--- a/Modulo_3_Transformacion_Digital/Clase_1_Transformacion_Digital.pptx
+++ b/Modulo_3_Transformacion_Digital/Clase_1_Transformacion_Digital.pptx
@@ -11,6 +11,7 @@
   </p:notesMasterIdLst>
   <p:sldIdLst>
     <p:sldId id="256" r:id="rId4"/>
+    <p:sldId id="326" r:id="rId52"/>
     <p:sldId id="295" r:id="rId22"/>
     <p:sldId id="296" r:id="rId23"/>
     <p:sldId id="297" r:id="rId24"/>
@@ -38888,7 +38889,7 @@
                 <a:cs typeface="Roboto Condensed Medium"/>
                 <a:sym typeface="Roboto Condensed Medium"/>
               </a:rPr>
-              <a:t>Caso: e-Estonia, la digitalización como política de Estado</a:t>
+              <a:t>¿Paliativo o solución? El riesgo de digitalizar un mal proceso</a:t>
             </a:r>
             <a:endParaRPr dirty="0"/>
           </a:p>
@@ -38938,6 +38939,481 @@
                 </a:solidFill>
                 <a:latin typeface="Roboto Condensed"/>
               </a:rPr>
+              <a:t>• Digitalizar un mal proceso traslada al entorno virtual las mismas demoras y duplicidades del papel</a:t>
+            </a:r>
+            <a:endParaRPr dirty="0"/>
+          </a:p>
+          <a:p>
+            <a:pPr lvl="1">
+              <a:spcAft>
+                <a:spcPts val="400"/>
+              </a:spcAft>
+            </a:pPr>
+            <a:r>
+              <a:rPr sz="1800">
+                <a:solidFill>
+                  <a:srgbClr val="3A3A3A"/>
+                </a:solidFill>
+                <a:latin typeface="Roboto Condensed"/>
+              </a:rPr>
+              <a:t>– Ej.: trámite que inicia en línea pero exige imprimir, ir a la oficina y repetir información</a:t>
+            </a:r>
+          </a:p>
+          <a:p>
+            <a:pPr>
+              <a:spcAft>
+                <a:spcPts val="800"/>
+              </a:spcAft>
+            </a:pPr>
+            <a:r>
+              <a:rPr sz="2000">
+                <a:solidFill>
+                  <a:srgbClr val="3A3A3A"/>
+                </a:solidFill>
+                <a:latin typeface="Roboto Condensed"/>
+              </a:rPr>
+              <a:t>• Una transformación bien diseñada: simplifica procedimientos, conecta bases de datos, reduce discrecionalidad</a:t>
+            </a:r>
+          </a:p>
+          <a:p>
+            <a:pPr>
+              <a:spcAft>
+                <a:spcPts val="800"/>
+              </a:spcAft>
+            </a:pPr>
+            <a:r>
+              <a:rPr sz="2000">
+                <a:solidFill>
+                  <a:srgbClr val="3A3A3A"/>
+                </a:solidFill>
+                <a:latin typeface="Roboto Condensed"/>
+              </a:rPr>
+              <a:t>• Aumenta la trazabilidad de las decisiones y mejora la experiencia ciudadana</a:t>
+            </a:r>
+          </a:p>
+          <a:p>
+            <a:pPr>
+              <a:spcAft>
+                <a:spcPts val="800"/>
+              </a:spcAft>
+            </a:pPr>
+            <a:r>
+              <a:rPr sz="2000">
+                <a:solidFill>
+                  <a:srgbClr val="3A3A3A"/>
+                </a:solidFill>
+                <a:latin typeface="Roboto Condensed"/>
+              </a:rPr>
+              <a:t>• Requiere liderazgo estratégico que sostenga el cambio más allá de una administración específica</a:t>
+            </a:r>
+          </a:p>
+        </p:txBody>
+      </p:sp>
+      <p:pic>
+        <p:nvPicPr>
+          <p:cNvPr id="252" name="Google Shape;252;p38"/>
+          <p:cNvPicPr preferRelativeResize="0"/>
+          <p:nvPr/>
+        </p:nvPicPr>
+        <p:blipFill rotWithShape="1">
+          <a:blip r:embed="rId2">
+            <a:alphaModFix/>
+          </a:blip>
+          <a:srcRect/>
+          <a:stretch/>
+        </p:blipFill>
+        <p:spPr>
+          <a:xfrm>
+            <a:off x="10120580" y="230187"/>
+            <a:ext cx="1866726" cy="590083"/>
+          </a:xfrm>
+          <a:prstGeom prst="rect">
+            <a:avLst/>
+          </a:prstGeom>
+          <a:noFill/>
+          <a:ln>
+            <a:noFill/>
+          </a:ln>
+        </p:spPr>
+      </p:pic>
+      <p:sp>
+        <p:nvSpPr>
+          <p:cNvPr id="2" name="Marcador de número de diapositiva 2">
+            <a:extLst>
+              <a:ext uri="{FF2B5EF4-FFF2-40B4-BE49-F238E27FC236}">
+                <a16:creationId xmlns:a16="http://schemas.microsoft.com/office/drawing/2014/main" id="{9E2EBC40-EC40-BDF2-F68A-0BA88B712A11}"/>
+              </a:ext>
+            </a:extLst>
+          </p:cNvPr>
+          <p:cNvSpPr txBox="1">
+            <a:spLocks/>
+          </p:cNvSpPr>
+          <p:nvPr/>
+        </p:nvSpPr>
+        <p:spPr>
+          <a:xfrm>
+            <a:off x="8610600" y="6356351"/>
+            <a:ext cx="2743200" cy="365125"/>
+          </a:xfrm>
+          <a:prstGeom prst="rect">
+            <a:avLst/>
+          </a:prstGeom>
+        </p:spPr>
+        <p:txBody>
+          <a:bodyPr/>
+          <a:lstStyle>
+            <a:defPPr marR="0" lvl="0" algn="l" rtl="0">
+              <a:lnSpc>
+                <a:spcPct val="100000"/>
+              </a:lnSpc>
+              <a:spcBef>
+                <a:spcPts val="0"/>
+              </a:spcBef>
+              <a:spcAft>
+                <a:spcPts val="0"/>
+              </a:spcAft>
+            </a:defPPr>
+            <a:lvl1pPr marR="0" lvl="0" algn="l" rtl="0">
+              <a:lnSpc>
+                <a:spcPct val="100000"/>
+              </a:lnSpc>
+              <a:spcBef>
+                <a:spcPts val="0"/>
+              </a:spcBef>
+              <a:spcAft>
+                <a:spcPts val="0"/>
+              </a:spcAft>
+              <a:buClr>
+                <a:srgbClr val="000000"/>
+              </a:buClr>
+              <a:buFont typeface="Arial"/>
+              <a:defRPr sz="1400" b="0" i="0" u="none" strike="noStrike" cap="none">
+                <a:solidFill>
+                  <a:srgbClr val="000000"/>
+                </a:solidFill>
+                <a:latin typeface="Arial"/>
+                <a:ea typeface="Arial"/>
+                <a:cs typeface="Arial"/>
+                <a:sym typeface="Arial"/>
+              </a:defRPr>
+            </a:lvl1pPr>
+            <a:lvl2pPr marR="0" lvl="1" algn="l" rtl="0">
+              <a:lnSpc>
+                <a:spcPct val="100000"/>
+              </a:lnSpc>
+              <a:spcBef>
+                <a:spcPts val="0"/>
+              </a:spcBef>
+              <a:spcAft>
+                <a:spcPts val="0"/>
+              </a:spcAft>
+              <a:buClr>
+                <a:srgbClr val="000000"/>
+              </a:buClr>
+              <a:buFont typeface="Arial"/>
+              <a:defRPr sz="1400" b="0" i="0" u="none" strike="noStrike" cap="none">
+                <a:solidFill>
+                  <a:srgbClr val="000000"/>
+                </a:solidFill>
+                <a:latin typeface="Arial"/>
+                <a:ea typeface="Arial"/>
+                <a:cs typeface="Arial"/>
+                <a:sym typeface="Arial"/>
+              </a:defRPr>
+            </a:lvl2pPr>
+            <a:lvl3pPr marR="0" lvl="2" algn="l" rtl="0">
+              <a:lnSpc>
+                <a:spcPct val="100000"/>
+              </a:lnSpc>
+              <a:spcBef>
+                <a:spcPts val="0"/>
+              </a:spcBef>
+              <a:spcAft>
+                <a:spcPts val="0"/>
+              </a:spcAft>
+              <a:buClr>
+                <a:srgbClr val="000000"/>
+              </a:buClr>
+              <a:buFont typeface="Arial"/>
+              <a:defRPr sz="1400" b="0" i="0" u="none" strike="noStrike" cap="none">
+                <a:solidFill>
+                  <a:srgbClr val="000000"/>
+                </a:solidFill>
+                <a:latin typeface="Arial"/>
+                <a:ea typeface="Arial"/>
+                <a:cs typeface="Arial"/>
+                <a:sym typeface="Arial"/>
+              </a:defRPr>
+            </a:lvl3pPr>
+            <a:lvl4pPr marR="0" lvl="3" algn="l" rtl="0">
+              <a:lnSpc>
+                <a:spcPct val="100000"/>
+              </a:lnSpc>
+              <a:spcBef>
+                <a:spcPts val="0"/>
+              </a:spcBef>
+              <a:spcAft>
+                <a:spcPts val="0"/>
+              </a:spcAft>
+              <a:buClr>
+                <a:srgbClr val="000000"/>
+              </a:buClr>
+              <a:buFont typeface="Arial"/>
+              <a:defRPr sz="1400" b="0" i="0" u="none" strike="noStrike" cap="none">
+                <a:solidFill>
+                  <a:srgbClr val="000000"/>
+                </a:solidFill>
+                <a:latin typeface="Arial"/>
+                <a:ea typeface="Arial"/>
+                <a:cs typeface="Arial"/>
+                <a:sym typeface="Arial"/>
+              </a:defRPr>
+            </a:lvl4pPr>
+            <a:lvl5pPr marR="0" lvl="4" algn="l" rtl="0">
+              <a:lnSpc>
+                <a:spcPct val="100000"/>
+              </a:lnSpc>
+              <a:spcBef>
+                <a:spcPts val="0"/>
+              </a:spcBef>
+              <a:spcAft>
+                <a:spcPts val="0"/>
+              </a:spcAft>
+              <a:buClr>
+                <a:srgbClr val="000000"/>
+              </a:buClr>
+              <a:buFont typeface="Arial"/>
+              <a:defRPr sz="1400" b="0" i="0" u="none" strike="noStrike" cap="none">
+                <a:solidFill>
+                  <a:srgbClr val="000000"/>
+                </a:solidFill>
+                <a:latin typeface="Arial"/>
+                <a:ea typeface="Arial"/>
+                <a:cs typeface="Arial"/>
+                <a:sym typeface="Arial"/>
+              </a:defRPr>
+            </a:lvl5pPr>
+            <a:lvl6pPr marR="0" lvl="5" algn="l" rtl="0">
+              <a:lnSpc>
+                <a:spcPct val="100000"/>
+              </a:lnSpc>
+              <a:spcBef>
+                <a:spcPts val="0"/>
+              </a:spcBef>
+              <a:spcAft>
+                <a:spcPts val="0"/>
+              </a:spcAft>
+              <a:buClr>
+                <a:srgbClr val="000000"/>
+              </a:buClr>
+              <a:buFont typeface="Arial"/>
+              <a:defRPr sz="1400" b="0" i="0" u="none" strike="noStrike" cap="none">
+                <a:solidFill>
+                  <a:srgbClr val="000000"/>
+                </a:solidFill>
+                <a:latin typeface="Arial"/>
+                <a:ea typeface="Arial"/>
+                <a:cs typeface="Arial"/>
+                <a:sym typeface="Arial"/>
+              </a:defRPr>
+            </a:lvl6pPr>
+            <a:lvl7pPr marR="0" lvl="6" algn="l" rtl="0">
+              <a:lnSpc>
+                <a:spcPct val="100000"/>
+              </a:lnSpc>
+              <a:spcBef>
+                <a:spcPts val="0"/>
+              </a:spcBef>
+              <a:spcAft>
+                <a:spcPts val="0"/>
+              </a:spcAft>
+              <a:buClr>
+                <a:srgbClr val="000000"/>
+              </a:buClr>
+              <a:buFont typeface="Arial"/>
+              <a:defRPr sz="1400" b="0" i="0" u="none" strike="noStrike" cap="none">
+                <a:solidFill>
+                  <a:srgbClr val="000000"/>
+                </a:solidFill>
+                <a:latin typeface="Arial"/>
+                <a:ea typeface="Arial"/>
+                <a:cs typeface="Arial"/>
+                <a:sym typeface="Arial"/>
+              </a:defRPr>
+            </a:lvl7pPr>
+            <a:lvl8pPr marR="0" lvl="7" algn="l" rtl="0">
+              <a:lnSpc>
+                <a:spcPct val="100000"/>
+              </a:lnSpc>
+              <a:spcBef>
+                <a:spcPts val="0"/>
+              </a:spcBef>
+              <a:spcAft>
+                <a:spcPts val="0"/>
+              </a:spcAft>
+              <a:buClr>
+                <a:srgbClr val="000000"/>
+              </a:buClr>
+              <a:buFont typeface="Arial"/>
+              <a:defRPr sz="1400" b="0" i="0" u="none" strike="noStrike" cap="none">
+                <a:solidFill>
+                  <a:srgbClr val="000000"/>
+                </a:solidFill>
+                <a:latin typeface="Arial"/>
+                <a:ea typeface="Arial"/>
+                <a:cs typeface="Arial"/>
+                <a:sym typeface="Arial"/>
+              </a:defRPr>
+            </a:lvl8pPr>
+            <a:lvl9pPr marR="0" lvl="8" algn="l" rtl="0">
+              <a:lnSpc>
+                <a:spcPct val="100000"/>
+              </a:lnSpc>
+              <a:spcBef>
+                <a:spcPts val="0"/>
+              </a:spcBef>
+              <a:spcAft>
+                <a:spcPts val="0"/>
+              </a:spcAft>
+              <a:buClr>
+                <a:srgbClr val="000000"/>
+              </a:buClr>
+              <a:buFont typeface="Arial"/>
+              <a:defRPr sz="1400" b="0" i="0" u="none" strike="noStrike" cap="none">
+                <a:solidFill>
+                  <a:srgbClr val="000000"/>
+                </a:solidFill>
+                <a:latin typeface="Arial"/>
+                <a:ea typeface="Arial"/>
+                <a:cs typeface="Arial"/>
+                <a:sym typeface="Arial"/>
+              </a:defRPr>
+            </a:lvl9pPr>
+          </a:lstStyle>
+          <a:p>
+            <a:pPr algn="r"/>
+            <a:r>
+              <a:t>10</a:t>
+            </a:r>
+            <a:endParaRPr lang="en-US"/>
+          </a:p>
+        </p:txBody>
+      </p:sp>
+    </p:spTree>
+  </p:cSld>
+  <p:clrMapOvr>
+    <a:masterClrMapping/>
+  </p:clrMapOvr>
+</p:sld>
+</file>
+
+<file path=ppt/slides/slide11.xml><?xml version="1.0" encoding="utf-8"?>
+<p:sld xmlns:a="http://schemas.openxmlformats.org/drawingml/2006/main" xmlns:p="http://schemas.openxmlformats.org/presentationml/2006/main" xmlns:r="http://schemas.openxmlformats.org/officeDocument/2006/relationships">
+  <p:cSld>
+    <p:spTree>
+      <p:nvGrpSpPr>
+        <p:cNvPr id="1" name=""/>
+        <p:cNvGrpSpPr/>
+        <p:nvPr/>
+      </p:nvGrpSpPr>
+      <p:grpSpPr/>
+      <p:sp>
+        <p:nvSpPr>
+          <p:cNvPr id="240" name="Google Shape;240;p38"/>
+          <p:cNvSpPr/>
+          <p:nvPr/>
+        </p:nvSpPr>
+        <p:spPr>
+          <a:xfrm>
+            <a:off x="853440" y="790892"/>
+            <a:ext cx="9055100" cy="731520"/>
+          </a:xfrm>
+          <a:prstGeom prst="rect">
+            <a:avLst/>
+          </a:prstGeom>
+          <a:noFill/>
+          <a:ln>
+            <a:noFill/>
+          </a:ln>
+        </p:spPr>
+        <p:txBody>
+          <a:bodyPr spcFirstLastPara="1" wrap="square" lIns="91425" tIns="45700" rIns="91425" bIns="45700" anchor="ctr" anchorCtr="0">
+            <a:noAutofit/>
+          </a:bodyPr>
+          <a:lstStyle/>
+          <a:p>
+            <a:pPr marL="0" marR="0" lvl="0" indent="0" algn="l" rtl="0">
+              <a:lnSpc>
+                <a:spcPct val="100000"/>
+              </a:lnSpc>
+              <a:spcBef>
+                <a:spcPts val="0"/>
+              </a:spcBef>
+              <a:spcAft>
+                <a:spcPts val="0"/>
+              </a:spcAft>
+              <a:buNone/>
+            </a:pPr>
+            <a:r>
+              <a:rPr lang="en-US" sz="4400" dirty="0">
+                <a:solidFill>
+                  <a:srgbClr val="3A3A3A"/>
+                </a:solidFill>
+                <a:latin typeface="Roboto Condensed Medium"/>
+                <a:ea typeface="Roboto Condensed Medium"/>
+                <a:cs typeface="Roboto Condensed Medium"/>
+                <a:sym typeface="Roboto Condensed Medium"/>
+              </a:rPr>
+              <a:t>Caso: e-Estonia, la digitalización como política de Estado</a:t>
+            </a:r>
+            <a:endParaRPr dirty="0"/>
+          </a:p>
+        </p:txBody>
+      </p:sp>
+      <p:sp>
+        <p:nvSpPr>
+          <p:cNvPr id="241" name="Google Shape;241;p38"/>
+          <p:cNvSpPr/>
+          <p:nvPr/>
+        </p:nvSpPr>
+        <p:spPr>
+          <a:xfrm>
+            <a:off x="889446" y="2014379"/>
+            <a:ext cx="6300000" cy="3413760"/>
+          </a:xfrm>
+          <a:prstGeom prst="rect">
+            <a:avLst/>
+          </a:prstGeom>
+          <a:noFill/>
+          <a:ln>
+            <a:noFill/>
+          </a:ln>
+        </p:spPr>
+        <p:txBody>
+          <a:bodyPr spcFirstLastPara="1" wrap="square" lIns="91425" tIns="45700" rIns="91425" bIns="45700" anchor="t" anchorCtr="0">
+            <a:noAutofit/>
+          </a:bodyPr>
+          <a:lstStyle/>
+          <a:p>
+            <a:pPr marL="0" marR="0" indent="0" algn="l" rtl="0">
+              <a:lnSpc>
+                <a:spcPct val="100000"/>
+              </a:lnSpc>
+              <a:spcBef>
+                <a:spcPts val="0"/>
+              </a:spcBef>
+              <a:spcAft>
+                <a:spcPts val="600"/>
+              </a:spcAft>
+              <a:buNone/>
+            </a:pPr>
+            <a:r>
+              <a:rPr sz="1500">
+                <a:solidFill>
+                  <a:srgbClr val="3A3A3A"/>
+                </a:solidFill>
+                <a:latin typeface="Roboto Condensed"/>
+              </a:rPr>
               <a:t>• Estado pequeño que convirtió la digitalización en política nacional de largo plazo</a:t>
             </a:r>
             <a:endParaRPr dirty="0"/>
@@ -38945,11 +39421,11 @@
           <a:p>
             <a:pPr>
               <a:spcAft>
-                <a:spcPts val="800"/>
+                <a:spcPts val="600"/>
               </a:spcAft>
             </a:pPr>
             <a:r>
-              <a:rPr sz="2000">
+              <a:rPr sz="1500">
                 <a:solidFill>
                   <a:srgbClr val="3A3A3A"/>
                 </a:solidFill>
@@ -38961,11 +39437,11 @@
           <a:p>
             <a:pPr>
               <a:spcAft>
-                <a:spcPts val="800"/>
+                <a:spcPts val="600"/>
               </a:spcAft>
             </a:pPr>
             <a:r>
-              <a:rPr sz="2000">
+              <a:rPr sz="1500">
                 <a:solidFill>
                   <a:srgbClr val="3A3A3A"/>
                 </a:solidFill>
@@ -38977,11 +39453,11 @@
           <a:p>
             <a:pPr>
               <a:spcAft>
-                <a:spcPts val="800"/>
+                <a:spcPts val="600"/>
               </a:spcAft>
             </a:pPr>
             <a:r>
-              <a:rPr sz="2000">
+              <a:rPr sz="1500">
                 <a:solidFill>
                   <a:srgbClr val="3A3A3A"/>
                 </a:solidFill>
@@ -38993,11 +39469,11 @@
           <a:p>
             <a:pPr lvl="1">
               <a:spcAft>
-                <a:spcPts val="400"/>
+                <a:spcPts val="600"/>
               </a:spcAft>
             </a:pPr>
             <a:r>
-              <a:rPr sz="1800">
+              <a:rPr sz="1500">
                 <a:solidFill>
                   <a:srgbClr val="3A3A3A"/>
                 </a:solidFill>
@@ -39015,12 +39491,12 @@
                 <a:spcPts val="0"/>
               </a:spcBef>
               <a:spcAft>
-                <a:spcPts val="800"/>
+                <a:spcPts val="600"/>
               </a:spcAft>
               <a:buNone/>
             </a:pPr>
             <a:r>
-              <a:rPr sz="1200" i="1">
+              <a:rPr sz="1500" i="1">
                 <a:solidFill>
                   <a:srgbClr val="3A3A3A"/>
                 </a:solidFill>
@@ -39316,9 +39792,378 @@
           <a:p>
             <a:pPr algn="r"/>
             <a:r>
-              <a:t>10</a:t>
+              <a:t>11</a:t>
             </a:r>
             <a:endParaRPr lang="en-US"/>
+          </a:p>
+        </p:txBody>
+      </p:sp>
+      <p:sp>
+        <p:nvSpPr>
+          <p:cNvPr id="253" name="Rounded Rectangle 252"/>
+          <p:cNvSpPr/>
+          <p:nvPr/>
+        </p:nvSpPr>
+        <p:spPr>
+          <a:xfrm>
+            <a:off x="7550000" y="2300000"/>
+            <a:ext cx="3300000" cy="2000000"/>
+          </a:xfrm>
+          <a:prstGeom prst="roundRect">
+            <a:avLst/>
+          </a:prstGeom>
+          <a:solidFill>
+            <a:srgbClr val="156082"/>
+          </a:solidFill>
+          <a:ln>
+            <a:noFill/>
+          </a:ln>
+          <a:effectLst/>
+        </p:spPr>
+        <p:style>
+          <a:lnRef idx="1">
+            <a:schemeClr val="accent1"/>
+          </a:lnRef>
+          <a:fillRef idx="3">
+            <a:schemeClr val="accent1"/>
+          </a:fillRef>
+          <a:effectRef idx="2">
+            <a:schemeClr val="accent1"/>
+          </a:effectRef>
+          <a:fontRef idx="minor">
+            <a:schemeClr val="lt1"/>
+          </a:fontRef>
+        </p:style>
+        <p:txBody>
+          <a:bodyPr rtlCol="0" anchor="ctr" wrap="square" lIns="18000" rIns="18000" tIns="9000" bIns="9000"/>
+          <a:lstStyle/>
+          <a:p>
+            <a:pPr algn="ctr"/>
+          </a:p>
+        </p:txBody>
+      </p:sp>
+      <p:sp>
+        <p:nvSpPr>
+          <p:cNvPr id="254" name="Rounded Rectangle 253"/>
+          <p:cNvSpPr/>
+          <p:nvPr/>
+        </p:nvSpPr>
+        <p:spPr>
+          <a:xfrm>
+            <a:off x="7770000" y="2520000"/>
+            <a:ext cx="700000" cy="550000"/>
+          </a:xfrm>
+          <a:prstGeom prst="roundRect">
+            <a:avLst/>
+          </a:prstGeom>
+          <a:solidFill>
+            <a:srgbClr val="C8A02A"/>
+          </a:solidFill>
+          <a:ln>
+            <a:noFill/>
+          </a:ln>
+          <a:effectLst/>
+        </p:spPr>
+        <p:style>
+          <a:lnRef idx="1">
+            <a:schemeClr val="accent1"/>
+          </a:lnRef>
+          <a:fillRef idx="3">
+            <a:schemeClr val="accent1"/>
+          </a:fillRef>
+          <a:effectRef idx="2">
+            <a:schemeClr val="accent1"/>
+          </a:effectRef>
+          <a:fontRef idx="minor">
+            <a:schemeClr val="lt1"/>
+          </a:fontRef>
+        </p:style>
+        <p:txBody>
+          <a:bodyPr rtlCol="0" anchor="ctr" wrap="square" lIns="18000" rIns="18000" tIns="9000" bIns="9000"/>
+          <a:lstStyle/>
+          <a:p>
+            <a:pPr algn="ctr"/>
+          </a:p>
+        </p:txBody>
+      </p:sp>
+      <p:sp>
+        <p:nvSpPr>
+          <p:cNvPr id="255" name="TextBox 254"/>
+          <p:cNvSpPr txBox="1"/>
+          <p:nvPr/>
+        </p:nvSpPr>
+        <p:spPr>
+          <a:xfrm>
+            <a:off x="7770000" y="3200000"/>
+            <a:ext cx="2860000" cy="300000"/>
+          </a:xfrm>
+          <a:prstGeom prst="rect">
+            <a:avLst/>
+          </a:prstGeom>
+          <a:noFill/>
+        </p:spPr>
+        <p:txBody>
+          <a:bodyPr wrap="square" lIns="0" rIns="0" tIns="0" bIns="0">
+            <a:spAutoFit/>
+          </a:bodyPr>
+          <a:lstStyle/>
+          <a:p>
+            <a:pPr algn="l"/>
+            <a:r>
+              <a:rPr sz="2200" b="1" i="0">
+                <a:solidFill>
+                  <a:srgbClr val="FFFFFF"/>
+                </a:solidFill>
+                <a:latin typeface="Roboto Condensed"/>
+              </a:rPr>
+              <a:t>eID</a:t>
+            </a:r>
+          </a:p>
+        </p:txBody>
+      </p:sp>
+      <p:sp>
+        <p:nvSpPr>
+          <p:cNvPr id="256" name="TextBox 255"/>
+          <p:cNvSpPr txBox="1"/>
+          <p:nvPr/>
+        </p:nvSpPr>
+        <p:spPr>
+          <a:xfrm>
+            <a:off x="7770000" y="3550000"/>
+            <a:ext cx="2860000" cy="400000"/>
+          </a:xfrm>
+          <a:prstGeom prst="rect">
+            <a:avLst/>
+          </a:prstGeom>
+          <a:noFill/>
+        </p:spPr>
+        <p:txBody>
+          <a:bodyPr wrap="square" lIns="0" rIns="0" tIns="0" bIns="0">
+            <a:spAutoFit/>
+          </a:bodyPr>
+          <a:lstStyle/>
+          <a:p>
+            <a:pPr algn="l"/>
+            <a:r>
+              <a:rPr sz="1100" b="0" i="0">
+                <a:solidFill>
+                  <a:srgbClr val="FFFFFF"/>
+                </a:solidFill>
+                <a:latin typeface="Roboto Condensed"/>
+              </a:rPr>
+              <a:t>Identidad digital
+nacional</a:t>
+            </a:r>
+          </a:p>
+        </p:txBody>
+      </p:sp>
+      <p:cxnSp>
+        <p:nvCxnSpPr>
+          <p:cNvPr id="257" name="Connector 256"/>
+          <p:cNvCxnSpPr/>
+          <p:nvPr/>
+        </p:nvCxnSpPr>
+        <p:spPr>
+          <a:xfrm>
+            <a:off x="10000000" y="2380000"/>
+            <a:ext cx="650000" cy="0"/>
+          </a:xfrm>
+          <a:prstGeom prst="line">
+            <a:avLst/>
+          </a:prstGeom>
+          <a:ln w="12700">
+            <a:solidFill>
+              <a:srgbClr val="FFFFFF"/>
+            </a:solidFill>
+          </a:ln>
+        </p:spPr>
+        <p:style>
+          <a:lnRef idx="2">
+            <a:schemeClr val="accent1"/>
+          </a:lnRef>
+          <a:fillRef idx="0">
+            <a:schemeClr val="accent1"/>
+          </a:fillRef>
+          <a:effectRef idx="1">
+            <a:schemeClr val="accent1"/>
+          </a:effectRef>
+          <a:fontRef idx="minor">
+            <a:schemeClr val="tx1"/>
+          </a:fontRef>
+        </p:style>
+      </p:cxnSp>
+      <p:cxnSp>
+        <p:nvCxnSpPr>
+          <p:cNvPr id="258" name="Connector 257"/>
+          <p:cNvCxnSpPr/>
+          <p:nvPr/>
+        </p:nvCxnSpPr>
+        <p:spPr>
+          <a:xfrm>
+            <a:off x="10000000" y="2420000"/>
+            <a:ext cx="650000" cy="0"/>
+          </a:xfrm>
+          <a:prstGeom prst="line">
+            <a:avLst/>
+          </a:prstGeom>
+          <a:ln w="12700">
+            <a:solidFill>
+              <a:srgbClr val="FFFFFF"/>
+            </a:solidFill>
+          </a:ln>
+        </p:spPr>
+        <p:style>
+          <a:lnRef idx="2">
+            <a:schemeClr val="accent1"/>
+          </a:lnRef>
+          <a:fillRef idx="0">
+            <a:schemeClr val="accent1"/>
+          </a:fillRef>
+          <a:effectRef idx="1">
+            <a:schemeClr val="accent1"/>
+          </a:effectRef>
+          <a:fontRef idx="minor">
+            <a:schemeClr val="tx1"/>
+          </a:fontRef>
+        </p:style>
+      </p:cxnSp>
+      <p:cxnSp>
+        <p:nvCxnSpPr>
+          <p:cNvPr id="259" name="Connector 258"/>
+          <p:cNvCxnSpPr/>
+          <p:nvPr/>
+        </p:nvCxnSpPr>
+        <p:spPr>
+          <a:xfrm>
+            <a:off x="10000000" y="2460000"/>
+            <a:ext cx="650000" cy="0"/>
+          </a:xfrm>
+          <a:prstGeom prst="line">
+            <a:avLst/>
+          </a:prstGeom>
+          <a:ln w="12700">
+            <a:solidFill>
+              <a:srgbClr val="FFFFFF"/>
+            </a:solidFill>
+          </a:ln>
+        </p:spPr>
+        <p:style>
+          <a:lnRef idx="2">
+            <a:schemeClr val="accent1"/>
+          </a:lnRef>
+          <a:fillRef idx="0">
+            <a:schemeClr val="accent1"/>
+          </a:fillRef>
+          <a:effectRef idx="1">
+            <a:schemeClr val="accent1"/>
+          </a:effectRef>
+          <a:fontRef idx="minor">
+            <a:schemeClr val="tx1"/>
+          </a:fontRef>
+        </p:style>
+      </p:cxnSp>
+      <p:cxnSp>
+        <p:nvCxnSpPr>
+          <p:cNvPr id="260" name="Connector 259"/>
+          <p:cNvCxnSpPr/>
+          <p:nvPr/>
+        </p:nvCxnSpPr>
+        <p:spPr>
+          <a:xfrm>
+            <a:off x="10000000" y="2500000"/>
+            <a:ext cx="650000" cy="0"/>
+          </a:xfrm>
+          <a:prstGeom prst="line">
+            <a:avLst/>
+          </a:prstGeom>
+          <a:ln w="12700">
+            <a:solidFill>
+              <a:srgbClr val="FFFFFF"/>
+            </a:solidFill>
+          </a:ln>
+        </p:spPr>
+        <p:style>
+          <a:lnRef idx="2">
+            <a:schemeClr val="accent1"/>
+          </a:lnRef>
+          <a:fillRef idx="0">
+            <a:schemeClr val="accent1"/>
+          </a:fillRef>
+          <a:effectRef idx="1">
+            <a:schemeClr val="accent1"/>
+          </a:effectRef>
+          <a:fontRef idx="minor">
+            <a:schemeClr val="tx1"/>
+          </a:fontRef>
+        </p:style>
+      </p:cxnSp>
+      <p:cxnSp>
+        <p:nvCxnSpPr>
+          <p:cNvPr id="261" name="Connector 260"/>
+          <p:cNvCxnSpPr/>
+          <p:nvPr/>
+        </p:nvCxnSpPr>
+        <p:spPr>
+          <a:xfrm>
+            <a:off x="10000000" y="2540000"/>
+            <a:ext cx="650000" cy="0"/>
+          </a:xfrm>
+          <a:prstGeom prst="line">
+            <a:avLst/>
+          </a:prstGeom>
+          <a:ln w="12700">
+            <a:solidFill>
+              <a:srgbClr val="FFFFFF"/>
+            </a:solidFill>
+          </a:ln>
+        </p:spPr>
+        <p:style>
+          <a:lnRef idx="2">
+            <a:schemeClr val="accent1"/>
+          </a:lnRef>
+          <a:fillRef idx="0">
+            <a:schemeClr val="accent1"/>
+          </a:fillRef>
+          <a:effectRef idx="1">
+            <a:schemeClr val="accent1"/>
+          </a:effectRef>
+          <a:fontRef idx="minor">
+            <a:schemeClr val="tx1"/>
+          </a:fontRef>
+        </p:style>
+      </p:cxnSp>
+      <p:sp>
+        <p:nvSpPr>
+          <p:cNvPr id="262" name="TextBox 261"/>
+          <p:cNvSpPr txBox="1"/>
+          <p:nvPr/>
+        </p:nvSpPr>
+        <p:spPr>
+          <a:xfrm>
+            <a:off x="7550000" y="4450000"/>
+            <a:ext cx="3300000" cy="300000"/>
+          </a:xfrm>
+          <a:prstGeom prst="rect">
+            <a:avLst/>
+          </a:prstGeom>
+          <a:noFill/>
+        </p:spPr>
+        <p:txBody>
+          <a:bodyPr wrap="square" lIns="0" rIns="0" tIns="0" bIns="0">
+            <a:spAutoFit/>
+          </a:bodyPr>
+          <a:lstStyle/>
+          <a:p>
+            <a:pPr algn="ctr"/>
+            <a:r>
+              <a:rPr sz="1000" b="0" i="1">
+                <a:solidFill>
+                  <a:srgbClr val="3A3A3A"/>
+                </a:solidFill>
+                <a:latin typeface="Roboto Condensed"/>
+              </a:rPr>
+              <a:t>Referencial: tarjeta de identidad digital (eID)</a:t>
+            </a:r>
           </a:p>
         </p:txBody>
       </p:sp>
@@ -39330,7 +40175,7 @@
 </p:sld>
 </file>
 
-<file path=ppt/slides/slide11.xml><?xml version="1.0" encoding="utf-8"?>
+<file path=ppt/slides/slide12.xml><?xml version="1.0" encoding="utf-8"?>
 <p:sld xmlns:a="http://schemas.openxmlformats.org/drawingml/2006/main" xmlns:p="http://schemas.openxmlformats.org/presentationml/2006/main" xmlns:r="http://schemas.openxmlformats.org/officeDocument/2006/relationships">
   <p:cSld>
     <p:spTree>
@@ -39402,7 +40247,7 @@
         <p:spPr>
           <a:xfrm>
             <a:off x="889446" y="2014379"/>
-            <a:ext cx="9385264" cy="3413760"/>
+            <a:ext cx="6300000" cy="3413760"/>
           </a:xfrm>
           <a:prstGeom prst="rect">
             <a:avLst/>
@@ -39426,12 +40271,12 @@
                 <a:spcPts val="0"/>
               </a:spcBef>
               <a:spcAft>
-                <a:spcPts val="800"/>
+                <a:spcPts val="600"/>
               </a:spcAft>
               <a:buNone/>
             </a:pPr>
             <a:r>
-              <a:rPr sz="2000">
+              <a:rPr sz="1500">
                 <a:solidFill>
                   <a:srgbClr val="3A3A3A"/>
                 </a:solidFill>
@@ -39444,11 +40289,11 @@
           <a:p>
             <a:pPr>
               <a:spcAft>
-                <a:spcPts val="800"/>
+                <a:spcPts val="600"/>
               </a:spcAft>
             </a:pPr>
             <a:r>
-              <a:rPr sz="2000">
+              <a:rPr sz="1500">
                 <a:solidFill>
                   <a:srgbClr val="3A3A3A"/>
                 </a:solidFill>
@@ -39460,11 +40305,11 @@
           <a:p>
             <a:pPr>
               <a:spcAft>
-                <a:spcPts val="800"/>
+                <a:spcPts val="600"/>
               </a:spcAft>
             </a:pPr>
             <a:r>
-              <a:rPr sz="2000">
+              <a:rPr sz="1500">
                 <a:solidFill>
                   <a:srgbClr val="3A3A3A"/>
                 </a:solidFill>
@@ -39476,11 +40321,11 @@
           <a:p>
             <a:pPr>
               <a:spcAft>
-                <a:spcPts val="800"/>
+                <a:spcPts val="600"/>
               </a:spcAft>
             </a:pPr>
             <a:r>
-              <a:rPr sz="2000">
+              <a:rPr sz="1500">
                 <a:solidFill>
                   <a:srgbClr val="3A3A3A"/>
                 </a:solidFill>
@@ -39492,11 +40337,11 @@
           <a:p>
             <a:pPr>
               <a:spcAft>
-                <a:spcPts val="800"/>
+                <a:spcPts val="600"/>
               </a:spcAft>
             </a:pPr>
             <a:r>
-              <a:rPr sz="2000">
+              <a:rPr sz="1500">
                 <a:solidFill>
                   <a:srgbClr val="3A3A3A"/>
                 </a:solidFill>
@@ -39508,11 +40353,11 @@
           <a:p>
             <a:pPr>
               <a:spcAft>
-                <a:spcPts val="800"/>
+                <a:spcPts val="600"/>
               </a:spcAft>
             </a:pPr>
             <a:r>
-              <a:rPr sz="2000">
+              <a:rPr sz="1500">
                 <a:solidFill>
                   <a:srgbClr val="3A3A3A"/>
                 </a:solidFill>
@@ -39530,12 +40375,12 @@
                 <a:spcPts val="0"/>
               </a:spcBef>
               <a:spcAft>
-                <a:spcPts val="800"/>
+                <a:spcPts val="600"/>
               </a:spcAft>
               <a:buNone/>
             </a:pPr>
             <a:r>
-              <a:rPr sz="2000">
+              <a:rPr sz="1500">
                 <a:solidFill>
                   <a:srgbClr val="3A3A3A"/>
                 </a:solidFill>
@@ -39554,12 +40399,12 @@
                 <a:spcPts val="0"/>
               </a:spcBef>
               <a:spcAft>
-                <a:spcPts val="800"/>
+                <a:spcPts val="600"/>
               </a:spcAft>
               <a:buNone/>
             </a:pPr>
             <a:r>
-              <a:rPr sz="1200" i="1">
+              <a:rPr sz="1500" i="1">
                 <a:solidFill>
                   <a:srgbClr val="3A3A3A"/>
                 </a:solidFill>
@@ -39855,9 +40700,659 @@
           <a:p>
             <a:pPr algn="r"/>
             <a:r>
-              <a:t>11</a:t>
+              <a:t>12</a:t>
             </a:r>
             <a:endParaRPr lang="en-US"/>
+          </a:p>
+        </p:txBody>
+      </p:sp>
+      <p:cxnSp>
+        <p:nvCxnSpPr>
+          <p:cNvPr id="253" name="Connector 252"/>
+          <p:cNvCxnSpPr/>
+          <p:nvPr/>
+        </p:nvCxnSpPr>
+        <p:spPr>
+          <a:xfrm>
+            <a:off x="9330000" y="2480000"/>
+            <a:ext cx="1300000" cy="700000"/>
+          </a:xfrm>
+          <a:prstGeom prst="line">
+            <a:avLst/>
+          </a:prstGeom>
+          <a:ln w="9525">
+            <a:solidFill>
+              <a:srgbClr val="E8E8E8"/>
+            </a:solidFill>
+          </a:ln>
+        </p:spPr>
+        <p:style>
+          <a:lnRef idx="2">
+            <a:schemeClr val="accent1"/>
+          </a:lnRef>
+          <a:fillRef idx="0">
+            <a:schemeClr val="accent1"/>
+          </a:fillRef>
+          <a:effectRef idx="1">
+            <a:schemeClr val="accent1"/>
+          </a:effectRef>
+          <a:fontRef idx="minor">
+            <a:schemeClr val="tx1"/>
+          </a:fontRef>
+        </p:style>
+      </p:cxnSp>
+      <p:cxnSp>
+        <p:nvCxnSpPr>
+          <p:cNvPr id="254" name="Connector 253"/>
+          <p:cNvCxnSpPr/>
+          <p:nvPr/>
+        </p:nvCxnSpPr>
+        <p:spPr>
+          <a:xfrm>
+            <a:off x="9330000" y="2480000"/>
+            <a:ext cx="850000" cy="2100000"/>
+          </a:xfrm>
+          <a:prstGeom prst="line">
+            <a:avLst/>
+          </a:prstGeom>
+          <a:ln w="9525">
+            <a:solidFill>
+              <a:srgbClr val="E8E8E8"/>
+            </a:solidFill>
+          </a:ln>
+        </p:spPr>
+        <p:style>
+          <a:lnRef idx="2">
+            <a:schemeClr val="accent1"/>
+          </a:lnRef>
+          <a:fillRef idx="0">
+            <a:schemeClr val="accent1"/>
+          </a:fillRef>
+          <a:effectRef idx="1">
+            <a:schemeClr val="accent1"/>
+          </a:effectRef>
+          <a:fontRef idx="minor">
+            <a:schemeClr val="tx1"/>
+          </a:fontRef>
+        </p:style>
+      </p:cxnSp>
+      <p:cxnSp>
+        <p:nvCxnSpPr>
+          <p:cNvPr id="255" name="Connector 254"/>
+          <p:cNvCxnSpPr/>
+          <p:nvPr/>
+        </p:nvCxnSpPr>
+        <p:spPr>
+          <a:xfrm flipH="1">
+            <a:off x="8480000" y="2480000"/>
+            <a:ext cx="850000" cy="2100000"/>
+          </a:xfrm>
+          <a:prstGeom prst="line">
+            <a:avLst/>
+          </a:prstGeom>
+          <a:ln w="9525">
+            <a:solidFill>
+              <a:srgbClr val="E8E8E8"/>
+            </a:solidFill>
+          </a:ln>
+        </p:spPr>
+        <p:style>
+          <a:lnRef idx="2">
+            <a:schemeClr val="accent1"/>
+          </a:lnRef>
+          <a:fillRef idx="0">
+            <a:schemeClr val="accent1"/>
+          </a:fillRef>
+          <a:effectRef idx="1">
+            <a:schemeClr val="accent1"/>
+          </a:effectRef>
+          <a:fontRef idx="minor">
+            <a:schemeClr val="tx1"/>
+          </a:fontRef>
+        </p:style>
+      </p:cxnSp>
+      <p:cxnSp>
+        <p:nvCxnSpPr>
+          <p:cNvPr id="256" name="Connector 255"/>
+          <p:cNvCxnSpPr/>
+          <p:nvPr/>
+        </p:nvCxnSpPr>
+        <p:spPr>
+          <a:xfrm flipH="1">
+            <a:off x="8030000" y="2480000"/>
+            <a:ext cx="1300000" cy="700000"/>
+          </a:xfrm>
+          <a:prstGeom prst="line">
+            <a:avLst/>
+          </a:prstGeom>
+          <a:ln w="9525">
+            <a:solidFill>
+              <a:srgbClr val="E8E8E8"/>
+            </a:solidFill>
+          </a:ln>
+        </p:spPr>
+        <p:style>
+          <a:lnRef idx="2">
+            <a:schemeClr val="accent1"/>
+          </a:lnRef>
+          <a:fillRef idx="0">
+            <a:schemeClr val="accent1"/>
+          </a:fillRef>
+          <a:effectRef idx="1">
+            <a:schemeClr val="accent1"/>
+          </a:effectRef>
+          <a:fontRef idx="minor">
+            <a:schemeClr val="tx1"/>
+          </a:fontRef>
+        </p:style>
+      </p:cxnSp>
+      <p:cxnSp>
+        <p:nvCxnSpPr>
+          <p:cNvPr id="257" name="Connector 256"/>
+          <p:cNvCxnSpPr/>
+          <p:nvPr/>
+        </p:nvCxnSpPr>
+        <p:spPr>
+          <a:xfrm flipH="1">
+            <a:off x="10180000" y="3180000"/>
+            <a:ext cx="450000" cy="1400000"/>
+          </a:xfrm>
+          <a:prstGeom prst="line">
+            <a:avLst/>
+          </a:prstGeom>
+          <a:ln w="9525">
+            <a:solidFill>
+              <a:srgbClr val="E8E8E8"/>
+            </a:solidFill>
+          </a:ln>
+        </p:spPr>
+        <p:style>
+          <a:lnRef idx="2">
+            <a:schemeClr val="accent1"/>
+          </a:lnRef>
+          <a:fillRef idx="0">
+            <a:schemeClr val="accent1"/>
+          </a:fillRef>
+          <a:effectRef idx="1">
+            <a:schemeClr val="accent1"/>
+          </a:effectRef>
+          <a:fontRef idx="minor">
+            <a:schemeClr val="tx1"/>
+          </a:fontRef>
+        </p:style>
+      </p:cxnSp>
+      <p:cxnSp>
+        <p:nvCxnSpPr>
+          <p:cNvPr id="258" name="Connector 257"/>
+          <p:cNvCxnSpPr/>
+          <p:nvPr/>
+        </p:nvCxnSpPr>
+        <p:spPr>
+          <a:xfrm flipH="1">
+            <a:off x="8480000" y="3180000"/>
+            <a:ext cx="2150000" cy="1400000"/>
+          </a:xfrm>
+          <a:prstGeom prst="line">
+            <a:avLst/>
+          </a:prstGeom>
+          <a:ln w="9525">
+            <a:solidFill>
+              <a:srgbClr val="E8E8E8"/>
+            </a:solidFill>
+          </a:ln>
+        </p:spPr>
+        <p:style>
+          <a:lnRef idx="2">
+            <a:schemeClr val="accent1"/>
+          </a:lnRef>
+          <a:fillRef idx="0">
+            <a:schemeClr val="accent1"/>
+          </a:fillRef>
+          <a:effectRef idx="1">
+            <a:schemeClr val="accent1"/>
+          </a:effectRef>
+          <a:fontRef idx="minor">
+            <a:schemeClr val="tx1"/>
+          </a:fontRef>
+        </p:style>
+      </p:cxnSp>
+      <p:cxnSp>
+        <p:nvCxnSpPr>
+          <p:cNvPr id="259" name="Connector 258"/>
+          <p:cNvCxnSpPr/>
+          <p:nvPr/>
+        </p:nvCxnSpPr>
+        <p:spPr>
+          <a:xfrm flipH="1">
+            <a:off x="8030000" y="3180000"/>
+            <a:ext cx="2600000" cy="0"/>
+          </a:xfrm>
+          <a:prstGeom prst="line">
+            <a:avLst/>
+          </a:prstGeom>
+          <a:ln w="9525">
+            <a:solidFill>
+              <a:srgbClr val="E8E8E8"/>
+            </a:solidFill>
+          </a:ln>
+        </p:spPr>
+        <p:style>
+          <a:lnRef idx="2">
+            <a:schemeClr val="accent1"/>
+          </a:lnRef>
+          <a:fillRef idx="0">
+            <a:schemeClr val="accent1"/>
+          </a:fillRef>
+          <a:effectRef idx="1">
+            <a:schemeClr val="accent1"/>
+          </a:effectRef>
+          <a:fontRef idx="minor">
+            <a:schemeClr val="tx1"/>
+          </a:fontRef>
+        </p:style>
+      </p:cxnSp>
+      <p:cxnSp>
+        <p:nvCxnSpPr>
+          <p:cNvPr id="260" name="Connector 259"/>
+          <p:cNvCxnSpPr/>
+          <p:nvPr/>
+        </p:nvCxnSpPr>
+        <p:spPr>
+          <a:xfrm flipH="1">
+            <a:off x="8480000" y="4580000"/>
+            <a:ext cx="1700000" cy="0"/>
+          </a:xfrm>
+          <a:prstGeom prst="line">
+            <a:avLst/>
+          </a:prstGeom>
+          <a:ln w="9525">
+            <a:solidFill>
+              <a:srgbClr val="E8E8E8"/>
+            </a:solidFill>
+          </a:ln>
+        </p:spPr>
+        <p:style>
+          <a:lnRef idx="2">
+            <a:schemeClr val="accent1"/>
+          </a:lnRef>
+          <a:fillRef idx="0">
+            <a:schemeClr val="accent1"/>
+          </a:fillRef>
+          <a:effectRef idx="1">
+            <a:schemeClr val="accent1"/>
+          </a:effectRef>
+          <a:fontRef idx="minor">
+            <a:schemeClr val="tx1"/>
+          </a:fontRef>
+        </p:style>
+      </p:cxnSp>
+      <p:cxnSp>
+        <p:nvCxnSpPr>
+          <p:cNvPr id="261" name="Connector 260"/>
+          <p:cNvCxnSpPr/>
+          <p:nvPr/>
+        </p:nvCxnSpPr>
+        <p:spPr>
+          <a:xfrm flipH="1" flipV="1">
+            <a:off x="8030000" y="3180000"/>
+            <a:ext cx="2150000" cy="1400000"/>
+          </a:xfrm>
+          <a:prstGeom prst="line">
+            <a:avLst/>
+          </a:prstGeom>
+          <a:ln w="9525">
+            <a:solidFill>
+              <a:srgbClr val="E8E8E8"/>
+            </a:solidFill>
+          </a:ln>
+        </p:spPr>
+        <p:style>
+          <a:lnRef idx="2">
+            <a:schemeClr val="accent1"/>
+          </a:lnRef>
+          <a:fillRef idx="0">
+            <a:schemeClr val="accent1"/>
+          </a:fillRef>
+          <a:effectRef idx="1">
+            <a:schemeClr val="accent1"/>
+          </a:effectRef>
+          <a:fontRef idx="minor">
+            <a:schemeClr val="tx1"/>
+          </a:fontRef>
+        </p:style>
+      </p:cxnSp>
+      <p:cxnSp>
+        <p:nvCxnSpPr>
+          <p:cNvPr id="262" name="Connector 261"/>
+          <p:cNvCxnSpPr/>
+          <p:nvPr/>
+        </p:nvCxnSpPr>
+        <p:spPr>
+          <a:xfrm flipH="1" flipV="1">
+            <a:off x="8030000" y="3180000"/>
+            <a:ext cx="450000" cy="1400000"/>
+          </a:xfrm>
+          <a:prstGeom prst="line">
+            <a:avLst/>
+          </a:prstGeom>
+          <a:ln w="9525">
+            <a:solidFill>
+              <a:srgbClr val="E8E8E8"/>
+            </a:solidFill>
+          </a:ln>
+        </p:spPr>
+        <p:style>
+          <a:lnRef idx="2">
+            <a:schemeClr val="accent1"/>
+          </a:lnRef>
+          <a:fillRef idx="0">
+            <a:schemeClr val="accent1"/>
+          </a:fillRef>
+          <a:effectRef idx="1">
+            <a:schemeClr val="accent1"/>
+          </a:effectRef>
+          <a:fontRef idx="minor">
+            <a:schemeClr val="tx1"/>
+          </a:fontRef>
+        </p:style>
+      </p:cxnSp>
+      <p:sp>
+        <p:nvSpPr>
+          <p:cNvPr id="263" name="Oval 262"/>
+          <p:cNvSpPr/>
+          <p:nvPr/>
+        </p:nvSpPr>
+        <p:spPr>
+          <a:xfrm>
+            <a:off x="9000000" y="2150000"/>
+            <a:ext cx="660000" cy="660000"/>
+          </a:xfrm>
+          <a:prstGeom prst="ellipse">
+            <a:avLst/>
+          </a:prstGeom>
+          <a:solidFill>
+            <a:srgbClr val="0F9ED5"/>
+          </a:solidFill>
+          <a:ln>
+            <a:noFill/>
+          </a:ln>
+          <a:effectLst/>
+        </p:spPr>
+        <p:style>
+          <a:lnRef idx="1">
+            <a:schemeClr val="accent1"/>
+          </a:lnRef>
+          <a:fillRef idx="3">
+            <a:schemeClr val="accent1"/>
+          </a:fillRef>
+          <a:effectRef idx="2">
+            <a:schemeClr val="accent1"/>
+          </a:effectRef>
+          <a:fontRef idx="minor">
+            <a:schemeClr val="lt1"/>
+          </a:fontRef>
+        </p:style>
+        <p:txBody>
+          <a:bodyPr rtlCol="0" anchor="ctr" wrap="square" lIns="18000" rIns="18000" tIns="9000" bIns="9000"/>
+          <a:lstStyle/>
+          <a:p>
+            <a:pPr algn="ctr"/>
+            <a:r>
+              <a:rPr sz="900" b="1">
+                <a:solidFill>
+                  <a:srgbClr val="0E2841"/>
+                </a:solidFill>
+                <a:latin typeface="Roboto Condensed"/>
+              </a:rPr>
+              <a:t>Salud</a:t>
+            </a:r>
+          </a:p>
+        </p:txBody>
+      </p:sp>
+      <p:sp>
+        <p:nvSpPr>
+          <p:cNvPr id="264" name="Oval 263"/>
+          <p:cNvSpPr/>
+          <p:nvPr/>
+        </p:nvSpPr>
+        <p:spPr>
+          <a:xfrm>
+            <a:off x="10300000" y="2850000"/>
+            <a:ext cx="660000" cy="660000"/>
+          </a:xfrm>
+          <a:prstGeom prst="ellipse">
+            <a:avLst/>
+          </a:prstGeom>
+          <a:solidFill>
+            <a:srgbClr val="0F9ED5"/>
+          </a:solidFill>
+          <a:ln>
+            <a:noFill/>
+          </a:ln>
+          <a:effectLst/>
+        </p:spPr>
+        <p:style>
+          <a:lnRef idx="1">
+            <a:schemeClr val="accent1"/>
+          </a:lnRef>
+          <a:fillRef idx="3">
+            <a:schemeClr val="accent1"/>
+          </a:fillRef>
+          <a:effectRef idx="2">
+            <a:schemeClr val="accent1"/>
+          </a:effectRef>
+          <a:fontRef idx="minor">
+            <a:schemeClr val="lt1"/>
+          </a:fontRef>
+        </p:style>
+        <p:txBody>
+          <a:bodyPr rtlCol="0" anchor="ctr" wrap="square" lIns="18000" rIns="18000" tIns="9000" bIns="9000"/>
+          <a:lstStyle/>
+          <a:p>
+            <a:pPr algn="ctr"/>
+            <a:r>
+              <a:rPr sz="900" b="1">
+                <a:solidFill>
+                  <a:srgbClr val="0E2841"/>
+                </a:solidFill>
+                <a:latin typeface="Roboto Condensed"/>
+              </a:rPr>
+              <a:t>Bancos</a:t>
+            </a:r>
+          </a:p>
+        </p:txBody>
+      </p:sp>
+      <p:sp>
+        <p:nvSpPr>
+          <p:cNvPr id="265" name="Oval 264"/>
+          <p:cNvSpPr/>
+          <p:nvPr/>
+        </p:nvSpPr>
+        <p:spPr>
+          <a:xfrm>
+            <a:off x="9850000" y="4250000"/>
+            <a:ext cx="660000" cy="660000"/>
+          </a:xfrm>
+          <a:prstGeom prst="ellipse">
+            <a:avLst/>
+          </a:prstGeom>
+          <a:solidFill>
+            <a:srgbClr val="0F9ED5"/>
+          </a:solidFill>
+          <a:ln>
+            <a:noFill/>
+          </a:ln>
+          <a:effectLst/>
+        </p:spPr>
+        <p:style>
+          <a:lnRef idx="1">
+            <a:schemeClr val="accent1"/>
+          </a:lnRef>
+          <a:fillRef idx="3">
+            <a:schemeClr val="accent1"/>
+          </a:fillRef>
+          <a:effectRef idx="2">
+            <a:schemeClr val="accent1"/>
+          </a:effectRef>
+          <a:fontRef idx="minor">
+            <a:schemeClr val="lt1"/>
+          </a:fontRef>
+        </p:style>
+        <p:txBody>
+          <a:bodyPr rtlCol="0" anchor="ctr" wrap="square" lIns="18000" rIns="18000" tIns="9000" bIns="9000"/>
+          <a:lstStyle/>
+          <a:p>
+            <a:pPr algn="ctr"/>
+            <a:r>
+              <a:rPr sz="900" b="1">
+                <a:solidFill>
+                  <a:srgbClr val="0E2841"/>
+                </a:solidFill>
+                <a:latin typeface="Roboto Condensed"/>
+              </a:rPr>
+              <a:t>Municipios</a:t>
+            </a:r>
+          </a:p>
+        </p:txBody>
+      </p:sp>
+      <p:sp>
+        <p:nvSpPr>
+          <p:cNvPr id="266" name="Oval 265"/>
+          <p:cNvSpPr/>
+          <p:nvPr/>
+        </p:nvSpPr>
+        <p:spPr>
+          <a:xfrm>
+            <a:off x="8150000" y="4250000"/>
+            <a:ext cx="660000" cy="660000"/>
+          </a:xfrm>
+          <a:prstGeom prst="ellipse">
+            <a:avLst/>
+          </a:prstGeom>
+          <a:solidFill>
+            <a:srgbClr val="0F9ED5"/>
+          </a:solidFill>
+          <a:ln>
+            <a:noFill/>
+          </a:ln>
+          <a:effectLst/>
+        </p:spPr>
+        <p:style>
+          <a:lnRef idx="1">
+            <a:schemeClr val="accent1"/>
+          </a:lnRef>
+          <a:fillRef idx="3">
+            <a:schemeClr val="accent1"/>
+          </a:fillRef>
+          <a:effectRef idx="2">
+            <a:schemeClr val="accent1"/>
+          </a:effectRef>
+          <a:fontRef idx="minor">
+            <a:schemeClr val="lt1"/>
+          </a:fontRef>
+        </p:style>
+        <p:txBody>
+          <a:bodyPr rtlCol="0" anchor="ctr" wrap="square" lIns="18000" rIns="18000" tIns="9000" bIns="9000"/>
+          <a:lstStyle/>
+          <a:p>
+            <a:pPr algn="ctr"/>
+            <a:r>
+              <a:rPr sz="900" b="1">
+                <a:solidFill>
+                  <a:srgbClr val="0E2841"/>
+                </a:solidFill>
+                <a:latin typeface="Roboto Condensed"/>
+              </a:rPr>
+              <a:t>Educación</a:t>
+            </a:r>
+          </a:p>
+        </p:txBody>
+      </p:sp>
+      <p:sp>
+        <p:nvSpPr>
+          <p:cNvPr id="267" name="Oval 266"/>
+          <p:cNvSpPr/>
+          <p:nvPr/>
+        </p:nvSpPr>
+        <p:spPr>
+          <a:xfrm>
+            <a:off x="7700000" y="2850000"/>
+            <a:ext cx="660000" cy="660000"/>
+          </a:xfrm>
+          <a:prstGeom prst="ellipse">
+            <a:avLst/>
+          </a:prstGeom>
+          <a:solidFill>
+            <a:srgbClr val="0F9ED5"/>
+          </a:solidFill>
+          <a:ln>
+            <a:noFill/>
+          </a:ln>
+          <a:effectLst/>
+        </p:spPr>
+        <p:style>
+          <a:lnRef idx="1">
+            <a:schemeClr val="accent1"/>
+          </a:lnRef>
+          <a:fillRef idx="3">
+            <a:schemeClr val="accent1"/>
+          </a:fillRef>
+          <a:effectRef idx="2">
+            <a:schemeClr val="accent1"/>
+          </a:effectRef>
+          <a:fontRef idx="minor">
+            <a:schemeClr val="lt1"/>
+          </a:fontRef>
+        </p:style>
+        <p:txBody>
+          <a:bodyPr rtlCol="0" anchor="ctr" wrap="square" lIns="18000" rIns="18000" tIns="9000" bIns="9000"/>
+          <a:lstStyle/>
+          <a:p>
+            <a:pPr algn="ctr"/>
+            <a:r>
+              <a:rPr sz="900" b="1">
+                <a:solidFill>
+                  <a:srgbClr val="0E2841"/>
+                </a:solidFill>
+                <a:latin typeface="Roboto Condensed"/>
+              </a:rPr>
+              <a:t>Impuestos</a:t>
+            </a:r>
+          </a:p>
+        </p:txBody>
+      </p:sp>
+      <p:sp>
+        <p:nvSpPr>
+          <p:cNvPr id="268" name="TextBox 267"/>
+          <p:cNvSpPr txBox="1"/>
+          <p:nvPr/>
+        </p:nvSpPr>
+        <p:spPr>
+          <a:xfrm>
+            <a:off x="7350000" y="4650000"/>
+            <a:ext cx="3700000" cy="300000"/>
+          </a:xfrm>
+          <a:prstGeom prst="rect">
+            <a:avLst/>
+          </a:prstGeom>
+          <a:noFill/>
+        </p:spPr>
+        <p:txBody>
+          <a:bodyPr wrap="square" lIns="0" rIns="0" tIns="0" bIns="0">
+            <a:spAutoFit/>
+          </a:bodyPr>
+          <a:lstStyle/>
+          <a:p>
+            <a:pPr algn="ctr"/>
+            <a:r>
+              <a:rPr sz="1000" b="0" i="1">
+                <a:solidFill>
+                  <a:srgbClr val="3A3A3A"/>
+                </a:solidFill>
+                <a:latin typeface="Roboto Condensed"/>
+              </a:rPr>
+              <a:t>Referencial: red distribuida sin autoridad central</a:t>
+            </a:r>
           </a:p>
         </p:txBody>
       </p:sp>
@@ -39869,7 +41364,7 @@
 </p:sld>
 </file>
 
-<file path=ppt/slides/slide12.xml><?xml version="1.0" encoding="utf-8"?>
+<file path=ppt/slides/slide13.xml><?xml version="1.0" encoding="utf-8"?>
 <p:sld xmlns:a="http://schemas.openxmlformats.org/drawingml/2006/main" xmlns:p="http://schemas.openxmlformats.org/presentationml/2006/main" xmlns:r="http://schemas.openxmlformats.org/officeDocument/2006/relationships">
   <p:cSld>
     <p:spTree>
@@ -40362,7 +41857,7 @@
           <a:p>
             <a:pPr algn="r"/>
             <a:r>
-              <a:t>12</a:t>
+              <a:t>13</a:t>
             </a:r>
             <a:endParaRPr lang="en-US"/>
           </a:p>
@@ -40376,7 +41871,7 @@
 </p:sld>
 </file>
 
-<file path=ppt/slides/slide13.xml><?xml version="1.0" encoding="utf-8"?>
+<file path=ppt/slides/slide14.xml><?xml version="1.0" encoding="utf-8"?>
 <p:sld xmlns:a="http://schemas.openxmlformats.org/drawingml/2006/main" xmlns:p="http://schemas.openxmlformats.org/presentationml/2006/main" xmlns:r="http://schemas.openxmlformats.org/officeDocument/2006/relationships">
   <p:cSld>
     <p:spTree>
@@ -40448,7 +41943,7 @@
         <p:spPr>
           <a:xfrm>
             <a:off x="889446" y="2014379"/>
-            <a:ext cx="9385264" cy="3413760"/>
+            <a:ext cx="6300000" cy="3413760"/>
           </a:xfrm>
           <a:prstGeom prst="rect">
             <a:avLst/>
@@ -40472,12 +41967,12 @@
                 <a:spcPts val="0"/>
               </a:spcBef>
               <a:spcAft>
-                <a:spcPts val="800"/>
+                <a:spcPts val="600"/>
               </a:spcAft>
               <a:buNone/>
             </a:pPr>
             <a:r>
-              <a:rPr sz="2000">
+              <a:rPr sz="1500">
                 <a:solidFill>
                   <a:srgbClr val="3A3A3A"/>
                 </a:solidFill>
@@ -40496,12 +41991,12 @@
                 <a:spcPts val="0"/>
               </a:spcBef>
               <a:spcAft>
-                <a:spcPts val="800"/>
+                <a:spcPts val="600"/>
               </a:spcAft>
               <a:buNone/>
             </a:pPr>
             <a:r>
-              <a:rPr sz="2000">
+              <a:rPr sz="1500">
                 <a:solidFill>
                   <a:srgbClr val="3A3A3A"/>
                 </a:solidFill>
@@ -40520,12 +42015,12 @@
                 <a:spcPts val="0"/>
               </a:spcBef>
               <a:spcAft>
-                <a:spcPts val="800"/>
+                <a:spcPts val="600"/>
               </a:spcAft>
               <a:buNone/>
             </a:pPr>
             <a:r>
-              <a:rPr sz="2000">
+              <a:rPr sz="1500">
                 <a:solidFill>
                   <a:srgbClr val="3A3A3A"/>
                 </a:solidFill>
@@ -40544,12 +42039,12 @@
                 <a:spcPts val="0"/>
               </a:spcBef>
               <a:spcAft>
-                <a:spcPts val="800"/>
+                <a:spcPts val="600"/>
               </a:spcAft>
               <a:buNone/>
             </a:pPr>
             <a:r>
-              <a:rPr sz="2000">
+              <a:rPr sz="1500">
                 <a:solidFill>
                   <a:srgbClr val="3A3A3A"/>
                 </a:solidFill>
@@ -40568,12 +42063,12 @@
                 <a:spcPts val="0"/>
               </a:spcBef>
               <a:spcAft>
-                <a:spcPts val="800"/>
+                <a:spcPts val="600"/>
               </a:spcAft>
               <a:buNone/>
             </a:pPr>
             <a:r>
-              <a:rPr sz="2000">
+              <a:rPr sz="1500">
                 <a:solidFill>
                   <a:srgbClr val="3A3A3A"/>
                 </a:solidFill>
@@ -40592,12 +42087,12 @@
                 <a:spcPts val="0"/>
               </a:spcBef>
               <a:spcAft>
-                <a:spcPts val="800"/>
+                <a:spcPts val="600"/>
               </a:spcAft>
               <a:buNone/>
             </a:pPr>
             <a:r>
-              <a:rPr sz="2000">
+              <a:rPr sz="1500">
                 <a:solidFill>
                   <a:srgbClr val="3A3A3A"/>
                 </a:solidFill>
@@ -40616,12 +42111,12 @@
                 <a:spcPts val="0"/>
               </a:spcBef>
               <a:spcAft>
-                <a:spcPts val="800"/>
+                <a:spcPts val="600"/>
               </a:spcAft>
               <a:buNone/>
             </a:pPr>
             <a:r>
-              <a:rPr sz="1200" i="1">
+              <a:rPr sz="1500" i="1">
                 <a:solidFill>
                   <a:srgbClr val="3A3A3A"/>
                 </a:solidFill>
@@ -40917,9 +42412,203 @@
           <a:p>
             <a:pPr algn="r"/>
             <a:r>
-              <a:t>13</a:t>
+              <a:t>14</a:t>
             </a:r>
             <a:endParaRPr lang="en-US"/>
+          </a:p>
+        </p:txBody>
+      </p:sp>
+      <p:sp>
+        <p:nvSpPr>
+          <p:cNvPr id="253" name="Oval 252"/>
+          <p:cNvSpPr/>
+          <p:nvPr/>
+        </p:nvSpPr>
+        <p:spPr>
+          <a:xfrm>
+            <a:off x="8200000" y="2200000"/>
+            <a:ext cx="900000" cy="900000"/>
+          </a:xfrm>
+          <a:prstGeom prst="ellipse">
+            <a:avLst/>
+          </a:prstGeom>
+          <a:solidFill>
+            <a:srgbClr val="E97132"/>
+          </a:solidFill>
+          <a:ln>
+            <a:noFill/>
+          </a:ln>
+          <a:effectLst/>
+        </p:spPr>
+        <p:style>
+          <a:lnRef idx="1">
+            <a:schemeClr val="accent1"/>
+          </a:lnRef>
+          <a:fillRef idx="3">
+            <a:schemeClr val="accent1"/>
+          </a:fillRef>
+          <a:effectRef idx="2">
+            <a:schemeClr val="accent1"/>
+          </a:effectRef>
+          <a:fontRef idx="minor">
+            <a:schemeClr val="lt1"/>
+          </a:fontRef>
+        </p:style>
+        <p:txBody>
+          <a:bodyPr rtlCol="0" anchor="ctr" wrap="square" lIns="18000" rIns="18000" tIns="9000" bIns="9000"/>
+          <a:lstStyle/>
+          <a:p>
+            <a:pPr algn="ctr"/>
+          </a:p>
+        </p:txBody>
+      </p:sp>
+      <p:sp>
+        <p:nvSpPr>
+          <p:cNvPr id="254" name="Rounded Rectangle 253"/>
+          <p:cNvSpPr/>
+          <p:nvPr/>
+        </p:nvSpPr>
+        <p:spPr>
+          <a:xfrm>
+            <a:off x="8050000" y="2950000"/>
+            <a:ext cx="1200000" cy="1100000"/>
+          </a:xfrm>
+          <a:prstGeom prst="roundRect">
+            <a:avLst/>
+          </a:prstGeom>
+          <a:solidFill>
+            <a:srgbClr val="E97132"/>
+          </a:solidFill>
+          <a:ln>
+            <a:noFill/>
+          </a:ln>
+          <a:effectLst/>
+        </p:spPr>
+        <p:style>
+          <a:lnRef idx="1">
+            <a:schemeClr val="accent1"/>
+          </a:lnRef>
+          <a:fillRef idx="3">
+            <a:schemeClr val="accent1"/>
+          </a:fillRef>
+          <a:effectRef idx="2">
+            <a:schemeClr val="accent1"/>
+          </a:effectRef>
+          <a:fontRef idx="minor">
+            <a:schemeClr val="lt1"/>
+          </a:fontRef>
+        </p:style>
+        <p:txBody>
+          <a:bodyPr rtlCol="0" anchor="ctr" wrap="square" lIns="18000" rIns="18000" tIns="9000" bIns="9000"/>
+          <a:lstStyle/>
+          <a:p>
+            <a:pPr algn="ctr"/>
+          </a:p>
+        </p:txBody>
+      </p:sp>
+      <p:sp>
+        <p:nvSpPr>
+          <p:cNvPr id="255" name="TextBox 254"/>
+          <p:cNvSpPr txBox="1"/>
+          <p:nvPr/>
+        </p:nvSpPr>
+        <p:spPr>
+          <a:xfrm>
+            <a:off x="7850000" y="4250000"/>
+            <a:ext cx="1600000" cy="260000"/>
+          </a:xfrm>
+          <a:prstGeom prst="rect">
+            <a:avLst/>
+          </a:prstGeom>
+          <a:noFill/>
+        </p:spPr>
+        <p:txBody>
+          <a:bodyPr wrap="square" lIns="0" rIns="0" tIns="0" bIns="0">
+            <a:spAutoFit/>
+          </a:bodyPr>
+          <a:lstStyle/>
+          <a:p>
+            <a:pPr algn="ctr"/>
+            <a:r>
+              <a:rPr sz="1400" b="1" i="0">
+                <a:solidFill>
+                  <a:srgbClr val="0E2841"/>
+                </a:solidFill>
+                <a:latin typeface="Roboto Condensed"/>
+              </a:rPr>
+              <a:t>ClaveÚnica</a:t>
+            </a:r>
+          </a:p>
+        </p:txBody>
+      </p:sp>
+      <p:sp>
+        <p:nvSpPr>
+          <p:cNvPr id="256" name="TextBox 255"/>
+          <p:cNvSpPr txBox="1"/>
+          <p:nvPr/>
+        </p:nvSpPr>
+        <p:spPr>
+          <a:xfrm>
+            <a:off x="7850000" y="4520000"/>
+            <a:ext cx="1600000" cy="400000"/>
+          </a:xfrm>
+          <a:prstGeom prst="rect">
+            <a:avLst/>
+          </a:prstGeom>
+          <a:noFill/>
+        </p:spPr>
+        <p:txBody>
+          <a:bodyPr wrap="square" lIns="0" rIns="0" tIns="0" bIns="0">
+            <a:spAutoFit/>
+          </a:bodyPr>
+          <a:lstStyle/>
+          <a:p>
+            <a:pPr algn="ctr"/>
+            <a:r>
+              <a:rPr sz="1000" b="0" i="0">
+                <a:solidFill>
+                  <a:srgbClr val="3A3A3A"/>
+                </a:solidFill>
+                <a:latin typeface="Roboto Condensed"/>
+              </a:rPr>
+              <a:t>Identidad digital
+del Estado de Chile</a:t>
+            </a:r>
+          </a:p>
+        </p:txBody>
+      </p:sp>
+      <p:sp>
+        <p:nvSpPr>
+          <p:cNvPr id="257" name="TextBox 256"/>
+          <p:cNvSpPr txBox="1"/>
+          <p:nvPr/>
+        </p:nvSpPr>
+        <p:spPr>
+          <a:xfrm>
+            <a:off x="7450000" y="5050000"/>
+            <a:ext cx="2000000" cy="300000"/>
+          </a:xfrm>
+          <a:prstGeom prst="rect">
+            <a:avLst/>
+          </a:prstGeom>
+          <a:noFill/>
+        </p:spPr>
+        <p:txBody>
+          <a:bodyPr wrap="square" lIns="0" rIns="0" tIns="0" bIns="0">
+            <a:spAutoFit/>
+          </a:bodyPr>
+          <a:lstStyle/>
+          <a:p>
+            <a:pPr algn="ctr"/>
+            <a:r>
+              <a:rPr sz="1000" b="0" i="1">
+                <a:solidFill>
+                  <a:srgbClr val="3A3A3A"/>
+                </a:solidFill>
+                <a:latin typeface="Roboto Condensed"/>
+              </a:rPr>
+              <a:t>Referencial: acceso único a trámites del Estado</a:t>
+            </a:r>
           </a:p>
         </p:txBody>
       </p:sp>
@@ -40931,7 +42620,7 @@
 </p:sld>
 </file>
 
-<file path=ppt/slides/slide14.xml><?xml version="1.0" encoding="utf-8"?>
+<file path=ppt/slides/slide15.xml><?xml version="1.0" encoding="utf-8"?>
 <p:sld xmlns:a="http://schemas.openxmlformats.org/drawingml/2006/main" xmlns:p="http://schemas.openxmlformats.org/presentationml/2006/main" xmlns:r="http://schemas.openxmlformats.org/officeDocument/2006/relationships">
   <p:cSld>
     <p:spTree>
@@ -41328,7 +43017,7 @@
           <a:p>
             <a:pPr algn="r"/>
             <a:r>
-              <a:t>14</a:t>
+              <a:t>15</a:t>
             </a:r>
             <a:endParaRPr lang="en-US"/>
           </a:p>
@@ -41342,7 +43031,7 @@
 </p:sld>
 </file>
 
-<file path=ppt/slides/slide15.xml><?xml version="1.0" encoding="utf-8"?>
+<file path=ppt/slides/slide16.xml><?xml version="1.0" encoding="utf-8"?>
 <p:sld xmlns:a="http://schemas.openxmlformats.org/drawingml/2006/main" xmlns:p="http://schemas.openxmlformats.org/presentationml/2006/main" xmlns:r="http://schemas.openxmlformats.org/officeDocument/2006/relationships">
   <p:cSld>
     <p:spTree>
@@ -41414,7 +43103,7 @@
         <p:spPr>
           <a:xfrm>
             <a:off x="889446" y="2014379"/>
-            <a:ext cx="9385264" cy="3413760"/>
+            <a:ext cx="6300000" cy="3413760"/>
           </a:xfrm>
           <a:prstGeom prst="rect">
             <a:avLst/>
@@ -41438,12 +43127,12 @@
                 <a:spcPts val="0"/>
               </a:spcBef>
               <a:spcAft>
-                <a:spcPts val="800"/>
+                <a:spcPts val="600"/>
               </a:spcAft>
               <a:buNone/>
             </a:pPr>
             <a:r>
-              <a:rPr sz="2000">
+              <a:rPr sz="1500">
                 <a:solidFill>
                   <a:srgbClr val="3A3A3A"/>
                 </a:solidFill>
@@ -41456,11 +43145,11 @@
           <a:p>
             <a:pPr>
               <a:spcAft>
-                <a:spcPts val="800"/>
+                <a:spcPts val="600"/>
               </a:spcAft>
             </a:pPr>
             <a:r>
-              <a:rPr sz="2000">
+              <a:rPr sz="1500">
                 <a:solidFill>
                   <a:srgbClr val="3A3A3A"/>
                 </a:solidFill>
@@ -41472,11 +43161,11 @@
           <a:p>
             <a:pPr lvl="1">
               <a:spcAft>
-                <a:spcPts val="400"/>
+                <a:spcPts val="600"/>
               </a:spcAft>
             </a:pPr>
             <a:r>
-              <a:rPr sz="1800">
+              <a:rPr sz="1500">
                 <a:solidFill>
                   <a:srgbClr val="3A3A3A"/>
                 </a:solidFill>
@@ -41488,11 +43177,11 @@
           <a:p>
             <a:pPr lvl="1">
               <a:spcAft>
-                <a:spcPts val="400"/>
+                <a:spcPts val="600"/>
               </a:spcAft>
             </a:pPr>
             <a:r>
-              <a:rPr sz="1800">
+              <a:rPr sz="1500">
                 <a:solidFill>
                   <a:srgbClr val="3A3A3A"/>
                 </a:solidFill>
@@ -41504,11 +43193,11 @@
           <a:p>
             <a:pPr>
               <a:spcAft>
-                <a:spcPts val="800"/>
+                <a:spcPts val="600"/>
               </a:spcAft>
             </a:pPr>
             <a:r>
-              <a:rPr sz="2000">
+              <a:rPr sz="1500">
                 <a:solidFill>
                   <a:srgbClr val="3A3A3A"/>
                 </a:solidFill>
@@ -41803,9 +43492,1140 @@
           <a:p>
             <a:pPr algn="r"/>
             <a:r>
-              <a:t>15</a:t>
+              <a:t>16</a:t>
             </a:r>
             <a:endParaRPr lang="en-US"/>
+          </a:p>
+        </p:txBody>
+      </p:sp>
+      <p:cxnSp>
+        <p:nvCxnSpPr>
+          <p:cNvPr id="253" name="Connector 252"/>
+          <p:cNvCxnSpPr/>
+          <p:nvPr/>
+        </p:nvCxnSpPr>
+        <p:spPr>
+          <a:xfrm flipV="1">
+            <a:off x="7920000" y="2370000"/>
+            <a:ext cx="1100000" cy="220000"/>
+          </a:xfrm>
+          <a:prstGeom prst="line">
+            <a:avLst/>
+          </a:prstGeom>
+          <a:ln w="6350">
+            <a:solidFill>
+              <a:srgbClr val="E8E8E8"/>
+            </a:solidFill>
+          </a:ln>
+        </p:spPr>
+        <p:style>
+          <a:lnRef idx="2">
+            <a:schemeClr val="accent1"/>
+          </a:lnRef>
+          <a:fillRef idx="0">
+            <a:schemeClr val="accent1"/>
+          </a:fillRef>
+          <a:effectRef idx="1">
+            <a:schemeClr val="accent1"/>
+          </a:effectRef>
+          <a:fontRef idx="minor">
+            <a:schemeClr val="tx1"/>
+          </a:fontRef>
+        </p:style>
+      </p:cxnSp>
+      <p:cxnSp>
+        <p:nvCxnSpPr>
+          <p:cNvPr id="254" name="Connector 253"/>
+          <p:cNvCxnSpPr/>
+          <p:nvPr/>
+        </p:nvCxnSpPr>
+        <p:spPr>
+          <a:xfrm>
+            <a:off x="7920000" y="2590000"/>
+            <a:ext cx="1100000" cy="300000"/>
+          </a:xfrm>
+          <a:prstGeom prst="line">
+            <a:avLst/>
+          </a:prstGeom>
+          <a:ln w="6350">
+            <a:solidFill>
+              <a:srgbClr val="E8E8E8"/>
+            </a:solidFill>
+          </a:ln>
+        </p:spPr>
+        <p:style>
+          <a:lnRef idx="2">
+            <a:schemeClr val="accent1"/>
+          </a:lnRef>
+          <a:fillRef idx="0">
+            <a:schemeClr val="accent1"/>
+          </a:fillRef>
+          <a:effectRef idx="1">
+            <a:schemeClr val="accent1"/>
+          </a:effectRef>
+          <a:fontRef idx="minor">
+            <a:schemeClr val="tx1"/>
+          </a:fontRef>
+        </p:style>
+      </p:cxnSp>
+      <p:cxnSp>
+        <p:nvCxnSpPr>
+          <p:cNvPr id="255" name="Connector 254"/>
+          <p:cNvCxnSpPr/>
+          <p:nvPr/>
+        </p:nvCxnSpPr>
+        <p:spPr>
+          <a:xfrm>
+            <a:off x="7920000" y="2590000"/>
+            <a:ext cx="1100000" cy="820000"/>
+          </a:xfrm>
+          <a:prstGeom prst="line">
+            <a:avLst/>
+          </a:prstGeom>
+          <a:ln w="6350">
+            <a:solidFill>
+              <a:srgbClr val="E8E8E8"/>
+            </a:solidFill>
+          </a:ln>
+        </p:spPr>
+        <p:style>
+          <a:lnRef idx="2">
+            <a:schemeClr val="accent1"/>
+          </a:lnRef>
+          <a:fillRef idx="0">
+            <a:schemeClr val="accent1"/>
+          </a:fillRef>
+          <a:effectRef idx="1">
+            <a:schemeClr val="accent1"/>
+          </a:effectRef>
+          <a:fontRef idx="minor">
+            <a:schemeClr val="tx1"/>
+          </a:fontRef>
+        </p:style>
+      </p:cxnSp>
+      <p:cxnSp>
+        <p:nvCxnSpPr>
+          <p:cNvPr id="256" name="Connector 255"/>
+          <p:cNvCxnSpPr/>
+          <p:nvPr/>
+        </p:nvCxnSpPr>
+        <p:spPr>
+          <a:xfrm>
+            <a:off x="7920000" y="2590000"/>
+            <a:ext cx="1100000" cy="1340000"/>
+          </a:xfrm>
+          <a:prstGeom prst="line">
+            <a:avLst/>
+          </a:prstGeom>
+          <a:ln w="6350">
+            <a:solidFill>
+              <a:srgbClr val="E8E8E8"/>
+            </a:solidFill>
+          </a:ln>
+        </p:spPr>
+        <p:style>
+          <a:lnRef idx="2">
+            <a:schemeClr val="accent1"/>
+          </a:lnRef>
+          <a:fillRef idx="0">
+            <a:schemeClr val="accent1"/>
+          </a:fillRef>
+          <a:effectRef idx="1">
+            <a:schemeClr val="accent1"/>
+          </a:effectRef>
+          <a:fontRef idx="minor">
+            <a:schemeClr val="tx1"/>
+          </a:fontRef>
+        </p:style>
+      </p:cxnSp>
+      <p:cxnSp>
+        <p:nvCxnSpPr>
+          <p:cNvPr id="257" name="Connector 256"/>
+          <p:cNvCxnSpPr/>
+          <p:nvPr/>
+        </p:nvCxnSpPr>
+        <p:spPr>
+          <a:xfrm flipV="1">
+            <a:off x="7920000" y="2370000"/>
+            <a:ext cx="1100000" cy="740000"/>
+          </a:xfrm>
+          <a:prstGeom prst="line">
+            <a:avLst/>
+          </a:prstGeom>
+          <a:ln w="6350">
+            <a:solidFill>
+              <a:srgbClr val="E8E8E8"/>
+            </a:solidFill>
+          </a:ln>
+        </p:spPr>
+        <p:style>
+          <a:lnRef idx="2">
+            <a:schemeClr val="accent1"/>
+          </a:lnRef>
+          <a:fillRef idx="0">
+            <a:schemeClr val="accent1"/>
+          </a:fillRef>
+          <a:effectRef idx="1">
+            <a:schemeClr val="accent1"/>
+          </a:effectRef>
+          <a:fontRef idx="minor">
+            <a:schemeClr val="tx1"/>
+          </a:fontRef>
+        </p:style>
+      </p:cxnSp>
+      <p:cxnSp>
+        <p:nvCxnSpPr>
+          <p:cNvPr id="258" name="Connector 257"/>
+          <p:cNvCxnSpPr/>
+          <p:nvPr/>
+        </p:nvCxnSpPr>
+        <p:spPr>
+          <a:xfrm flipV="1">
+            <a:off x="7920000" y="2890000"/>
+            <a:ext cx="1100000" cy="220000"/>
+          </a:xfrm>
+          <a:prstGeom prst="line">
+            <a:avLst/>
+          </a:prstGeom>
+          <a:ln w="6350">
+            <a:solidFill>
+              <a:srgbClr val="E8E8E8"/>
+            </a:solidFill>
+          </a:ln>
+        </p:spPr>
+        <p:style>
+          <a:lnRef idx="2">
+            <a:schemeClr val="accent1"/>
+          </a:lnRef>
+          <a:fillRef idx="0">
+            <a:schemeClr val="accent1"/>
+          </a:fillRef>
+          <a:effectRef idx="1">
+            <a:schemeClr val="accent1"/>
+          </a:effectRef>
+          <a:fontRef idx="minor">
+            <a:schemeClr val="tx1"/>
+          </a:fontRef>
+        </p:style>
+      </p:cxnSp>
+      <p:cxnSp>
+        <p:nvCxnSpPr>
+          <p:cNvPr id="259" name="Connector 258"/>
+          <p:cNvCxnSpPr/>
+          <p:nvPr/>
+        </p:nvCxnSpPr>
+        <p:spPr>
+          <a:xfrm>
+            <a:off x="7920000" y="3110000"/>
+            <a:ext cx="1100000" cy="300000"/>
+          </a:xfrm>
+          <a:prstGeom prst="line">
+            <a:avLst/>
+          </a:prstGeom>
+          <a:ln w="6350">
+            <a:solidFill>
+              <a:srgbClr val="E8E8E8"/>
+            </a:solidFill>
+          </a:ln>
+        </p:spPr>
+        <p:style>
+          <a:lnRef idx="2">
+            <a:schemeClr val="accent1"/>
+          </a:lnRef>
+          <a:fillRef idx="0">
+            <a:schemeClr val="accent1"/>
+          </a:fillRef>
+          <a:effectRef idx="1">
+            <a:schemeClr val="accent1"/>
+          </a:effectRef>
+          <a:fontRef idx="minor">
+            <a:schemeClr val="tx1"/>
+          </a:fontRef>
+        </p:style>
+      </p:cxnSp>
+      <p:cxnSp>
+        <p:nvCxnSpPr>
+          <p:cNvPr id="260" name="Connector 259"/>
+          <p:cNvCxnSpPr/>
+          <p:nvPr/>
+        </p:nvCxnSpPr>
+        <p:spPr>
+          <a:xfrm>
+            <a:off x="7920000" y="3110000"/>
+            <a:ext cx="1100000" cy="820000"/>
+          </a:xfrm>
+          <a:prstGeom prst="line">
+            <a:avLst/>
+          </a:prstGeom>
+          <a:ln w="6350">
+            <a:solidFill>
+              <a:srgbClr val="E8E8E8"/>
+            </a:solidFill>
+          </a:ln>
+        </p:spPr>
+        <p:style>
+          <a:lnRef idx="2">
+            <a:schemeClr val="accent1"/>
+          </a:lnRef>
+          <a:fillRef idx="0">
+            <a:schemeClr val="accent1"/>
+          </a:fillRef>
+          <a:effectRef idx="1">
+            <a:schemeClr val="accent1"/>
+          </a:effectRef>
+          <a:fontRef idx="minor">
+            <a:schemeClr val="tx1"/>
+          </a:fontRef>
+        </p:style>
+      </p:cxnSp>
+      <p:cxnSp>
+        <p:nvCxnSpPr>
+          <p:cNvPr id="261" name="Connector 260"/>
+          <p:cNvCxnSpPr/>
+          <p:nvPr/>
+        </p:nvCxnSpPr>
+        <p:spPr>
+          <a:xfrm flipV="1">
+            <a:off x="7920000" y="2370000"/>
+            <a:ext cx="1100000" cy="1260000"/>
+          </a:xfrm>
+          <a:prstGeom prst="line">
+            <a:avLst/>
+          </a:prstGeom>
+          <a:ln w="6350">
+            <a:solidFill>
+              <a:srgbClr val="E8E8E8"/>
+            </a:solidFill>
+          </a:ln>
+        </p:spPr>
+        <p:style>
+          <a:lnRef idx="2">
+            <a:schemeClr val="accent1"/>
+          </a:lnRef>
+          <a:fillRef idx="0">
+            <a:schemeClr val="accent1"/>
+          </a:fillRef>
+          <a:effectRef idx="1">
+            <a:schemeClr val="accent1"/>
+          </a:effectRef>
+          <a:fontRef idx="minor">
+            <a:schemeClr val="tx1"/>
+          </a:fontRef>
+        </p:style>
+      </p:cxnSp>
+      <p:cxnSp>
+        <p:nvCxnSpPr>
+          <p:cNvPr id="262" name="Connector 261"/>
+          <p:cNvCxnSpPr/>
+          <p:nvPr/>
+        </p:nvCxnSpPr>
+        <p:spPr>
+          <a:xfrm flipV="1">
+            <a:off x="7920000" y="2890000"/>
+            <a:ext cx="1100000" cy="740000"/>
+          </a:xfrm>
+          <a:prstGeom prst="line">
+            <a:avLst/>
+          </a:prstGeom>
+          <a:ln w="6350">
+            <a:solidFill>
+              <a:srgbClr val="E8E8E8"/>
+            </a:solidFill>
+          </a:ln>
+        </p:spPr>
+        <p:style>
+          <a:lnRef idx="2">
+            <a:schemeClr val="accent1"/>
+          </a:lnRef>
+          <a:fillRef idx="0">
+            <a:schemeClr val="accent1"/>
+          </a:fillRef>
+          <a:effectRef idx="1">
+            <a:schemeClr val="accent1"/>
+          </a:effectRef>
+          <a:fontRef idx="minor">
+            <a:schemeClr val="tx1"/>
+          </a:fontRef>
+        </p:style>
+      </p:cxnSp>
+      <p:cxnSp>
+        <p:nvCxnSpPr>
+          <p:cNvPr id="263" name="Connector 262"/>
+          <p:cNvCxnSpPr/>
+          <p:nvPr/>
+        </p:nvCxnSpPr>
+        <p:spPr>
+          <a:xfrm flipV="1">
+            <a:off x="7920000" y="3410000"/>
+            <a:ext cx="1100000" cy="220000"/>
+          </a:xfrm>
+          <a:prstGeom prst="line">
+            <a:avLst/>
+          </a:prstGeom>
+          <a:ln w="6350">
+            <a:solidFill>
+              <a:srgbClr val="E8E8E8"/>
+            </a:solidFill>
+          </a:ln>
+        </p:spPr>
+        <p:style>
+          <a:lnRef idx="2">
+            <a:schemeClr val="accent1"/>
+          </a:lnRef>
+          <a:fillRef idx="0">
+            <a:schemeClr val="accent1"/>
+          </a:fillRef>
+          <a:effectRef idx="1">
+            <a:schemeClr val="accent1"/>
+          </a:effectRef>
+          <a:fontRef idx="minor">
+            <a:schemeClr val="tx1"/>
+          </a:fontRef>
+        </p:style>
+      </p:cxnSp>
+      <p:cxnSp>
+        <p:nvCxnSpPr>
+          <p:cNvPr id="264" name="Connector 263"/>
+          <p:cNvCxnSpPr/>
+          <p:nvPr/>
+        </p:nvCxnSpPr>
+        <p:spPr>
+          <a:xfrm>
+            <a:off x="7920000" y="3630000"/>
+            <a:ext cx="1100000" cy="300000"/>
+          </a:xfrm>
+          <a:prstGeom prst="line">
+            <a:avLst/>
+          </a:prstGeom>
+          <a:ln w="6350">
+            <a:solidFill>
+              <a:srgbClr val="E8E8E8"/>
+            </a:solidFill>
+          </a:ln>
+        </p:spPr>
+        <p:style>
+          <a:lnRef idx="2">
+            <a:schemeClr val="accent1"/>
+          </a:lnRef>
+          <a:fillRef idx="0">
+            <a:schemeClr val="accent1"/>
+          </a:fillRef>
+          <a:effectRef idx="1">
+            <a:schemeClr val="accent1"/>
+          </a:effectRef>
+          <a:fontRef idx="minor">
+            <a:schemeClr val="tx1"/>
+          </a:fontRef>
+        </p:style>
+      </p:cxnSp>
+      <p:cxnSp>
+        <p:nvCxnSpPr>
+          <p:cNvPr id="265" name="Connector 264"/>
+          <p:cNvCxnSpPr/>
+          <p:nvPr/>
+        </p:nvCxnSpPr>
+        <p:spPr>
+          <a:xfrm>
+            <a:off x="9020000" y="2370000"/>
+            <a:ext cx="1100000" cy="440000"/>
+          </a:xfrm>
+          <a:prstGeom prst="line">
+            <a:avLst/>
+          </a:prstGeom>
+          <a:ln w="6350">
+            <a:solidFill>
+              <a:srgbClr val="E8E8E8"/>
+            </a:solidFill>
+          </a:ln>
+        </p:spPr>
+        <p:style>
+          <a:lnRef idx="2">
+            <a:schemeClr val="accent1"/>
+          </a:lnRef>
+          <a:fillRef idx="0">
+            <a:schemeClr val="accent1"/>
+          </a:fillRef>
+          <a:effectRef idx="1">
+            <a:schemeClr val="accent1"/>
+          </a:effectRef>
+          <a:fontRef idx="minor">
+            <a:schemeClr val="tx1"/>
+          </a:fontRef>
+        </p:style>
+      </p:cxnSp>
+      <p:cxnSp>
+        <p:nvCxnSpPr>
+          <p:cNvPr id="266" name="Connector 265"/>
+          <p:cNvCxnSpPr/>
+          <p:nvPr/>
+        </p:nvCxnSpPr>
+        <p:spPr>
+          <a:xfrm>
+            <a:off x="9020000" y="2370000"/>
+            <a:ext cx="1100000" cy="960000"/>
+          </a:xfrm>
+          <a:prstGeom prst="line">
+            <a:avLst/>
+          </a:prstGeom>
+          <a:ln w="6350">
+            <a:solidFill>
+              <a:srgbClr val="E8E8E8"/>
+            </a:solidFill>
+          </a:ln>
+        </p:spPr>
+        <p:style>
+          <a:lnRef idx="2">
+            <a:schemeClr val="accent1"/>
+          </a:lnRef>
+          <a:fillRef idx="0">
+            <a:schemeClr val="accent1"/>
+          </a:fillRef>
+          <a:effectRef idx="1">
+            <a:schemeClr val="accent1"/>
+          </a:effectRef>
+          <a:fontRef idx="minor">
+            <a:schemeClr val="tx1"/>
+          </a:fontRef>
+        </p:style>
+      </p:cxnSp>
+      <p:cxnSp>
+        <p:nvCxnSpPr>
+          <p:cNvPr id="267" name="Connector 266"/>
+          <p:cNvCxnSpPr/>
+          <p:nvPr/>
+        </p:nvCxnSpPr>
+        <p:spPr>
+          <a:xfrm flipV="1">
+            <a:off x="9020000" y="2810000"/>
+            <a:ext cx="1100000" cy="80000"/>
+          </a:xfrm>
+          <a:prstGeom prst="line">
+            <a:avLst/>
+          </a:prstGeom>
+          <a:ln w="6350">
+            <a:solidFill>
+              <a:srgbClr val="E8E8E8"/>
+            </a:solidFill>
+          </a:ln>
+        </p:spPr>
+        <p:style>
+          <a:lnRef idx="2">
+            <a:schemeClr val="accent1"/>
+          </a:lnRef>
+          <a:fillRef idx="0">
+            <a:schemeClr val="accent1"/>
+          </a:fillRef>
+          <a:effectRef idx="1">
+            <a:schemeClr val="accent1"/>
+          </a:effectRef>
+          <a:fontRef idx="minor">
+            <a:schemeClr val="tx1"/>
+          </a:fontRef>
+        </p:style>
+      </p:cxnSp>
+      <p:cxnSp>
+        <p:nvCxnSpPr>
+          <p:cNvPr id="268" name="Connector 267"/>
+          <p:cNvCxnSpPr/>
+          <p:nvPr/>
+        </p:nvCxnSpPr>
+        <p:spPr>
+          <a:xfrm>
+            <a:off x="9020000" y="2890000"/>
+            <a:ext cx="1100000" cy="440000"/>
+          </a:xfrm>
+          <a:prstGeom prst="line">
+            <a:avLst/>
+          </a:prstGeom>
+          <a:ln w="6350">
+            <a:solidFill>
+              <a:srgbClr val="E8E8E8"/>
+            </a:solidFill>
+          </a:ln>
+        </p:spPr>
+        <p:style>
+          <a:lnRef idx="2">
+            <a:schemeClr val="accent1"/>
+          </a:lnRef>
+          <a:fillRef idx="0">
+            <a:schemeClr val="accent1"/>
+          </a:fillRef>
+          <a:effectRef idx="1">
+            <a:schemeClr val="accent1"/>
+          </a:effectRef>
+          <a:fontRef idx="minor">
+            <a:schemeClr val="tx1"/>
+          </a:fontRef>
+        </p:style>
+      </p:cxnSp>
+      <p:cxnSp>
+        <p:nvCxnSpPr>
+          <p:cNvPr id="269" name="Connector 268"/>
+          <p:cNvCxnSpPr/>
+          <p:nvPr/>
+        </p:nvCxnSpPr>
+        <p:spPr>
+          <a:xfrm flipV="1">
+            <a:off x="9020000" y="2810000"/>
+            <a:ext cx="1100000" cy="600000"/>
+          </a:xfrm>
+          <a:prstGeom prst="line">
+            <a:avLst/>
+          </a:prstGeom>
+          <a:ln w="6350">
+            <a:solidFill>
+              <a:srgbClr val="E8E8E8"/>
+            </a:solidFill>
+          </a:ln>
+        </p:spPr>
+        <p:style>
+          <a:lnRef idx="2">
+            <a:schemeClr val="accent1"/>
+          </a:lnRef>
+          <a:fillRef idx="0">
+            <a:schemeClr val="accent1"/>
+          </a:fillRef>
+          <a:effectRef idx="1">
+            <a:schemeClr val="accent1"/>
+          </a:effectRef>
+          <a:fontRef idx="minor">
+            <a:schemeClr val="tx1"/>
+          </a:fontRef>
+        </p:style>
+      </p:cxnSp>
+      <p:cxnSp>
+        <p:nvCxnSpPr>
+          <p:cNvPr id="270" name="Connector 269"/>
+          <p:cNvCxnSpPr/>
+          <p:nvPr/>
+        </p:nvCxnSpPr>
+        <p:spPr>
+          <a:xfrm flipV="1">
+            <a:off x="9020000" y="3330000"/>
+            <a:ext cx="1100000" cy="80000"/>
+          </a:xfrm>
+          <a:prstGeom prst="line">
+            <a:avLst/>
+          </a:prstGeom>
+          <a:ln w="6350">
+            <a:solidFill>
+              <a:srgbClr val="E8E8E8"/>
+            </a:solidFill>
+          </a:ln>
+        </p:spPr>
+        <p:style>
+          <a:lnRef idx="2">
+            <a:schemeClr val="accent1"/>
+          </a:lnRef>
+          <a:fillRef idx="0">
+            <a:schemeClr val="accent1"/>
+          </a:fillRef>
+          <a:effectRef idx="1">
+            <a:schemeClr val="accent1"/>
+          </a:effectRef>
+          <a:fontRef idx="minor">
+            <a:schemeClr val="tx1"/>
+          </a:fontRef>
+        </p:style>
+      </p:cxnSp>
+      <p:cxnSp>
+        <p:nvCxnSpPr>
+          <p:cNvPr id="271" name="Connector 270"/>
+          <p:cNvCxnSpPr/>
+          <p:nvPr/>
+        </p:nvCxnSpPr>
+        <p:spPr>
+          <a:xfrm flipV="1">
+            <a:off x="9020000" y="2810000"/>
+            <a:ext cx="1100000" cy="1120000"/>
+          </a:xfrm>
+          <a:prstGeom prst="line">
+            <a:avLst/>
+          </a:prstGeom>
+          <a:ln w="6350">
+            <a:solidFill>
+              <a:srgbClr val="E8E8E8"/>
+            </a:solidFill>
+          </a:ln>
+        </p:spPr>
+        <p:style>
+          <a:lnRef idx="2">
+            <a:schemeClr val="accent1"/>
+          </a:lnRef>
+          <a:fillRef idx="0">
+            <a:schemeClr val="accent1"/>
+          </a:fillRef>
+          <a:effectRef idx="1">
+            <a:schemeClr val="accent1"/>
+          </a:effectRef>
+          <a:fontRef idx="minor">
+            <a:schemeClr val="tx1"/>
+          </a:fontRef>
+        </p:style>
+      </p:cxnSp>
+      <p:cxnSp>
+        <p:nvCxnSpPr>
+          <p:cNvPr id="272" name="Connector 271"/>
+          <p:cNvCxnSpPr/>
+          <p:nvPr/>
+        </p:nvCxnSpPr>
+        <p:spPr>
+          <a:xfrm flipV="1">
+            <a:off x="9020000" y="3330000"/>
+            <a:ext cx="1100000" cy="600000"/>
+          </a:xfrm>
+          <a:prstGeom prst="line">
+            <a:avLst/>
+          </a:prstGeom>
+          <a:ln w="6350">
+            <a:solidFill>
+              <a:srgbClr val="E8E8E8"/>
+            </a:solidFill>
+          </a:ln>
+        </p:spPr>
+        <p:style>
+          <a:lnRef idx="2">
+            <a:schemeClr val="accent1"/>
+          </a:lnRef>
+          <a:fillRef idx="0">
+            <a:schemeClr val="accent1"/>
+          </a:fillRef>
+          <a:effectRef idx="1">
+            <a:schemeClr val="accent1"/>
+          </a:effectRef>
+          <a:fontRef idx="minor">
+            <a:schemeClr val="tx1"/>
+          </a:fontRef>
+        </p:style>
+      </p:cxnSp>
+      <p:sp>
+        <p:nvSpPr>
+          <p:cNvPr id="273" name="Oval 272"/>
+          <p:cNvSpPr/>
+          <p:nvPr/>
+        </p:nvSpPr>
+        <p:spPr>
+          <a:xfrm>
+            <a:off x="7700000" y="2370000"/>
+            <a:ext cx="440000" cy="440000"/>
+          </a:xfrm>
+          <a:prstGeom prst="ellipse">
+            <a:avLst/>
+          </a:prstGeom>
+          <a:solidFill>
+            <a:srgbClr val="156082"/>
+          </a:solidFill>
+          <a:ln>
+            <a:noFill/>
+          </a:ln>
+          <a:effectLst/>
+        </p:spPr>
+        <p:style>
+          <a:lnRef idx="1">
+            <a:schemeClr val="accent1"/>
+          </a:lnRef>
+          <a:fillRef idx="3">
+            <a:schemeClr val="accent1"/>
+          </a:fillRef>
+          <a:effectRef idx="2">
+            <a:schemeClr val="accent1"/>
+          </a:effectRef>
+          <a:fontRef idx="minor">
+            <a:schemeClr val="lt1"/>
+          </a:fontRef>
+        </p:style>
+        <p:txBody>
+          <a:bodyPr rtlCol="0" anchor="ctr" wrap="square" lIns="18000" rIns="18000" tIns="9000" bIns="9000"/>
+          <a:lstStyle/>
+          <a:p>
+            <a:pPr algn="ctr"/>
+          </a:p>
+        </p:txBody>
+      </p:sp>
+      <p:sp>
+        <p:nvSpPr>
+          <p:cNvPr id="274" name="Oval 273"/>
+          <p:cNvSpPr/>
+          <p:nvPr/>
+        </p:nvSpPr>
+        <p:spPr>
+          <a:xfrm>
+            <a:off x="7700000" y="2890000"/>
+            <a:ext cx="440000" cy="440000"/>
+          </a:xfrm>
+          <a:prstGeom prst="ellipse">
+            <a:avLst/>
+          </a:prstGeom>
+          <a:solidFill>
+            <a:srgbClr val="156082"/>
+          </a:solidFill>
+          <a:ln>
+            <a:noFill/>
+          </a:ln>
+          <a:effectLst/>
+        </p:spPr>
+        <p:style>
+          <a:lnRef idx="1">
+            <a:schemeClr val="accent1"/>
+          </a:lnRef>
+          <a:fillRef idx="3">
+            <a:schemeClr val="accent1"/>
+          </a:fillRef>
+          <a:effectRef idx="2">
+            <a:schemeClr val="accent1"/>
+          </a:effectRef>
+          <a:fontRef idx="minor">
+            <a:schemeClr val="lt1"/>
+          </a:fontRef>
+        </p:style>
+        <p:txBody>
+          <a:bodyPr rtlCol="0" anchor="ctr" wrap="square" lIns="18000" rIns="18000" tIns="9000" bIns="9000"/>
+          <a:lstStyle/>
+          <a:p>
+            <a:pPr algn="ctr"/>
+          </a:p>
+        </p:txBody>
+      </p:sp>
+      <p:sp>
+        <p:nvSpPr>
+          <p:cNvPr id="275" name="Oval 274"/>
+          <p:cNvSpPr/>
+          <p:nvPr/>
+        </p:nvSpPr>
+        <p:spPr>
+          <a:xfrm>
+            <a:off x="7700000" y="3410000"/>
+            <a:ext cx="440000" cy="440000"/>
+          </a:xfrm>
+          <a:prstGeom prst="ellipse">
+            <a:avLst/>
+          </a:prstGeom>
+          <a:solidFill>
+            <a:srgbClr val="156082"/>
+          </a:solidFill>
+          <a:ln>
+            <a:noFill/>
+          </a:ln>
+          <a:effectLst/>
+        </p:spPr>
+        <p:style>
+          <a:lnRef idx="1">
+            <a:schemeClr val="accent1"/>
+          </a:lnRef>
+          <a:fillRef idx="3">
+            <a:schemeClr val="accent1"/>
+          </a:fillRef>
+          <a:effectRef idx="2">
+            <a:schemeClr val="accent1"/>
+          </a:effectRef>
+          <a:fontRef idx="minor">
+            <a:schemeClr val="lt1"/>
+          </a:fontRef>
+        </p:style>
+        <p:txBody>
+          <a:bodyPr rtlCol="0" anchor="ctr" wrap="square" lIns="18000" rIns="18000" tIns="9000" bIns="9000"/>
+          <a:lstStyle/>
+          <a:p>
+            <a:pPr algn="ctr"/>
+          </a:p>
+        </p:txBody>
+      </p:sp>
+      <p:sp>
+        <p:nvSpPr>
+          <p:cNvPr id="276" name="Oval 275"/>
+          <p:cNvSpPr/>
+          <p:nvPr/>
+        </p:nvSpPr>
+        <p:spPr>
+          <a:xfrm>
+            <a:off x="8800000" y="2150000"/>
+            <a:ext cx="440000" cy="440000"/>
+          </a:xfrm>
+          <a:prstGeom prst="ellipse">
+            <a:avLst/>
+          </a:prstGeom>
+          <a:solidFill>
+            <a:srgbClr val="156082"/>
+          </a:solidFill>
+          <a:ln>
+            <a:noFill/>
+          </a:ln>
+          <a:effectLst/>
+        </p:spPr>
+        <p:style>
+          <a:lnRef idx="1">
+            <a:schemeClr val="accent1"/>
+          </a:lnRef>
+          <a:fillRef idx="3">
+            <a:schemeClr val="accent1"/>
+          </a:fillRef>
+          <a:effectRef idx="2">
+            <a:schemeClr val="accent1"/>
+          </a:effectRef>
+          <a:fontRef idx="minor">
+            <a:schemeClr val="lt1"/>
+          </a:fontRef>
+        </p:style>
+        <p:txBody>
+          <a:bodyPr rtlCol="0" anchor="ctr" wrap="square" lIns="18000" rIns="18000" tIns="9000" bIns="9000"/>
+          <a:lstStyle/>
+          <a:p>
+            <a:pPr algn="ctr"/>
+          </a:p>
+        </p:txBody>
+      </p:sp>
+      <p:sp>
+        <p:nvSpPr>
+          <p:cNvPr id="277" name="Oval 276"/>
+          <p:cNvSpPr/>
+          <p:nvPr/>
+        </p:nvSpPr>
+        <p:spPr>
+          <a:xfrm>
+            <a:off x="8800000" y="2670000"/>
+            <a:ext cx="440000" cy="440000"/>
+          </a:xfrm>
+          <a:prstGeom prst="ellipse">
+            <a:avLst/>
+          </a:prstGeom>
+          <a:solidFill>
+            <a:srgbClr val="156082"/>
+          </a:solidFill>
+          <a:ln>
+            <a:noFill/>
+          </a:ln>
+          <a:effectLst/>
+        </p:spPr>
+        <p:style>
+          <a:lnRef idx="1">
+            <a:schemeClr val="accent1"/>
+          </a:lnRef>
+          <a:fillRef idx="3">
+            <a:schemeClr val="accent1"/>
+          </a:fillRef>
+          <a:effectRef idx="2">
+            <a:schemeClr val="accent1"/>
+          </a:effectRef>
+          <a:fontRef idx="minor">
+            <a:schemeClr val="lt1"/>
+          </a:fontRef>
+        </p:style>
+        <p:txBody>
+          <a:bodyPr rtlCol="0" anchor="ctr" wrap="square" lIns="18000" rIns="18000" tIns="9000" bIns="9000"/>
+          <a:lstStyle/>
+          <a:p>
+            <a:pPr algn="ctr"/>
+          </a:p>
+        </p:txBody>
+      </p:sp>
+      <p:sp>
+        <p:nvSpPr>
+          <p:cNvPr id="278" name="Oval 277"/>
+          <p:cNvSpPr/>
+          <p:nvPr/>
+        </p:nvSpPr>
+        <p:spPr>
+          <a:xfrm>
+            <a:off x="8800000" y="3190000"/>
+            <a:ext cx="440000" cy="440000"/>
+          </a:xfrm>
+          <a:prstGeom prst="ellipse">
+            <a:avLst/>
+          </a:prstGeom>
+          <a:solidFill>
+            <a:srgbClr val="156082"/>
+          </a:solidFill>
+          <a:ln>
+            <a:noFill/>
+          </a:ln>
+          <a:effectLst/>
+        </p:spPr>
+        <p:style>
+          <a:lnRef idx="1">
+            <a:schemeClr val="accent1"/>
+          </a:lnRef>
+          <a:fillRef idx="3">
+            <a:schemeClr val="accent1"/>
+          </a:fillRef>
+          <a:effectRef idx="2">
+            <a:schemeClr val="accent1"/>
+          </a:effectRef>
+          <a:fontRef idx="minor">
+            <a:schemeClr val="lt1"/>
+          </a:fontRef>
+        </p:style>
+        <p:txBody>
+          <a:bodyPr rtlCol="0" anchor="ctr" wrap="square" lIns="18000" rIns="18000" tIns="9000" bIns="9000"/>
+          <a:lstStyle/>
+          <a:p>
+            <a:pPr algn="ctr"/>
+          </a:p>
+        </p:txBody>
+      </p:sp>
+      <p:sp>
+        <p:nvSpPr>
+          <p:cNvPr id="279" name="Oval 278"/>
+          <p:cNvSpPr/>
+          <p:nvPr/>
+        </p:nvSpPr>
+        <p:spPr>
+          <a:xfrm>
+            <a:off x="8800000" y="3710000"/>
+            <a:ext cx="440000" cy="440000"/>
+          </a:xfrm>
+          <a:prstGeom prst="ellipse">
+            <a:avLst/>
+          </a:prstGeom>
+          <a:solidFill>
+            <a:srgbClr val="156082"/>
+          </a:solidFill>
+          <a:ln>
+            <a:noFill/>
+          </a:ln>
+          <a:effectLst/>
+        </p:spPr>
+        <p:style>
+          <a:lnRef idx="1">
+            <a:schemeClr val="accent1"/>
+          </a:lnRef>
+          <a:fillRef idx="3">
+            <a:schemeClr val="accent1"/>
+          </a:fillRef>
+          <a:effectRef idx="2">
+            <a:schemeClr val="accent1"/>
+          </a:effectRef>
+          <a:fontRef idx="minor">
+            <a:schemeClr val="lt1"/>
+          </a:fontRef>
+        </p:style>
+        <p:txBody>
+          <a:bodyPr rtlCol="0" anchor="ctr" wrap="square" lIns="18000" rIns="18000" tIns="9000" bIns="9000"/>
+          <a:lstStyle/>
+          <a:p>
+            <a:pPr algn="ctr"/>
+          </a:p>
+        </p:txBody>
+      </p:sp>
+      <p:sp>
+        <p:nvSpPr>
+          <p:cNvPr id="280" name="Oval 279"/>
+          <p:cNvSpPr/>
+          <p:nvPr/>
+        </p:nvSpPr>
+        <p:spPr>
+          <a:xfrm>
+            <a:off x="9900000" y="2590000"/>
+            <a:ext cx="440000" cy="440000"/>
+          </a:xfrm>
+          <a:prstGeom prst="ellipse">
+            <a:avLst/>
+          </a:prstGeom>
+          <a:solidFill>
+            <a:srgbClr val="156082"/>
+          </a:solidFill>
+          <a:ln>
+            <a:noFill/>
+          </a:ln>
+          <a:effectLst/>
+        </p:spPr>
+        <p:style>
+          <a:lnRef idx="1">
+            <a:schemeClr val="accent1"/>
+          </a:lnRef>
+          <a:fillRef idx="3">
+            <a:schemeClr val="accent1"/>
+          </a:fillRef>
+          <a:effectRef idx="2">
+            <a:schemeClr val="accent1"/>
+          </a:effectRef>
+          <a:fontRef idx="minor">
+            <a:schemeClr val="lt1"/>
+          </a:fontRef>
+        </p:style>
+        <p:txBody>
+          <a:bodyPr rtlCol="0" anchor="ctr" wrap="square" lIns="18000" rIns="18000" tIns="9000" bIns="9000"/>
+          <a:lstStyle/>
+          <a:p>
+            <a:pPr algn="ctr"/>
+          </a:p>
+        </p:txBody>
+      </p:sp>
+      <p:sp>
+        <p:nvSpPr>
+          <p:cNvPr id="281" name="Oval 280"/>
+          <p:cNvSpPr/>
+          <p:nvPr/>
+        </p:nvSpPr>
+        <p:spPr>
+          <a:xfrm>
+            <a:off x="9900000" y="3110000"/>
+            <a:ext cx="440000" cy="440000"/>
+          </a:xfrm>
+          <a:prstGeom prst="ellipse">
+            <a:avLst/>
+          </a:prstGeom>
+          <a:solidFill>
+            <a:srgbClr val="156082"/>
+          </a:solidFill>
+          <a:ln>
+            <a:noFill/>
+          </a:ln>
+          <a:effectLst/>
+        </p:spPr>
+        <p:style>
+          <a:lnRef idx="1">
+            <a:schemeClr val="accent1"/>
+          </a:lnRef>
+          <a:fillRef idx="3">
+            <a:schemeClr val="accent1"/>
+          </a:fillRef>
+          <a:effectRef idx="2">
+            <a:schemeClr val="accent1"/>
+          </a:effectRef>
+          <a:fontRef idx="minor">
+            <a:schemeClr val="lt1"/>
+          </a:fontRef>
+        </p:style>
+        <p:txBody>
+          <a:bodyPr rtlCol="0" anchor="ctr" wrap="square" lIns="18000" rIns="18000" tIns="9000" bIns="9000"/>
+          <a:lstStyle/>
+          <a:p>
+            <a:pPr algn="ctr"/>
+          </a:p>
+        </p:txBody>
+      </p:sp>
+      <p:sp>
+        <p:nvSpPr>
+          <p:cNvPr id="282" name="TextBox 281"/>
+          <p:cNvSpPr txBox="1"/>
+          <p:nvPr/>
+        </p:nvSpPr>
+        <p:spPr>
+          <a:xfrm>
+            <a:off x="7500000" y="4650000"/>
+            <a:ext cx="3200000" cy="300000"/>
+          </a:xfrm>
+          <a:prstGeom prst="rect">
+            <a:avLst/>
+          </a:prstGeom>
+          <a:noFill/>
+        </p:spPr>
+        <p:txBody>
+          <a:bodyPr wrap="square" lIns="0" rIns="0" tIns="0" bIns="0">
+            <a:spAutoFit/>
+          </a:bodyPr>
+          <a:lstStyle/>
+          <a:p>
+            <a:pPr algn="ctr"/>
+            <a:r>
+              <a:rPr sz="1000" b="0" i="1">
+                <a:solidFill>
+                  <a:srgbClr val="3A3A3A"/>
+                </a:solidFill>
+                <a:latin typeface="Roboto Condensed"/>
+              </a:rPr>
+              <a:t>Referencial: red neuronal artificial (capas de entrada, ocultas y salida)</a:t>
+            </a:r>
           </a:p>
         </p:txBody>
       </p:sp>
@@ -41817,7 +44637,7 @@
 </p:sld>
 </file>
 
-<file path=ppt/slides/slide16.xml><?xml version="1.0" encoding="utf-8"?>
+<file path=ppt/slides/slide17.xml><?xml version="1.0" encoding="utf-8"?>
 <p:sld xmlns:a="http://schemas.openxmlformats.org/drawingml/2006/main" xmlns:p="http://schemas.openxmlformats.org/presentationml/2006/main" xmlns:r="http://schemas.openxmlformats.org/officeDocument/2006/relationships">
   <p:cSld>
     <p:spTree>
@@ -42278,7 +45098,7 @@
           <a:p>
             <a:pPr algn="r"/>
             <a:r>
-              <a:t>16</a:t>
+              <a:t>17</a:t>
             </a:r>
             <a:endParaRPr lang="en-US"/>
           </a:p>
@@ -42292,7 +45112,7 @@
 </p:sld>
 </file>
 
-<file path=ppt/slides/slide17.xml><?xml version="1.0" encoding="utf-8"?>
+<file path=ppt/slides/slide18.xml><?xml version="1.0" encoding="utf-8"?>
 <p:sld xmlns:a="http://schemas.openxmlformats.org/drawingml/2006/main" xmlns:p="http://schemas.openxmlformats.org/presentationml/2006/main" xmlns:r="http://schemas.openxmlformats.org/officeDocument/2006/relationships">
   <p:cSld>
     <p:spTree>
@@ -42737,7 +45557,7 @@
           <a:p>
             <a:pPr algn="r"/>
             <a:r>
-              <a:t>17</a:t>
+              <a:t>18</a:t>
             </a:r>
             <a:endParaRPr lang="en-US"/>
           </a:p>
@@ -42751,7 +45571,7 @@
 </p:sld>
 </file>
 
-<file path=ppt/slides/slide18.xml><?xml version="1.0" encoding="utf-8"?>
+<file path=ppt/slides/slide19.xml><?xml version="1.0" encoding="utf-8"?>
 <p:sld xmlns:a="http://schemas.openxmlformats.org/drawingml/2006/main" xmlns:p="http://schemas.openxmlformats.org/presentationml/2006/main" xmlns:r="http://schemas.openxmlformats.org/officeDocument/2006/relationships">
   <p:cSld>
     <p:spTree>
@@ -43196,7 +46016,7 @@
           <a:p>
             <a:pPr algn="r"/>
             <a:r>
-              <a:t>18</a:t>
+              <a:t>19</a:t>
             </a:r>
             <a:endParaRPr lang="en-US"/>
           </a:p>
@@ -43210,7 +46030,629 @@
 </p:sld>
 </file>
 
-<file path=ppt/slides/slide19.xml><?xml version="1.0" encoding="utf-8"?>
+<file path=ppt/slides/slide2.xml><?xml version="1.0" encoding="utf-8"?>
+<p:sld xmlns:a="http://schemas.openxmlformats.org/drawingml/2006/main" xmlns:p="http://schemas.openxmlformats.org/presentationml/2006/main" xmlns:r="http://schemas.openxmlformats.org/officeDocument/2006/relationships">
+  <p:cSld>
+    <p:spTree>
+      <p:nvGrpSpPr>
+        <p:cNvPr id="1" name=""/>
+        <p:cNvGrpSpPr/>
+        <p:nvPr/>
+      </p:nvGrpSpPr>
+      <p:grpSpPr/>
+      <p:sp>
+        <p:nvSpPr>
+          <p:cNvPr id="240" name="Google Shape;240;p38"/>
+          <p:cNvSpPr/>
+          <p:nvPr/>
+        </p:nvSpPr>
+        <p:spPr>
+          <a:xfrm>
+            <a:off x="853440" y="790892"/>
+            <a:ext cx="9055100" cy="731520"/>
+          </a:xfrm>
+          <a:prstGeom prst="rect">
+            <a:avLst/>
+          </a:prstGeom>
+          <a:noFill/>
+          <a:ln>
+            <a:noFill/>
+          </a:ln>
+        </p:spPr>
+        <p:txBody>
+          <a:bodyPr spcFirstLastPara="1" wrap="square" lIns="91425" tIns="45700" rIns="91425" bIns="45700" anchor="ctr" anchorCtr="0">
+            <a:noAutofit/>
+          </a:bodyPr>
+          <a:lstStyle/>
+          <a:p>
+            <a:pPr marL="0" marR="0" lvl="0" indent="0" algn="l" rtl="0">
+              <a:lnSpc>
+                <a:spcPct val="100000"/>
+              </a:lnSpc>
+              <a:spcBef>
+                <a:spcPts val="0"/>
+              </a:spcBef>
+              <a:spcAft>
+                <a:spcPts val="0"/>
+              </a:spcAft>
+              <a:buNone/>
+            </a:pPr>
+            <a:r>
+              <a:rPr lang="en-US" sz="4400" dirty="0">
+                <a:solidFill>
+                  <a:srgbClr val="3A3A3A"/>
+                </a:solidFill>
+                <a:latin typeface="Roboto Condensed Medium"/>
+                <a:ea typeface="Roboto Condensed Medium"/>
+                <a:cs typeface="Roboto Condensed Medium"/>
+                <a:sym typeface="Roboto Condensed Medium"/>
+              </a:rPr>
+              <a:t>Sobre el relator</a:t>
+            </a:r>
+            <a:endParaRPr dirty="0"/>
+          </a:p>
+        </p:txBody>
+      </p:sp>
+      <p:sp>
+        <p:nvSpPr>
+          <p:cNvPr id="241" name="Google Shape;241;p38"/>
+          <p:cNvSpPr/>
+          <p:nvPr/>
+        </p:nvSpPr>
+        <p:spPr>
+          <a:xfrm>
+            <a:off x="889446" y="2014379"/>
+            <a:ext cx="5300000" cy="3413760"/>
+          </a:xfrm>
+          <a:prstGeom prst="rect">
+            <a:avLst/>
+          </a:prstGeom>
+          <a:noFill/>
+          <a:ln>
+            <a:noFill/>
+          </a:ln>
+        </p:spPr>
+        <p:txBody>
+          <a:bodyPr spcFirstLastPara="1" wrap="square" lIns="91425" tIns="45700" rIns="91425" bIns="45700" anchor="t" anchorCtr="0">
+            <a:noAutofit/>
+          </a:bodyPr>
+          <a:lstStyle/>
+          <a:p>
+            <a:pPr marL="0" marR="0" indent="0" algn="l" rtl="0">
+              <a:lnSpc>
+                <a:spcPct val="100000"/>
+              </a:lnSpc>
+              <a:spcBef>
+                <a:spcPts val="0"/>
+              </a:spcBef>
+              <a:spcAft>
+                <a:spcPts val="800"/>
+              </a:spcAft>
+              <a:buNone/>
+            </a:pPr>
+            <a:r>
+              <a:rPr sz="2200" b="1">
+                <a:solidFill>
+                  <a:srgbClr val="3A3A3A"/>
+                </a:solidFill>
+                <a:latin typeface="Roboto Condensed"/>
+              </a:rPr>
+              <a:t>Ing. Diego Zamorano</a:t>
+            </a:r>
+            <a:endParaRPr dirty="0"/>
+          </a:p>
+          <a:p>
+            <a:pPr marL="0" marR="0" indent="0" algn="l" rtl="0">
+              <a:lnSpc>
+                <a:spcPct val="100000"/>
+              </a:lnSpc>
+              <a:spcBef>
+                <a:spcPts val="0"/>
+              </a:spcBef>
+              <a:spcAft>
+                <a:spcPts val="800"/>
+              </a:spcAft>
+              <a:buNone/>
+            </a:pPr>
+            <a:r>
+              <a:rPr sz="1400">
+                <a:solidFill>
+                  <a:srgbClr val="3A3A3A"/>
+                </a:solidFill>
+                <a:latin typeface="Roboto Condensed"/>
+              </a:rPr>
+              <a:t>Cargo / rol actual: [Completa aquí]</a:t>
+            </a:r>
+            <a:endParaRPr dirty="0"/>
+          </a:p>
+          <a:p>
+            <a:pPr marL="0" marR="0" indent="0" algn="l" rtl="0">
+              <a:lnSpc>
+                <a:spcPct val="100000"/>
+              </a:lnSpc>
+              <a:spcBef>
+                <a:spcPts val="0"/>
+              </a:spcBef>
+              <a:spcAft>
+                <a:spcPts val="800"/>
+              </a:spcAft>
+              <a:buNone/>
+            </a:pPr>
+            <a:r>
+              <a:rPr sz="1400">
+                <a:solidFill>
+                  <a:srgbClr val="3A3A3A"/>
+                </a:solidFill>
+                <a:latin typeface="Roboto Condensed"/>
+              </a:rPr>
+              <a:t>Experiencia profesional: [Completa aquí]</a:t>
+            </a:r>
+            <a:endParaRPr dirty="0"/>
+          </a:p>
+          <a:p>
+            <a:pPr marL="0" marR="0" indent="0" algn="l" rtl="0">
+              <a:lnSpc>
+                <a:spcPct val="100000"/>
+              </a:lnSpc>
+              <a:spcBef>
+                <a:spcPts val="0"/>
+              </a:spcBef>
+              <a:spcAft>
+                <a:spcPts val="800"/>
+              </a:spcAft>
+              <a:buNone/>
+            </a:pPr>
+            <a:r>
+              <a:rPr sz="1400">
+                <a:solidFill>
+                  <a:srgbClr val="3A3A3A"/>
+                </a:solidFill>
+                <a:latin typeface="Roboto Condensed"/>
+              </a:rPr>
+              <a:t>Experiencia docente: [Completa aquí]</a:t>
+            </a:r>
+            <a:endParaRPr dirty="0"/>
+          </a:p>
+          <a:p>
+            <a:pPr marL="0" marR="0" indent="0" algn="l" rtl="0">
+              <a:lnSpc>
+                <a:spcPct val="100000"/>
+              </a:lnSpc>
+              <a:spcBef>
+                <a:spcPts val="0"/>
+              </a:spcBef>
+              <a:spcAft>
+                <a:spcPts val="800"/>
+              </a:spcAft>
+              <a:buNone/>
+            </a:pPr>
+            <a:r>
+              <a:rPr sz="1400">
+                <a:solidFill>
+                  <a:srgbClr val="3A3A3A"/>
+                </a:solidFill>
+                <a:latin typeface="Roboto Condensed"/>
+              </a:rPr>
+              <a:t>Formación académica (título, diplomado): [Completa aquí]</a:t>
+            </a:r>
+            <a:endParaRPr dirty="0"/>
+          </a:p>
+          <a:p>
+            <a:pPr marL="0" marR="0" indent="0" algn="l" rtl="0">
+              <a:lnSpc>
+                <a:spcPct val="100000"/>
+              </a:lnSpc>
+              <a:spcBef>
+                <a:spcPts val="0"/>
+              </a:spcBef>
+              <a:spcAft>
+                <a:spcPts val="800"/>
+              </a:spcAft>
+              <a:buNone/>
+            </a:pPr>
+            <a:r>
+              <a:rPr sz="1400">
+                <a:solidFill>
+                  <a:srgbClr val="3A3A3A"/>
+                </a:solidFill>
+                <a:latin typeface="Roboto Condensed"/>
+              </a:rPr>
+              <a:t>diego.zamorano.p@mail.pucv.cl</a:t>
+            </a:r>
+            <a:endParaRPr dirty="0"/>
+          </a:p>
+        </p:txBody>
+      </p:sp>
+      <p:pic>
+        <p:nvPicPr>
+          <p:cNvPr id="252" name="Google Shape;252;p38"/>
+          <p:cNvPicPr preferRelativeResize="0"/>
+          <p:nvPr/>
+        </p:nvPicPr>
+        <p:blipFill rotWithShape="1">
+          <a:blip r:embed="rId2">
+            <a:alphaModFix/>
+          </a:blip>
+          <a:srcRect/>
+          <a:stretch/>
+        </p:blipFill>
+        <p:spPr>
+          <a:xfrm>
+            <a:off x="10120580" y="230187"/>
+            <a:ext cx="1866726" cy="590083"/>
+          </a:xfrm>
+          <a:prstGeom prst="rect">
+            <a:avLst/>
+          </a:prstGeom>
+          <a:noFill/>
+          <a:ln>
+            <a:noFill/>
+          </a:ln>
+        </p:spPr>
+      </p:pic>
+      <p:sp>
+        <p:nvSpPr>
+          <p:cNvPr id="2" name="Marcador de número de diapositiva 2">
+            <a:extLst>
+              <a:ext uri="{FF2B5EF4-FFF2-40B4-BE49-F238E27FC236}">
+                <a16:creationId xmlns:a16="http://schemas.microsoft.com/office/drawing/2014/main" id="{9E2EBC40-EC40-BDF2-F68A-0BA88B712A11}"/>
+              </a:ext>
+            </a:extLst>
+          </p:cNvPr>
+          <p:cNvSpPr txBox="1">
+            <a:spLocks/>
+          </p:cNvSpPr>
+          <p:nvPr/>
+        </p:nvSpPr>
+        <p:spPr>
+          <a:xfrm>
+            <a:off x="8610600" y="6356351"/>
+            <a:ext cx="2743200" cy="365125"/>
+          </a:xfrm>
+          <a:prstGeom prst="rect">
+            <a:avLst/>
+          </a:prstGeom>
+        </p:spPr>
+        <p:txBody>
+          <a:bodyPr/>
+          <a:lstStyle>
+            <a:defPPr marR="0" lvl="0" algn="l" rtl="0">
+              <a:lnSpc>
+                <a:spcPct val="100000"/>
+              </a:lnSpc>
+              <a:spcBef>
+                <a:spcPts val="0"/>
+              </a:spcBef>
+              <a:spcAft>
+                <a:spcPts val="0"/>
+              </a:spcAft>
+            </a:defPPr>
+            <a:lvl1pPr marR="0" lvl="0" algn="l" rtl="0">
+              <a:lnSpc>
+                <a:spcPct val="100000"/>
+              </a:lnSpc>
+              <a:spcBef>
+                <a:spcPts val="0"/>
+              </a:spcBef>
+              <a:spcAft>
+                <a:spcPts val="0"/>
+              </a:spcAft>
+              <a:buClr>
+                <a:srgbClr val="000000"/>
+              </a:buClr>
+              <a:buFont typeface="Arial"/>
+              <a:defRPr sz="1400" b="0" i="0" u="none" strike="noStrike" cap="none">
+                <a:solidFill>
+                  <a:srgbClr val="000000"/>
+                </a:solidFill>
+                <a:latin typeface="Arial"/>
+                <a:ea typeface="Arial"/>
+                <a:cs typeface="Arial"/>
+                <a:sym typeface="Arial"/>
+              </a:defRPr>
+            </a:lvl1pPr>
+            <a:lvl2pPr marR="0" lvl="1" algn="l" rtl="0">
+              <a:lnSpc>
+                <a:spcPct val="100000"/>
+              </a:lnSpc>
+              <a:spcBef>
+                <a:spcPts val="0"/>
+              </a:spcBef>
+              <a:spcAft>
+                <a:spcPts val="0"/>
+              </a:spcAft>
+              <a:buClr>
+                <a:srgbClr val="000000"/>
+              </a:buClr>
+              <a:buFont typeface="Arial"/>
+              <a:defRPr sz="1400" b="0" i="0" u="none" strike="noStrike" cap="none">
+                <a:solidFill>
+                  <a:srgbClr val="000000"/>
+                </a:solidFill>
+                <a:latin typeface="Arial"/>
+                <a:ea typeface="Arial"/>
+                <a:cs typeface="Arial"/>
+                <a:sym typeface="Arial"/>
+              </a:defRPr>
+            </a:lvl2pPr>
+            <a:lvl3pPr marR="0" lvl="2" algn="l" rtl="0">
+              <a:lnSpc>
+                <a:spcPct val="100000"/>
+              </a:lnSpc>
+              <a:spcBef>
+                <a:spcPts val="0"/>
+              </a:spcBef>
+              <a:spcAft>
+                <a:spcPts val="0"/>
+              </a:spcAft>
+              <a:buClr>
+                <a:srgbClr val="000000"/>
+              </a:buClr>
+              <a:buFont typeface="Arial"/>
+              <a:defRPr sz="1400" b="0" i="0" u="none" strike="noStrike" cap="none">
+                <a:solidFill>
+                  <a:srgbClr val="000000"/>
+                </a:solidFill>
+                <a:latin typeface="Arial"/>
+                <a:ea typeface="Arial"/>
+                <a:cs typeface="Arial"/>
+                <a:sym typeface="Arial"/>
+              </a:defRPr>
+            </a:lvl3pPr>
+            <a:lvl4pPr marR="0" lvl="3" algn="l" rtl="0">
+              <a:lnSpc>
+                <a:spcPct val="100000"/>
+              </a:lnSpc>
+              <a:spcBef>
+                <a:spcPts val="0"/>
+              </a:spcBef>
+              <a:spcAft>
+                <a:spcPts val="0"/>
+              </a:spcAft>
+              <a:buClr>
+                <a:srgbClr val="000000"/>
+              </a:buClr>
+              <a:buFont typeface="Arial"/>
+              <a:defRPr sz="1400" b="0" i="0" u="none" strike="noStrike" cap="none">
+                <a:solidFill>
+                  <a:srgbClr val="000000"/>
+                </a:solidFill>
+                <a:latin typeface="Arial"/>
+                <a:ea typeface="Arial"/>
+                <a:cs typeface="Arial"/>
+                <a:sym typeface="Arial"/>
+              </a:defRPr>
+            </a:lvl4pPr>
+            <a:lvl5pPr marR="0" lvl="4" algn="l" rtl="0">
+              <a:lnSpc>
+                <a:spcPct val="100000"/>
+              </a:lnSpc>
+              <a:spcBef>
+                <a:spcPts val="0"/>
+              </a:spcBef>
+              <a:spcAft>
+                <a:spcPts val="0"/>
+              </a:spcAft>
+              <a:buClr>
+                <a:srgbClr val="000000"/>
+              </a:buClr>
+              <a:buFont typeface="Arial"/>
+              <a:defRPr sz="1400" b="0" i="0" u="none" strike="noStrike" cap="none">
+                <a:solidFill>
+                  <a:srgbClr val="000000"/>
+                </a:solidFill>
+                <a:latin typeface="Arial"/>
+                <a:ea typeface="Arial"/>
+                <a:cs typeface="Arial"/>
+                <a:sym typeface="Arial"/>
+              </a:defRPr>
+            </a:lvl5pPr>
+            <a:lvl6pPr marR="0" lvl="5" algn="l" rtl="0">
+              <a:lnSpc>
+                <a:spcPct val="100000"/>
+              </a:lnSpc>
+              <a:spcBef>
+                <a:spcPts val="0"/>
+              </a:spcBef>
+              <a:spcAft>
+                <a:spcPts val="0"/>
+              </a:spcAft>
+              <a:buClr>
+                <a:srgbClr val="000000"/>
+              </a:buClr>
+              <a:buFont typeface="Arial"/>
+              <a:defRPr sz="1400" b="0" i="0" u="none" strike="noStrike" cap="none">
+                <a:solidFill>
+                  <a:srgbClr val="000000"/>
+                </a:solidFill>
+                <a:latin typeface="Arial"/>
+                <a:ea typeface="Arial"/>
+                <a:cs typeface="Arial"/>
+                <a:sym typeface="Arial"/>
+              </a:defRPr>
+            </a:lvl6pPr>
+            <a:lvl7pPr marR="0" lvl="6" algn="l" rtl="0">
+              <a:lnSpc>
+                <a:spcPct val="100000"/>
+              </a:lnSpc>
+              <a:spcBef>
+                <a:spcPts val="0"/>
+              </a:spcBef>
+              <a:spcAft>
+                <a:spcPts val="0"/>
+              </a:spcAft>
+              <a:buClr>
+                <a:srgbClr val="000000"/>
+              </a:buClr>
+              <a:buFont typeface="Arial"/>
+              <a:defRPr sz="1400" b="0" i="0" u="none" strike="noStrike" cap="none">
+                <a:solidFill>
+                  <a:srgbClr val="000000"/>
+                </a:solidFill>
+                <a:latin typeface="Arial"/>
+                <a:ea typeface="Arial"/>
+                <a:cs typeface="Arial"/>
+                <a:sym typeface="Arial"/>
+              </a:defRPr>
+            </a:lvl7pPr>
+            <a:lvl8pPr marR="0" lvl="7" algn="l" rtl="0">
+              <a:lnSpc>
+                <a:spcPct val="100000"/>
+              </a:lnSpc>
+              <a:spcBef>
+                <a:spcPts val="0"/>
+              </a:spcBef>
+              <a:spcAft>
+                <a:spcPts val="0"/>
+              </a:spcAft>
+              <a:buClr>
+                <a:srgbClr val="000000"/>
+              </a:buClr>
+              <a:buFont typeface="Arial"/>
+              <a:defRPr sz="1400" b="0" i="0" u="none" strike="noStrike" cap="none">
+                <a:solidFill>
+                  <a:srgbClr val="000000"/>
+                </a:solidFill>
+                <a:latin typeface="Arial"/>
+                <a:ea typeface="Arial"/>
+                <a:cs typeface="Arial"/>
+                <a:sym typeface="Arial"/>
+              </a:defRPr>
+            </a:lvl8pPr>
+            <a:lvl9pPr marR="0" lvl="8" algn="l" rtl="0">
+              <a:lnSpc>
+                <a:spcPct val="100000"/>
+              </a:lnSpc>
+              <a:spcBef>
+                <a:spcPts val="0"/>
+              </a:spcBef>
+              <a:spcAft>
+                <a:spcPts val="0"/>
+              </a:spcAft>
+              <a:buClr>
+                <a:srgbClr val="000000"/>
+              </a:buClr>
+              <a:buFont typeface="Arial"/>
+              <a:defRPr sz="1400" b="0" i="0" u="none" strike="noStrike" cap="none">
+                <a:solidFill>
+                  <a:srgbClr val="000000"/>
+                </a:solidFill>
+                <a:latin typeface="Arial"/>
+                <a:ea typeface="Arial"/>
+                <a:cs typeface="Arial"/>
+                <a:sym typeface="Arial"/>
+              </a:defRPr>
+            </a:lvl9pPr>
+          </a:lstStyle>
+          <a:p>
+            <a:pPr algn="r"/>
+            <a:r>
+              <a:t>2</a:t>
+            </a:r>
+            <a:endParaRPr lang="en-US"/>
+          </a:p>
+        </p:txBody>
+      </p:sp>
+      <p:sp>
+        <p:nvSpPr>
+          <p:cNvPr id="253" name="Rectangle 252"/>
+          <p:cNvSpPr/>
+          <p:nvPr/>
+        </p:nvSpPr>
+        <p:spPr>
+          <a:xfrm>
+            <a:off x="7400000" y="1900000"/>
+            <a:ext cx="3450000" cy="3450000"/>
+          </a:xfrm>
+          <a:prstGeom prst="rect">
+            <a:avLst/>
+          </a:prstGeom>
+          <a:solidFill>
+            <a:srgbClr val="F0F0F0"/>
+          </a:solidFill>
+          <a:ln w="15875">
+            <a:solidFill>
+              <a:srgbClr val="B0B0B0"/>
+            </a:solidFill>
+            <a:prstDash val="dash"/>
+          </a:ln>
+          <a:effectLst/>
+        </p:spPr>
+        <p:style>
+          <a:lnRef idx="1">
+            <a:schemeClr val="accent1"/>
+          </a:lnRef>
+          <a:fillRef idx="3">
+            <a:schemeClr val="accent1"/>
+          </a:fillRef>
+          <a:effectRef idx="2">
+            <a:schemeClr val="accent1"/>
+          </a:effectRef>
+          <a:fontRef idx="minor">
+            <a:schemeClr val="lt1"/>
+          </a:fontRef>
+        </p:style>
+        <p:txBody>
+          <a:bodyPr rtlCol="0" anchor="ctr" wrap="square"/>
+          <a:lstStyle/>
+          <a:p>
+            <a:pPr algn="ctr"/>
+            <a:r>
+              <a:rPr sz="1400" i="1">
+                <a:solidFill>
+                  <a:srgbClr val="808080"/>
+                </a:solidFill>
+                <a:latin typeface="Roboto Condensed"/>
+              </a:rPr>
+              <a:t>Espacio para fotografía</a:t>
+            </a:r>
+          </a:p>
+        </p:txBody>
+      </p:sp>
+      <p:sp>
+        <p:nvSpPr>
+          <p:cNvPr id="254" name="TextBox 253"/>
+          <p:cNvSpPr txBox="1"/>
+          <p:nvPr/>
+        </p:nvSpPr>
+        <p:spPr>
+          <a:xfrm>
+            <a:off x="7400000" y="5500000"/>
+            <a:ext cx="3450000" cy="300000"/>
+          </a:xfrm>
+          <a:prstGeom prst="rect">
+            <a:avLst/>
+          </a:prstGeom>
+          <a:noFill/>
+        </p:spPr>
+        <p:txBody>
+          <a:bodyPr wrap="square" lIns="0" rIns="0" tIns="0" bIns="0">
+            <a:spAutoFit/>
+          </a:bodyPr>
+          <a:lstStyle/>
+          <a:p>
+            <a:pPr algn="ctr"/>
+            <a:r>
+              <a:rPr sz="1000" b="0" i="1">
+                <a:solidFill>
+                  <a:srgbClr val="3A3A3A"/>
+                </a:solidFill>
+                <a:latin typeface="Roboto Condensed"/>
+              </a:rPr>
+              <a:t>Reemplazar este recuadro por una fotografía del relator</a:t>
+            </a:r>
+          </a:p>
+        </p:txBody>
+      </p:sp>
+    </p:spTree>
+  </p:cSld>
+  <p:clrMapOvr>
+    <a:masterClrMapping/>
+  </p:clrMapOvr>
+</p:sld>
+</file>
+
+<file path=ppt/slides/slide20.xml><?xml version="1.0" encoding="utf-8"?>
 <p:sld xmlns:a="http://schemas.openxmlformats.org/drawingml/2006/main" xmlns:p="http://schemas.openxmlformats.org/presentationml/2006/main" xmlns:r="http://schemas.openxmlformats.org/officeDocument/2006/relationships">
   <p:cSld>
     <p:spTree>
@@ -43671,7 +47113,7 @@
           <a:p>
             <a:pPr algn="r"/>
             <a:r>
-              <a:t>19</a:t>
+              <a:t>20</a:t>
             </a:r>
             <a:endParaRPr lang="en-US"/>
           </a:p>
@@ -43685,482 +47127,7 @@
 </p:sld>
 </file>
 
-<file path=ppt/slides/slide2.xml><?xml version="1.0" encoding="utf-8"?>
-<p:sld xmlns:a="http://schemas.openxmlformats.org/drawingml/2006/main" xmlns:p="http://schemas.openxmlformats.org/presentationml/2006/main" xmlns:r="http://schemas.openxmlformats.org/officeDocument/2006/relationships">
-  <p:cSld>
-    <p:spTree>
-      <p:nvGrpSpPr>
-        <p:cNvPr id="1" name=""/>
-        <p:cNvGrpSpPr/>
-        <p:nvPr/>
-      </p:nvGrpSpPr>
-      <p:grpSpPr/>
-      <p:sp>
-        <p:nvSpPr>
-          <p:cNvPr id="240" name="Google Shape;240;p38"/>
-          <p:cNvSpPr/>
-          <p:nvPr/>
-        </p:nvSpPr>
-        <p:spPr>
-          <a:xfrm>
-            <a:off x="853440" y="790892"/>
-            <a:ext cx="9055100" cy="731520"/>
-          </a:xfrm>
-          <a:prstGeom prst="rect">
-            <a:avLst/>
-          </a:prstGeom>
-          <a:noFill/>
-          <a:ln>
-            <a:noFill/>
-          </a:ln>
-        </p:spPr>
-        <p:txBody>
-          <a:bodyPr spcFirstLastPara="1" wrap="square" lIns="91425" tIns="45700" rIns="91425" bIns="45700" anchor="ctr" anchorCtr="0">
-            <a:noAutofit/>
-          </a:bodyPr>
-          <a:lstStyle/>
-          <a:p>
-            <a:pPr marL="0" marR="0" lvl="0" indent="0" algn="l" rtl="0">
-              <a:lnSpc>
-                <a:spcPct val="100000"/>
-              </a:lnSpc>
-              <a:spcBef>
-                <a:spcPts val="0"/>
-              </a:spcBef>
-              <a:spcAft>
-                <a:spcPts val="0"/>
-              </a:spcAft>
-              <a:buNone/>
-            </a:pPr>
-            <a:r>
-              <a:rPr lang="en-US" sz="4400" dirty="0">
-                <a:solidFill>
-                  <a:srgbClr val="3A3A3A"/>
-                </a:solidFill>
-                <a:latin typeface="Roboto Condensed Medium"/>
-                <a:ea typeface="Roboto Condensed Medium"/>
-                <a:cs typeface="Roboto Condensed Medium"/>
-                <a:sym typeface="Roboto Condensed Medium"/>
-              </a:rPr>
-              <a:t>Objetivo del módulo</a:t>
-            </a:r>
-            <a:endParaRPr dirty="0"/>
-          </a:p>
-        </p:txBody>
-      </p:sp>
-      <p:sp>
-        <p:nvSpPr>
-          <p:cNvPr id="241" name="Google Shape;241;p38"/>
-          <p:cNvSpPr/>
-          <p:nvPr/>
-        </p:nvSpPr>
-        <p:spPr>
-          <a:xfrm>
-            <a:off x="889446" y="2014379"/>
-            <a:ext cx="9385264" cy="3413760"/>
-          </a:xfrm>
-          <a:prstGeom prst="rect">
-            <a:avLst/>
-          </a:prstGeom>
-          <a:noFill/>
-          <a:ln>
-            <a:noFill/>
-          </a:ln>
-        </p:spPr>
-        <p:txBody>
-          <a:bodyPr spcFirstLastPara="1" wrap="square" lIns="91425" tIns="45700" rIns="91425" bIns="45700" anchor="t" anchorCtr="0">
-            <a:noAutofit/>
-          </a:bodyPr>
-          <a:lstStyle/>
-          <a:p>
-            <a:pPr marL="0" marR="0" indent="0" algn="l" rtl="0">
-              <a:lnSpc>
-                <a:spcPct val="100000"/>
-              </a:lnSpc>
-              <a:spcBef>
-                <a:spcPts val="0"/>
-              </a:spcBef>
-              <a:spcAft>
-                <a:spcPts val="800"/>
-              </a:spcAft>
-              <a:buNone/>
-            </a:pPr>
-            <a:r>
-              <a:rPr sz="2000">
-                <a:solidFill>
-                  <a:srgbClr val="3A3A3A"/>
-                </a:solidFill>
-                <a:latin typeface="Roboto Condensed"/>
-              </a:rPr>
-              <a:t>• Analizar el proceso de transformación digital en las organizaciones, integrando inteligencia artificial con otras tecnologías emergentes</a:t>
-            </a:r>
-            <a:endParaRPr dirty="0"/>
-          </a:p>
-          <a:p>
-            <a:pPr>
-              <a:spcAft>
-                <a:spcPts val="800"/>
-              </a:spcAft>
-            </a:pPr>
-            <a:r>
-              <a:rPr sz="2000">
-                <a:solidFill>
-                  <a:srgbClr val="3A3A3A"/>
-                </a:solidFill>
-                <a:latin typeface="Roboto Condensed"/>
-              </a:rPr>
-              <a:t>• Examinar estrategias para implementar cambios digitales que mejoren la eficiencia operativa y la competitividad</a:t>
-            </a:r>
-          </a:p>
-          <a:p>
-            <a:pPr lvl="1">
-              <a:spcAft>
-                <a:spcPts val="400"/>
-              </a:spcAft>
-            </a:pPr>
-            <a:r>
-              <a:rPr sz="1800">
-                <a:solidFill>
-                  <a:srgbClr val="3A3A3A"/>
-                </a:solidFill>
-                <a:latin typeface="Roboto Condensed"/>
-              </a:rPr>
-              <a:t>– Clase 1 (7 jul): digitalización, IA, IoT y Blockchain</a:t>
-            </a:r>
-          </a:p>
-          <a:p>
-            <a:pPr lvl="1">
-              <a:spcAft>
-                <a:spcPts val="400"/>
-              </a:spcAft>
-            </a:pPr>
-            <a:r>
-              <a:rPr sz="1800">
-                <a:solidFill>
-                  <a:srgbClr val="3A3A3A"/>
-                </a:solidFill>
-                <a:latin typeface="Roboto Condensed"/>
-              </a:rPr>
-              <a:t>– Clase 2 (14 jul): Big Data/BI, Cloud, Automatización y Ciberseguridad</a:t>
-            </a:r>
-          </a:p>
-          <a:p>
-            <a:pPr lvl="1">
-              <a:spcAft>
-                <a:spcPts val="400"/>
-              </a:spcAft>
-            </a:pPr>
-            <a:r>
-              <a:rPr sz="1800">
-                <a:solidFill>
-                  <a:srgbClr val="3A3A3A"/>
-                </a:solidFill>
-                <a:latin typeface="Roboto Condensed"/>
-              </a:rPr>
-              <a:t>– Evaluación del módulo: lunes 21 de julio</a:t>
-            </a:r>
-          </a:p>
-        </p:txBody>
-      </p:sp>
-      <p:pic>
-        <p:nvPicPr>
-          <p:cNvPr id="252" name="Google Shape;252;p38"/>
-          <p:cNvPicPr preferRelativeResize="0"/>
-          <p:nvPr/>
-        </p:nvPicPr>
-        <p:blipFill rotWithShape="1">
-          <a:blip r:embed="rId2">
-            <a:alphaModFix/>
-          </a:blip>
-          <a:srcRect/>
-          <a:stretch/>
-        </p:blipFill>
-        <p:spPr>
-          <a:xfrm>
-            <a:off x="10120580" y="230187"/>
-            <a:ext cx="1866726" cy="590083"/>
-          </a:xfrm>
-          <a:prstGeom prst="rect">
-            <a:avLst/>
-          </a:prstGeom>
-          <a:noFill/>
-          <a:ln>
-            <a:noFill/>
-          </a:ln>
-        </p:spPr>
-      </p:pic>
-      <p:sp>
-        <p:nvSpPr>
-          <p:cNvPr id="2" name="Marcador de número de diapositiva 2">
-            <a:extLst>
-              <a:ext uri="{FF2B5EF4-FFF2-40B4-BE49-F238E27FC236}">
-                <a16:creationId xmlns:a16="http://schemas.microsoft.com/office/drawing/2014/main" id="{9E2EBC40-EC40-BDF2-F68A-0BA88B712A11}"/>
-              </a:ext>
-            </a:extLst>
-          </p:cNvPr>
-          <p:cNvSpPr txBox="1">
-            <a:spLocks/>
-          </p:cNvSpPr>
-          <p:nvPr/>
-        </p:nvSpPr>
-        <p:spPr>
-          <a:xfrm>
-            <a:off x="8610600" y="6356351"/>
-            <a:ext cx="2743200" cy="365125"/>
-          </a:xfrm>
-          <a:prstGeom prst="rect">
-            <a:avLst/>
-          </a:prstGeom>
-        </p:spPr>
-        <p:txBody>
-          <a:bodyPr/>
-          <a:lstStyle>
-            <a:defPPr marR="0" lvl="0" algn="l" rtl="0">
-              <a:lnSpc>
-                <a:spcPct val="100000"/>
-              </a:lnSpc>
-              <a:spcBef>
-                <a:spcPts val="0"/>
-              </a:spcBef>
-              <a:spcAft>
-                <a:spcPts val="0"/>
-              </a:spcAft>
-            </a:defPPr>
-            <a:lvl1pPr marR="0" lvl="0" algn="l" rtl="0">
-              <a:lnSpc>
-                <a:spcPct val="100000"/>
-              </a:lnSpc>
-              <a:spcBef>
-                <a:spcPts val="0"/>
-              </a:spcBef>
-              <a:spcAft>
-                <a:spcPts val="0"/>
-              </a:spcAft>
-              <a:buClr>
-                <a:srgbClr val="000000"/>
-              </a:buClr>
-              <a:buFont typeface="Arial"/>
-              <a:defRPr sz="1400" b="0" i="0" u="none" strike="noStrike" cap="none">
-                <a:solidFill>
-                  <a:srgbClr val="000000"/>
-                </a:solidFill>
-                <a:latin typeface="Arial"/>
-                <a:ea typeface="Arial"/>
-                <a:cs typeface="Arial"/>
-                <a:sym typeface="Arial"/>
-              </a:defRPr>
-            </a:lvl1pPr>
-            <a:lvl2pPr marR="0" lvl="1" algn="l" rtl="0">
-              <a:lnSpc>
-                <a:spcPct val="100000"/>
-              </a:lnSpc>
-              <a:spcBef>
-                <a:spcPts val="0"/>
-              </a:spcBef>
-              <a:spcAft>
-                <a:spcPts val="0"/>
-              </a:spcAft>
-              <a:buClr>
-                <a:srgbClr val="000000"/>
-              </a:buClr>
-              <a:buFont typeface="Arial"/>
-              <a:defRPr sz="1400" b="0" i="0" u="none" strike="noStrike" cap="none">
-                <a:solidFill>
-                  <a:srgbClr val="000000"/>
-                </a:solidFill>
-                <a:latin typeface="Arial"/>
-                <a:ea typeface="Arial"/>
-                <a:cs typeface="Arial"/>
-                <a:sym typeface="Arial"/>
-              </a:defRPr>
-            </a:lvl2pPr>
-            <a:lvl3pPr marR="0" lvl="2" algn="l" rtl="0">
-              <a:lnSpc>
-                <a:spcPct val="100000"/>
-              </a:lnSpc>
-              <a:spcBef>
-                <a:spcPts val="0"/>
-              </a:spcBef>
-              <a:spcAft>
-                <a:spcPts val="0"/>
-              </a:spcAft>
-              <a:buClr>
-                <a:srgbClr val="000000"/>
-              </a:buClr>
-              <a:buFont typeface="Arial"/>
-              <a:defRPr sz="1400" b="0" i="0" u="none" strike="noStrike" cap="none">
-                <a:solidFill>
-                  <a:srgbClr val="000000"/>
-                </a:solidFill>
-                <a:latin typeface="Arial"/>
-                <a:ea typeface="Arial"/>
-                <a:cs typeface="Arial"/>
-                <a:sym typeface="Arial"/>
-              </a:defRPr>
-            </a:lvl3pPr>
-            <a:lvl4pPr marR="0" lvl="3" algn="l" rtl="0">
-              <a:lnSpc>
-                <a:spcPct val="100000"/>
-              </a:lnSpc>
-              <a:spcBef>
-                <a:spcPts val="0"/>
-              </a:spcBef>
-              <a:spcAft>
-                <a:spcPts val="0"/>
-              </a:spcAft>
-              <a:buClr>
-                <a:srgbClr val="000000"/>
-              </a:buClr>
-              <a:buFont typeface="Arial"/>
-              <a:defRPr sz="1400" b="0" i="0" u="none" strike="noStrike" cap="none">
-                <a:solidFill>
-                  <a:srgbClr val="000000"/>
-                </a:solidFill>
-                <a:latin typeface="Arial"/>
-                <a:ea typeface="Arial"/>
-                <a:cs typeface="Arial"/>
-                <a:sym typeface="Arial"/>
-              </a:defRPr>
-            </a:lvl4pPr>
-            <a:lvl5pPr marR="0" lvl="4" algn="l" rtl="0">
-              <a:lnSpc>
-                <a:spcPct val="100000"/>
-              </a:lnSpc>
-              <a:spcBef>
-                <a:spcPts val="0"/>
-              </a:spcBef>
-              <a:spcAft>
-                <a:spcPts val="0"/>
-              </a:spcAft>
-              <a:buClr>
-                <a:srgbClr val="000000"/>
-              </a:buClr>
-              <a:buFont typeface="Arial"/>
-              <a:defRPr sz="1400" b="0" i="0" u="none" strike="noStrike" cap="none">
-                <a:solidFill>
-                  <a:srgbClr val="000000"/>
-                </a:solidFill>
-                <a:latin typeface="Arial"/>
-                <a:ea typeface="Arial"/>
-                <a:cs typeface="Arial"/>
-                <a:sym typeface="Arial"/>
-              </a:defRPr>
-            </a:lvl5pPr>
-            <a:lvl6pPr marR="0" lvl="5" algn="l" rtl="0">
-              <a:lnSpc>
-                <a:spcPct val="100000"/>
-              </a:lnSpc>
-              <a:spcBef>
-                <a:spcPts val="0"/>
-              </a:spcBef>
-              <a:spcAft>
-                <a:spcPts val="0"/>
-              </a:spcAft>
-              <a:buClr>
-                <a:srgbClr val="000000"/>
-              </a:buClr>
-              <a:buFont typeface="Arial"/>
-              <a:defRPr sz="1400" b="0" i="0" u="none" strike="noStrike" cap="none">
-                <a:solidFill>
-                  <a:srgbClr val="000000"/>
-                </a:solidFill>
-                <a:latin typeface="Arial"/>
-                <a:ea typeface="Arial"/>
-                <a:cs typeface="Arial"/>
-                <a:sym typeface="Arial"/>
-              </a:defRPr>
-            </a:lvl6pPr>
-            <a:lvl7pPr marR="0" lvl="6" algn="l" rtl="0">
-              <a:lnSpc>
-                <a:spcPct val="100000"/>
-              </a:lnSpc>
-              <a:spcBef>
-                <a:spcPts val="0"/>
-              </a:spcBef>
-              <a:spcAft>
-                <a:spcPts val="0"/>
-              </a:spcAft>
-              <a:buClr>
-                <a:srgbClr val="000000"/>
-              </a:buClr>
-              <a:buFont typeface="Arial"/>
-              <a:defRPr sz="1400" b="0" i="0" u="none" strike="noStrike" cap="none">
-                <a:solidFill>
-                  <a:srgbClr val="000000"/>
-                </a:solidFill>
-                <a:latin typeface="Arial"/>
-                <a:ea typeface="Arial"/>
-                <a:cs typeface="Arial"/>
-                <a:sym typeface="Arial"/>
-              </a:defRPr>
-            </a:lvl7pPr>
-            <a:lvl8pPr marR="0" lvl="7" algn="l" rtl="0">
-              <a:lnSpc>
-                <a:spcPct val="100000"/>
-              </a:lnSpc>
-              <a:spcBef>
-                <a:spcPts val="0"/>
-              </a:spcBef>
-              <a:spcAft>
-                <a:spcPts val="0"/>
-              </a:spcAft>
-              <a:buClr>
-                <a:srgbClr val="000000"/>
-              </a:buClr>
-              <a:buFont typeface="Arial"/>
-              <a:defRPr sz="1400" b="0" i="0" u="none" strike="noStrike" cap="none">
-                <a:solidFill>
-                  <a:srgbClr val="000000"/>
-                </a:solidFill>
-                <a:latin typeface="Arial"/>
-                <a:ea typeface="Arial"/>
-                <a:cs typeface="Arial"/>
-                <a:sym typeface="Arial"/>
-              </a:defRPr>
-            </a:lvl8pPr>
-            <a:lvl9pPr marR="0" lvl="8" algn="l" rtl="0">
-              <a:lnSpc>
-                <a:spcPct val="100000"/>
-              </a:lnSpc>
-              <a:spcBef>
-                <a:spcPts val="0"/>
-              </a:spcBef>
-              <a:spcAft>
-                <a:spcPts val="0"/>
-              </a:spcAft>
-              <a:buClr>
-                <a:srgbClr val="000000"/>
-              </a:buClr>
-              <a:buFont typeface="Arial"/>
-              <a:defRPr sz="1400" b="0" i="0" u="none" strike="noStrike" cap="none">
-                <a:solidFill>
-                  <a:srgbClr val="000000"/>
-                </a:solidFill>
-                <a:latin typeface="Arial"/>
-                <a:ea typeface="Arial"/>
-                <a:cs typeface="Arial"/>
-                <a:sym typeface="Arial"/>
-              </a:defRPr>
-            </a:lvl9pPr>
-          </a:lstStyle>
-          <a:p>
-            <a:pPr algn="r"/>
-            <a:r>
-              <a:t>2</a:t>
-            </a:r>
-            <a:endParaRPr lang="en-US"/>
-          </a:p>
-        </p:txBody>
-      </p:sp>
-    </p:spTree>
-  </p:cSld>
-  <p:clrMapOvr>
-    <a:masterClrMapping/>
-  </p:clrMapOvr>
-</p:sld>
-</file>
-
-<file path=ppt/slides/slide20.xml><?xml version="1.0" encoding="utf-8"?>
+<file path=ppt/slides/slide21.xml><?xml version="1.0" encoding="utf-8"?>
 <p:sld xmlns:a="http://schemas.openxmlformats.org/drawingml/2006/main" xmlns:p="http://schemas.openxmlformats.org/presentationml/2006/main" xmlns:r="http://schemas.openxmlformats.org/officeDocument/2006/relationships">
   <p:cSld>
     <p:spTree>
@@ -44557,7 +47524,7 @@
           <a:p>
             <a:pPr algn="r"/>
             <a:r>
-              <a:t>20</a:t>
+              <a:t>21</a:t>
             </a:r>
             <a:endParaRPr lang="en-US"/>
           </a:p>
@@ -44571,7 +47538,7 @@
 </p:sld>
 </file>
 
-<file path=ppt/slides/slide21.xml><?xml version="1.0" encoding="utf-8"?>
+<file path=ppt/slides/slide22.xml><?xml version="1.0" encoding="utf-8"?>
 <p:sld xmlns:a="http://schemas.openxmlformats.org/drawingml/2006/main" xmlns:p="http://schemas.openxmlformats.org/presentationml/2006/main" xmlns:r="http://schemas.openxmlformats.org/officeDocument/2006/relationships">
   <p:cSld>
     <p:spTree>
@@ -44643,7 +47610,7 @@
         <p:spPr>
           <a:xfrm>
             <a:off x="889446" y="2014379"/>
-            <a:ext cx="9385264" cy="3413760"/>
+            <a:ext cx="6300000" cy="3413760"/>
           </a:xfrm>
           <a:prstGeom prst="rect">
             <a:avLst/>
@@ -44667,12 +47634,12 @@
                 <a:spcPts val="0"/>
               </a:spcBef>
               <a:spcAft>
-                <a:spcPts val="800"/>
+                <a:spcPts val="600"/>
               </a:spcAft>
               <a:buNone/>
             </a:pPr>
             <a:r>
-              <a:rPr sz="2000">
+              <a:rPr sz="1500">
                 <a:solidFill>
                   <a:srgbClr val="3A3A3A"/>
                 </a:solidFill>
@@ -44685,11 +47652,11 @@
           <a:p>
             <a:pPr>
               <a:spcAft>
-                <a:spcPts val="800"/>
+                <a:spcPts val="600"/>
               </a:spcAft>
             </a:pPr>
             <a:r>
-              <a:rPr sz="2000">
+              <a:rPr sz="1500">
                 <a:solidFill>
                   <a:srgbClr val="3A3A3A"/>
                 </a:solidFill>
@@ -44701,11 +47668,11 @@
           <a:p>
             <a:pPr lvl="1">
               <a:spcAft>
-                <a:spcPts val="400"/>
+                <a:spcPts val="600"/>
               </a:spcAft>
             </a:pPr>
             <a:r>
-              <a:rPr sz="1800">
+              <a:rPr sz="1500">
                 <a:solidFill>
                   <a:srgbClr val="3A3A3A"/>
                 </a:solidFill>
@@ -44717,11 +47684,11 @@
           <a:p>
             <a:pPr>
               <a:spcAft>
-                <a:spcPts val="800"/>
+                <a:spcPts val="600"/>
               </a:spcAft>
             </a:pPr>
             <a:r>
-              <a:rPr sz="2000">
+              <a:rPr sz="1500">
                 <a:solidFill>
                   <a:srgbClr val="3A3A3A"/>
                 </a:solidFill>
@@ -45016,9 +47983,450 @@
           <a:p>
             <a:pPr algn="r"/>
             <a:r>
-              <a:t>21</a:t>
+              <a:t>22</a:t>
             </a:r>
             <a:endParaRPr lang="en-US"/>
+          </a:p>
+        </p:txBody>
+      </p:sp>
+      <p:sp>
+        <p:nvSpPr>
+          <p:cNvPr id="253" name="Oval 252"/>
+          <p:cNvSpPr/>
+          <p:nvPr/>
+        </p:nvSpPr>
+        <p:spPr>
+          <a:xfrm>
+            <a:off x="8850000" y="3100000"/>
+            <a:ext cx="1000000" cy="700000"/>
+          </a:xfrm>
+          <a:prstGeom prst="ellipse">
+            <a:avLst/>
+          </a:prstGeom>
+          <a:solidFill>
+            <a:srgbClr val="0E2841"/>
+          </a:solidFill>
+          <a:ln>
+            <a:noFill/>
+          </a:ln>
+          <a:effectLst/>
+        </p:spPr>
+        <p:style>
+          <a:lnRef idx="1">
+            <a:schemeClr val="accent1"/>
+          </a:lnRef>
+          <a:fillRef idx="3">
+            <a:schemeClr val="accent1"/>
+          </a:fillRef>
+          <a:effectRef idx="2">
+            <a:schemeClr val="accent1"/>
+          </a:effectRef>
+          <a:fontRef idx="minor">
+            <a:schemeClr val="lt1"/>
+          </a:fontRef>
+        </p:style>
+        <p:txBody>
+          <a:bodyPr rtlCol="0" anchor="ctr" wrap="square" lIns="18000" rIns="18000" tIns="9000" bIns="9000"/>
+          <a:lstStyle/>
+          <a:p>
+            <a:pPr algn="ctr"/>
+            <a:r>
+              <a:rPr sz="1000" b="1">
+                <a:solidFill>
+                  <a:srgbClr val="FFFFFF"/>
+                </a:solidFill>
+                <a:latin typeface="Roboto Condensed"/>
+              </a:rPr>
+              <a:t>Nube /
+plataforma</a:t>
+            </a:r>
+          </a:p>
+        </p:txBody>
+      </p:sp>
+      <p:cxnSp>
+        <p:nvCxnSpPr>
+          <p:cNvPr id="254" name="Connector 253"/>
+          <p:cNvCxnSpPr/>
+          <p:nvPr/>
+        </p:nvCxnSpPr>
+        <p:spPr>
+          <a:xfrm flipH="1" flipV="1">
+            <a:off x="8050000" y="2500000"/>
+            <a:ext cx="1300000" cy="950000"/>
+          </a:xfrm>
+          <a:prstGeom prst="line">
+            <a:avLst/>
+          </a:prstGeom>
+          <a:ln w="12700">
+            <a:solidFill>
+              <a:srgbClr val="0F9ED5"/>
+            </a:solidFill>
+          </a:ln>
+        </p:spPr>
+        <p:style>
+          <a:lnRef idx="2">
+            <a:schemeClr val="accent1"/>
+          </a:lnRef>
+          <a:fillRef idx="0">
+            <a:schemeClr val="accent1"/>
+          </a:fillRef>
+          <a:effectRef idx="1">
+            <a:schemeClr val="accent1"/>
+          </a:effectRef>
+          <a:fontRef idx="minor">
+            <a:schemeClr val="tx1"/>
+          </a:fontRef>
+        </p:style>
+      </p:cxnSp>
+      <p:sp>
+        <p:nvSpPr>
+          <p:cNvPr id="255" name="Rounded Rectangle 254"/>
+          <p:cNvSpPr/>
+          <p:nvPr/>
+        </p:nvSpPr>
+        <p:spPr>
+          <a:xfrm>
+            <a:off x="7650000" y="2200000"/>
+            <a:ext cx="800000" cy="600000"/>
+          </a:xfrm>
+          <a:prstGeom prst="roundRect">
+            <a:avLst/>
+          </a:prstGeom>
+          <a:solidFill>
+            <a:srgbClr val="0F9ED5"/>
+          </a:solidFill>
+          <a:ln>
+            <a:noFill/>
+          </a:ln>
+          <a:effectLst/>
+        </p:spPr>
+        <p:style>
+          <a:lnRef idx="1">
+            <a:schemeClr val="accent1"/>
+          </a:lnRef>
+          <a:fillRef idx="3">
+            <a:schemeClr val="accent1"/>
+          </a:fillRef>
+          <a:effectRef idx="2">
+            <a:schemeClr val="accent1"/>
+          </a:effectRef>
+          <a:fontRef idx="minor">
+            <a:schemeClr val="lt1"/>
+          </a:fontRef>
+        </p:style>
+        <p:txBody>
+          <a:bodyPr rtlCol="0" anchor="ctr" wrap="square" lIns="18000" rIns="18000" tIns="9000" bIns="9000"/>
+          <a:lstStyle/>
+          <a:p>
+            <a:pPr algn="ctr"/>
+            <a:r>
+              <a:rPr sz="900" b="1">
+                <a:solidFill>
+                  <a:srgbClr val="0E2841"/>
+                </a:solidFill>
+                <a:latin typeface="Roboto Condensed"/>
+              </a:rPr>
+              <a:t>Sensores</a:t>
+            </a:r>
+          </a:p>
+        </p:txBody>
+      </p:sp>
+      <p:cxnSp>
+        <p:nvCxnSpPr>
+          <p:cNvPr id="256" name="Connector 255"/>
+          <p:cNvCxnSpPr/>
+          <p:nvPr/>
+        </p:nvCxnSpPr>
+        <p:spPr>
+          <a:xfrm flipV="1">
+            <a:off x="9350000" y="2500000"/>
+            <a:ext cx="1100000" cy="950000"/>
+          </a:xfrm>
+          <a:prstGeom prst="line">
+            <a:avLst/>
+          </a:prstGeom>
+          <a:ln w="12700">
+            <a:solidFill>
+              <a:srgbClr val="0F9ED5"/>
+            </a:solidFill>
+          </a:ln>
+        </p:spPr>
+        <p:style>
+          <a:lnRef idx="2">
+            <a:schemeClr val="accent1"/>
+          </a:lnRef>
+          <a:fillRef idx="0">
+            <a:schemeClr val="accent1"/>
+          </a:fillRef>
+          <a:effectRef idx="1">
+            <a:schemeClr val="accent1"/>
+          </a:effectRef>
+          <a:fontRef idx="minor">
+            <a:schemeClr val="tx1"/>
+          </a:fontRef>
+        </p:style>
+      </p:cxnSp>
+      <p:sp>
+        <p:nvSpPr>
+          <p:cNvPr id="257" name="Rounded Rectangle 256"/>
+          <p:cNvSpPr/>
+          <p:nvPr/>
+        </p:nvSpPr>
+        <p:spPr>
+          <a:xfrm>
+            <a:off x="10050000" y="2200000"/>
+            <a:ext cx="800000" cy="600000"/>
+          </a:xfrm>
+          <a:prstGeom prst="roundRect">
+            <a:avLst/>
+          </a:prstGeom>
+          <a:solidFill>
+            <a:srgbClr val="0F9ED5"/>
+          </a:solidFill>
+          <a:ln>
+            <a:noFill/>
+          </a:ln>
+          <a:effectLst/>
+        </p:spPr>
+        <p:style>
+          <a:lnRef idx="1">
+            <a:schemeClr val="accent1"/>
+          </a:lnRef>
+          <a:fillRef idx="3">
+            <a:schemeClr val="accent1"/>
+          </a:fillRef>
+          <a:effectRef idx="2">
+            <a:schemeClr val="accent1"/>
+          </a:effectRef>
+          <a:fontRef idx="minor">
+            <a:schemeClr val="lt1"/>
+          </a:fontRef>
+        </p:style>
+        <p:txBody>
+          <a:bodyPr rtlCol="0" anchor="ctr" wrap="square" lIns="18000" rIns="18000" tIns="9000" bIns="9000"/>
+          <a:lstStyle/>
+          <a:p>
+            <a:pPr algn="ctr"/>
+            <a:r>
+              <a:rPr sz="900" b="1">
+                <a:solidFill>
+                  <a:srgbClr val="0E2841"/>
+                </a:solidFill>
+                <a:latin typeface="Roboto Condensed"/>
+              </a:rPr>
+              <a:t>Cámaras</a:t>
+            </a:r>
+          </a:p>
+        </p:txBody>
+      </p:sp>
+      <p:cxnSp>
+        <p:nvCxnSpPr>
+          <p:cNvPr id="258" name="Connector 257"/>
+          <p:cNvCxnSpPr/>
+          <p:nvPr/>
+        </p:nvCxnSpPr>
+        <p:spPr>
+          <a:xfrm flipH="1">
+            <a:off x="8050000" y="3450000"/>
+            <a:ext cx="1300000" cy="1050000"/>
+          </a:xfrm>
+          <a:prstGeom prst="line">
+            <a:avLst/>
+          </a:prstGeom>
+          <a:ln w="12700">
+            <a:solidFill>
+              <a:srgbClr val="0F9ED5"/>
+            </a:solidFill>
+          </a:ln>
+        </p:spPr>
+        <p:style>
+          <a:lnRef idx="2">
+            <a:schemeClr val="accent1"/>
+          </a:lnRef>
+          <a:fillRef idx="0">
+            <a:schemeClr val="accent1"/>
+          </a:fillRef>
+          <a:effectRef idx="1">
+            <a:schemeClr val="accent1"/>
+          </a:effectRef>
+          <a:fontRef idx="minor">
+            <a:schemeClr val="tx1"/>
+          </a:fontRef>
+        </p:style>
+      </p:cxnSp>
+      <p:sp>
+        <p:nvSpPr>
+          <p:cNvPr id="259" name="Rounded Rectangle 258"/>
+          <p:cNvSpPr/>
+          <p:nvPr/>
+        </p:nvSpPr>
+        <p:spPr>
+          <a:xfrm>
+            <a:off x="7650000" y="4200000"/>
+            <a:ext cx="800000" cy="600000"/>
+          </a:xfrm>
+          <a:prstGeom prst="roundRect">
+            <a:avLst/>
+          </a:prstGeom>
+          <a:solidFill>
+            <a:srgbClr val="0F9ED5"/>
+          </a:solidFill>
+          <a:ln>
+            <a:noFill/>
+          </a:ln>
+          <a:effectLst/>
+        </p:spPr>
+        <p:style>
+          <a:lnRef idx="1">
+            <a:schemeClr val="accent1"/>
+          </a:lnRef>
+          <a:fillRef idx="3">
+            <a:schemeClr val="accent1"/>
+          </a:fillRef>
+          <a:effectRef idx="2">
+            <a:schemeClr val="accent1"/>
+          </a:effectRef>
+          <a:fontRef idx="minor">
+            <a:schemeClr val="lt1"/>
+          </a:fontRef>
+        </p:style>
+        <p:txBody>
+          <a:bodyPr rtlCol="0" anchor="ctr" wrap="square" lIns="18000" rIns="18000" tIns="9000" bIns="9000"/>
+          <a:lstStyle/>
+          <a:p>
+            <a:pPr algn="ctr"/>
+            <a:r>
+              <a:rPr sz="900" b="1">
+                <a:solidFill>
+                  <a:srgbClr val="0E2841"/>
+                </a:solidFill>
+                <a:latin typeface="Roboto Condensed"/>
+              </a:rPr>
+              <a:t>Medidores</a:t>
+            </a:r>
+          </a:p>
+        </p:txBody>
+      </p:sp>
+      <p:cxnSp>
+        <p:nvCxnSpPr>
+          <p:cNvPr id="260" name="Connector 259"/>
+          <p:cNvCxnSpPr/>
+          <p:nvPr/>
+        </p:nvCxnSpPr>
+        <p:spPr>
+          <a:xfrm>
+            <a:off x="9350000" y="3450000"/>
+            <a:ext cx="1100000" cy="1050000"/>
+          </a:xfrm>
+          <a:prstGeom prst="line">
+            <a:avLst/>
+          </a:prstGeom>
+          <a:ln w="12700">
+            <a:solidFill>
+              <a:srgbClr val="0F9ED5"/>
+            </a:solidFill>
+          </a:ln>
+        </p:spPr>
+        <p:style>
+          <a:lnRef idx="2">
+            <a:schemeClr val="accent1"/>
+          </a:lnRef>
+          <a:fillRef idx="0">
+            <a:schemeClr val="accent1"/>
+          </a:fillRef>
+          <a:effectRef idx="1">
+            <a:schemeClr val="accent1"/>
+          </a:effectRef>
+          <a:fontRef idx="minor">
+            <a:schemeClr val="tx1"/>
+          </a:fontRef>
+        </p:style>
+      </p:cxnSp>
+      <p:sp>
+        <p:nvSpPr>
+          <p:cNvPr id="261" name="Rounded Rectangle 260"/>
+          <p:cNvSpPr/>
+          <p:nvPr/>
+        </p:nvSpPr>
+        <p:spPr>
+          <a:xfrm>
+            <a:off x="10050000" y="4200000"/>
+            <a:ext cx="800000" cy="600000"/>
+          </a:xfrm>
+          <a:prstGeom prst="roundRect">
+            <a:avLst/>
+          </a:prstGeom>
+          <a:solidFill>
+            <a:srgbClr val="0F9ED5"/>
+          </a:solidFill>
+          <a:ln>
+            <a:noFill/>
+          </a:ln>
+          <a:effectLst/>
+        </p:spPr>
+        <p:style>
+          <a:lnRef idx="1">
+            <a:schemeClr val="accent1"/>
+          </a:lnRef>
+          <a:fillRef idx="3">
+            <a:schemeClr val="accent1"/>
+          </a:fillRef>
+          <a:effectRef idx="2">
+            <a:schemeClr val="accent1"/>
+          </a:effectRef>
+          <a:fontRef idx="minor">
+            <a:schemeClr val="lt1"/>
+          </a:fontRef>
+        </p:style>
+        <p:txBody>
+          <a:bodyPr rtlCol="0" anchor="ctr" wrap="square" lIns="18000" rIns="18000" tIns="9000" bIns="9000"/>
+          <a:lstStyle/>
+          <a:p>
+            <a:pPr algn="ctr"/>
+            <a:r>
+              <a:rPr sz="900" b="1">
+                <a:solidFill>
+                  <a:srgbClr val="0E2841"/>
+                </a:solidFill>
+                <a:latin typeface="Roboto Condensed"/>
+              </a:rPr>
+              <a:t>Wearables</a:t>
+            </a:r>
+          </a:p>
+        </p:txBody>
+      </p:sp>
+      <p:sp>
+        <p:nvSpPr>
+          <p:cNvPr id="262" name="TextBox 261"/>
+          <p:cNvSpPr txBox="1"/>
+          <p:nvPr/>
+        </p:nvSpPr>
+        <p:spPr>
+          <a:xfrm>
+            <a:off x="7450000" y="4950000"/>
+            <a:ext cx="3400000" cy="300000"/>
+          </a:xfrm>
+          <a:prstGeom prst="rect">
+            <a:avLst/>
+          </a:prstGeom>
+          <a:noFill/>
+        </p:spPr>
+        <p:txBody>
+          <a:bodyPr wrap="square" lIns="0" rIns="0" tIns="0" bIns="0">
+            <a:spAutoFit/>
+          </a:bodyPr>
+          <a:lstStyle/>
+          <a:p>
+            <a:pPr algn="ctr"/>
+            <a:r>
+              <a:rPr sz="1000" b="0" i="1">
+                <a:solidFill>
+                  <a:srgbClr val="3A3A3A"/>
+                </a:solidFill>
+                <a:latin typeface="Roboto Condensed"/>
+              </a:rPr>
+              <a:t>Referencial: dispositivos conectados a una plataforma central</a:t>
+            </a:r>
           </a:p>
         </p:txBody>
       </p:sp>
@@ -45030,7 +48438,7 @@
 </p:sld>
 </file>
 
-<file path=ppt/slides/slide22.xml><?xml version="1.0" encoding="utf-8"?>
+<file path=ppt/slides/slide23.xml><?xml version="1.0" encoding="utf-8"?>
 <p:sld xmlns:a="http://schemas.openxmlformats.org/drawingml/2006/main" xmlns:p="http://schemas.openxmlformats.org/presentationml/2006/main" xmlns:r="http://schemas.openxmlformats.org/officeDocument/2006/relationships">
   <p:cSld>
     <p:spTree>
@@ -45491,7 +48899,7 @@
           <a:p>
             <a:pPr algn="r"/>
             <a:r>
-              <a:t>22</a:t>
+              <a:t>23</a:t>
             </a:r>
             <a:endParaRPr lang="en-US"/>
           </a:p>
@@ -45505,7 +48913,7 @@
 </p:sld>
 </file>
 
-<file path=ppt/slides/slide23.xml><?xml version="1.0" encoding="utf-8"?>
+<file path=ppt/slides/slide24.xml><?xml version="1.0" encoding="utf-8"?>
 <p:sld xmlns:a="http://schemas.openxmlformats.org/drawingml/2006/main" xmlns:p="http://schemas.openxmlformats.org/presentationml/2006/main" xmlns:r="http://schemas.openxmlformats.org/officeDocument/2006/relationships">
   <p:cSld>
     <p:spTree>
@@ -45982,7 +49390,7 @@
           <a:p>
             <a:pPr algn="r"/>
             <a:r>
-              <a:t>23</a:t>
+              <a:t>24</a:t>
             </a:r>
             <a:endParaRPr lang="en-US"/>
           </a:p>
@@ -45996,7 +49404,7 @@
 </p:sld>
 </file>
 
-<file path=ppt/slides/slide24.xml><?xml version="1.0" encoding="utf-8"?>
+<file path=ppt/slides/slide25.xml><?xml version="1.0" encoding="utf-8"?>
 <p:sld xmlns:a="http://schemas.openxmlformats.org/drawingml/2006/main" xmlns:p="http://schemas.openxmlformats.org/presentationml/2006/main" xmlns:r="http://schemas.openxmlformats.org/officeDocument/2006/relationships">
   <p:cSld>
     <p:spTree>
@@ -46068,7 +49476,7 @@
         <p:spPr>
           <a:xfrm>
             <a:off x="889446" y="2014379"/>
-            <a:ext cx="9385264" cy="3413760"/>
+            <a:ext cx="6300000" cy="3413760"/>
           </a:xfrm>
           <a:prstGeom prst="rect">
             <a:avLst/>
@@ -46092,12 +49500,12 @@
                 <a:spcPts val="0"/>
               </a:spcBef>
               <a:spcAft>
-                <a:spcPts val="800"/>
+                <a:spcPts val="600"/>
               </a:spcAft>
               <a:buNone/>
             </a:pPr>
             <a:r>
-              <a:rPr sz="2000">
+              <a:rPr sz="1500">
                 <a:solidFill>
                   <a:srgbClr val="3A3A3A"/>
                 </a:solidFill>
@@ -46110,11 +49518,11 @@
           <a:p>
             <a:pPr>
               <a:spcAft>
-                <a:spcPts val="800"/>
+                <a:spcPts val="600"/>
               </a:spcAft>
             </a:pPr>
             <a:r>
-              <a:rPr sz="2000">
+              <a:rPr sz="1500">
                 <a:solidFill>
                   <a:srgbClr val="3A3A3A"/>
                 </a:solidFill>
@@ -46126,11 +49534,11 @@
           <a:p>
             <a:pPr>
               <a:spcAft>
-                <a:spcPts val="800"/>
+                <a:spcPts val="600"/>
               </a:spcAft>
             </a:pPr>
             <a:r>
-              <a:rPr sz="2000">
+              <a:rPr sz="1500">
                 <a:solidFill>
                   <a:srgbClr val="3A3A3A"/>
                 </a:solidFill>
@@ -46142,11 +49550,11 @@
           <a:p>
             <a:pPr>
               <a:spcAft>
-                <a:spcPts val="800"/>
+                <a:spcPts val="600"/>
               </a:spcAft>
             </a:pPr>
             <a:r>
-              <a:rPr sz="2000">
+              <a:rPr sz="1500">
                 <a:solidFill>
                   <a:srgbClr val="3A3A3A"/>
                 </a:solidFill>
@@ -46441,9 +49849,492 @@
           <a:p>
             <a:pPr algn="r"/>
             <a:r>
-              <a:t>24</a:t>
+              <a:t>25</a:t>
             </a:r>
             <a:endParaRPr lang="en-US"/>
+          </a:p>
+        </p:txBody>
+      </p:sp>
+      <p:sp>
+        <p:nvSpPr>
+          <p:cNvPr id="253" name="Rounded Rectangle 252"/>
+          <p:cNvSpPr/>
+          <p:nvPr/>
+        </p:nvSpPr>
+        <p:spPr>
+          <a:xfrm>
+            <a:off x="7900000" y="3000000"/>
+            <a:ext cx="1600000" cy="700000"/>
+          </a:xfrm>
+          <a:prstGeom prst="roundRect">
+            <a:avLst/>
+          </a:prstGeom>
+          <a:solidFill>
+            <a:srgbClr val="196B24"/>
+          </a:solidFill>
+          <a:ln>
+            <a:noFill/>
+          </a:ln>
+          <a:effectLst/>
+        </p:spPr>
+        <p:style>
+          <a:lnRef idx="1">
+            <a:schemeClr val="accent1"/>
+          </a:lnRef>
+          <a:fillRef idx="3">
+            <a:schemeClr val="accent1"/>
+          </a:fillRef>
+          <a:effectRef idx="2">
+            <a:schemeClr val="accent1"/>
+          </a:effectRef>
+          <a:fontRef idx="minor">
+            <a:schemeClr val="lt1"/>
+          </a:fontRef>
+        </p:style>
+        <p:txBody>
+          <a:bodyPr rtlCol="0" anchor="ctr" wrap="square" lIns="18000" rIns="18000" tIns="9000" bIns="9000"/>
+          <a:lstStyle/>
+          <a:p>
+            <a:pPr algn="ctr"/>
+          </a:p>
+        </p:txBody>
+      </p:sp>
+      <p:sp>
+        <p:nvSpPr>
+          <p:cNvPr id="254" name="Rounded Rectangle 253"/>
+          <p:cNvSpPr/>
+          <p:nvPr/>
+        </p:nvSpPr>
+        <p:spPr>
+          <a:xfrm>
+            <a:off x="8900000" y="2600000"/>
+            <a:ext cx="700000" cy="700000"/>
+          </a:xfrm>
+          <a:prstGeom prst="roundRect">
+            <a:avLst/>
+          </a:prstGeom>
+          <a:solidFill>
+            <a:srgbClr val="196B24"/>
+          </a:solidFill>
+          <a:ln>
+            <a:noFill/>
+          </a:ln>
+          <a:effectLst/>
+        </p:spPr>
+        <p:style>
+          <a:lnRef idx="1">
+            <a:schemeClr val="accent1"/>
+          </a:lnRef>
+          <a:fillRef idx="3">
+            <a:schemeClr val="accent1"/>
+          </a:fillRef>
+          <a:effectRef idx="2">
+            <a:schemeClr val="accent1"/>
+          </a:effectRef>
+          <a:fontRef idx="minor">
+            <a:schemeClr val="lt1"/>
+          </a:fontRef>
+        </p:style>
+        <p:txBody>
+          <a:bodyPr rtlCol="0" anchor="ctr" wrap="square" lIns="18000" rIns="18000" tIns="9000" bIns="9000"/>
+          <a:lstStyle/>
+          <a:p>
+            <a:pPr algn="ctr"/>
+          </a:p>
+        </p:txBody>
+      </p:sp>
+      <p:sp>
+        <p:nvSpPr>
+          <p:cNvPr id="255" name="Oval 254"/>
+          <p:cNvSpPr/>
+          <p:nvPr/>
+        </p:nvSpPr>
+        <p:spPr>
+          <a:xfrm>
+            <a:off x="7850000" y="3600000"/>
+            <a:ext cx="500000" cy="500000"/>
+          </a:xfrm>
+          <a:prstGeom prst="ellipse">
+            <a:avLst/>
+          </a:prstGeom>
+          <a:solidFill>
+            <a:srgbClr val="0E2841"/>
+          </a:solidFill>
+          <a:ln>
+            <a:noFill/>
+          </a:ln>
+          <a:effectLst/>
+        </p:spPr>
+        <p:style>
+          <a:lnRef idx="1">
+            <a:schemeClr val="accent1"/>
+          </a:lnRef>
+          <a:fillRef idx="3">
+            <a:schemeClr val="accent1"/>
+          </a:fillRef>
+          <a:effectRef idx="2">
+            <a:schemeClr val="accent1"/>
+          </a:effectRef>
+          <a:fontRef idx="minor">
+            <a:schemeClr val="lt1"/>
+          </a:fontRef>
+        </p:style>
+        <p:txBody>
+          <a:bodyPr rtlCol="0" anchor="ctr" wrap="square" lIns="18000" rIns="18000" tIns="9000" bIns="9000"/>
+          <a:lstStyle/>
+          <a:p>
+            <a:pPr algn="ctr"/>
+          </a:p>
+        </p:txBody>
+      </p:sp>
+      <p:sp>
+        <p:nvSpPr>
+          <p:cNvPr id="256" name="Oval 255"/>
+          <p:cNvSpPr/>
+          <p:nvPr/>
+        </p:nvSpPr>
+        <p:spPr>
+          <a:xfrm>
+            <a:off x="9250000" y="3600000"/>
+            <a:ext cx="700000" cy="700000"/>
+          </a:xfrm>
+          <a:prstGeom prst="ellipse">
+            <a:avLst/>
+          </a:prstGeom>
+          <a:solidFill>
+            <a:srgbClr val="0E2841"/>
+          </a:solidFill>
+          <a:ln>
+            <a:noFill/>
+          </a:ln>
+          <a:effectLst/>
+        </p:spPr>
+        <p:style>
+          <a:lnRef idx="1">
+            <a:schemeClr val="accent1"/>
+          </a:lnRef>
+          <a:fillRef idx="3">
+            <a:schemeClr val="accent1"/>
+          </a:fillRef>
+          <a:effectRef idx="2">
+            <a:schemeClr val="accent1"/>
+          </a:effectRef>
+          <a:fontRef idx="minor">
+            <a:schemeClr val="lt1"/>
+          </a:fontRef>
+        </p:style>
+        <p:txBody>
+          <a:bodyPr rtlCol="0" anchor="ctr" wrap="square" lIns="18000" rIns="18000" tIns="9000" bIns="9000"/>
+          <a:lstStyle/>
+          <a:p>
+            <a:pPr algn="ctr"/>
+          </a:p>
+        </p:txBody>
+      </p:sp>
+      <p:sp>
+        <p:nvSpPr>
+          <p:cNvPr id="257" name="Oval 256"/>
+          <p:cNvSpPr/>
+          <p:nvPr/>
+        </p:nvSpPr>
+        <p:spPr>
+          <a:xfrm>
+            <a:off x="8100000" y="2250000"/>
+            <a:ext cx="160000" cy="160000"/>
+          </a:xfrm>
+          <a:prstGeom prst="ellipse">
+            <a:avLst/>
+          </a:prstGeom>
+          <a:solidFill>
+            <a:srgbClr val="E97132"/>
+          </a:solidFill>
+          <a:ln>
+            <a:noFill/>
+          </a:ln>
+          <a:effectLst/>
+        </p:spPr>
+        <p:style>
+          <a:lnRef idx="1">
+            <a:schemeClr val="accent1"/>
+          </a:lnRef>
+          <a:fillRef idx="3">
+            <a:schemeClr val="accent1"/>
+          </a:fillRef>
+          <a:effectRef idx="2">
+            <a:schemeClr val="accent1"/>
+          </a:effectRef>
+          <a:fontRef idx="minor">
+            <a:schemeClr val="lt1"/>
+          </a:fontRef>
+        </p:style>
+        <p:txBody>
+          <a:bodyPr rtlCol="0" anchor="ctr" wrap="square" lIns="18000" rIns="18000" tIns="9000" bIns="9000"/>
+          <a:lstStyle/>
+          <a:p>
+            <a:pPr algn="ctr"/>
+          </a:p>
+        </p:txBody>
+      </p:sp>
+      <p:cxnSp>
+        <p:nvCxnSpPr>
+          <p:cNvPr id="258" name="Connector 257"/>
+          <p:cNvCxnSpPr/>
+          <p:nvPr/>
+        </p:nvCxnSpPr>
+        <p:spPr>
+          <a:xfrm>
+            <a:off x="8180000" y="2410000"/>
+            <a:ext cx="0" cy="240000"/>
+          </a:xfrm>
+          <a:prstGeom prst="line">
+            <a:avLst/>
+          </a:prstGeom>
+          <a:ln w="12700">
+            <a:solidFill>
+              <a:srgbClr val="E97132"/>
+            </a:solidFill>
+          </a:ln>
+        </p:spPr>
+        <p:style>
+          <a:lnRef idx="2">
+            <a:schemeClr val="accent1"/>
+          </a:lnRef>
+          <a:fillRef idx="0">
+            <a:schemeClr val="accent1"/>
+          </a:fillRef>
+          <a:effectRef idx="1">
+            <a:schemeClr val="accent1"/>
+          </a:effectRef>
+          <a:fontRef idx="minor">
+            <a:schemeClr val="tx1"/>
+          </a:fontRef>
+        </p:style>
+      </p:cxnSp>
+      <p:sp>
+        <p:nvSpPr>
+          <p:cNvPr id="259" name="Oval 258"/>
+          <p:cNvSpPr/>
+          <p:nvPr/>
+        </p:nvSpPr>
+        <p:spPr>
+          <a:xfrm>
+            <a:off x="8500000" y="2250000"/>
+            <a:ext cx="160000" cy="160000"/>
+          </a:xfrm>
+          <a:prstGeom prst="ellipse">
+            <a:avLst/>
+          </a:prstGeom>
+          <a:solidFill>
+            <a:srgbClr val="E97132"/>
+          </a:solidFill>
+          <a:ln>
+            <a:noFill/>
+          </a:ln>
+          <a:effectLst/>
+        </p:spPr>
+        <p:style>
+          <a:lnRef idx="1">
+            <a:schemeClr val="accent1"/>
+          </a:lnRef>
+          <a:fillRef idx="3">
+            <a:schemeClr val="accent1"/>
+          </a:fillRef>
+          <a:effectRef idx="2">
+            <a:schemeClr val="accent1"/>
+          </a:effectRef>
+          <a:fontRef idx="minor">
+            <a:schemeClr val="lt1"/>
+          </a:fontRef>
+        </p:style>
+        <p:txBody>
+          <a:bodyPr rtlCol="0" anchor="ctr" wrap="square" lIns="18000" rIns="18000" tIns="9000" bIns="9000"/>
+          <a:lstStyle/>
+          <a:p>
+            <a:pPr algn="ctr"/>
+          </a:p>
+        </p:txBody>
+      </p:sp>
+      <p:cxnSp>
+        <p:nvCxnSpPr>
+          <p:cNvPr id="260" name="Connector 259"/>
+          <p:cNvCxnSpPr/>
+          <p:nvPr/>
+        </p:nvCxnSpPr>
+        <p:spPr>
+          <a:xfrm>
+            <a:off x="8580000" y="2410000"/>
+            <a:ext cx="0" cy="240000"/>
+          </a:xfrm>
+          <a:prstGeom prst="line">
+            <a:avLst/>
+          </a:prstGeom>
+          <a:ln w="12700">
+            <a:solidFill>
+              <a:srgbClr val="E97132"/>
+            </a:solidFill>
+          </a:ln>
+        </p:spPr>
+        <p:style>
+          <a:lnRef idx="2">
+            <a:schemeClr val="accent1"/>
+          </a:lnRef>
+          <a:fillRef idx="0">
+            <a:schemeClr val="accent1"/>
+          </a:fillRef>
+          <a:effectRef idx="1">
+            <a:schemeClr val="accent1"/>
+          </a:effectRef>
+          <a:fontRef idx="minor">
+            <a:schemeClr val="tx1"/>
+          </a:fontRef>
+        </p:style>
+      </p:cxnSp>
+      <p:sp>
+        <p:nvSpPr>
+          <p:cNvPr id="261" name="Oval 260"/>
+          <p:cNvSpPr/>
+          <p:nvPr/>
+        </p:nvSpPr>
+        <p:spPr>
+          <a:xfrm>
+            <a:off x="8900000" y="2250000"/>
+            <a:ext cx="160000" cy="160000"/>
+          </a:xfrm>
+          <a:prstGeom prst="ellipse">
+            <a:avLst/>
+          </a:prstGeom>
+          <a:solidFill>
+            <a:srgbClr val="E97132"/>
+          </a:solidFill>
+          <a:ln>
+            <a:noFill/>
+          </a:ln>
+          <a:effectLst/>
+        </p:spPr>
+        <p:style>
+          <a:lnRef idx="1">
+            <a:schemeClr val="accent1"/>
+          </a:lnRef>
+          <a:fillRef idx="3">
+            <a:schemeClr val="accent1"/>
+          </a:fillRef>
+          <a:effectRef idx="2">
+            <a:schemeClr val="accent1"/>
+          </a:effectRef>
+          <a:fontRef idx="minor">
+            <a:schemeClr val="lt1"/>
+          </a:fontRef>
+        </p:style>
+        <p:txBody>
+          <a:bodyPr rtlCol="0" anchor="ctr" wrap="square" lIns="18000" rIns="18000" tIns="9000" bIns="9000"/>
+          <a:lstStyle/>
+          <a:p>
+            <a:pPr algn="ctr"/>
+          </a:p>
+        </p:txBody>
+      </p:sp>
+      <p:cxnSp>
+        <p:nvCxnSpPr>
+          <p:cNvPr id="262" name="Connector 261"/>
+          <p:cNvCxnSpPr/>
+          <p:nvPr/>
+        </p:nvCxnSpPr>
+        <p:spPr>
+          <a:xfrm>
+            <a:off x="8980000" y="2410000"/>
+            <a:ext cx="0" cy="240000"/>
+          </a:xfrm>
+          <a:prstGeom prst="line">
+            <a:avLst/>
+          </a:prstGeom>
+          <a:ln w="12700">
+            <a:solidFill>
+              <a:srgbClr val="E97132"/>
+            </a:solidFill>
+          </a:ln>
+        </p:spPr>
+        <p:style>
+          <a:lnRef idx="2">
+            <a:schemeClr val="accent1"/>
+          </a:lnRef>
+          <a:fillRef idx="0">
+            <a:schemeClr val="accent1"/>
+          </a:fillRef>
+          <a:effectRef idx="1">
+            <a:schemeClr val="accent1"/>
+          </a:effectRef>
+          <a:fontRef idx="minor">
+            <a:schemeClr val="tx1"/>
+          </a:fontRef>
+        </p:style>
+      </p:cxnSp>
+      <p:sp>
+        <p:nvSpPr>
+          <p:cNvPr id="263" name="TextBox 262"/>
+          <p:cNvSpPr txBox="1"/>
+          <p:nvPr/>
+        </p:nvSpPr>
+        <p:spPr>
+          <a:xfrm>
+            <a:off x="7600000" y="4300000"/>
+            <a:ext cx="2600000" cy="300000"/>
+          </a:xfrm>
+          <a:prstGeom prst="rect">
+            <a:avLst/>
+          </a:prstGeom>
+          <a:noFill/>
+        </p:spPr>
+        <p:txBody>
+          <a:bodyPr wrap="square" lIns="0" rIns="0" tIns="0" bIns="0">
+            <a:spAutoFit/>
+          </a:bodyPr>
+          <a:lstStyle/>
+          <a:p>
+            <a:pPr algn="ctr"/>
+            <a:r>
+              <a:rPr sz="1000" b="1" i="0">
+                <a:solidFill>
+                  <a:srgbClr val="3A3A3A"/>
+                </a:solidFill>
+                <a:latin typeface="Roboto Condensed"/>
+              </a:rPr>
+              <a:t>Sensores + IA + Conectividad</a:t>
+            </a:r>
+          </a:p>
+        </p:txBody>
+      </p:sp>
+      <p:sp>
+        <p:nvSpPr>
+          <p:cNvPr id="264" name="TextBox 263"/>
+          <p:cNvSpPr txBox="1"/>
+          <p:nvPr/>
+        </p:nvSpPr>
+        <p:spPr>
+          <a:xfrm>
+            <a:off x="7600000" y="4650000"/>
+            <a:ext cx="2600000" cy="300000"/>
+          </a:xfrm>
+          <a:prstGeom prst="rect">
+            <a:avLst/>
+          </a:prstGeom>
+          <a:noFill/>
+        </p:spPr>
+        <p:txBody>
+          <a:bodyPr wrap="square" lIns="0" rIns="0" tIns="0" bIns="0">
+            <a:spAutoFit/>
+          </a:bodyPr>
+          <a:lstStyle/>
+          <a:p>
+            <a:pPr algn="ctr"/>
+            <a:r>
+              <a:rPr sz="1000" b="0" i="1">
+                <a:solidFill>
+                  <a:srgbClr val="3A3A3A"/>
+                </a:solidFill>
+                <a:latin typeface="Roboto Condensed"/>
+              </a:rPr>
+              <a:t>Referencial: maquinaria agrícola conectada (Agricultura 4.0)</a:t>
+            </a:r>
           </a:p>
         </p:txBody>
       </p:sp>
@@ -46455,7 +50346,7 @@
 </p:sld>
 </file>
 
-<file path=ppt/slides/slide25.xml><?xml version="1.0" encoding="utf-8"?>
+<file path=ppt/slides/slide26.xml><?xml version="1.0" encoding="utf-8"?>
 <p:sld xmlns:a="http://schemas.openxmlformats.org/drawingml/2006/main" xmlns:p="http://schemas.openxmlformats.org/presentationml/2006/main" xmlns:r="http://schemas.openxmlformats.org/officeDocument/2006/relationships">
   <p:cSld>
     <p:spTree>
@@ -46964,7 +50855,7 @@
           <a:p>
             <a:pPr algn="r"/>
             <a:r>
-              <a:t>25</a:t>
+              <a:t>26</a:t>
             </a:r>
             <a:endParaRPr lang="en-US"/>
           </a:p>
@@ -46978,7 +50869,7 @@
 </p:sld>
 </file>
 
-<file path=ppt/slides/slide26.xml><?xml version="1.0" encoding="utf-8"?>
+<file path=ppt/slides/slide27.xml><?xml version="1.0" encoding="utf-8"?>
 <p:sld xmlns:a="http://schemas.openxmlformats.org/drawingml/2006/main" xmlns:p="http://schemas.openxmlformats.org/presentationml/2006/main" xmlns:r="http://schemas.openxmlformats.org/officeDocument/2006/relationships">
   <p:cSld>
     <p:spTree>
@@ -47375,7 +51266,7 @@
           <a:p>
             <a:pPr algn="r"/>
             <a:r>
-              <a:t>26</a:t>
+              <a:t>27</a:t>
             </a:r>
             <a:endParaRPr lang="en-US"/>
           </a:p>
@@ -47389,7 +51280,7 @@
 </p:sld>
 </file>
 
-<file path=ppt/slides/slide27.xml><?xml version="1.0" encoding="utf-8"?>
+<file path=ppt/slides/slide28.xml><?xml version="1.0" encoding="utf-8"?>
 <p:sld xmlns:a="http://schemas.openxmlformats.org/drawingml/2006/main" xmlns:p="http://schemas.openxmlformats.org/presentationml/2006/main" xmlns:r="http://schemas.openxmlformats.org/officeDocument/2006/relationships">
   <p:cSld>
     <p:spTree>
@@ -47461,7 +51352,7 @@
         <p:spPr>
           <a:xfrm>
             <a:off x="889446" y="2014379"/>
-            <a:ext cx="9385264" cy="3413760"/>
+            <a:ext cx="6300000" cy="3413760"/>
           </a:xfrm>
           <a:prstGeom prst="rect">
             <a:avLst/>
@@ -47485,12 +51376,12 @@
                 <a:spcPts val="0"/>
               </a:spcBef>
               <a:spcAft>
-                <a:spcPts val="800"/>
+                <a:spcPts val="600"/>
               </a:spcAft>
               <a:buNone/>
             </a:pPr>
             <a:r>
-              <a:rPr sz="2000">
+              <a:rPr sz="1500">
                 <a:solidFill>
                   <a:srgbClr val="3A3A3A"/>
                 </a:solidFill>
@@ -47503,11 +51394,11 @@
           <a:p>
             <a:pPr>
               <a:spcAft>
-                <a:spcPts val="800"/>
+                <a:spcPts val="600"/>
               </a:spcAft>
             </a:pPr>
             <a:r>
-              <a:rPr sz="2000">
+              <a:rPr sz="1500">
                 <a:solidFill>
                   <a:srgbClr val="3A3A3A"/>
                 </a:solidFill>
@@ -47519,11 +51410,11 @@
           <a:p>
             <a:pPr>
               <a:spcAft>
-                <a:spcPts val="800"/>
+                <a:spcPts val="600"/>
               </a:spcAft>
             </a:pPr>
             <a:r>
-              <a:rPr sz="2000">
+              <a:rPr sz="1500">
                 <a:solidFill>
                   <a:srgbClr val="3A3A3A"/>
                 </a:solidFill>
@@ -47535,11 +51426,11 @@
           <a:p>
             <a:pPr>
               <a:spcAft>
-                <a:spcPts val="800"/>
+                <a:spcPts val="600"/>
               </a:spcAft>
             </a:pPr>
             <a:r>
-              <a:rPr sz="2000">
+              <a:rPr sz="1500">
                 <a:solidFill>
                   <a:srgbClr val="3A3A3A"/>
                 </a:solidFill>
@@ -47551,11 +51442,11 @@
           <a:p>
             <a:pPr>
               <a:spcAft>
-                <a:spcPts val="800"/>
+                <a:spcPts val="600"/>
               </a:spcAft>
             </a:pPr>
             <a:r>
-              <a:rPr sz="2000">
+              <a:rPr sz="1500">
                 <a:solidFill>
                   <a:srgbClr val="3A3A3A"/>
                 </a:solidFill>
@@ -47850,9 +51741,364 @@
           <a:p>
             <a:pPr algn="r"/>
             <a:r>
-              <a:t>27</a:t>
+              <a:t>28</a:t>
             </a:r>
             <a:endParaRPr lang="en-US"/>
+          </a:p>
+        </p:txBody>
+      </p:sp>
+      <p:sp>
+        <p:nvSpPr>
+          <p:cNvPr id="253" name="Rounded Rectangle 252"/>
+          <p:cNvSpPr/>
+          <p:nvPr/>
+        </p:nvSpPr>
+        <p:spPr>
+          <a:xfrm>
+            <a:off x="7600000" y="2600000"/>
+            <a:ext cx="750000" cy="750000"/>
+          </a:xfrm>
+          <a:prstGeom prst="roundRect">
+            <a:avLst/>
+          </a:prstGeom>
+          <a:solidFill>
+            <a:srgbClr val="0E2841"/>
+          </a:solidFill>
+          <a:ln>
+            <a:noFill/>
+          </a:ln>
+          <a:effectLst/>
+        </p:spPr>
+        <p:style>
+          <a:lnRef idx="1">
+            <a:schemeClr val="accent1"/>
+          </a:lnRef>
+          <a:fillRef idx="3">
+            <a:schemeClr val="accent1"/>
+          </a:fillRef>
+          <a:effectRef idx="2">
+            <a:schemeClr val="accent1"/>
+          </a:effectRef>
+          <a:fontRef idx="minor">
+            <a:schemeClr val="lt1"/>
+          </a:fontRef>
+        </p:style>
+        <p:txBody>
+          <a:bodyPr rtlCol="0" anchor="ctr" wrap="square" lIns="18000" rIns="18000" tIns="9000" bIns="9000"/>
+          <a:lstStyle/>
+          <a:p>
+            <a:pPr algn="ctr"/>
+            <a:r>
+              <a:rPr sz="900" b="1">
+                <a:solidFill>
+                  <a:srgbClr val="FFFFFF"/>
+                </a:solidFill>
+                <a:latin typeface="Roboto Condensed"/>
+              </a:rPr>
+              <a:t>Bloque 1</a:t>
+            </a:r>
+          </a:p>
+        </p:txBody>
+      </p:sp>
+      <p:sp>
+        <p:nvSpPr>
+          <p:cNvPr id="254" name="Rounded Rectangle 253"/>
+          <p:cNvSpPr/>
+          <p:nvPr/>
+        </p:nvSpPr>
+        <p:spPr>
+          <a:xfrm>
+            <a:off x="8610000" y="2600000"/>
+            <a:ext cx="750000" cy="750000"/>
+          </a:xfrm>
+          <a:prstGeom prst="roundRect">
+            <a:avLst/>
+          </a:prstGeom>
+          <a:solidFill>
+            <a:srgbClr val="0E2841"/>
+          </a:solidFill>
+          <a:ln>
+            <a:noFill/>
+          </a:ln>
+          <a:effectLst/>
+        </p:spPr>
+        <p:style>
+          <a:lnRef idx="1">
+            <a:schemeClr val="accent1"/>
+          </a:lnRef>
+          <a:fillRef idx="3">
+            <a:schemeClr val="accent1"/>
+          </a:fillRef>
+          <a:effectRef idx="2">
+            <a:schemeClr val="accent1"/>
+          </a:effectRef>
+          <a:fontRef idx="minor">
+            <a:schemeClr val="lt1"/>
+          </a:fontRef>
+        </p:style>
+        <p:txBody>
+          <a:bodyPr rtlCol="0" anchor="ctr" wrap="square" lIns="18000" rIns="18000" tIns="9000" bIns="9000"/>
+          <a:lstStyle/>
+          <a:p>
+            <a:pPr algn="ctr"/>
+            <a:r>
+              <a:rPr sz="900" b="1">
+                <a:solidFill>
+                  <a:srgbClr val="FFFFFF"/>
+                </a:solidFill>
+                <a:latin typeface="Roboto Condensed"/>
+              </a:rPr>
+              <a:t>Bloque 2</a:t>
+            </a:r>
+          </a:p>
+        </p:txBody>
+      </p:sp>
+      <p:cxnSp>
+        <p:nvCxnSpPr>
+          <p:cNvPr id="255" name="Connector 254"/>
+          <p:cNvCxnSpPr/>
+          <p:nvPr/>
+        </p:nvCxnSpPr>
+        <p:spPr>
+          <a:xfrm>
+            <a:off x="8350000" y="2975000"/>
+            <a:ext cx="260000" cy="0"/>
+          </a:xfrm>
+          <a:prstGeom prst="line">
+            <a:avLst/>
+          </a:prstGeom>
+          <a:ln w="19050">
+            <a:solidFill>
+              <a:srgbClr val="E97132"/>
+            </a:solidFill>
+            <a:tailEnd type="triangle" w="med" len="med"/>
+          </a:ln>
+        </p:spPr>
+        <p:style>
+          <a:lnRef idx="2">
+            <a:schemeClr val="accent1"/>
+          </a:lnRef>
+          <a:fillRef idx="0">
+            <a:schemeClr val="accent1"/>
+          </a:fillRef>
+          <a:effectRef idx="1">
+            <a:schemeClr val="accent1"/>
+          </a:effectRef>
+          <a:fontRef idx="minor">
+            <a:schemeClr val="tx1"/>
+          </a:fontRef>
+        </p:style>
+      </p:cxnSp>
+      <p:sp>
+        <p:nvSpPr>
+          <p:cNvPr id="256" name="Rounded Rectangle 255"/>
+          <p:cNvSpPr/>
+          <p:nvPr/>
+        </p:nvSpPr>
+        <p:spPr>
+          <a:xfrm>
+            <a:off x="9620000" y="2600000"/>
+            <a:ext cx="750000" cy="750000"/>
+          </a:xfrm>
+          <a:prstGeom prst="roundRect">
+            <a:avLst/>
+          </a:prstGeom>
+          <a:solidFill>
+            <a:srgbClr val="0E2841"/>
+          </a:solidFill>
+          <a:ln>
+            <a:noFill/>
+          </a:ln>
+          <a:effectLst/>
+        </p:spPr>
+        <p:style>
+          <a:lnRef idx="1">
+            <a:schemeClr val="accent1"/>
+          </a:lnRef>
+          <a:fillRef idx="3">
+            <a:schemeClr val="accent1"/>
+          </a:fillRef>
+          <a:effectRef idx="2">
+            <a:schemeClr val="accent1"/>
+          </a:effectRef>
+          <a:fontRef idx="minor">
+            <a:schemeClr val="lt1"/>
+          </a:fontRef>
+        </p:style>
+        <p:txBody>
+          <a:bodyPr rtlCol="0" anchor="ctr" wrap="square" lIns="18000" rIns="18000" tIns="9000" bIns="9000"/>
+          <a:lstStyle/>
+          <a:p>
+            <a:pPr algn="ctr"/>
+            <a:r>
+              <a:rPr sz="900" b="1">
+                <a:solidFill>
+                  <a:srgbClr val="FFFFFF"/>
+                </a:solidFill>
+                <a:latin typeface="Roboto Condensed"/>
+              </a:rPr>
+              <a:t>Bloque 3</a:t>
+            </a:r>
+          </a:p>
+        </p:txBody>
+      </p:sp>
+      <p:cxnSp>
+        <p:nvCxnSpPr>
+          <p:cNvPr id="257" name="Connector 256"/>
+          <p:cNvCxnSpPr/>
+          <p:nvPr/>
+        </p:nvCxnSpPr>
+        <p:spPr>
+          <a:xfrm>
+            <a:off x="9360000" y="2975000"/>
+            <a:ext cx="260000" cy="0"/>
+          </a:xfrm>
+          <a:prstGeom prst="line">
+            <a:avLst/>
+          </a:prstGeom>
+          <a:ln w="19050">
+            <a:solidFill>
+              <a:srgbClr val="E97132"/>
+            </a:solidFill>
+            <a:tailEnd type="triangle" w="med" len="med"/>
+          </a:ln>
+        </p:spPr>
+        <p:style>
+          <a:lnRef idx="2">
+            <a:schemeClr val="accent1"/>
+          </a:lnRef>
+          <a:fillRef idx="0">
+            <a:schemeClr val="accent1"/>
+          </a:fillRef>
+          <a:effectRef idx="1">
+            <a:schemeClr val="accent1"/>
+          </a:effectRef>
+          <a:fontRef idx="minor">
+            <a:schemeClr val="tx1"/>
+          </a:fontRef>
+        </p:style>
+      </p:cxnSp>
+      <p:sp>
+        <p:nvSpPr>
+          <p:cNvPr id="258" name="Rounded Rectangle 257"/>
+          <p:cNvSpPr/>
+          <p:nvPr/>
+        </p:nvSpPr>
+        <p:spPr>
+          <a:xfrm>
+            <a:off x="10630000" y="2600000"/>
+            <a:ext cx="750000" cy="750000"/>
+          </a:xfrm>
+          <a:prstGeom prst="roundRect">
+            <a:avLst/>
+          </a:prstGeom>
+          <a:solidFill>
+            <a:srgbClr val="0E2841"/>
+          </a:solidFill>
+          <a:ln>
+            <a:noFill/>
+          </a:ln>
+          <a:effectLst/>
+        </p:spPr>
+        <p:style>
+          <a:lnRef idx="1">
+            <a:schemeClr val="accent1"/>
+          </a:lnRef>
+          <a:fillRef idx="3">
+            <a:schemeClr val="accent1"/>
+          </a:fillRef>
+          <a:effectRef idx="2">
+            <a:schemeClr val="accent1"/>
+          </a:effectRef>
+          <a:fontRef idx="minor">
+            <a:schemeClr val="lt1"/>
+          </a:fontRef>
+        </p:style>
+        <p:txBody>
+          <a:bodyPr rtlCol="0" anchor="ctr" wrap="square" lIns="18000" rIns="18000" tIns="9000" bIns="9000"/>
+          <a:lstStyle/>
+          <a:p>
+            <a:pPr algn="ctr"/>
+            <a:r>
+              <a:rPr sz="900" b="1">
+                <a:solidFill>
+                  <a:srgbClr val="FFFFFF"/>
+                </a:solidFill>
+                <a:latin typeface="Roboto Condensed"/>
+              </a:rPr>
+              <a:t>Bloque 4</a:t>
+            </a:r>
+          </a:p>
+        </p:txBody>
+      </p:sp>
+      <p:cxnSp>
+        <p:nvCxnSpPr>
+          <p:cNvPr id="259" name="Connector 258"/>
+          <p:cNvCxnSpPr/>
+          <p:nvPr/>
+        </p:nvCxnSpPr>
+        <p:spPr>
+          <a:xfrm>
+            <a:off x="10370000" y="2975000"/>
+            <a:ext cx="260000" cy="0"/>
+          </a:xfrm>
+          <a:prstGeom prst="line">
+            <a:avLst/>
+          </a:prstGeom>
+          <a:ln w="19050">
+            <a:solidFill>
+              <a:srgbClr val="E97132"/>
+            </a:solidFill>
+            <a:tailEnd type="triangle" w="med" len="med"/>
+          </a:ln>
+        </p:spPr>
+        <p:style>
+          <a:lnRef idx="2">
+            <a:schemeClr val="accent1"/>
+          </a:lnRef>
+          <a:fillRef idx="0">
+            <a:schemeClr val="accent1"/>
+          </a:fillRef>
+          <a:effectRef idx="1">
+            <a:schemeClr val="accent1"/>
+          </a:effectRef>
+          <a:fontRef idx="minor">
+            <a:schemeClr val="tx1"/>
+          </a:fontRef>
+        </p:style>
+      </p:cxnSp>
+      <p:sp>
+        <p:nvSpPr>
+          <p:cNvPr id="260" name="TextBox 259"/>
+          <p:cNvSpPr txBox="1"/>
+          <p:nvPr/>
+        </p:nvSpPr>
+        <p:spPr>
+          <a:xfrm>
+            <a:off x="7600000" y="3650000"/>
+            <a:ext cx="3400000" cy="300000"/>
+          </a:xfrm>
+          <a:prstGeom prst="rect">
+            <a:avLst/>
+          </a:prstGeom>
+          <a:noFill/>
+        </p:spPr>
+        <p:txBody>
+          <a:bodyPr wrap="square" lIns="0" rIns="0" tIns="0" bIns="0">
+            <a:spAutoFit/>
+          </a:bodyPr>
+          <a:lstStyle/>
+          <a:p>
+            <a:pPr algn="ctr"/>
+            <a:r>
+              <a:rPr sz="1000" b="0" i="1">
+                <a:solidFill>
+                  <a:srgbClr val="3A3A3A"/>
+                </a:solidFill>
+                <a:latin typeface="Roboto Condensed"/>
+              </a:rPr>
+              <a:t>Referencial: cada bloque se encadena criptográficamente al anterior</a:t>
+            </a:r>
           </a:p>
         </p:txBody>
       </p:sp>
@@ -47864,7 +52110,7 @@
 </p:sld>
 </file>
 
-<file path=ppt/slides/slide28.xml><?xml version="1.0" encoding="utf-8"?>
+<file path=ppt/slides/slide29.xml><?xml version="1.0" encoding="utf-8"?>
 <p:sld xmlns:a="http://schemas.openxmlformats.org/drawingml/2006/main" xmlns:p="http://schemas.openxmlformats.org/presentationml/2006/main" xmlns:r="http://schemas.openxmlformats.org/officeDocument/2006/relationships">
   <p:cSld>
     <p:spTree>
@@ -48325,7 +52571,7 @@
           <a:p>
             <a:pPr algn="r"/>
             <a:r>
-              <a:t>28</a:t>
+              <a:t>29</a:t>
             </a:r>
             <a:endParaRPr lang="en-US"/>
           </a:p>
@@ -48339,7 +52585,482 @@
 </p:sld>
 </file>
 
-<file path=ppt/slides/slide29.xml><?xml version="1.0" encoding="utf-8"?>
+<file path=ppt/slides/slide3.xml><?xml version="1.0" encoding="utf-8"?>
+<p:sld xmlns:a="http://schemas.openxmlformats.org/drawingml/2006/main" xmlns:p="http://schemas.openxmlformats.org/presentationml/2006/main" xmlns:r="http://schemas.openxmlformats.org/officeDocument/2006/relationships">
+  <p:cSld>
+    <p:spTree>
+      <p:nvGrpSpPr>
+        <p:cNvPr id="1" name=""/>
+        <p:cNvGrpSpPr/>
+        <p:nvPr/>
+      </p:nvGrpSpPr>
+      <p:grpSpPr/>
+      <p:sp>
+        <p:nvSpPr>
+          <p:cNvPr id="240" name="Google Shape;240;p38"/>
+          <p:cNvSpPr/>
+          <p:nvPr/>
+        </p:nvSpPr>
+        <p:spPr>
+          <a:xfrm>
+            <a:off x="853440" y="790892"/>
+            <a:ext cx="9055100" cy="731520"/>
+          </a:xfrm>
+          <a:prstGeom prst="rect">
+            <a:avLst/>
+          </a:prstGeom>
+          <a:noFill/>
+          <a:ln>
+            <a:noFill/>
+          </a:ln>
+        </p:spPr>
+        <p:txBody>
+          <a:bodyPr spcFirstLastPara="1" wrap="square" lIns="91425" tIns="45700" rIns="91425" bIns="45700" anchor="ctr" anchorCtr="0">
+            <a:noAutofit/>
+          </a:bodyPr>
+          <a:lstStyle/>
+          <a:p>
+            <a:pPr marL="0" marR="0" lvl="0" indent="0" algn="l" rtl="0">
+              <a:lnSpc>
+                <a:spcPct val="100000"/>
+              </a:lnSpc>
+              <a:spcBef>
+                <a:spcPts val="0"/>
+              </a:spcBef>
+              <a:spcAft>
+                <a:spcPts val="0"/>
+              </a:spcAft>
+              <a:buNone/>
+            </a:pPr>
+            <a:r>
+              <a:rPr lang="en-US" sz="4400" dirty="0">
+                <a:solidFill>
+                  <a:srgbClr val="3A3A3A"/>
+                </a:solidFill>
+                <a:latin typeface="Roboto Condensed Medium"/>
+                <a:ea typeface="Roboto Condensed Medium"/>
+                <a:cs typeface="Roboto Condensed Medium"/>
+                <a:sym typeface="Roboto Condensed Medium"/>
+              </a:rPr>
+              <a:t>Objetivo del módulo</a:t>
+            </a:r>
+            <a:endParaRPr dirty="0"/>
+          </a:p>
+        </p:txBody>
+      </p:sp>
+      <p:sp>
+        <p:nvSpPr>
+          <p:cNvPr id="241" name="Google Shape;241;p38"/>
+          <p:cNvSpPr/>
+          <p:nvPr/>
+        </p:nvSpPr>
+        <p:spPr>
+          <a:xfrm>
+            <a:off x="889446" y="2014379"/>
+            <a:ext cx="9385264" cy="3413760"/>
+          </a:xfrm>
+          <a:prstGeom prst="rect">
+            <a:avLst/>
+          </a:prstGeom>
+          <a:noFill/>
+          <a:ln>
+            <a:noFill/>
+          </a:ln>
+        </p:spPr>
+        <p:txBody>
+          <a:bodyPr spcFirstLastPara="1" wrap="square" lIns="91425" tIns="45700" rIns="91425" bIns="45700" anchor="t" anchorCtr="0">
+            <a:noAutofit/>
+          </a:bodyPr>
+          <a:lstStyle/>
+          <a:p>
+            <a:pPr marL="0" marR="0" indent="0" algn="l" rtl="0">
+              <a:lnSpc>
+                <a:spcPct val="100000"/>
+              </a:lnSpc>
+              <a:spcBef>
+                <a:spcPts val="0"/>
+              </a:spcBef>
+              <a:spcAft>
+                <a:spcPts val="800"/>
+              </a:spcAft>
+              <a:buNone/>
+            </a:pPr>
+            <a:r>
+              <a:rPr sz="2000">
+                <a:solidFill>
+                  <a:srgbClr val="3A3A3A"/>
+                </a:solidFill>
+                <a:latin typeface="Roboto Condensed"/>
+              </a:rPr>
+              <a:t>• Analizar el proceso de transformación digital en las organizaciones, integrando inteligencia artificial con otras tecnologías emergentes</a:t>
+            </a:r>
+            <a:endParaRPr dirty="0"/>
+          </a:p>
+          <a:p>
+            <a:pPr>
+              <a:spcAft>
+                <a:spcPts val="800"/>
+              </a:spcAft>
+            </a:pPr>
+            <a:r>
+              <a:rPr sz="2000">
+                <a:solidFill>
+                  <a:srgbClr val="3A3A3A"/>
+                </a:solidFill>
+                <a:latin typeface="Roboto Condensed"/>
+              </a:rPr>
+              <a:t>• Examinar estrategias para implementar cambios digitales que mejoren la eficiencia operativa y la competitividad</a:t>
+            </a:r>
+          </a:p>
+          <a:p>
+            <a:pPr lvl="1">
+              <a:spcAft>
+                <a:spcPts val="400"/>
+              </a:spcAft>
+            </a:pPr>
+            <a:r>
+              <a:rPr sz="1800">
+                <a:solidFill>
+                  <a:srgbClr val="3A3A3A"/>
+                </a:solidFill>
+                <a:latin typeface="Roboto Condensed"/>
+              </a:rPr>
+              <a:t>– Clase 1 (7 jul): digitalización, IA, IoT y Blockchain</a:t>
+            </a:r>
+          </a:p>
+          <a:p>
+            <a:pPr lvl="1">
+              <a:spcAft>
+                <a:spcPts val="400"/>
+              </a:spcAft>
+            </a:pPr>
+            <a:r>
+              <a:rPr sz="1800">
+                <a:solidFill>
+                  <a:srgbClr val="3A3A3A"/>
+                </a:solidFill>
+                <a:latin typeface="Roboto Condensed"/>
+              </a:rPr>
+              <a:t>– Clase 2 (14 jul): Big Data/BI, Cloud, Automatización y Ciberseguridad</a:t>
+            </a:r>
+          </a:p>
+          <a:p>
+            <a:pPr lvl="1">
+              <a:spcAft>
+                <a:spcPts val="400"/>
+              </a:spcAft>
+            </a:pPr>
+            <a:r>
+              <a:rPr sz="1800">
+                <a:solidFill>
+                  <a:srgbClr val="3A3A3A"/>
+                </a:solidFill>
+                <a:latin typeface="Roboto Condensed"/>
+              </a:rPr>
+              <a:t>– Evaluación del módulo: lunes 21 de julio</a:t>
+            </a:r>
+          </a:p>
+        </p:txBody>
+      </p:sp>
+      <p:pic>
+        <p:nvPicPr>
+          <p:cNvPr id="252" name="Google Shape;252;p38"/>
+          <p:cNvPicPr preferRelativeResize="0"/>
+          <p:nvPr/>
+        </p:nvPicPr>
+        <p:blipFill rotWithShape="1">
+          <a:blip r:embed="rId2">
+            <a:alphaModFix/>
+          </a:blip>
+          <a:srcRect/>
+          <a:stretch/>
+        </p:blipFill>
+        <p:spPr>
+          <a:xfrm>
+            <a:off x="10120580" y="230187"/>
+            <a:ext cx="1866726" cy="590083"/>
+          </a:xfrm>
+          <a:prstGeom prst="rect">
+            <a:avLst/>
+          </a:prstGeom>
+          <a:noFill/>
+          <a:ln>
+            <a:noFill/>
+          </a:ln>
+        </p:spPr>
+      </p:pic>
+      <p:sp>
+        <p:nvSpPr>
+          <p:cNvPr id="2" name="Marcador de número de diapositiva 2">
+            <a:extLst>
+              <a:ext uri="{FF2B5EF4-FFF2-40B4-BE49-F238E27FC236}">
+                <a16:creationId xmlns:a16="http://schemas.microsoft.com/office/drawing/2014/main" id="{9E2EBC40-EC40-BDF2-F68A-0BA88B712A11}"/>
+              </a:ext>
+            </a:extLst>
+          </p:cNvPr>
+          <p:cNvSpPr txBox="1">
+            <a:spLocks/>
+          </p:cNvSpPr>
+          <p:nvPr/>
+        </p:nvSpPr>
+        <p:spPr>
+          <a:xfrm>
+            <a:off x="8610600" y="6356351"/>
+            <a:ext cx="2743200" cy="365125"/>
+          </a:xfrm>
+          <a:prstGeom prst="rect">
+            <a:avLst/>
+          </a:prstGeom>
+        </p:spPr>
+        <p:txBody>
+          <a:bodyPr/>
+          <a:lstStyle>
+            <a:defPPr marR="0" lvl="0" algn="l" rtl="0">
+              <a:lnSpc>
+                <a:spcPct val="100000"/>
+              </a:lnSpc>
+              <a:spcBef>
+                <a:spcPts val="0"/>
+              </a:spcBef>
+              <a:spcAft>
+                <a:spcPts val="0"/>
+              </a:spcAft>
+            </a:defPPr>
+            <a:lvl1pPr marR="0" lvl="0" algn="l" rtl="0">
+              <a:lnSpc>
+                <a:spcPct val="100000"/>
+              </a:lnSpc>
+              <a:spcBef>
+                <a:spcPts val="0"/>
+              </a:spcBef>
+              <a:spcAft>
+                <a:spcPts val="0"/>
+              </a:spcAft>
+              <a:buClr>
+                <a:srgbClr val="000000"/>
+              </a:buClr>
+              <a:buFont typeface="Arial"/>
+              <a:defRPr sz="1400" b="0" i="0" u="none" strike="noStrike" cap="none">
+                <a:solidFill>
+                  <a:srgbClr val="000000"/>
+                </a:solidFill>
+                <a:latin typeface="Arial"/>
+                <a:ea typeface="Arial"/>
+                <a:cs typeface="Arial"/>
+                <a:sym typeface="Arial"/>
+              </a:defRPr>
+            </a:lvl1pPr>
+            <a:lvl2pPr marR="0" lvl="1" algn="l" rtl="0">
+              <a:lnSpc>
+                <a:spcPct val="100000"/>
+              </a:lnSpc>
+              <a:spcBef>
+                <a:spcPts val="0"/>
+              </a:spcBef>
+              <a:spcAft>
+                <a:spcPts val="0"/>
+              </a:spcAft>
+              <a:buClr>
+                <a:srgbClr val="000000"/>
+              </a:buClr>
+              <a:buFont typeface="Arial"/>
+              <a:defRPr sz="1400" b="0" i="0" u="none" strike="noStrike" cap="none">
+                <a:solidFill>
+                  <a:srgbClr val="000000"/>
+                </a:solidFill>
+                <a:latin typeface="Arial"/>
+                <a:ea typeface="Arial"/>
+                <a:cs typeface="Arial"/>
+                <a:sym typeface="Arial"/>
+              </a:defRPr>
+            </a:lvl2pPr>
+            <a:lvl3pPr marR="0" lvl="2" algn="l" rtl="0">
+              <a:lnSpc>
+                <a:spcPct val="100000"/>
+              </a:lnSpc>
+              <a:spcBef>
+                <a:spcPts val="0"/>
+              </a:spcBef>
+              <a:spcAft>
+                <a:spcPts val="0"/>
+              </a:spcAft>
+              <a:buClr>
+                <a:srgbClr val="000000"/>
+              </a:buClr>
+              <a:buFont typeface="Arial"/>
+              <a:defRPr sz="1400" b="0" i="0" u="none" strike="noStrike" cap="none">
+                <a:solidFill>
+                  <a:srgbClr val="000000"/>
+                </a:solidFill>
+                <a:latin typeface="Arial"/>
+                <a:ea typeface="Arial"/>
+                <a:cs typeface="Arial"/>
+                <a:sym typeface="Arial"/>
+              </a:defRPr>
+            </a:lvl3pPr>
+            <a:lvl4pPr marR="0" lvl="3" algn="l" rtl="0">
+              <a:lnSpc>
+                <a:spcPct val="100000"/>
+              </a:lnSpc>
+              <a:spcBef>
+                <a:spcPts val="0"/>
+              </a:spcBef>
+              <a:spcAft>
+                <a:spcPts val="0"/>
+              </a:spcAft>
+              <a:buClr>
+                <a:srgbClr val="000000"/>
+              </a:buClr>
+              <a:buFont typeface="Arial"/>
+              <a:defRPr sz="1400" b="0" i="0" u="none" strike="noStrike" cap="none">
+                <a:solidFill>
+                  <a:srgbClr val="000000"/>
+                </a:solidFill>
+                <a:latin typeface="Arial"/>
+                <a:ea typeface="Arial"/>
+                <a:cs typeface="Arial"/>
+                <a:sym typeface="Arial"/>
+              </a:defRPr>
+            </a:lvl4pPr>
+            <a:lvl5pPr marR="0" lvl="4" algn="l" rtl="0">
+              <a:lnSpc>
+                <a:spcPct val="100000"/>
+              </a:lnSpc>
+              <a:spcBef>
+                <a:spcPts val="0"/>
+              </a:spcBef>
+              <a:spcAft>
+                <a:spcPts val="0"/>
+              </a:spcAft>
+              <a:buClr>
+                <a:srgbClr val="000000"/>
+              </a:buClr>
+              <a:buFont typeface="Arial"/>
+              <a:defRPr sz="1400" b="0" i="0" u="none" strike="noStrike" cap="none">
+                <a:solidFill>
+                  <a:srgbClr val="000000"/>
+                </a:solidFill>
+                <a:latin typeface="Arial"/>
+                <a:ea typeface="Arial"/>
+                <a:cs typeface="Arial"/>
+                <a:sym typeface="Arial"/>
+              </a:defRPr>
+            </a:lvl5pPr>
+            <a:lvl6pPr marR="0" lvl="5" algn="l" rtl="0">
+              <a:lnSpc>
+                <a:spcPct val="100000"/>
+              </a:lnSpc>
+              <a:spcBef>
+                <a:spcPts val="0"/>
+              </a:spcBef>
+              <a:spcAft>
+                <a:spcPts val="0"/>
+              </a:spcAft>
+              <a:buClr>
+                <a:srgbClr val="000000"/>
+              </a:buClr>
+              <a:buFont typeface="Arial"/>
+              <a:defRPr sz="1400" b="0" i="0" u="none" strike="noStrike" cap="none">
+                <a:solidFill>
+                  <a:srgbClr val="000000"/>
+                </a:solidFill>
+                <a:latin typeface="Arial"/>
+                <a:ea typeface="Arial"/>
+                <a:cs typeface="Arial"/>
+                <a:sym typeface="Arial"/>
+              </a:defRPr>
+            </a:lvl6pPr>
+            <a:lvl7pPr marR="0" lvl="6" algn="l" rtl="0">
+              <a:lnSpc>
+                <a:spcPct val="100000"/>
+              </a:lnSpc>
+              <a:spcBef>
+                <a:spcPts val="0"/>
+              </a:spcBef>
+              <a:spcAft>
+                <a:spcPts val="0"/>
+              </a:spcAft>
+              <a:buClr>
+                <a:srgbClr val="000000"/>
+              </a:buClr>
+              <a:buFont typeface="Arial"/>
+              <a:defRPr sz="1400" b="0" i="0" u="none" strike="noStrike" cap="none">
+                <a:solidFill>
+                  <a:srgbClr val="000000"/>
+                </a:solidFill>
+                <a:latin typeface="Arial"/>
+                <a:ea typeface="Arial"/>
+                <a:cs typeface="Arial"/>
+                <a:sym typeface="Arial"/>
+              </a:defRPr>
+            </a:lvl7pPr>
+            <a:lvl8pPr marR="0" lvl="7" algn="l" rtl="0">
+              <a:lnSpc>
+                <a:spcPct val="100000"/>
+              </a:lnSpc>
+              <a:spcBef>
+                <a:spcPts val="0"/>
+              </a:spcBef>
+              <a:spcAft>
+                <a:spcPts val="0"/>
+              </a:spcAft>
+              <a:buClr>
+                <a:srgbClr val="000000"/>
+              </a:buClr>
+              <a:buFont typeface="Arial"/>
+              <a:defRPr sz="1400" b="0" i="0" u="none" strike="noStrike" cap="none">
+                <a:solidFill>
+                  <a:srgbClr val="000000"/>
+                </a:solidFill>
+                <a:latin typeface="Arial"/>
+                <a:ea typeface="Arial"/>
+                <a:cs typeface="Arial"/>
+                <a:sym typeface="Arial"/>
+              </a:defRPr>
+            </a:lvl8pPr>
+            <a:lvl9pPr marR="0" lvl="8" algn="l" rtl="0">
+              <a:lnSpc>
+                <a:spcPct val="100000"/>
+              </a:lnSpc>
+              <a:spcBef>
+                <a:spcPts val="0"/>
+              </a:spcBef>
+              <a:spcAft>
+                <a:spcPts val="0"/>
+              </a:spcAft>
+              <a:buClr>
+                <a:srgbClr val="000000"/>
+              </a:buClr>
+              <a:buFont typeface="Arial"/>
+              <a:defRPr sz="1400" b="0" i="0" u="none" strike="noStrike" cap="none">
+                <a:solidFill>
+                  <a:srgbClr val="000000"/>
+                </a:solidFill>
+                <a:latin typeface="Arial"/>
+                <a:ea typeface="Arial"/>
+                <a:cs typeface="Arial"/>
+                <a:sym typeface="Arial"/>
+              </a:defRPr>
+            </a:lvl9pPr>
+          </a:lstStyle>
+          <a:p>
+            <a:pPr algn="r"/>
+            <a:r>
+              <a:t>3</a:t>
+            </a:r>
+            <a:endParaRPr lang="en-US"/>
+          </a:p>
+        </p:txBody>
+      </p:sp>
+    </p:spTree>
+  </p:cSld>
+  <p:clrMapOvr>
+    <a:masterClrMapping/>
+  </p:clrMapOvr>
+</p:sld>
+</file>
+
+<file path=ppt/slides/slide30.xml><?xml version="1.0" encoding="utf-8"?>
 <p:sld xmlns:a="http://schemas.openxmlformats.org/drawingml/2006/main" xmlns:p="http://schemas.openxmlformats.org/presentationml/2006/main" xmlns:r="http://schemas.openxmlformats.org/officeDocument/2006/relationships">
   <p:cSld>
     <p:spTree>
@@ -48800,7 +53521,7 @@
           <a:p>
             <a:pPr algn="r"/>
             <a:r>
-              <a:t>29</a:t>
+              <a:t>30</a:t>
             </a:r>
             <a:endParaRPr lang="en-US"/>
           </a:p>
@@ -48814,7 +53535,7 @@
 </p:sld>
 </file>
 
-<file path=ppt/slides/slide3.xml><?xml version="1.0" encoding="utf-8"?>
+<file path=ppt/slides/slide31.xml><?xml version="1.0" encoding="utf-8"?>
 <p:sld xmlns:a="http://schemas.openxmlformats.org/drawingml/2006/main" xmlns:p="http://schemas.openxmlformats.org/presentationml/2006/main" xmlns:r="http://schemas.openxmlformats.org/officeDocument/2006/relationships">
   <p:cSld>
     <p:spTree>
@@ -48871,7 +53592,7 @@
                 <a:cs typeface="Roboto Condensed Medium"/>
                 <a:sym typeface="Roboto Condensed Medium"/>
               </a:rPr>
-              <a:t>Agenda de la clase</a:t>
+              <a:t>Caso: IBM Food Trust y Walmart</a:t>
             </a:r>
             <a:endParaRPr dirty="0"/>
           </a:p>
@@ -48886,7 +53607,7 @@
         <p:spPr>
           <a:xfrm>
             <a:off x="889446" y="2014379"/>
-            <a:ext cx="9385264" cy="3413760"/>
+            <a:ext cx="6300000" cy="3413760"/>
           </a:xfrm>
           <a:prstGeom prst="rect">
             <a:avLst/>
@@ -48910,639 +53631,12 @@
                 <a:spcPts val="0"/>
               </a:spcBef>
               <a:spcAft>
-                <a:spcPts val="800"/>
+                <a:spcPts val="600"/>
               </a:spcAft>
               <a:buNone/>
             </a:pPr>
             <a:r>
-              <a:rPr sz="1800">
-                <a:solidFill>
-                  <a:srgbClr val="3A3A3A"/>
-                </a:solidFill>
-                <a:latin typeface="Roboto Condensed"/>
-              </a:rPr>
-              <a:t>• La digitalización en la organización pública y privada</a:t>
-            </a:r>
-            <a:endParaRPr dirty="0"/>
-          </a:p>
-          <a:p>
-            <a:pPr marL="0" marR="0" indent="0" algn="l" rtl="0">
-              <a:lnSpc>
-                <a:spcPct val="100000"/>
-              </a:lnSpc>
-              <a:spcBef>
-                <a:spcPts val="0"/>
-              </a:spcBef>
-              <a:spcAft>
-                <a:spcPts val="800"/>
-              </a:spcAft>
-              <a:buNone/>
-            </a:pPr>
-            <a:r>
-              <a:rPr sz="1800">
-                <a:solidFill>
-                  <a:srgbClr val="3A3A3A"/>
-                </a:solidFill>
-                <a:latin typeface="Roboto Condensed"/>
-              </a:rPr>
-              <a:t>– Caso comparativo: e-Estonia y la plataforma X-Road</a:t>
-            </a:r>
-            <a:endParaRPr dirty="0"/>
-          </a:p>
-          <a:p>
-            <a:pPr marL="0" marR="0" indent="0" algn="l" rtl="0">
-              <a:lnSpc>
-                <a:spcPct val="100000"/>
-              </a:lnSpc>
-              <a:spcBef>
-                <a:spcPts val="0"/>
-              </a:spcBef>
-              <a:spcAft>
-                <a:spcPts val="800"/>
-              </a:spcAft>
-              <a:buNone/>
-            </a:pPr>
-            <a:r>
-              <a:rPr sz="1800">
-                <a:solidFill>
-                  <a:srgbClr val="3A3A3A"/>
-                </a:solidFill>
-                <a:latin typeface="Roboto Condensed"/>
-              </a:rPr>
-              <a:t>– Demostración en vivo: recorrido por e-Estonia y datos abiertos del Estado de Chile</a:t>
-            </a:r>
-            <a:endParaRPr dirty="0"/>
-          </a:p>
-          <a:p>
-            <a:pPr marL="0" marR="0" indent="0" algn="l" rtl="0">
-              <a:lnSpc>
-                <a:spcPct val="100000"/>
-              </a:lnSpc>
-              <a:spcBef>
-                <a:spcPts val="0"/>
-              </a:spcBef>
-              <a:spcAft>
-                <a:spcPts val="800"/>
-              </a:spcAft>
-              <a:buNone/>
-            </a:pPr>
-            <a:r>
-              <a:rPr sz="1800">
-                <a:solidFill>
-                  <a:srgbClr val="3A3A3A"/>
-                </a:solidFill>
-                <a:latin typeface="Roboto Condensed"/>
-              </a:rPr>
-              <a:t>– Caso chileno: ClaveÚnica y la digitalización del Estado</a:t>
-            </a:r>
-            <a:endParaRPr dirty="0"/>
-          </a:p>
-          <a:p>
-            <a:pPr marL="0" marR="0" indent="0" algn="l" rtl="0">
-              <a:lnSpc>
-                <a:spcPct val="100000"/>
-              </a:lnSpc>
-              <a:spcBef>
-                <a:spcPts val="0"/>
-              </a:spcBef>
-              <a:spcAft>
-                <a:spcPts val="800"/>
-              </a:spcAft>
-              <a:buNone/>
-            </a:pPr>
-            <a:r>
-              <a:rPr sz="1800">
-                <a:solidFill>
-                  <a:srgbClr val="3A3A3A"/>
-                </a:solidFill>
-                <a:latin typeface="Roboto Condensed"/>
-              </a:rPr>
-              <a:t>• Inteligencia Artificial en la transformación digital</a:t>
-            </a:r>
-            <a:endParaRPr dirty="0"/>
-          </a:p>
-          <a:p>
-            <a:pPr marL="0" marR="0" indent="0" algn="l" rtl="0">
-              <a:lnSpc>
-                <a:spcPct val="100000"/>
-              </a:lnSpc>
-              <a:spcBef>
-                <a:spcPts val="0"/>
-              </a:spcBef>
-              <a:spcAft>
-                <a:spcPts val="800"/>
-              </a:spcAft>
-              <a:buNone/>
-            </a:pPr>
-            <a:r>
-              <a:rPr sz="1800">
-                <a:solidFill>
-                  <a:srgbClr val="3A3A3A"/>
-                </a:solidFill>
-                <a:latin typeface="Roboto Condensed"/>
-              </a:rPr>
-              <a:t>• El Internet de las Cosas (IoT)</a:t>
-            </a:r>
-            <a:endParaRPr dirty="0"/>
-          </a:p>
-          <a:p>
-            <a:pPr marL="0" marR="0" indent="0" algn="l" rtl="0">
-              <a:lnSpc>
-                <a:spcPct val="100000"/>
-              </a:lnSpc>
-              <a:spcBef>
-                <a:spcPts val="0"/>
-              </a:spcBef>
-              <a:spcAft>
-                <a:spcPts val="800"/>
-              </a:spcAft>
-              <a:buNone/>
-            </a:pPr>
-            <a:r>
-              <a:rPr sz="1800">
-                <a:solidFill>
-                  <a:srgbClr val="3A3A3A"/>
-                </a:solidFill>
-                <a:latin typeface="Roboto Condensed"/>
-              </a:rPr>
-              <a:t>– Caso de estudio: John Deere y la Agricultura 4.0</a:t>
-            </a:r>
-            <a:endParaRPr dirty="0"/>
-          </a:p>
-          <a:p>
-            <a:pPr marL="0" marR="0" indent="0" algn="l" rtl="0">
-              <a:lnSpc>
-                <a:spcPct val="100000"/>
-              </a:lnSpc>
-              <a:spcBef>
-                <a:spcPts val="0"/>
-              </a:spcBef>
-              <a:spcAft>
-                <a:spcPts val="800"/>
-              </a:spcAft>
-              <a:buNone/>
-            </a:pPr>
-            <a:r>
-              <a:rPr sz="1800">
-                <a:solidFill>
-                  <a:srgbClr val="3A3A3A"/>
-                </a:solidFill>
-                <a:latin typeface="Roboto Condensed"/>
-              </a:rPr>
-              <a:t>• Blockchain</a:t>
-            </a:r>
-            <a:endParaRPr dirty="0"/>
-          </a:p>
-          <a:p>
-            <a:pPr marL="0" marR="0" indent="0" algn="l" rtl="0">
-              <a:lnSpc>
-                <a:spcPct val="100000"/>
-              </a:lnSpc>
-              <a:spcBef>
-                <a:spcPts val="0"/>
-              </a:spcBef>
-              <a:spcAft>
-                <a:spcPts val="800"/>
-              </a:spcAft>
-              <a:buNone/>
-            </a:pPr>
-            <a:r>
-              <a:rPr sz="1800">
-                <a:solidFill>
-                  <a:srgbClr val="3A3A3A"/>
-                </a:solidFill>
-                <a:latin typeface="Roboto Condensed"/>
-              </a:rPr>
-              <a:t>– Caso de estudio: IBM Food Trust, Walmart y la cadena de suministro</a:t>
-            </a:r>
-            <a:endParaRPr dirty="0"/>
-          </a:p>
-          <a:p>
-            <a:pPr marL="0" marR="0" indent="0" algn="l" rtl="0">
-              <a:lnSpc>
-                <a:spcPct val="100000"/>
-              </a:lnSpc>
-              <a:spcBef>
-                <a:spcPts val="0"/>
-              </a:spcBef>
-              <a:spcAft>
-                <a:spcPts val="800"/>
-              </a:spcAft>
-              <a:buNone/>
-            </a:pPr>
-            <a:r>
-              <a:rPr sz="1800">
-                <a:solidFill>
-                  <a:srgbClr val="3A3A3A"/>
-                </a:solidFill>
-                <a:latin typeface="Roboto Condensed"/>
-              </a:rPr>
-              <a:t>• Ética, privacidad y normativa: hilo transversal del diplomado</a:t>
-            </a:r>
-            <a:endParaRPr dirty="0"/>
-          </a:p>
-        </p:txBody>
-      </p:sp>
-      <p:pic>
-        <p:nvPicPr>
-          <p:cNvPr id="252" name="Google Shape;252;p38"/>
-          <p:cNvPicPr preferRelativeResize="0"/>
-          <p:nvPr/>
-        </p:nvPicPr>
-        <p:blipFill rotWithShape="1">
-          <a:blip r:embed="rId2">
-            <a:alphaModFix/>
-          </a:blip>
-          <a:srcRect/>
-          <a:stretch/>
-        </p:blipFill>
-        <p:spPr>
-          <a:xfrm>
-            <a:off x="10120580" y="230187"/>
-            <a:ext cx="1866726" cy="590083"/>
-          </a:xfrm>
-          <a:prstGeom prst="rect">
-            <a:avLst/>
-          </a:prstGeom>
-          <a:noFill/>
-          <a:ln>
-            <a:noFill/>
-          </a:ln>
-        </p:spPr>
-      </p:pic>
-      <p:sp>
-        <p:nvSpPr>
-          <p:cNvPr id="2" name="Marcador de número de diapositiva 2">
-            <a:extLst>
-              <a:ext uri="{FF2B5EF4-FFF2-40B4-BE49-F238E27FC236}">
-                <a16:creationId xmlns:a16="http://schemas.microsoft.com/office/drawing/2014/main" id="{9E2EBC40-EC40-BDF2-F68A-0BA88B712A11}"/>
-              </a:ext>
-            </a:extLst>
-          </p:cNvPr>
-          <p:cNvSpPr txBox="1">
-            <a:spLocks/>
-          </p:cNvSpPr>
-          <p:nvPr/>
-        </p:nvSpPr>
-        <p:spPr>
-          <a:xfrm>
-            <a:off x="8610600" y="6356351"/>
-            <a:ext cx="2743200" cy="365125"/>
-          </a:xfrm>
-          <a:prstGeom prst="rect">
-            <a:avLst/>
-          </a:prstGeom>
-        </p:spPr>
-        <p:txBody>
-          <a:bodyPr/>
-          <a:lstStyle>
-            <a:defPPr marR="0" lvl="0" algn="l" rtl="0">
-              <a:lnSpc>
-                <a:spcPct val="100000"/>
-              </a:lnSpc>
-              <a:spcBef>
-                <a:spcPts val="0"/>
-              </a:spcBef>
-              <a:spcAft>
-                <a:spcPts val="0"/>
-              </a:spcAft>
-            </a:defPPr>
-            <a:lvl1pPr marR="0" lvl="0" algn="l" rtl="0">
-              <a:lnSpc>
-                <a:spcPct val="100000"/>
-              </a:lnSpc>
-              <a:spcBef>
-                <a:spcPts val="0"/>
-              </a:spcBef>
-              <a:spcAft>
-                <a:spcPts val="0"/>
-              </a:spcAft>
-              <a:buClr>
-                <a:srgbClr val="000000"/>
-              </a:buClr>
-              <a:buFont typeface="Arial"/>
-              <a:defRPr sz="1400" b="0" i="0" u="none" strike="noStrike" cap="none">
-                <a:solidFill>
-                  <a:srgbClr val="000000"/>
-                </a:solidFill>
-                <a:latin typeface="Arial"/>
-                <a:ea typeface="Arial"/>
-                <a:cs typeface="Arial"/>
-                <a:sym typeface="Arial"/>
-              </a:defRPr>
-            </a:lvl1pPr>
-            <a:lvl2pPr marR="0" lvl="1" algn="l" rtl="0">
-              <a:lnSpc>
-                <a:spcPct val="100000"/>
-              </a:lnSpc>
-              <a:spcBef>
-                <a:spcPts val="0"/>
-              </a:spcBef>
-              <a:spcAft>
-                <a:spcPts val="0"/>
-              </a:spcAft>
-              <a:buClr>
-                <a:srgbClr val="000000"/>
-              </a:buClr>
-              <a:buFont typeface="Arial"/>
-              <a:defRPr sz="1400" b="0" i="0" u="none" strike="noStrike" cap="none">
-                <a:solidFill>
-                  <a:srgbClr val="000000"/>
-                </a:solidFill>
-                <a:latin typeface="Arial"/>
-                <a:ea typeface="Arial"/>
-                <a:cs typeface="Arial"/>
-                <a:sym typeface="Arial"/>
-              </a:defRPr>
-            </a:lvl2pPr>
-            <a:lvl3pPr marR="0" lvl="2" algn="l" rtl="0">
-              <a:lnSpc>
-                <a:spcPct val="100000"/>
-              </a:lnSpc>
-              <a:spcBef>
-                <a:spcPts val="0"/>
-              </a:spcBef>
-              <a:spcAft>
-                <a:spcPts val="0"/>
-              </a:spcAft>
-              <a:buClr>
-                <a:srgbClr val="000000"/>
-              </a:buClr>
-              <a:buFont typeface="Arial"/>
-              <a:defRPr sz="1400" b="0" i="0" u="none" strike="noStrike" cap="none">
-                <a:solidFill>
-                  <a:srgbClr val="000000"/>
-                </a:solidFill>
-                <a:latin typeface="Arial"/>
-                <a:ea typeface="Arial"/>
-                <a:cs typeface="Arial"/>
-                <a:sym typeface="Arial"/>
-              </a:defRPr>
-            </a:lvl3pPr>
-            <a:lvl4pPr marR="0" lvl="3" algn="l" rtl="0">
-              <a:lnSpc>
-                <a:spcPct val="100000"/>
-              </a:lnSpc>
-              <a:spcBef>
-                <a:spcPts val="0"/>
-              </a:spcBef>
-              <a:spcAft>
-                <a:spcPts val="0"/>
-              </a:spcAft>
-              <a:buClr>
-                <a:srgbClr val="000000"/>
-              </a:buClr>
-              <a:buFont typeface="Arial"/>
-              <a:defRPr sz="1400" b="0" i="0" u="none" strike="noStrike" cap="none">
-                <a:solidFill>
-                  <a:srgbClr val="000000"/>
-                </a:solidFill>
-                <a:latin typeface="Arial"/>
-                <a:ea typeface="Arial"/>
-                <a:cs typeface="Arial"/>
-                <a:sym typeface="Arial"/>
-              </a:defRPr>
-            </a:lvl4pPr>
-            <a:lvl5pPr marR="0" lvl="4" algn="l" rtl="0">
-              <a:lnSpc>
-                <a:spcPct val="100000"/>
-              </a:lnSpc>
-              <a:spcBef>
-                <a:spcPts val="0"/>
-              </a:spcBef>
-              <a:spcAft>
-                <a:spcPts val="0"/>
-              </a:spcAft>
-              <a:buClr>
-                <a:srgbClr val="000000"/>
-              </a:buClr>
-              <a:buFont typeface="Arial"/>
-              <a:defRPr sz="1400" b="0" i="0" u="none" strike="noStrike" cap="none">
-                <a:solidFill>
-                  <a:srgbClr val="000000"/>
-                </a:solidFill>
-                <a:latin typeface="Arial"/>
-                <a:ea typeface="Arial"/>
-                <a:cs typeface="Arial"/>
-                <a:sym typeface="Arial"/>
-              </a:defRPr>
-            </a:lvl5pPr>
-            <a:lvl6pPr marR="0" lvl="5" algn="l" rtl="0">
-              <a:lnSpc>
-                <a:spcPct val="100000"/>
-              </a:lnSpc>
-              <a:spcBef>
-                <a:spcPts val="0"/>
-              </a:spcBef>
-              <a:spcAft>
-                <a:spcPts val="0"/>
-              </a:spcAft>
-              <a:buClr>
-                <a:srgbClr val="000000"/>
-              </a:buClr>
-              <a:buFont typeface="Arial"/>
-              <a:defRPr sz="1400" b="0" i="0" u="none" strike="noStrike" cap="none">
-                <a:solidFill>
-                  <a:srgbClr val="000000"/>
-                </a:solidFill>
-                <a:latin typeface="Arial"/>
-                <a:ea typeface="Arial"/>
-                <a:cs typeface="Arial"/>
-                <a:sym typeface="Arial"/>
-              </a:defRPr>
-            </a:lvl6pPr>
-            <a:lvl7pPr marR="0" lvl="6" algn="l" rtl="0">
-              <a:lnSpc>
-                <a:spcPct val="100000"/>
-              </a:lnSpc>
-              <a:spcBef>
-                <a:spcPts val="0"/>
-              </a:spcBef>
-              <a:spcAft>
-                <a:spcPts val="0"/>
-              </a:spcAft>
-              <a:buClr>
-                <a:srgbClr val="000000"/>
-              </a:buClr>
-              <a:buFont typeface="Arial"/>
-              <a:defRPr sz="1400" b="0" i="0" u="none" strike="noStrike" cap="none">
-                <a:solidFill>
-                  <a:srgbClr val="000000"/>
-                </a:solidFill>
-                <a:latin typeface="Arial"/>
-                <a:ea typeface="Arial"/>
-                <a:cs typeface="Arial"/>
-                <a:sym typeface="Arial"/>
-              </a:defRPr>
-            </a:lvl7pPr>
-            <a:lvl8pPr marR="0" lvl="7" algn="l" rtl="0">
-              <a:lnSpc>
-                <a:spcPct val="100000"/>
-              </a:lnSpc>
-              <a:spcBef>
-                <a:spcPts val="0"/>
-              </a:spcBef>
-              <a:spcAft>
-                <a:spcPts val="0"/>
-              </a:spcAft>
-              <a:buClr>
-                <a:srgbClr val="000000"/>
-              </a:buClr>
-              <a:buFont typeface="Arial"/>
-              <a:defRPr sz="1400" b="0" i="0" u="none" strike="noStrike" cap="none">
-                <a:solidFill>
-                  <a:srgbClr val="000000"/>
-                </a:solidFill>
-                <a:latin typeface="Arial"/>
-                <a:ea typeface="Arial"/>
-                <a:cs typeface="Arial"/>
-                <a:sym typeface="Arial"/>
-              </a:defRPr>
-            </a:lvl8pPr>
-            <a:lvl9pPr marR="0" lvl="8" algn="l" rtl="0">
-              <a:lnSpc>
-                <a:spcPct val="100000"/>
-              </a:lnSpc>
-              <a:spcBef>
-                <a:spcPts val="0"/>
-              </a:spcBef>
-              <a:spcAft>
-                <a:spcPts val="0"/>
-              </a:spcAft>
-              <a:buClr>
-                <a:srgbClr val="000000"/>
-              </a:buClr>
-              <a:buFont typeface="Arial"/>
-              <a:defRPr sz="1400" b="0" i="0" u="none" strike="noStrike" cap="none">
-                <a:solidFill>
-                  <a:srgbClr val="000000"/>
-                </a:solidFill>
-                <a:latin typeface="Arial"/>
-                <a:ea typeface="Arial"/>
-                <a:cs typeface="Arial"/>
-                <a:sym typeface="Arial"/>
-              </a:defRPr>
-            </a:lvl9pPr>
-          </a:lstStyle>
-          <a:p>
-            <a:pPr algn="r"/>
-            <a:r>
-              <a:t>3</a:t>
-            </a:r>
-            <a:endParaRPr lang="en-US"/>
-          </a:p>
-        </p:txBody>
-      </p:sp>
-    </p:spTree>
-  </p:cSld>
-  <p:clrMapOvr>
-    <a:masterClrMapping/>
-  </p:clrMapOvr>
-</p:sld>
-</file>
-
-<file path=ppt/slides/slide30.xml><?xml version="1.0" encoding="utf-8"?>
-<p:sld xmlns:a="http://schemas.openxmlformats.org/drawingml/2006/main" xmlns:p="http://schemas.openxmlformats.org/presentationml/2006/main" xmlns:r="http://schemas.openxmlformats.org/officeDocument/2006/relationships">
-  <p:cSld>
-    <p:spTree>
-      <p:nvGrpSpPr>
-        <p:cNvPr id="1" name=""/>
-        <p:cNvGrpSpPr/>
-        <p:nvPr/>
-      </p:nvGrpSpPr>
-      <p:grpSpPr/>
-      <p:sp>
-        <p:nvSpPr>
-          <p:cNvPr id="240" name="Google Shape;240;p38"/>
-          <p:cNvSpPr/>
-          <p:nvPr/>
-        </p:nvSpPr>
-        <p:spPr>
-          <a:xfrm>
-            <a:off x="853440" y="790892"/>
-            <a:ext cx="9055100" cy="731520"/>
-          </a:xfrm>
-          <a:prstGeom prst="rect">
-            <a:avLst/>
-          </a:prstGeom>
-          <a:noFill/>
-          <a:ln>
-            <a:noFill/>
-          </a:ln>
-        </p:spPr>
-        <p:txBody>
-          <a:bodyPr spcFirstLastPara="1" wrap="square" lIns="91425" tIns="45700" rIns="91425" bIns="45700" anchor="ctr" anchorCtr="0">
-            <a:noAutofit/>
-          </a:bodyPr>
-          <a:lstStyle/>
-          <a:p>
-            <a:pPr marL="0" marR="0" lvl="0" indent="0" algn="l" rtl="0">
-              <a:lnSpc>
-                <a:spcPct val="100000"/>
-              </a:lnSpc>
-              <a:spcBef>
-                <a:spcPts val="0"/>
-              </a:spcBef>
-              <a:spcAft>
-                <a:spcPts val="0"/>
-              </a:spcAft>
-              <a:buNone/>
-            </a:pPr>
-            <a:r>
-              <a:rPr lang="en-US" sz="4400" dirty="0">
-                <a:solidFill>
-                  <a:srgbClr val="3A3A3A"/>
-                </a:solidFill>
-                <a:latin typeface="Roboto Condensed Medium"/>
-                <a:ea typeface="Roboto Condensed Medium"/>
-                <a:cs typeface="Roboto Condensed Medium"/>
-                <a:sym typeface="Roboto Condensed Medium"/>
-              </a:rPr>
-              <a:t>Caso: IBM Food Trust y Walmart</a:t>
-            </a:r>
-            <a:endParaRPr dirty="0"/>
-          </a:p>
-        </p:txBody>
-      </p:sp>
-      <p:sp>
-        <p:nvSpPr>
-          <p:cNvPr id="241" name="Google Shape;241;p38"/>
-          <p:cNvSpPr/>
-          <p:nvPr/>
-        </p:nvSpPr>
-        <p:spPr>
-          <a:xfrm>
-            <a:off x="889446" y="2014379"/>
-            <a:ext cx="9385264" cy="3413760"/>
-          </a:xfrm>
-          <a:prstGeom prst="rect">
-            <a:avLst/>
-          </a:prstGeom>
-          <a:noFill/>
-          <a:ln>
-            <a:noFill/>
-          </a:ln>
-        </p:spPr>
-        <p:txBody>
-          <a:bodyPr spcFirstLastPara="1" wrap="square" lIns="91425" tIns="45700" rIns="91425" bIns="45700" anchor="t" anchorCtr="0">
-            <a:noAutofit/>
-          </a:bodyPr>
-          <a:lstStyle/>
-          <a:p>
-            <a:pPr marL="0" marR="0" indent="0" algn="l" rtl="0">
-              <a:lnSpc>
-                <a:spcPct val="100000"/>
-              </a:lnSpc>
-              <a:spcBef>
-                <a:spcPts val="0"/>
-              </a:spcBef>
-              <a:spcAft>
-                <a:spcPts val="800"/>
-              </a:spcAft>
-              <a:buNone/>
-            </a:pPr>
-            <a:r>
-              <a:rPr sz="2000">
+              <a:rPr sz="1500">
                 <a:solidFill>
                   <a:srgbClr val="3A3A3A"/>
                 </a:solidFill>
@@ -49555,11 +53649,11 @@
           <a:p>
             <a:pPr>
               <a:spcAft>
-                <a:spcPts val="800"/>
+                <a:spcPts val="600"/>
               </a:spcAft>
             </a:pPr>
             <a:r>
-              <a:rPr sz="2000">
+              <a:rPr sz="1500">
                 <a:solidFill>
                   <a:srgbClr val="3A3A3A"/>
                 </a:solidFill>
@@ -49571,11 +53665,11 @@
           <a:p>
             <a:pPr>
               <a:spcAft>
-                <a:spcPts val="800"/>
+                <a:spcPts val="600"/>
               </a:spcAft>
             </a:pPr>
             <a:r>
-              <a:rPr sz="2000">
+              <a:rPr sz="1500">
                 <a:solidFill>
                   <a:srgbClr val="3A3A3A"/>
                 </a:solidFill>
@@ -49587,11 +53681,11 @@
           <a:p>
             <a:pPr>
               <a:spcAft>
-                <a:spcPts val="800"/>
+                <a:spcPts val="600"/>
               </a:spcAft>
             </a:pPr>
             <a:r>
-              <a:rPr sz="2000">
+              <a:rPr sz="1500">
                 <a:solidFill>
                   <a:srgbClr val="3A3A3A"/>
                 </a:solidFill>
@@ -49603,11 +53697,11 @@
           <a:p>
             <a:pPr>
               <a:spcAft>
-                <a:spcPts val="800"/>
+                <a:spcPts val="600"/>
               </a:spcAft>
             </a:pPr>
             <a:r>
-              <a:rPr sz="2000">
+              <a:rPr sz="1500">
                 <a:solidFill>
                   <a:srgbClr val="3A3A3A"/>
                 </a:solidFill>
@@ -49625,12 +53719,12 @@
                 <a:spcPts val="0"/>
               </a:spcBef>
               <a:spcAft>
-                <a:spcPts val="800"/>
+                <a:spcPts val="600"/>
               </a:spcAft>
               <a:buNone/>
             </a:pPr>
             <a:r>
-              <a:rPr sz="2000">
+              <a:rPr sz="1500">
                 <a:solidFill>
                   <a:srgbClr val="3A3A3A"/>
                 </a:solidFill>
@@ -49649,12 +53743,12 @@
                 <a:spcPts val="0"/>
               </a:spcBef>
               <a:spcAft>
-                <a:spcPts val="800"/>
+                <a:spcPts val="600"/>
               </a:spcAft>
               <a:buNone/>
             </a:pPr>
             <a:r>
-              <a:rPr sz="1200" i="1">
+              <a:rPr sz="1500" i="1">
                 <a:solidFill>
                   <a:srgbClr val="3A3A3A"/>
                 </a:solidFill>
@@ -49950,9 +54044,435 @@
           <a:p>
             <a:pPr algn="r"/>
             <a:r>
-              <a:t>30</a:t>
+              <a:t>31</a:t>
             </a:r>
             <a:endParaRPr lang="en-US"/>
+          </a:p>
+        </p:txBody>
+      </p:sp>
+      <p:sp>
+        <p:nvSpPr>
+          <p:cNvPr id="253" name="Rounded Rectangle 252"/>
+          <p:cNvSpPr/>
+          <p:nvPr/>
+        </p:nvSpPr>
+        <p:spPr>
+          <a:xfrm>
+            <a:off x="7550000" y="2500000"/>
+            <a:ext cx="780000" cy="600000"/>
+          </a:xfrm>
+          <a:prstGeom prst="roundRect">
+            <a:avLst/>
+          </a:prstGeom>
+          <a:solidFill>
+            <a:srgbClr val="156082"/>
+          </a:solidFill>
+          <a:ln>
+            <a:noFill/>
+          </a:ln>
+          <a:effectLst/>
+        </p:spPr>
+        <p:style>
+          <a:lnRef idx="1">
+            <a:schemeClr val="accent1"/>
+          </a:lnRef>
+          <a:fillRef idx="3">
+            <a:schemeClr val="accent1"/>
+          </a:fillRef>
+          <a:effectRef idx="2">
+            <a:schemeClr val="accent1"/>
+          </a:effectRef>
+          <a:fontRef idx="minor">
+            <a:schemeClr val="lt1"/>
+          </a:fontRef>
+        </p:style>
+        <p:txBody>
+          <a:bodyPr rtlCol="0" anchor="ctr" wrap="square" lIns="18000" rIns="18000" tIns="9000" bIns="9000"/>
+          <a:lstStyle/>
+          <a:p>
+            <a:pPr algn="ctr"/>
+            <a:r>
+              <a:rPr sz="900" b="1">
+                <a:solidFill>
+                  <a:srgbClr val="FFFFFF"/>
+                </a:solidFill>
+                <a:latin typeface="Roboto Condensed"/>
+              </a:rPr>
+              <a:t>Granja</a:t>
+            </a:r>
+          </a:p>
+        </p:txBody>
+      </p:sp>
+      <p:sp>
+        <p:nvSpPr>
+          <p:cNvPr id="254" name="Rounded Rectangle 253"/>
+          <p:cNvSpPr/>
+          <p:nvPr/>
+        </p:nvSpPr>
+        <p:spPr>
+          <a:xfrm>
+            <a:off x="8510000" y="2500000"/>
+            <a:ext cx="780000" cy="600000"/>
+          </a:xfrm>
+          <a:prstGeom prst="roundRect">
+            <a:avLst/>
+          </a:prstGeom>
+          <a:solidFill>
+            <a:srgbClr val="156082"/>
+          </a:solidFill>
+          <a:ln>
+            <a:noFill/>
+          </a:ln>
+          <a:effectLst/>
+        </p:spPr>
+        <p:style>
+          <a:lnRef idx="1">
+            <a:schemeClr val="accent1"/>
+          </a:lnRef>
+          <a:fillRef idx="3">
+            <a:schemeClr val="accent1"/>
+          </a:fillRef>
+          <a:effectRef idx="2">
+            <a:schemeClr val="accent1"/>
+          </a:effectRef>
+          <a:fontRef idx="minor">
+            <a:schemeClr val="lt1"/>
+          </a:fontRef>
+        </p:style>
+        <p:txBody>
+          <a:bodyPr rtlCol="0" anchor="ctr" wrap="square" lIns="18000" rIns="18000" tIns="9000" bIns="9000"/>
+          <a:lstStyle/>
+          <a:p>
+            <a:pPr algn="ctr"/>
+            <a:r>
+              <a:rPr sz="900" b="1">
+                <a:solidFill>
+                  <a:srgbClr val="FFFFFF"/>
+                </a:solidFill>
+                <a:latin typeface="Roboto Condensed"/>
+              </a:rPr>
+              <a:t>Planta</a:t>
+            </a:r>
+          </a:p>
+        </p:txBody>
+      </p:sp>
+      <p:cxnSp>
+        <p:nvCxnSpPr>
+          <p:cNvPr id="255" name="Connector 254"/>
+          <p:cNvCxnSpPr/>
+          <p:nvPr/>
+        </p:nvCxnSpPr>
+        <p:spPr>
+          <a:xfrm>
+            <a:off x="8330000" y="2800000"/>
+            <a:ext cx="180000" cy="0"/>
+          </a:xfrm>
+          <a:prstGeom prst="line">
+            <a:avLst/>
+          </a:prstGeom>
+          <a:ln w="15240">
+            <a:solidFill>
+              <a:srgbClr val="3A3A3A"/>
+            </a:solidFill>
+            <a:tailEnd type="triangle" w="med" len="med"/>
+          </a:ln>
+        </p:spPr>
+        <p:style>
+          <a:lnRef idx="2">
+            <a:schemeClr val="accent1"/>
+          </a:lnRef>
+          <a:fillRef idx="0">
+            <a:schemeClr val="accent1"/>
+          </a:fillRef>
+          <a:effectRef idx="1">
+            <a:schemeClr val="accent1"/>
+          </a:effectRef>
+          <a:fontRef idx="minor">
+            <a:schemeClr val="tx1"/>
+          </a:fontRef>
+        </p:style>
+      </p:cxnSp>
+      <p:sp>
+        <p:nvSpPr>
+          <p:cNvPr id="256" name="Rounded Rectangle 255"/>
+          <p:cNvSpPr/>
+          <p:nvPr/>
+        </p:nvSpPr>
+        <p:spPr>
+          <a:xfrm>
+            <a:off x="9470000" y="2500000"/>
+            <a:ext cx="780000" cy="600000"/>
+          </a:xfrm>
+          <a:prstGeom prst="roundRect">
+            <a:avLst/>
+          </a:prstGeom>
+          <a:solidFill>
+            <a:srgbClr val="156082"/>
+          </a:solidFill>
+          <a:ln>
+            <a:noFill/>
+          </a:ln>
+          <a:effectLst/>
+        </p:spPr>
+        <p:style>
+          <a:lnRef idx="1">
+            <a:schemeClr val="accent1"/>
+          </a:lnRef>
+          <a:fillRef idx="3">
+            <a:schemeClr val="accent1"/>
+          </a:fillRef>
+          <a:effectRef idx="2">
+            <a:schemeClr val="accent1"/>
+          </a:effectRef>
+          <a:fontRef idx="minor">
+            <a:schemeClr val="lt1"/>
+          </a:fontRef>
+        </p:style>
+        <p:txBody>
+          <a:bodyPr rtlCol="0" anchor="ctr" wrap="square" lIns="18000" rIns="18000" tIns="9000" bIns="9000"/>
+          <a:lstStyle/>
+          <a:p>
+            <a:pPr algn="ctr"/>
+            <a:r>
+              <a:rPr sz="900" b="1">
+                <a:solidFill>
+                  <a:srgbClr val="FFFFFF"/>
+                </a:solidFill>
+                <a:latin typeface="Roboto Condensed"/>
+              </a:rPr>
+              <a:t>Transporte</a:t>
+            </a:r>
+          </a:p>
+        </p:txBody>
+      </p:sp>
+      <p:cxnSp>
+        <p:nvCxnSpPr>
+          <p:cNvPr id="257" name="Connector 256"/>
+          <p:cNvCxnSpPr/>
+          <p:nvPr/>
+        </p:nvCxnSpPr>
+        <p:spPr>
+          <a:xfrm>
+            <a:off x="9290000" y="2800000"/>
+            <a:ext cx="180000" cy="0"/>
+          </a:xfrm>
+          <a:prstGeom prst="line">
+            <a:avLst/>
+          </a:prstGeom>
+          <a:ln w="15240">
+            <a:solidFill>
+              <a:srgbClr val="3A3A3A"/>
+            </a:solidFill>
+            <a:tailEnd type="triangle" w="med" len="med"/>
+          </a:ln>
+        </p:spPr>
+        <p:style>
+          <a:lnRef idx="2">
+            <a:schemeClr val="accent1"/>
+          </a:lnRef>
+          <a:fillRef idx="0">
+            <a:schemeClr val="accent1"/>
+          </a:fillRef>
+          <a:effectRef idx="1">
+            <a:schemeClr val="accent1"/>
+          </a:effectRef>
+          <a:fontRef idx="minor">
+            <a:schemeClr val="tx1"/>
+          </a:fontRef>
+        </p:style>
+      </p:cxnSp>
+      <p:sp>
+        <p:nvSpPr>
+          <p:cNvPr id="258" name="Rounded Rectangle 257"/>
+          <p:cNvSpPr/>
+          <p:nvPr/>
+        </p:nvSpPr>
+        <p:spPr>
+          <a:xfrm>
+            <a:off x="10430000" y="2500000"/>
+            <a:ext cx="780000" cy="600000"/>
+          </a:xfrm>
+          <a:prstGeom prst="roundRect">
+            <a:avLst/>
+          </a:prstGeom>
+          <a:solidFill>
+            <a:srgbClr val="156082"/>
+          </a:solidFill>
+          <a:ln>
+            <a:noFill/>
+          </a:ln>
+          <a:effectLst/>
+        </p:spPr>
+        <p:style>
+          <a:lnRef idx="1">
+            <a:schemeClr val="accent1"/>
+          </a:lnRef>
+          <a:fillRef idx="3">
+            <a:schemeClr val="accent1"/>
+          </a:fillRef>
+          <a:effectRef idx="2">
+            <a:schemeClr val="accent1"/>
+          </a:effectRef>
+          <a:fontRef idx="minor">
+            <a:schemeClr val="lt1"/>
+          </a:fontRef>
+        </p:style>
+        <p:txBody>
+          <a:bodyPr rtlCol="0" anchor="ctr" wrap="square" lIns="18000" rIns="18000" tIns="9000" bIns="9000"/>
+          <a:lstStyle/>
+          <a:p>
+            <a:pPr algn="ctr"/>
+            <a:r>
+              <a:rPr sz="900" b="1">
+                <a:solidFill>
+                  <a:srgbClr val="FFFFFF"/>
+                </a:solidFill>
+                <a:latin typeface="Roboto Condensed"/>
+              </a:rPr>
+              <a:t>Tienda</a:t>
+            </a:r>
+          </a:p>
+        </p:txBody>
+      </p:sp>
+      <p:cxnSp>
+        <p:nvCxnSpPr>
+          <p:cNvPr id="259" name="Connector 258"/>
+          <p:cNvCxnSpPr/>
+          <p:nvPr/>
+        </p:nvCxnSpPr>
+        <p:spPr>
+          <a:xfrm>
+            <a:off x="10250000" y="2800000"/>
+            <a:ext cx="180000" cy="0"/>
+          </a:xfrm>
+          <a:prstGeom prst="line">
+            <a:avLst/>
+          </a:prstGeom>
+          <a:ln w="15240">
+            <a:solidFill>
+              <a:srgbClr val="3A3A3A"/>
+            </a:solidFill>
+            <a:tailEnd type="triangle" w="med" len="med"/>
+          </a:ln>
+        </p:spPr>
+        <p:style>
+          <a:lnRef idx="2">
+            <a:schemeClr val="accent1"/>
+          </a:lnRef>
+          <a:fillRef idx="0">
+            <a:schemeClr val="accent1"/>
+          </a:fillRef>
+          <a:effectRef idx="1">
+            <a:schemeClr val="accent1"/>
+          </a:effectRef>
+          <a:fontRef idx="minor">
+            <a:schemeClr val="tx1"/>
+          </a:fontRef>
+        </p:style>
+      </p:cxnSp>
+      <p:cxnSp>
+        <p:nvCxnSpPr>
+          <p:cNvPr id="260" name="Connector 259"/>
+          <p:cNvCxnSpPr/>
+          <p:nvPr/>
+        </p:nvCxnSpPr>
+        <p:spPr>
+          <a:xfrm>
+            <a:off x="7550000" y="2250000"/>
+            <a:ext cx="3480000" cy="0"/>
+          </a:xfrm>
+          <a:prstGeom prst="line">
+            <a:avLst/>
+          </a:prstGeom>
+          <a:ln w="25400">
+            <a:solidFill>
+              <a:srgbClr val="E97132"/>
+            </a:solidFill>
+            <a:prstDash val="dash"/>
+          </a:ln>
+        </p:spPr>
+        <p:style>
+          <a:lnRef idx="2">
+            <a:schemeClr val="accent1"/>
+          </a:lnRef>
+          <a:fillRef idx="0">
+            <a:schemeClr val="accent1"/>
+          </a:fillRef>
+          <a:effectRef idx="1">
+            <a:schemeClr val="accent1"/>
+          </a:effectRef>
+          <a:fontRef idx="minor">
+            <a:schemeClr val="tx1"/>
+          </a:fontRef>
+        </p:style>
+      </p:cxnSp>
+      <p:sp>
+        <p:nvSpPr>
+          <p:cNvPr id="261" name="TextBox 260"/>
+          <p:cNvSpPr txBox="1"/>
+          <p:nvPr/>
+        </p:nvSpPr>
+        <p:spPr>
+          <a:xfrm>
+            <a:off x="7550000" y="1950000"/>
+            <a:ext cx="3400000" cy="260000"/>
+          </a:xfrm>
+          <a:prstGeom prst="rect">
+            <a:avLst/>
+          </a:prstGeom>
+          <a:noFill/>
+        </p:spPr>
+        <p:txBody>
+          <a:bodyPr wrap="square" lIns="0" rIns="0" tIns="0" bIns="0">
+            <a:spAutoFit/>
+          </a:bodyPr>
+          <a:lstStyle/>
+          <a:p>
+            <a:pPr algn="ctr"/>
+            <a:r>
+              <a:rPr sz="900" b="1" i="0">
+                <a:solidFill>
+                  <a:srgbClr val="E97132"/>
+                </a:solidFill>
+                <a:latin typeface="Roboto Condensed"/>
+              </a:rPr>
+              <a:t>Registro compartido (blockchain)</a:t>
+            </a:r>
+          </a:p>
+        </p:txBody>
+      </p:sp>
+      <p:sp>
+        <p:nvSpPr>
+          <p:cNvPr id="262" name="TextBox 261"/>
+          <p:cNvSpPr txBox="1"/>
+          <p:nvPr/>
+        </p:nvSpPr>
+        <p:spPr>
+          <a:xfrm>
+            <a:off x="7550000" y="3450000"/>
+            <a:ext cx="3400000" cy="300000"/>
+          </a:xfrm>
+          <a:prstGeom prst="rect">
+            <a:avLst/>
+          </a:prstGeom>
+          <a:noFill/>
+        </p:spPr>
+        <p:txBody>
+          <a:bodyPr wrap="square" lIns="0" rIns="0" tIns="0" bIns="0">
+            <a:spAutoFit/>
+          </a:bodyPr>
+          <a:lstStyle/>
+          <a:p>
+            <a:pPr algn="ctr"/>
+            <a:r>
+              <a:rPr sz="1000" b="0" i="1">
+                <a:solidFill>
+                  <a:srgbClr val="3A3A3A"/>
+                </a:solidFill>
+                <a:latin typeface="Roboto Condensed"/>
+              </a:rPr>
+              <a:t>Referencial: trazabilidad de origen a punto de venta</a:t>
+            </a:r>
           </a:p>
         </p:txBody>
       </p:sp>
@@ -49964,7 +54484,7 @@
 </p:sld>
 </file>
 
-<file path=ppt/slides/slide31.xml><?xml version="1.0" encoding="utf-8"?>
+<file path=ppt/slides/slide32.xml><?xml version="1.0" encoding="utf-8"?>
 <p:sld xmlns:a="http://schemas.openxmlformats.org/drawingml/2006/main" xmlns:p="http://schemas.openxmlformats.org/presentationml/2006/main" xmlns:r="http://schemas.openxmlformats.org/officeDocument/2006/relationships">
   <p:cSld>
     <p:spTree>
@@ -50481,7 +55001,7 @@
           <a:p>
             <a:pPr algn="r"/>
             <a:r>
-              <a:t>31</a:t>
+              <a:t>32</a:t>
             </a:r>
             <a:endParaRPr lang="en-US"/>
           </a:p>
@@ -50495,7 +55015,7 @@
 </p:sld>
 </file>
 
-<file path=ppt/slides/slide32.xml><?xml version="1.0" encoding="utf-8"?>
+<file path=ppt/slides/slide33.xml><?xml version="1.0" encoding="utf-8"?>
 <p:sld xmlns:a="http://schemas.openxmlformats.org/drawingml/2006/main" xmlns:p="http://schemas.openxmlformats.org/presentationml/2006/main" xmlns:r="http://schemas.openxmlformats.org/officeDocument/2006/relationships">
   <p:cSld>
     <p:spTree>
@@ -50980,7 +55500,7 @@
           <a:p>
             <a:pPr algn="r"/>
             <a:r>
-              <a:t>32</a:t>
+              <a:t>33</a:t>
             </a:r>
             <a:endParaRPr lang="en-US"/>
           </a:p>
@@ -50994,7 +55514,7 @@
 </p:sld>
 </file>
 
-<file path=ppt/slides/slide33.xml><?xml version="1.0" encoding="utf-8"?>
+<file path=ppt/slides/slide34.xml><?xml version="1.0" encoding="utf-8"?>
 <p:sld xmlns:a="http://schemas.openxmlformats.org/drawingml/2006/main" xmlns:r="http://schemas.openxmlformats.org/officeDocument/2006/relationships" xmlns:p="http://schemas.openxmlformats.org/presentationml/2006/main">
   <p:cSld>
     <p:spTree>
@@ -51457,7 +55977,7 @@
               <a:buNone/>
             </a:pPr>
             <a:r>
-              <a:t>33</a:t>
+              <a:t>34</a:t>
             </a:r>
             <a:endParaRPr lang="en-US"/>
           </a:p>
@@ -51472,6 +55992,633 @@
 </file>
 
 <file path=ppt/slides/slide4.xml><?xml version="1.0" encoding="utf-8"?>
+<p:sld xmlns:a="http://schemas.openxmlformats.org/drawingml/2006/main" xmlns:p="http://schemas.openxmlformats.org/presentationml/2006/main" xmlns:r="http://schemas.openxmlformats.org/officeDocument/2006/relationships">
+  <p:cSld>
+    <p:spTree>
+      <p:nvGrpSpPr>
+        <p:cNvPr id="1" name=""/>
+        <p:cNvGrpSpPr/>
+        <p:nvPr/>
+      </p:nvGrpSpPr>
+      <p:grpSpPr/>
+      <p:sp>
+        <p:nvSpPr>
+          <p:cNvPr id="240" name="Google Shape;240;p38"/>
+          <p:cNvSpPr/>
+          <p:nvPr/>
+        </p:nvSpPr>
+        <p:spPr>
+          <a:xfrm>
+            <a:off x="853440" y="790892"/>
+            <a:ext cx="9055100" cy="731520"/>
+          </a:xfrm>
+          <a:prstGeom prst="rect">
+            <a:avLst/>
+          </a:prstGeom>
+          <a:noFill/>
+          <a:ln>
+            <a:noFill/>
+          </a:ln>
+        </p:spPr>
+        <p:txBody>
+          <a:bodyPr spcFirstLastPara="1" wrap="square" lIns="91425" tIns="45700" rIns="91425" bIns="45700" anchor="ctr" anchorCtr="0">
+            <a:noAutofit/>
+          </a:bodyPr>
+          <a:lstStyle/>
+          <a:p>
+            <a:pPr marL="0" marR="0" lvl="0" indent="0" algn="l" rtl="0">
+              <a:lnSpc>
+                <a:spcPct val="100000"/>
+              </a:lnSpc>
+              <a:spcBef>
+                <a:spcPts val="0"/>
+              </a:spcBef>
+              <a:spcAft>
+                <a:spcPts val="0"/>
+              </a:spcAft>
+              <a:buNone/>
+            </a:pPr>
+            <a:r>
+              <a:rPr lang="en-US" sz="4400" dirty="0">
+                <a:solidFill>
+                  <a:srgbClr val="3A3A3A"/>
+                </a:solidFill>
+                <a:latin typeface="Roboto Condensed Medium"/>
+                <a:ea typeface="Roboto Condensed Medium"/>
+                <a:cs typeface="Roboto Condensed Medium"/>
+                <a:sym typeface="Roboto Condensed Medium"/>
+              </a:rPr>
+              <a:t>Agenda de la clase</a:t>
+            </a:r>
+            <a:endParaRPr dirty="0"/>
+          </a:p>
+        </p:txBody>
+      </p:sp>
+      <p:sp>
+        <p:nvSpPr>
+          <p:cNvPr id="241" name="Google Shape;241;p38"/>
+          <p:cNvSpPr/>
+          <p:nvPr/>
+        </p:nvSpPr>
+        <p:spPr>
+          <a:xfrm>
+            <a:off x="889446" y="2014379"/>
+            <a:ext cx="9385264" cy="3413760"/>
+          </a:xfrm>
+          <a:prstGeom prst="rect">
+            <a:avLst/>
+          </a:prstGeom>
+          <a:noFill/>
+          <a:ln>
+            <a:noFill/>
+          </a:ln>
+        </p:spPr>
+        <p:txBody>
+          <a:bodyPr spcFirstLastPara="1" wrap="square" lIns="91425" tIns="45700" rIns="91425" bIns="45700" anchor="t" anchorCtr="0">
+            <a:noAutofit/>
+          </a:bodyPr>
+          <a:lstStyle/>
+          <a:p>
+            <a:pPr marL="0" marR="0" indent="0" algn="l" rtl="0">
+              <a:lnSpc>
+                <a:spcPct val="100000"/>
+              </a:lnSpc>
+              <a:spcBef>
+                <a:spcPts val="0"/>
+              </a:spcBef>
+              <a:spcAft>
+                <a:spcPts val="800"/>
+              </a:spcAft>
+              <a:buNone/>
+            </a:pPr>
+            <a:r>
+              <a:rPr sz="1800">
+                <a:solidFill>
+                  <a:srgbClr val="3A3A3A"/>
+                </a:solidFill>
+                <a:latin typeface="Roboto Condensed"/>
+              </a:rPr>
+              <a:t>• La digitalización en la organización pública y privada</a:t>
+            </a:r>
+            <a:endParaRPr dirty="0"/>
+          </a:p>
+          <a:p>
+            <a:pPr marL="0" marR="0" indent="0" algn="l" rtl="0">
+              <a:lnSpc>
+                <a:spcPct val="100000"/>
+              </a:lnSpc>
+              <a:spcBef>
+                <a:spcPts val="0"/>
+              </a:spcBef>
+              <a:spcAft>
+                <a:spcPts val="800"/>
+              </a:spcAft>
+              <a:buNone/>
+            </a:pPr>
+            <a:r>
+              <a:rPr sz="1800">
+                <a:solidFill>
+                  <a:srgbClr val="3A3A3A"/>
+                </a:solidFill>
+                <a:latin typeface="Roboto Condensed"/>
+              </a:rPr>
+              <a:t>– Caso comparativo: e-Estonia y la plataforma X-Road</a:t>
+            </a:r>
+            <a:endParaRPr dirty="0"/>
+          </a:p>
+          <a:p>
+            <a:pPr marL="0" marR="0" indent="0" algn="l" rtl="0">
+              <a:lnSpc>
+                <a:spcPct val="100000"/>
+              </a:lnSpc>
+              <a:spcBef>
+                <a:spcPts val="0"/>
+              </a:spcBef>
+              <a:spcAft>
+                <a:spcPts val="800"/>
+              </a:spcAft>
+              <a:buNone/>
+            </a:pPr>
+            <a:r>
+              <a:rPr sz="1800">
+                <a:solidFill>
+                  <a:srgbClr val="3A3A3A"/>
+                </a:solidFill>
+                <a:latin typeface="Roboto Condensed"/>
+              </a:rPr>
+              <a:t>– Demostración en vivo: recorrido por e-Estonia y datos abiertos del Estado de Chile</a:t>
+            </a:r>
+            <a:endParaRPr dirty="0"/>
+          </a:p>
+          <a:p>
+            <a:pPr marL="0" marR="0" indent="0" algn="l" rtl="0">
+              <a:lnSpc>
+                <a:spcPct val="100000"/>
+              </a:lnSpc>
+              <a:spcBef>
+                <a:spcPts val="0"/>
+              </a:spcBef>
+              <a:spcAft>
+                <a:spcPts val="800"/>
+              </a:spcAft>
+              <a:buNone/>
+            </a:pPr>
+            <a:r>
+              <a:rPr sz="1800">
+                <a:solidFill>
+                  <a:srgbClr val="3A3A3A"/>
+                </a:solidFill>
+                <a:latin typeface="Roboto Condensed"/>
+              </a:rPr>
+              <a:t>– Caso chileno: ClaveÚnica y la digitalización del Estado</a:t>
+            </a:r>
+            <a:endParaRPr dirty="0"/>
+          </a:p>
+          <a:p>
+            <a:pPr marL="0" marR="0" indent="0" algn="l" rtl="0">
+              <a:lnSpc>
+                <a:spcPct val="100000"/>
+              </a:lnSpc>
+              <a:spcBef>
+                <a:spcPts val="0"/>
+              </a:spcBef>
+              <a:spcAft>
+                <a:spcPts val="800"/>
+              </a:spcAft>
+              <a:buNone/>
+            </a:pPr>
+            <a:r>
+              <a:rPr sz="1800">
+                <a:solidFill>
+                  <a:srgbClr val="3A3A3A"/>
+                </a:solidFill>
+                <a:latin typeface="Roboto Condensed"/>
+              </a:rPr>
+              <a:t>• Inteligencia Artificial en la transformación digital</a:t>
+            </a:r>
+            <a:endParaRPr dirty="0"/>
+          </a:p>
+          <a:p>
+            <a:pPr marL="0" marR="0" indent="0" algn="l" rtl="0">
+              <a:lnSpc>
+                <a:spcPct val="100000"/>
+              </a:lnSpc>
+              <a:spcBef>
+                <a:spcPts val="0"/>
+              </a:spcBef>
+              <a:spcAft>
+                <a:spcPts val="800"/>
+              </a:spcAft>
+              <a:buNone/>
+            </a:pPr>
+            <a:r>
+              <a:rPr sz="1800">
+                <a:solidFill>
+                  <a:srgbClr val="3A3A3A"/>
+                </a:solidFill>
+                <a:latin typeface="Roboto Condensed"/>
+              </a:rPr>
+              <a:t>• El Internet de las Cosas (IoT)</a:t>
+            </a:r>
+            <a:endParaRPr dirty="0"/>
+          </a:p>
+          <a:p>
+            <a:pPr marL="0" marR="0" indent="0" algn="l" rtl="0">
+              <a:lnSpc>
+                <a:spcPct val="100000"/>
+              </a:lnSpc>
+              <a:spcBef>
+                <a:spcPts val="0"/>
+              </a:spcBef>
+              <a:spcAft>
+                <a:spcPts val="800"/>
+              </a:spcAft>
+              <a:buNone/>
+            </a:pPr>
+            <a:r>
+              <a:rPr sz="1800">
+                <a:solidFill>
+                  <a:srgbClr val="3A3A3A"/>
+                </a:solidFill>
+                <a:latin typeface="Roboto Condensed"/>
+              </a:rPr>
+              <a:t>– Caso de estudio: John Deere y la Agricultura 4.0</a:t>
+            </a:r>
+            <a:endParaRPr dirty="0"/>
+          </a:p>
+          <a:p>
+            <a:pPr marL="0" marR="0" indent="0" algn="l" rtl="0">
+              <a:lnSpc>
+                <a:spcPct val="100000"/>
+              </a:lnSpc>
+              <a:spcBef>
+                <a:spcPts val="0"/>
+              </a:spcBef>
+              <a:spcAft>
+                <a:spcPts val="800"/>
+              </a:spcAft>
+              <a:buNone/>
+            </a:pPr>
+            <a:r>
+              <a:rPr sz="1800">
+                <a:solidFill>
+                  <a:srgbClr val="3A3A3A"/>
+                </a:solidFill>
+                <a:latin typeface="Roboto Condensed"/>
+              </a:rPr>
+              <a:t>• Blockchain</a:t>
+            </a:r>
+            <a:endParaRPr dirty="0"/>
+          </a:p>
+          <a:p>
+            <a:pPr marL="0" marR="0" indent="0" algn="l" rtl="0">
+              <a:lnSpc>
+                <a:spcPct val="100000"/>
+              </a:lnSpc>
+              <a:spcBef>
+                <a:spcPts val="0"/>
+              </a:spcBef>
+              <a:spcAft>
+                <a:spcPts val="800"/>
+              </a:spcAft>
+              <a:buNone/>
+            </a:pPr>
+            <a:r>
+              <a:rPr sz="1800">
+                <a:solidFill>
+                  <a:srgbClr val="3A3A3A"/>
+                </a:solidFill>
+                <a:latin typeface="Roboto Condensed"/>
+              </a:rPr>
+              <a:t>– Caso de estudio: IBM Food Trust, Walmart y la cadena de suministro</a:t>
+            </a:r>
+            <a:endParaRPr dirty="0"/>
+          </a:p>
+          <a:p>
+            <a:pPr marL="0" marR="0" indent="0" algn="l" rtl="0">
+              <a:lnSpc>
+                <a:spcPct val="100000"/>
+              </a:lnSpc>
+              <a:spcBef>
+                <a:spcPts val="0"/>
+              </a:spcBef>
+              <a:spcAft>
+                <a:spcPts val="800"/>
+              </a:spcAft>
+              <a:buNone/>
+            </a:pPr>
+            <a:r>
+              <a:rPr sz="1800">
+                <a:solidFill>
+                  <a:srgbClr val="3A3A3A"/>
+                </a:solidFill>
+                <a:latin typeface="Roboto Condensed"/>
+              </a:rPr>
+              <a:t>• Ética, privacidad y normativa: hilo transversal del diplomado</a:t>
+            </a:r>
+            <a:endParaRPr dirty="0"/>
+          </a:p>
+        </p:txBody>
+      </p:sp>
+      <p:pic>
+        <p:nvPicPr>
+          <p:cNvPr id="252" name="Google Shape;252;p38"/>
+          <p:cNvPicPr preferRelativeResize="0"/>
+          <p:nvPr/>
+        </p:nvPicPr>
+        <p:blipFill rotWithShape="1">
+          <a:blip r:embed="rId2">
+            <a:alphaModFix/>
+          </a:blip>
+          <a:srcRect/>
+          <a:stretch/>
+        </p:blipFill>
+        <p:spPr>
+          <a:xfrm>
+            <a:off x="10120580" y="230187"/>
+            <a:ext cx="1866726" cy="590083"/>
+          </a:xfrm>
+          <a:prstGeom prst="rect">
+            <a:avLst/>
+          </a:prstGeom>
+          <a:noFill/>
+          <a:ln>
+            <a:noFill/>
+          </a:ln>
+        </p:spPr>
+      </p:pic>
+      <p:sp>
+        <p:nvSpPr>
+          <p:cNvPr id="2" name="Marcador de número de diapositiva 2">
+            <a:extLst>
+              <a:ext uri="{FF2B5EF4-FFF2-40B4-BE49-F238E27FC236}">
+                <a16:creationId xmlns:a16="http://schemas.microsoft.com/office/drawing/2014/main" id="{9E2EBC40-EC40-BDF2-F68A-0BA88B712A11}"/>
+              </a:ext>
+            </a:extLst>
+          </p:cNvPr>
+          <p:cNvSpPr txBox="1">
+            <a:spLocks/>
+          </p:cNvSpPr>
+          <p:nvPr/>
+        </p:nvSpPr>
+        <p:spPr>
+          <a:xfrm>
+            <a:off x="8610600" y="6356351"/>
+            <a:ext cx="2743200" cy="365125"/>
+          </a:xfrm>
+          <a:prstGeom prst="rect">
+            <a:avLst/>
+          </a:prstGeom>
+        </p:spPr>
+        <p:txBody>
+          <a:bodyPr/>
+          <a:lstStyle>
+            <a:defPPr marR="0" lvl="0" algn="l" rtl="0">
+              <a:lnSpc>
+                <a:spcPct val="100000"/>
+              </a:lnSpc>
+              <a:spcBef>
+                <a:spcPts val="0"/>
+              </a:spcBef>
+              <a:spcAft>
+                <a:spcPts val="0"/>
+              </a:spcAft>
+            </a:defPPr>
+            <a:lvl1pPr marR="0" lvl="0" algn="l" rtl="0">
+              <a:lnSpc>
+                <a:spcPct val="100000"/>
+              </a:lnSpc>
+              <a:spcBef>
+                <a:spcPts val="0"/>
+              </a:spcBef>
+              <a:spcAft>
+                <a:spcPts val="0"/>
+              </a:spcAft>
+              <a:buClr>
+                <a:srgbClr val="000000"/>
+              </a:buClr>
+              <a:buFont typeface="Arial"/>
+              <a:defRPr sz="1400" b="0" i="0" u="none" strike="noStrike" cap="none">
+                <a:solidFill>
+                  <a:srgbClr val="000000"/>
+                </a:solidFill>
+                <a:latin typeface="Arial"/>
+                <a:ea typeface="Arial"/>
+                <a:cs typeface="Arial"/>
+                <a:sym typeface="Arial"/>
+              </a:defRPr>
+            </a:lvl1pPr>
+            <a:lvl2pPr marR="0" lvl="1" algn="l" rtl="0">
+              <a:lnSpc>
+                <a:spcPct val="100000"/>
+              </a:lnSpc>
+              <a:spcBef>
+                <a:spcPts val="0"/>
+              </a:spcBef>
+              <a:spcAft>
+                <a:spcPts val="0"/>
+              </a:spcAft>
+              <a:buClr>
+                <a:srgbClr val="000000"/>
+              </a:buClr>
+              <a:buFont typeface="Arial"/>
+              <a:defRPr sz="1400" b="0" i="0" u="none" strike="noStrike" cap="none">
+                <a:solidFill>
+                  <a:srgbClr val="000000"/>
+                </a:solidFill>
+                <a:latin typeface="Arial"/>
+                <a:ea typeface="Arial"/>
+                <a:cs typeface="Arial"/>
+                <a:sym typeface="Arial"/>
+              </a:defRPr>
+            </a:lvl2pPr>
+            <a:lvl3pPr marR="0" lvl="2" algn="l" rtl="0">
+              <a:lnSpc>
+                <a:spcPct val="100000"/>
+              </a:lnSpc>
+              <a:spcBef>
+                <a:spcPts val="0"/>
+              </a:spcBef>
+              <a:spcAft>
+                <a:spcPts val="0"/>
+              </a:spcAft>
+              <a:buClr>
+                <a:srgbClr val="000000"/>
+              </a:buClr>
+              <a:buFont typeface="Arial"/>
+              <a:defRPr sz="1400" b="0" i="0" u="none" strike="noStrike" cap="none">
+                <a:solidFill>
+                  <a:srgbClr val="000000"/>
+                </a:solidFill>
+                <a:latin typeface="Arial"/>
+                <a:ea typeface="Arial"/>
+                <a:cs typeface="Arial"/>
+                <a:sym typeface="Arial"/>
+              </a:defRPr>
+            </a:lvl3pPr>
+            <a:lvl4pPr marR="0" lvl="3" algn="l" rtl="0">
+              <a:lnSpc>
+                <a:spcPct val="100000"/>
+              </a:lnSpc>
+              <a:spcBef>
+                <a:spcPts val="0"/>
+              </a:spcBef>
+              <a:spcAft>
+                <a:spcPts val="0"/>
+              </a:spcAft>
+              <a:buClr>
+                <a:srgbClr val="000000"/>
+              </a:buClr>
+              <a:buFont typeface="Arial"/>
+              <a:defRPr sz="1400" b="0" i="0" u="none" strike="noStrike" cap="none">
+                <a:solidFill>
+                  <a:srgbClr val="000000"/>
+                </a:solidFill>
+                <a:latin typeface="Arial"/>
+                <a:ea typeface="Arial"/>
+                <a:cs typeface="Arial"/>
+                <a:sym typeface="Arial"/>
+              </a:defRPr>
+            </a:lvl4pPr>
+            <a:lvl5pPr marR="0" lvl="4" algn="l" rtl="0">
+              <a:lnSpc>
+                <a:spcPct val="100000"/>
+              </a:lnSpc>
+              <a:spcBef>
+                <a:spcPts val="0"/>
+              </a:spcBef>
+              <a:spcAft>
+                <a:spcPts val="0"/>
+              </a:spcAft>
+              <a:buClr>
+                <a:srgbClr val="000000"/>
+              </a:buClr>
+              <a:buFont typeface="Arial"/>
+              <a:defRPr sz="1400" b="0" i="0" u="none" strike="noStrike" cap="none">
+                <a:solidFill>
+                  <a:srgbClr val="000000"/>
+                </a:solidFill>
+                <a:latin typeface="Arial"/>
+                <a:ea typeface="Arial"/>
+                <a:cs typeface="Arial"/>
+                <a:sym typeface="Arial"/>
+              </a:defRPr>
+            </a:lvl5pPr>
+            <a:lvl6pPr marR="0" lvl="5" algn="l" rtl="0">
+              <a:lnSpc>
+                <a:spcPct val="100000"/>
+              </a:lnSpc>
+              <a:spcBef>
+                <a:spcPts val="0"/>
+              </a:spcBef>
+              <a:spcAft>
+                <a:spcPts val="0"/>
+              </a:spcAft>
+              <a:buClr>
+                <a:srgbClr val="000000"/>
+              </a:buClr>
+              <a:buFont typeface="Arial"/>
+              <a:defRPr sz="1400" b="0" i="0" u="none" strike="noStrike" cap="none">
+                <a:solidFill>
+                  <a:srgbClr val="000000"/>
+                </a:solidFill>
+                <a:latin typeface="Arial"/>
+                <a:ea typeface="Arial"/>
+                <a:cs typeface="Arial"/>
+                <a:sym typeface="Arial"/>
+              </a:defRPr>
+            </a:lvl6pPr>
+            <a:lvl7pPr marR="0" lvl="6" algn="l" rtl="0">
+              <a:lnSpc>
+                <a:spcPct val="100000"/>
+              </a:lnSpc>
+              <a:spcBef>
+                <a:spcPts val="0"/>
+              </a:spcBef>
+              <a:spcAft>
+                <a:spcPts val="0"/>
+              </a:spcAft>
+              <a:buClr>
+                <a:srgbClr val="000000"/>
+              </a:buClr>
+              <a:buFont typeface="Arial"/>
+              <a:defRPr sz="1400" b="0" i="0" u="none" strike="noStrike" cap="none">
+                <a:solidFill>
+                  <a:srgbClr val="000000"/>
+                </a:solidFill>
+                <a:latin typeface="Arial"/>
+                <a:ea typeface="Arial"/>
+                <a:cs typeface="Arial"/>
+                <a:sym typeface="Arial"/>
+              </a:defRPr>
+            </a:lvl7pPr>
+            <a:lvl8pPr marR="0" lvl="7" algn="l" rtl="0">
+              <a:lnSpc>
+                <a:spcPct val="100000"/>
+              </a:lnSpc>
+              <a:spcBef>
+                <a:spcPts val="0"/>
+              </a:spcBef>
+              <a:spcAft>
+                <a:spcPts val="0"/>
+              </a:spcAft>
+              <a:buClr>
+                <a:srgbClr val="000000"/>
+              </a:buClr>
+              <a:buFont typeface="Arial"/>
+              <a:defRPr sz="1400" b="0" i="0" u="none" strike="noStrike" cap="none">
+                <a:solidFill>
+                  <a:srgbClr val="000000"/>
+                </a:solidFill>
+                <a:latin typeface="Arial"/>
+                <a:ea typeface="Arial"/>
+                <a:cs typeface="Arial"/>
+                <a:sym typeface="Arial"/>
+              </a:defRPr>
+            </a:lvl8pPr>
+            <a:lvl9pPr marR="0" lvl="8" algn="l" rtl="0">
+              <a:lnSpc>
+                <a:spcPct val="100000"/>
+              </a:lnSpc>
+              <a:spcBef>
+                <a:spcPts val="0"/>
+              </a:spcBef>
+              <a:spcAft>
+                <a:spcPts val="0"/>
+              </a:spcAft>
+              <a:buClr>
+                <a:srgbClr val="000000"/>
+              </a:buClr>
+              <a:buFont typeface="Arial"/>
+              <a:defRPr sz="1400" b="0" i="0" u="none" strike="noStrike" cap="none">
+                <a:solidFill>
+                  <a:srgbClr val="000000"/>
+                </a:solidFill>
+                <a:latin typeface="Arial"/>
+                <a:ea typeface="Arial"/>
+                <a:cs typeface="Arial"/>
+                <a:sym typeface="Arial"/>
+              </a:defRPr>
+            </a:lvl9pPr>
+          </a:lstStyle>
+          <a:p>
+            <a:pPr algn="r"/>
+            <a:r>
+              <a:t>4</a:t>
+            </a:r>
+            <a:endParaRPr lang="en-US"/>
+          </a:p>
+        </p:txBody>
+      </p:sp>
+    </p:spTree>
+  </p:cSld>
+  <p:clrMapOvr>
+    <a:masterClrMapping/>
+  </p:clrMapOvr>
+</p:sld>
+</file>
+
+<file path=ppt/slides/slide5.xml><?xml version="1.0" encoding="utf-8"?>
 <p:sld xmlns:a="http://schemas.openxmlformats.org/drawingml/2006/main" xmlns:p="http://schemas.openxmlformats.org/presentationml/2006/main" xmlns:r="http://schemas.openxmlformats.org/officeDocument/2006/relationships">
   <p:cSld>
     <p:spTree>
@@ -51868,7 +57015,7 @@
           <a:p>
             <a:pPr algn="r"/>
             <a:r>
-              <a:t>4</a:t>
+              <a:t>5</a:t>
             </a:r>
             <a:endParaRPr lang="en-US"/>
           </a:p>
@@ -51882,7 +57029,7 @@
 </p:sld>
 </file>
 
-<file path=ppt/slides/slide5.xml><?xml version="1.0" encoding="utf-8"?>
+<file path=ppt/slides/slide6.xml><?xml version="1.0" encoding="utf-8"?>
 <p:sld xmlns:a="http://schemas.openxmlformats.org/drawingml/2006/main" xmlns:p="http://schemas.openxmlformats.org/presentationml/2006/main" xmlns:r="http://schemas.openxmlformats.org/officeDocument/2006/relationships">
   <p:cSld>
     <p:spTree>
@@ -52327,7 +57474,7 @@
           <a:p>
             <a:pPr algn="r"/>
             <a:r>
-              <a:t>5</a:t>
+              <a:t>6</a:t>
             </a:r>
             <a:endParaRPr lang="en-US"/>
           </a:p>
@@ -52341,7 +57488,7 @@
 </p:sld>
 </file>
 
-<file path=ppt/slides/slide6.xml><?xml version="1.0" encoding="utf-8"?>
+<file path=ppt/slides/slide7.xml><?xml version="1.0" encoding="utf-8"?>
 <p:sld xmlns:a="http://schemas.openxmlformats.org/drawingml/2006/main" xmlns:p="http://schemas.openxmlformats.org/presentationml/2006/main" xmlns:r="http://schemas.openxmlformats.org/officeDocument/2006/relationships">
   <p:cSld>
     <p:spTree>
@@ -52818,7 +57965,7 @@
           <a:p>
             <a:pPr algn="r"/>
             <a:r>
-              <a:t>6</a:t>
+              <a:t>7</a:t>
             </a:r>
             <a:endParaRPr lang="en-US"/>
           </a:p>
@@ -52832,7 +57979,7 @@
 </p:sld>
 </file>
 
-<file path=ppt/slides/slide7.xml><?xml version="1.0" encoding="utf-8"?>
+<file path=ppt/slides/slide8.xml><?xml version="1.0" encoding="utf-8"?>
 <p:sld xmlns:a="http://schemas.openxmlformats.org/drawingml/2006/main" xmlns:p="http://schemas.openxmlformats.org/presentationml/2006/main" xmlns:r="http://schemas.openxmlformats.org/officeDocument/2006/relationships">
   <p:cSld>
     <p:spTree>
@@ -53293,7 +58440,7 @@
           <a:p>
             <a:pPr algn="r"/>
             <a:r>
-              <a:t>7</a:t>
+              <a:t>8</a:t>
             </a:r>
             <a:endParaRPr lang="en-US"/>
           </a:p>
@@ -53307,7 +58454,7 @@
 </p:sld>
 </file>
 
-<file path=ppt/slides/slide8.xml><?xml version="1.0" encoding="utf-8"?>
+<file path=ppt/slides/slide9.xml><?xml version="1.0" encoding="utf-8"?>
 <p:sld xmlns:a="http://schemas.openxmlformats.org/drawingml/2006/main" xmlns:p="http://schemas.openxmlformats.org/presentationml/2006/main" xmlns:r="http://schemas.openxmlformats.org/officeDocument/2006/relationships">
   <p:cSld>
     <p:spTree>
@@ -53704,7 +58851,7 @@
           <a:p>
             <a:pPr algn="r"/>
             <a:r>
-              <a:t>8</a:t>
+              <a:t>9</a:t>
             </a:r>
             <a:endParaRPr lang="en-US"/>
           </a:p>
@@ -54085,481 +59232,6 @@
           </a:graphicData>
         </a:graphic>
       </p:graphicFrame>
-    </p:spTree>
-  </p:cSld>
-  <p:clrMapOvr>
-    <a:masterClrMapping/>
-  </p:clrMapOvr>
-</p:sld>
-</file>
-
-<file path=ppt/slides/slide9.xml><?xml version="1.0" encoding="utf-8"?>
-<p:sld xmlns:a="http://schemas.openxmlformats.org/drawingml/2006/main" xmlns:p="http://schemas.openxmlformats.org/presentationml/2006/main" xmlns:r="http://schemas.openxmlformats.org/officeDocument/2006/relationships">
-  <p:cSld>
-    <p:spTree>
-      <p:nvGrpSpPr>
-        <p:cNvPr id="1" name=""/>
-        <p:cNvGrpSpPr/>
-        <p:nvPr/>
-      </p:nvGrpSpPr>
-      <p:grpSpPr/>
-      <p:sp>
-        <p:nvSpPr>
-          <p:cNvPr id="240" name="Google Shape;240;p38"/>
-          <p:cNvSpPr/>
-          <p:nvPr/>
-        </p:nvSpPr>
-        <p:spPr>
-          <a:xfrm>
-            <a:off x="853440" y="790892"/>
-            <a:ext cx="9055100" cy="731520"/>
-          </a:xfrm>
-          <a:prstGeom prst="rect">
-            <a:avLst/>
-          </a:prstGeom>
-          <a:noFill/>
-          <a:ln>
-            <a:noFill/>
-          </a:ln>
-        </p:spPr>
-        <p:txBody>
-          <a:bodyPr spcFirstLastPara="1" wrap="square" lIns="91425" tIns="45700" rIns="91425" bIns="45700" anchor="ctr" anchorCtr="0">
-            <a:noAutofit/>
-          </a:bodyPr>
-          <a:lstStyle/>
-          <a:p>
-            <a:pPr marL="0" marR="0" lvl="0" indent="0" algn="l" rtl="0">
-              <a:lnSpc>
-                <a:spcPct val="100000"/>
-              </a:lnSpc>
-              <a:spcBef>
-                <a:spcPts val="0"/>
-              </a:spcBef>
-              <a:spcAft>
-                <a:spcPts val="0"/>
-              </a:spcAft>
-              <a:buNone/>
-            </a:pPr>
-            <a:r>
-              <a:rPr lang="en-US" sz="4400" dirty="0">
-                <a:solidFill>
-                  <a:srgbClr val="3A3A3A"/>
-                </a:solidFill>
-                <a:latin typeface="Roboto Condensed Medium"/>
-                <a:ea typeface="Roboto Condensed Medium"/>
-                <a:cs typeface="Roboto Condensed Medium"/>
-                <a:sym typeface="Roboto Condensed Medium"/>
-              </a:rPr>
-              <a:t>¿Paliativo o solución? El riesgo de digitalizar un mal proceso</a:t>
-            </a:r>
-            <a:endParaRPr dirty="0"/>
-          </a:p>
-        </p:txBody>
-      </p:sp>
-      <p:sp>
-        <p:nvSpPr>
-          <p:cNvPr id="241" name="Google Shape;241;p38"/>
-          <p:cNvSpPr/>
-          <p:nvPr/>
-        </p:nvSpPr>
-        <p:spPr>
-          <a:xfrm>
-            <a:off x="889446" y="2014379"/>
-            <a:ext cx="9385264" cy="3413760"/>
-          </a:xfrm>
-          <a:prstGeom prst="rect">
-            <a:avLst/>
-          </a:prstGeom>
-          <a:noFill/>
-          <a:ln>
-            <a:noFill/>
-          </a:ln>
-        </p:spPr>
-        <p:txBody>
-          <a:bodyPr spcFirstLastPara="1" wrap="square" lIns="91425" tIns="45700" rIns="91425" bIns="45700" anchor="t" anchorCtr="0">
-            <a:noAutofit/>
-          </a:bodyPr>
-          <a:lstStyle/>
-          <a:p>
-            <a:pPr marL="0" marR="0" indent="0" algn="l" rtl="0">
-              <a:lnSpc>
-                <a:spcPct val="100000"/>
-              </a:lnSpc>
-              <a:spcBef>
-                <a:spcPts val="0"/>
-              </a:spcBef>
-              <a:spcAft>
-                <a:spcPts val="800"/>
-              </a:spcAft>
-              <a:buNone/>
-            </a:pPr>
-            <a:r>
-              <a:rPr sz="2000">
-                <a:solidFill>
-                  <a:srgbClr val="3A3A3A"/>
-                </a:solidFill>
-                <a:latin typeface="Roboto Condensed"/>
-              </a:rPr>
-              <a:t>• Digitalizar un mal proceso traslada al entorno virtual las mismas demoras y duplicidades del papel</a:t>
-            </a:r>
-            <a:endParaRPr dirty="0"/>
-          </a:p>
-          <a:p>
-            <a:pPr lvl="1">
-              <a:spcAft>
-                <a:spcPts val="400"/>
-              </a:spcAft>
-            </a:pPr>
-            <a:r>
-              <a:rPr sz="1800">
-                <a:solidFill>
-                  <a:srgbClr val="3A3A3A"/>
-                </a:solidFill>
-                <a:latin typeface="Roboto Condensed"/>
-              </a:rPr>
-              <a:t>– Ej.: trámite que inicia en línea pero exige imprimir, ir a la oficina y repetir información</a:t>
-            </a:r>
-          </a:p>
-          <a:p>
-            <a:pPr>
-              <a:spcAft>
-                <a:spcPts val="800"/>
-              </a:spcAft>
-            </a:pPr>
-            <a:r>
-              <a:rPr sz="2000">
-                <a:solidFill>
-                  <a:srgbClr val="3A3A3A"/>
-                </a:solidFill>
-                <a:latin typeface="Roboto Condensed"/>
-              </a:rPr>
-              <a:t>• Una transformación bien diseñada: simplifica procedimientos, conecta bases de datos, reduce discrecionalidad</a:t>
-            </a:r>
-          </a:p>
-          <a:p>
-            <a:pPr>
-              <a:spcAft>
-                <a:spcPts val="800"/>
-              </a:spcAft>
-            </a:pPr>
-            <a:r>
-              <a:rPr sz="2000">
-                <a:solidFill>
-                  <a:srgbClr val="3A3A3A"/>
-                </a:solidFill>
-                <a:latin typeface="Roboto Condensed"/>
-              </a:rPr>
-              <a:t>• Aumenta la trazabilidad de las decisiones y mejora la experiencia ciudadana</a:t>
-            </a:r>
-          </a:p>
-          <a:p>
-            <a:pPr>
-              <a:spcAft>
-                <a:spcPts val="800"/>
-              </a:spcAft>
-            </a:pPr>
-            <a:r>
-              <a:rPr sz="2000">
-                <a:solidFill>
-                  <a:srgbClr val="3A3A3A"/>
-                </a:solidFill>
-                <a:latin typeface="Roboto Condensed"/>
-              </a:rPr>
-              <a:t>• Requiere liderazgo estratégico que sostenga el cambio más allá de una administración específica</a:t>
-            </a:r>
-          </a:p>
-        </p:txBody>
-      </p:sp>
-      <p:pic>
-        <p:nvPicPr>
-          <p:cNvPr id="252" name="Google Shape;252;p38"/>
-          <p:cNvPicPr preferRelativeResize="0"/>
-          <p:nvPr/>
-        </p:nvPicPr>
-        <p:blipFill rotWithShape="1">
-          <a:blip r:embed="rId2">
-            <a:alphaModFix/>
-          </a:blip>
-          <a:srcRect/>
-          <a:stretch/>
-        </p:blipFill>
-        <p:spPr>
-          <a:xfrm>
-            <a:off x="10120580" y="230187"/>
-            <a:ext cx="1866726" cy="590083"/>
-          </a:xfrm>
-          <a:prstGeom prst="rect">
-            <a:avLst/>
-          </a:prstGeom>
-          <a:noFill/>
-          <a:ln>
-            <a:noFill/>
-          </a:ln>
-        </p:spPr>
-      </p:pic>
-      <p:sp>
-        <p:nvSpPr>
-          <p:cNvPr id="2" name="Marcador de número de diapositiva 2">
-            <a:extLst>
-              <a:ext uri="{FF2B5EF4-FFF2-40B4-BE49-F238E27FC236}">
-                <a16:creationId xmlns:a16="http://schemas.microsoft.com/office/drawing/2014/main" id="{9E2EBC40-EC40-BDF2-F68A-0BA88B712A11}"/>
-              </a:ext>
-            </a:extLst>
-          </p:cNvPr>
-          <p:cNvSpPr txBox="1">
-            <a:spLocks/>
-          </p:cNvSpPr>
-          <p:nvPr/>
-        </p:nvSpPr>
-        <p:spPr>
-          <a:xfrm>
-            <a:off x="8610600" y="6356351"/>
-            <a:ext cx="2743200" cy="365125"/>
-          </a:xfrm>
-          <a:prstGeom prst="rect">
-            <a:avLst/>
-          </a:prstGeom>
-        </p:spPr>
-        <p:txBody>
-          <a:bodyPr/>
-          <a:lstStyle>
-            <a:defPPr marR="0" lvl="0" algn="l" rtl="0">
-              <a:lnSpc>
-                <a:spcPct val="100000"/>
-              </a:lnSpc>
-              <a:spcBef>
-                <a:spcPts val="0"/>
-              </a:spcBef>
-              <a:spcAft>
-                <a:spcPts val="0"/>
-              </a:spcAft>
-            </a:defPPr>
-            <a:lvl1pPr marR="0" lvl="0" algn="l" rtl="0">
-              <a:lnSpc>
-                <a:spcPct val="100000"/>
-              </a:lnSpc>
-              <a:spcBef>
-                <a:spcPts val="0"/>
-              </a:spcBef>
-              <a:spcAft>
-                <a:spcPts val="0"/>
-              </a:spcAft>
-              <a:buClr>
-                <a:srgbClr val="000000"/>
-              </a:buClr>
-              <a:buFont typeface="Arial"/>
-              <a:defRPr sz="1400" b="0" i="0" u="none" strike="noStrike" cap="none">
-                <a:solidFill>
-                  <a:srgbClr val="000000"/>
-                </a:solidFill>
-                <a:latin typeface="Arial"/>
-                <a:ea typeface="Arial"/>
-                <a:cs typeface="Arial"/>
-                <a:sym typeface="Arial"/>
-              </a:defRPr>
-            </a:lvl1pPr>
-            <a:lvl2pPr marR="0" lvl="1" algn="l" rtl="0">
-              <a:lnSpc>
-                <a:spcPct val="100000"/>
-              </a:lnSpc>
-              <a:spcBef>
-                <a:spcPts val="0"/>
-              </a:spcBef>
-              <a:spcAft>
-                <a:spcPts val="0"/>
-              </a:spcAft>
-              <a:buClr>
-                <a:srgbClr val="000000"/>
-              </a:buClr>
-              <a:buFont typeface="Arial"/>
-              <a:defRPr sz="1400" b="0" i="0" u="none" strike="noStrike" cap="none">
-                <a:solidFill>
-                  <a:srgbClr val="000000"/>
-                </a:solidFill>
-                <a:latin typeface="Arial"/>
-                <a:ea typeface="Arial"/>
-                <a:cs typeface="Arial"/>
-                <a:sym typeface="Arial"/>
-              </a:defRPr>
-            </a:lvl2pPr>
-            <a:lvl3pPr marR="0" lvl="2" algn="l" rtl="0">
-              <a:lnSpc>
-                <a:spcPct val="100000"/>
-              </a:lnSpc>
-              <a:spcBef>
-                <a:spcPts val="0"/>
-              </a:spcBef>
-              <a:spcAft>
-                <a:spcPts val="0"/>
-              </a:spcAft>
-              <a:buClr>
-                <a:srgbClr val="000000"/>
-              </a:buClr>
-              <a:buFont typeface="Arial"/>
-              <a:defRPr sz="1400" b="0" i="0" u="none" strike="noStrike" cap="none">
-                <a:solidFill>
-                  <a:srgbClr val="000000"/>
-                </a:solidFill>
-                <a:latin typeface="Arial"/>
-                <a:ea typeface="Arial"/>
-                <a:cs typeface="Arial"/>
-                <a:sym typeface="Arial"/>
-              </a:defRPr>
-            </a:lvl3pPr>
-            <a:lvl4pPr marR="0" lvl="3" algn="l" rtl="0">
-              <a:lnSpc>
-                <a:spcPct val="100000"/>
-              </a:lnSpc>
-              <a:spcBef>
-                <a:spcPts val="0"/>
-              </a:spcBef>
-              <a:spcAft>
-                <a:spcPts val="0"/>
-              </a:spcAft>
-              <a:buClr>
-                <a:srgbClr val="000000"/>
-              </a:buClr>
-              <a:buFont typeface="Arial"/>
-              <a:defRPr sz="1400" b="0" i="0" u="none" strike="noStrike" cap="none">
-                <a:solidFill>
-                  <a:srgbClr val="000000"/>
-                </a:solidFill>
-                <a:latin typeface="Arial"/>
-                <a:ea typeface="Arial"/>
-                <a:cs typeface="Arial"/>
-                <a:sym typeface="Arial"/>
-              </a:defRPr>
-            </a:lvl4pPr>
-            <a:lvl5pPr marR="0" lvl="4" algn="l" rtl="0">
-              <a:lnSpc>
-                <a:spcPct val="100000"/>
-              </a:lnSpc>
-              <a:spcBef>
-                <a:spcPts val="0"/>
-              </a:spcBef>
-              <a:spcAft>
-                <a:spcPts val="0"/>
-              </a:spcAft>
-              <a:buClr>
-                <a:srgbClr val="000000"/>
-              </a:buClr>
-              <a:buFont typeface="Arial"/>
-              <a:defRPr sz="1400" b="0" i="0" u="none" strike="noStrike" cap="none">
-                <a:solidFill>
-                  <a:srgbClr val="000000"/>
-                </a:solidFill>
-                <a:latin typeface="Arial"/>
-                <a:ea typeface="Arial"/>
-                <a:cs typeface="Arial"/>
-                <a:sym typeface="Arial"/>
-              </a:defRPr>
-            </a:lvl5pPr>
-            <a:lvl6pPr marR="0" lvl="5" algn="l" rtl="0">
-              <a:lnSpc>
-                <a:spcPct val="100000"/>
-              </a:lnSpc>
-              <a:spcBef>
-                <a:spcPts val="0"/>
-              </a:spcBef>
-              <a:spcAft>
-                <a:spcPts val="0"/>
-              </a:spcAft>
-              <a:buClr>
-                <a:srgbClr val="000000"/>
-              </a:buClr>
-              <a:buFont typeface="Arial"/>
-              <a:defRPr sz="1400" b="0" i="0" u="none" strike="noStrike" cap="none">
-                <a:solidFill>
-                  <a:srgbClr val="000000"/>
-                </a:solidFill>
-                <a:latin typeface="Arial"/>
-                <a:ea typeface="Arial"/>
-                <a:cs typeface="Arial"/>
-                <a:sym typeface="Arial"/>
-              </a:defRPr>
-            </a:lvl6pPr>
-            <a:lvl7pPr marR="0" lvl="6" algn="l" rtl="0">
-              <a:lnSpc>
-                <a:spcPct val="100000"/>
-              </a:lnSpc>
-              <a:spcBef>
-                <a:spcPts val="0"/>
-              </a:spcBef>
-              <a:spcAft>
-                <a:spcPts val="0"/>
-              </a:spcAft>
-              <a:buClr>
-                <a:srgbClr val="000000"/>
-              </a:buClr>
-              <a:buFont typeface="Arial"/>
-              <a:defRPr sz="1400" b="0" i="0" u="none" strike="noStrike" cap="none">
-                <a:solidFill>
-                  <a:srgbClr val="000000"/>
-                </a:solidFill>
-                <a:latin typeface="Arial"/>
-                <a:ea typeface="Arial"/>
-                <a:cs typeface="Arial"/>
-                <a:sym typeface="Arial"/>
-              </a:defRPr>
-            </a:lvl7pPr>
-            <a:lvl8pPr marR="0" lvl="7" algn="l" rtl="0">
-              <a:lnSpc>
-                <a:spcPct val="100000"/>
-              </a:lnSpc>
-              <a:spcBef>
-                <a:spcPts val="0"/>
-              </a:spcBef>
-              <a:spcAft>
-                <a:spcPts val="0"/>
-              </a:spcAft>
-              <a:buClr>
-                <a:srgbClr val="000000"/>
-              </a:buClr>
-              <a:buFont typeface="Arial"/>
-              <a:defRPr sz="1400" b="0" i="0" u="none" strike="noStrike" cap="none">
-                <a:solidFill>
-                  <a:srgbClr val="000000"/>
-                </a:solidFill>
-                <a:latin typeface="Arial"/>
-                <a:ea typeface="Arial"/>
-                <a:cs typeface="Arial"/>
-                <a:sym typeface="Arial"/>
-              </a:defRPr>
-            </a:lvl8pPr>
-            <a:lvl9pPr marR="0" lvl="8" algn="l" rtl="0">
-              <a:lnSpc>
-                <a:spcPct val="100000"/>
-              </a:lnSpc>
-              <a:spcBef>
-                <a:spcPts val="0"/>
-              </a:spcBef>
-              <a:spcAft>
-                <a:spcPts val="0"/>
-              </a:spcAft>
-              <a:buClr>
-                <a:srgbClr val="000000"/>
-              </a:buClr>
-              <a:buFont typeface="Arial"/>
-              <a:defRPr sz="1400" b="0" i="0" u="none" strike="noStrike" cap="none">
-                <a:solidFill>
-                  <a:srgbClr val="000000"/>
-                </a:solidFill>
-                <a:latin typeface="Arial"/>
-                <a:ea typeface="Arial"/>
-                <a:cs typeface="Arial"/>
-                <a:sym typeface="Arial"/>
-              </a:defRPr>
-            </a:lvl9pPr>
-          </a:lstStyle>
-          <a:p>
-            <a:pPr algn="r"/>
-            <a:r>
-              <a:t>9</a:t>
-            </a:r>
-            <a:endParaRPr lang="en-US"/>
-          </a:p>
-        </p:txBody>
-      </p:sp>
     </p:spTree>
   </p:cSld>
   <p:clrMapOvr>

--- a/Modulo_3_Transformacion_Digital/Clase_1_Transformacion_Digital.pptx
+++ b/Modulo_3_Transformacion_Digital/Clase_1_Transformacion_Digital.pptx
@@ -11,7 +11,6 @@
   </p:notesMasterIdLst>
   <p:sldIdLst>
     <p:sldId id="256" r:id="rId4"/>
-    <p:sldId id="326" r:id="rId52"/>
     <p:sldId id="295" r:id="rId22"/>
     <p:sldId id="296" r:id="rId23"/>
     <p:sldId id="297" r:id="rId24"/>
@@ -38889,7 +38888,7 @@
                 <a:cs typeface="Roboto Condensed Medium"/>
                 <a:sym typeface="Roboto Condensed Medium"/>
               </a:rPr>
-              <a:t>¿Paliativo o solución? El riesgo de digitalizar un mal proceso</a:t>
+              <a:t>Caso: e-Estonia, la digitalización como política de Estado</a:t>
             </a:r>
             <a:endParaRPr dirty="0"/>
           </a:p>
@@ -38939,481 +38938,6 @@
                 </a:solidFill>
                 <a:latin typeface="Roboto Condensed"/>
               </a:rPr>
-              <a:t>• Digitalizar un mal proceso traslada al entorno virtual las mismas demoras y duplicidades del papel</a:t>
-            </a:r>
-            <a:endParaRPr dirty="0"/>
-          </a:p>
-          <a:p>
-            <a:pPr lvl="1">
-              <a:spcAft>
-                <a:spcPts val="400"/>
-              </a:spcAft>
-            </a:pPr>
-            <a:r>
-              <a:rPr sz="1800">
-                <a:solidFill>
-                  <a:srgbClr val="3A3A3A"/>
-                </a:solidFill>
-                <a:latin typeface="Roboto Condensed"/>
-              </a:rPr>
-              <a:t>– Ej.: trámite que inicia en línea pero exige imprimir, ir a la oficina y repetir información</a:t>
-            </a:r>
-          </a:p>
-          <a:p>
-            <a:pPr>
-              <a:spcAft>
-                <a:spcPts val="800"/>
-              </a:spcAft>
-            </a:pPr>
-            <a:r>
-              <a:rPr sz="2000">
-                <a:solidFill>
-                  <a:srgbClr val="3A3A3A"/>
-                </a:solidFill>
-                <a:latin typeface="Roboto Condensed"/>
-              </a:rPr>
-              <a:t>• Una transformación bien diseñada: simplifica procedimientos, conecta bases de datos, reduce discrecionalidad</a:t>
-            </a:r>
-          </a:p>
-          <a:p>
-            <a:pPr>
-              <a:spcAft>
-                <a:spcPts val="800"/>
-              </a:spcAft>
-            </a:pPr>
-            <a:r>
-              <a:rPr sz="2000">
-                <a:solidFill>
-                  <a:srgbClr val="3A3A3A"/>
-                </a:solidFill>
-                <a:latin typeface="Roboto Condensed"/>
-              </a:rPr>
-              <a:t>• Aumenta la trazabilidad de las decisiones y mejora la experiencia ciudadana</a:t>
-            </a:r>
-          </a:p>
-          <a:p>
-            <a:pPr>
-              <a:spcAft>
-                <a:spcPts val="800"/>
-              </a:spcAft>
-            </a:pPr>
-            <a:r>
-              <a:rPr sz="2000">
-                <a:solidFill>
-                  <a:srgbClr val="3A3A3A"/>
-                </a:solidFill>
-                <a:latin typeface="Roboto Condensed"/>
-              </a:rPr>
-              <a:t>• Requiere liderazgo estratégico que sostenga el cambio más allá de una administración específica</a:t>
-            </a:r>
-          </a:p>
-        </p:txBody>
-      </p:sp>
-      <p:pic>
-        <p:nvPicPr>
-          <p:cNvPr id="252" name="Google Shape;252;p38"/>
-          <p:cNvPicPr preferRelativeResize="0"/>
-          <p:nvPr/>
-        </p:nvPicPr>
-        <p:blipFill rotWithShape="1">
-          <a:blip r:embed="rId2">
-            <a:alphaModFix/>
-          </a:blip>
-          <a:srcRect/>
-          <a:stretch/>
-        </p:blipFill>
-        <p:spPr>
-          <a:xfrm>
-            <a:off x="10120580" y="230187"/>
-            <a:ext cx="1866726" cy="590083"/>
-          </a:xfrm>
-          <a:prstGeom prst="rect">
-            <a:avLst/>
-          </a:prstGeom>
-          <a:noFill/>
-          <a:ln>
-            <a:noFill/>
-          </a:ln>
-        </p:spPr>
-      </p:pic>
-      <p:sp>
-        <p:nvSpPr>
-          <p:cNvPr id="2" name="Marcador de número de diapositiva 2">
-            <a:extLst>
-              <a:ext uri="{FF2B5EF4-FFF2-40B4-BE49-F238E27FC236}">
-                <a16:creationId xmlns:a16="http://schemas.microsoft.com/office/drawing/2014/main" id="{9E2EBC40-EC40-BDF2-F68A-0BA88B712A11}"/>
-              </a:ext>
-            </a:extLst>
-          </p:cNvPr>
-          <p:cNvSpPr txBox="1">
-            <a:spLocks/>
-          </p:cNvSpPr>
-          <p:nvPr/>
-        </p:nvSpPr>
-        <p:spPr>
-          <a:xfrm>
-            <a:off x="8610600" y="6356351"/>
-            <a:ext cx="2743200" cy="365125"/>
-          </a:xfrm>
-          <a:prstGeom prst="rect">
-            <a:avLst/>
-          </a:prstGeom>
-        </p:spPr>
-        <p:txBody>
-          <a:bodyPr/>
-          <a:lstStyle>
-            <a:defPPr marR="0" lvl="0" algn="l" rtl="0">
-              <a:lnSpc>
-                <a:spcPct val="100000"/>
-              </a:lnSpc>
-              <a:spcBef>
-                <a:spcPts val="0"/>
-              </a:spcBef>
-              <a:spcAft>
-                <a:spcPts val="0"/>
-              </a:spcAft>
-            </a:defPPr>
-            <a:lvl1pPr marR="0" lvl="0" algn="l" rtl="0">
-              <a:lnSpc>
-                <a:spcPct val="100000"/>
-              </a:lnSpc>
-              <a:spcBef>
-                <a:spcPts val="0"/>
-              </a:spcBef>
-              <a:spcAft>
-                <a:spcPts val="0"/>
-              </a:spcAft>
-              <a:buClr>
-                <a:srgbClr val="000000"/>
-              </a:buClr>
-              <a:buFont typeface="Arial"/>
-              <a:defRPr sz="1400" b="0" i="0" u="none" strike="noStrike" cap="none">
-                <a:solidFill>
-                  <a:srgbClr val="000000"/>
-                </a:solidFill>
-                <a:latin typeface="Arial"/>
-                <a:ea typeface="Arial"/>
-                <a:cs typeface="Arial"/>
-                <a:sym typeface="Arial"/>
-              </a:defRPr>
-            </a:lvl1pPr>
-            <a:lvl2pPr marR="0" lvl="1" algn="l" rtl="0">
-              <a:lnSpc>
-                <a:spcPct val="100000"/>
-              </a:lnSpc>
-              <a:spcBef>
-                <a:spcPts val="0"/>
-              </a:spcBef>
-              <a:spcAft>
-                <a:spcPts val="0"/>
-              </a:spcAft>
-              <a:buClr>
-                <a:srgbClr val="000000"/>
-              </a:buClr>
-              <a:buFont typeface="Arial"/>
-              <a:defRPr sz="1400" b="0" i="0" u="none" strike="noStrike" cap="none">
-                <a:solidFill>
-                  <a:srgbClr val="000000"/>
-                </a:solidFill>
-                <a:latin typeface="Arial"/>
-                <a:ea typeface="Arial"/>
-                <a:cs typeface="Arial"/>
-                <a:sym typeface="Arial"/>
-              </a:defRPr>
-            </a:lvl2pPr>
-            <a:lvl3pPr marR="0" lvl="2" algn="l" rtl="0">
-              <a:lnSpc>
-                <a:spcPct val="100000"/>
-              </a:lnSpc>
-              <a:spcBef>
-                <a:spcPts val="0"/>
-              </a:spcBef>
-              <a:spcAft>
-                <a:spcPts val="0"/>
-              </a:spcAft>
-              <a:buClr>
-                <a:srgbClr val="000000"/>
-              </a:buClr>
-              <a:buFont typeface="Arial"/>
-              <a:defRPr sz="1400" b="0" i="0" u="none" strike="noStrike" cap="none">
-                <a:solidFill>
-                  <a:srgbClr val="000000"/>
-                </a:solidFill>
-                <a:latin typeface="Arial"/>
-                <a:ea typeface="Arial"/>
-                <a:cs typeface="Arial"/>
-                <a:sym typeface="Arial"/>
-              </a:defRPr>
-            </a:lvl3pPr>
-            <a:lvl4pPr marR="0" lvl="3" algn="l" rtl="0">
-              <a:lnSpc>
-                <a:spcPct val="100000"/>
-              </a:lnSpc>
-              <a:spcBef>
-                <a:spcPts val="0"/>
-              </a:spcBef>
-              <a:spcAft>
-                <a:spcPts val="0"/>
-              </a:spcAft>
-              <a:buClr>
-                <a:srgbClr val="000000"/>
-              </a:buClr>
-              <a:buFont typeface="Arial"/>
-              <a:defRPr sz="1400" b="0" i="0" u="none" strike="noStrike" cap="none">
-                <a:solidFill>
-                  <a:srgbClr val="000000"/>
-                </a:solidFill>
-                <a:latin typeface="Arial"/>
-                <a:ea typeface="Arial"/>
-                <a:cs typeface="Arial"/>
-                <a:sym typeface="Arial"/>
-              </a:defRPr>
-            </a:lvl4pPr>
-            <a:lvl5pPr marR="0" lvl="4" algn="l" rtl="0">
-              <a:lnSpc>
-                <a:spcPct val="100000"/>
-              </a:lnSpc>
-              <a:spcBef>
-                <a:spcPts val="0"/>
-              </a:spcBef>
-              <a:spcAft>
-                <a:spcPts val="0"/>
-              </a:spcAft>
-              <a:buClr>
-                <a:srgbClr val="000000"/>
-              </a:buClr>
-              <a:buFont typeface="Arial"/>
-              <a:defRPr sz="1400" b="0" i="0" u="none" strike="noStrike" cap="none">
-                <a:solidFill>
-                  <a:srgbClr val="000000"/>
-                </a:solidFill>
-                <a:latin typeface="Arial"/>
-                <a:ea typeface="Arial"/>
-                <a:cs typeface="Arial"/>
-                <a:sym typeface="Arial"/>
-              </a:defRPr>
-            </a:lvl5pPr>
-            <a:lvl6pPr marR="0" lvl="5" algn="l" rtl="0">
-              <a:lnSpc>
-                <a:spcPct val="100000"/>
-              </a:lnSpc>
-              <a:spcBef>
-                <a:spcPts val="0"/>
-              </a:spcBef>
-              <a:spcAft>
-                <a:spcPts val="0"/>
-              </a:spcAft>
-              <a:buClr>
-                <a:srgbClr val="000000"/>
-              </a:buClr>
-              <a:buFont typeface="Arial"/>
-              <a:defRPr sz="1400" b="0" i="0" u="none" strike="noStrike" cap="none">
-                <a:solidFill>
-                  <a:srgbClr val="000000"/>
-                </a:solidFill>
-                <a:latin typeface="Arial"/>
-                <a:ea typeface="Arial"/>
-                <a:cs typeface="Arial"/>
-                <a:sym typeface="Arial"/>
-              </a:defRPr>
-            </a:lvl6pPr>
-            <a:lvl7pPr marR="0" lvl="6" algn="l" rtl="0">
-              <a:lnSpc>
-                <a:spcPct val="100000"/>
-              </a:lnSpc>
-              <a:spcBef>
-                <a:spcPts val="0"/>
-              </a:spcBef>
-              <a:spcAft>
-                <a:spcPts val="0"/>
-              </a:spcAft>
-              <a:buClr>
-                <a:srgbClr val="000000"/>
-              </a:buClr>
-              <a:buFont typeface="Arial"/>
-              <a:defRPr sz="1400" b="0" i="0" u="none" strike="noStrike" cap="none">
-                <a:solidFill>
-                  <a:srgbClr val="000000"/>
-                </a:solidFill>
-                <a:latin typeface="Arial"/>
-                <a:ea typeface="Arial"/>
-                <a:cs typeface="Arial"/>
-                <a:sym typeface="Arial"/>
-              </a:defRPr>
-            </a:lvl7pPr>
-            <a:lvl8pPr marR="0" lvl="7" algn="l" rtl="0">
-              <a:lnSpc>
-                <a:spcPct val="100000"/>
-              </a:lnSpc>
-              <a:spcBef>
-                <a:spcPts val="0"/>
-              </a:spcBef>
-              <a:spcAft>
-                <a:spcPts val="0"/>
-              </a:spcAft>
-              <a:buClr>
-                <a:srgbClr val="000000"/>
-              </a:buClr>
-              <a:buFont typeface="Arial"/>
-              <a:defRPr sz="1400" b="0" i="0" u="none" strike="noStrike" cap="none">
-                <a:solidFill>
-                  <a:srgbClr val="000000"/>
-                </a:solidFill>
-                <a:latin typeface="Arial"/>
-                <a:ea typeface="Arial"/>
-                <a:cs typeface="Arial"/>
-                <a:sym typeface="Arial"/>
-              </a:defRPr>
-            </a:lvl8pPr>
-            <a:lvl9pPr marR="0" lvl="8" algn="l" rtl="0">
-              <a:lnSpc>
-                <a:spcPct val="100000"/>
-              </a:lnSpc>
-              <a:spcBef>
-                <a:spcPts val="0"/>
-              </a:spcBef>
-              <a:spcAft>
-                <a:spcPts val="0"/>
-              </a:spcAft>
-              <a:buClr>
-                <a:srgbClr val="000000"/>
-              </a:buClr>
-              <a:buFont typeface="Arial"/>
-              <a:defRPr sz="1400" b="0" i="0" u="none" strike="noStrike" cap="none">
-                <a:solidFill>
-                  <a:srgbClr val="000000"/>
-                </a:solidFill>
-                <a:latin typeface="Arial"/>
-                <a:ea typeface="Arial"/>
-                <a:cs typeface="Arial"/>
-                <a:sym typeface="Arial"/>
-              </a:defRPr>
-            </a:lvl9pPr>
-          </a:lstStyle>
-          <a:p>
-            <a:pPr algn="r"/>
-            <a:r>
-              <a:t>10</a:t>
-            </a:r>
-            <a:endParaRPr lang="en-US"/>
-          </a:p>
-        </p:txBody>
-      </p:sp>
-    </p:spTree>
-  </p:cSld>
-  <p:clrMapOvr>
-    <a:masterClrMapping/>
-  </p:clrMapOvr>
-</p:sld>
-</file>
-
-<file path=ppt/slides/slide11.xml><?xml version="1.0" encoding="utf-8"?>
-<p:sld xmlns:a="http://schemas.openxmlformats.org/drawingml/2006/main" xmlns:p="http://schemas.openxmlformats.org/presentationml/2006/main" xmlns:r="http://schemas.openxmlformats.org/officeDocument/2006/relationships">
-  <p:cSld>
-    <p:spTree>
-      <p:nvGrpSpPr>
-        <p:cNvPr id="1" name=""/>
-        <p:cNvGrpSpPr/>
-        <p:nvPr/>
-      </p:nvGrpSpPr>
-      <p:grpSpPr/>
-      <p:sp>
-        <p:nvSpPr>
-          <p:cNvPr id="240" name="Google Shape;240;p38"/>
-          <p:cNvSpPr/>
-          <p:nvPr/>
-        </p:nvSpPr>
-        <p:spPr>
-          <a:xfrm>
-            <a:off x="853440" y="790892"/>
-            <a:ext cx="9055100" cy="731520"/>
-          </a:xfrm>
-          <a:prstGeom prst="rect">
-            <a:avLst/>
-          </a:prstGeom>
-          <a:noFill/>
-          <a:ln>
-            <a:noFill/>
-          </a:ln>
-        </p:spPr>
-        <p:txBody>
-          <a:bodyPr spcFirstLastPara="1" wrap="square" lIns="91425" tIns="45700" rIns="91425" bIns="45700" anchor="ctr" anchorCtr="0">
-            <a:noAutofit/>
-          </a:bodyPr>
-          <a:lstStyle/>
-          <a:p>
-            <a:pPr marL="0" marR="0" lvl="0" indent="0" algn="l" rtl="0">
-              <a:lnSpc>
-                <a:spcPct val="100000"/>
-              </a:lnSpc>
-              <a:spcBef>
-                <a:spcPts val="0"/>
-              </a:spcBef>
-              <a:spcAft>
-                <a:spcPts val="0"/>
-              </a:spcAft>
-              <a:buNone/>
-            </a:pPr>
-            <a:r>
-              <a:rPr lang="en-US" sz="4400" dirty="0">
-                <a:solidFill>
-                  <a:srgbClr val="3A3A3A"/>
-                </a:solidFill>
-                <a:latin typeface="Roboto Condensed Medium"/>
-                <a:ea typeface="Roboto Condensed Medium"/>
-                <a:cs typeface="Roboto Condensed Medium"/>
-                <a:sym typeface="Roboto Condensed Medium"/>
-              </a:rPr>
-              <a:t>Caso: e-Estonia, la digitalización como política de Estado</a:t>
-            </a:r>
-            <a:endParaRPr dirty="0"/>
-          </a:p>
-        </p:txBody>
-      </p:sp>
-      <p:sp>
-        <p:nvSpPr>
-          <p:cNvPr id="241" name="Google Shape;241;p38"/>
-          <p:cNvSpPr/>
-          <p:nvPr/>
-        </p:nvSpPr>
-        <p:spPr>
-          <a:xfrm>
-            <a:off x="889446" y="2014379"/>
-            <a:ext cx="6300000" cy="3413760"/>
-          </a:xfrm>
-          <a:prstGeom prst="rect">
-            <a:avLst/>
-          </a:prstGeom>
-          <a:noFill/>
-          <a:ln>
-            <a:noFill/>
-          </a:ln>
-        </p:spPr>
-        <p:txBody>
-          <a:bodyPr spcFirstLastPara="1" wrap="square" lIns="91425" tIns="45700" rIns="91425" bIns="45700" anchor="t" anchorCtr="0">
-            <a:noAutofit/>
-          </a:bodyPr>
-          <a:lstStyle/>
-          <a:p>
-            <a:pPr marL="0" marR="0" indent="0" algn="l" rtl="0">
-              <a:lnSpc>
-                <a:spcPct val="100000"/>
-              </a:lnSpc>
-              <a:spcBef>
-                <a:spcPts val="0"/>
-              </a:spcBef>
-              <a:spcAft>
-                <a:spcPts val="600"/>
-              </a:spcAft>
-              <a:buNone/>
-            </a:pPr>
-            <a:r>
-              <a:rPr sz="1500">
-                <a:solidFill>
-                  <a:srgbClr val="3A3A3A"/>
-                </a:solidFill>
-                <a:latin typeface="Roboto Condensed"/>
-              </a:rPr>
               <a:t>• Estado pequeño que convirtió la digitalización en política nacional de largo plazo</a:t>
             </a:r>
             <a:endParaRPr dirty="0"/>
@@ -39421,11 +38945,11 @@
           <a:p>
             <a:pPr>
               <a:spcAft>
-                <a:spcPts val="600"/>
+                <a:spcPts val="800"/>
               </a:spcAft>
             </a:pPr>
             <a:r>
-              <a:rPr sz="1500">
+              <a:rPr sz="2000">
                 <a:solidFill>
                   <a:srgbClr val="3A3A3A"/>
                 </a:solidFill>
@@ -39437,11 +38961,11 @@
           <a:p>
             <a:pPr>
               <a:spcAft>
-                <a:spcPts val="600"/>
+                <a:spcPts val="800"/>
               </a:spcAft>
             </a:pPr>
             <a:r>
-              <a:rPr sz="1500">
+              <a:rPr sz="2000">
                 <a:solidFill>
                   <a:srgbClr val="3A3A3A"/>
                 </a:solidFill>
@@ -39453,11 +38977,11 @@
           <a:p>
             <a:pPr>
               <a:spcAft>
-                <a:spcPts val="600"/>
+                <a:spcPts val="800"/>
               </a:spcAft>
             </a:pPr>
             <a:r>
-              <a:rPr sz="1500">
+              <a:rPr sz="2000">
                 <a:solidFill>
                   <a:srgbClr val="3A3A3A"/>
                 </a:solidFill>
@@ -39469,11 +38993,11 @@
           <a:p>
             <a:pPr lvl="1">
               <a:spcAft>
-                <a:spcPts val="600"/>
+                <a:spcPts val="400"/>
               </a:spcAft>
             </a:pPr>
             <a:r>
-              <a:rPr sz="1500">
+              <a:rPr sz="1800">
                 <a:solidFill>
                   <a:srgbClr val="3A3A3A"/>
                 </a:solidFill>
@@ -39491,12 +39015,12 @@
                 <a:spcPts val="0"/>
               </a:spcBef>
               <a:spcAft>
-                <a:spcPts val="600"/>
+                <a:spcPts val="800"/>
               </a:spcAft>
               <a:buNone/>
             </a:pPr>
             <a:r>
-              <a:rPr sz="1500" i="1">
+              <a:rPr sz="1200" i="1">
                 <a:solidFill>
                   <a:srgbClr val="3A3A3A"/>
                 </a:solidFill>
@@ -39792,378 +39316,9 @@
           <a:p>
             <a:pPr algn="r"/>
             <a:r>
-              <a:t>11</a:t>
+              <a:t>10</a:t>
             </a:r>
             <a:endParaRPr lang="en-US"/>
-          </a:p>
-        </p:txBody>
-      </p:sp>
-      <p:sp>
-        <p:nvSpPr>
-          <p:cNvPr id="253" name="Rounded Rectangle 252"/>
-          <p:cNvSpPr/>
-          <p:nvPr/>
-        </p:nvSpPr>
-        <p:spPr>
-          <a:xfrm>
-            <a:off x="7550000" y="2300000"/>
-            <a:ext cx="3300000" cy="2000000"/>
-          </a:xfrm>
-          <a:prstGeom prst="roundRect">
-            <a:avLst/>
-          </a:prstGeom>
-          <a:solidFill>
-            <a:srgbClr val="156082"/>
-          </a:solidFill>
-          <a:ln>
-            <a:noFill/>
-          </a:ln>
-          <a:effectLst/>
-        </p:spPr>
-        <p:style>
-          <a:lnRef idx="1">
-            <a:schemeClr val="accent1"/>
-          </a:lnRef>
-          <a:fillRef idx="3">
-            <a:schemeClr val="accent1"/>
-          </a:fillRef>
-          <a:effectRef idx="2">
-            <a:schemeClr val="accent1"/>
-          </a:effectRef>
-          <a:fontRef idx="minor">
-            <a:schemeClr val="lt1"/>
-          </a:fontRef>
-        </p:style>
-        <p:txBody>
-          <a:bodyPr rtlCol="0" anchor="ctr" wrap="square" lIns="18000" rIns="18000" tIns="9000" bIns="9000"/>
-          <a:lstStyle/>
-          <a:p>
-            <a:pPr algn="ctr"/>
-          </a:p>
-        </p:txBody>
-      </p:sp>
-      <p:sp>
-        <p:nvSpPr>
-          <p:cNvPr id="254" name="Rounded Rectangle 253"/>
-          <p:cNvSpPr/>
-          <p:nvPr/>
-        </p:nvSpPr>
-        <p:spPr>
-          <a:xfrm>
-            <a:off x="7770000" y="2520000"/>
-            <a:ext cx="700000" cy="550000"/>
-          </a:xfrm>
-          <a:prstGeom prst="roundRect">
-            <a:avLst/>
-          </a:prstGeom>
-          <a:solidFill>
-            <a:srgbClr val="C8A02A"/>
-          </a:solidFill>
-          <a:ln>
-            <a:noFill/>
-          </a:ln>
-          <a:effectLst/>
-        </p:spPr>
-        <p:style>
-          <a:lnRef idx="1">
-            <a:schemeClr val="accent1"/>
-          </a:lnRef>
-          <a:fillRef idx="3">
-            <a:schemeClr val="accent1"/>
-          </a:fillRef>
-          <a:effectRef idx="2">
-            <a:schemeClr val="accent1"/>
-          </a:effectRef>
-          <a:fontRef idx="minor">
-            <a:schemeClr val="lt1"/>
-          </a:fontRef>
-        </p:style>
-        <p:txBody>
-          <a:bodyPr rtlCol="0" anchor="ctr" wrap="square" lIns="18000" rIns="18000" tIns="9000" bIns="9000"/>
-          <a:lstStyle/>
-          <a:p>
-            <a:pPr algn="ctr"/>
-          </a:p>
-        </p:txBody>
-      </p:sp>
-      <p:sp>
-        <p:nvSpPr>
-          <p:cNvPr id="255" name="TextBox 254"/>
-          <p:cNvSpPr txBox="1"/>
-          <p:nvPr/>
-        </p:nvSpPr>
-        <p:spPr>
-          <a:xfrm>
-            <a:off x="7770000" y="3200000"/>
-            <a:ext cx="2860000" cy="300000"/>
-          </a:xfrm>
-          <a:prstGeom prst="rect">
-            <a:avLst/>
-          </a:prstGeom>
-          <a:noFill/>
-        </p:spPr>
-        <p:txBody>
-          <a:bodyPr wrap="square" lIns="0" rIns="0" tIns="0" bIns="0">
-            <a:spAutoFit/>
-          </a:bodyPr>
-          <a:lstStyle/>
-          <a:p>
-            <a:pPr algn="l"/>
-            <a:r>
-              <a:rPr sz="2200" b="1" i="0">
-                <a:solidFill>
-                  <a:srgbClr val="FFFFFF"/>
-                </a:solidFill>
-                <a:latin typeface="Roboto Condensed"/>
-              </a:rPr>
-              <a:t>eID</a:t>
-            </a:r>
-          </a:p>
-        </p:txBody>
-      </p:sp>
-      <p:sp>
-        <p:nvSpPr>
-          <p:cNvPr id="256" name="TextBox 255"/>
-          <p:cNvSpPr txBox="1"/>
-          <p:nvPr/>
-        </p:nvSpPr>
-        <p:spPr>
-          <a:xfrm>
-            <a:off x="7770000" y="3550000"/>
-            <a:ext cx="2860000" cy="400000"/>
-          </a:xfrm>
-          <a:prstGeom prst="rect">
-            <a:avLst/>
-          </a:prstGeom>
-          <a:noFill/>
-        </p:spPr>
-        <p:txBody>
-          <a:bodyPr wrap="square" lIns="0" rIns="0" tIns="0" bIns="0">
-            <a:spAutoFit/>
-          </a:bodyPr>
-          <a:lstStyle/>
-          <a:p>
-            <a:pPr algn="l"/>
-            <a:r>
-              <a:rPr sz="1100" b="0" i="0">
-                <a:solidFill>
-                  <a:srgbClr val="FFFFFF"/>
-                </a:solidFill>
-                <a:latin typeface="Roboto Condensed"/>
-              </a:rPr>
-              <a:t>Identidad digital
-nacional</a:t>
-            </a:r>
-          </a:p>
-        </p:txBody>
-      </p:sp>
-      <p:cxnSp>
-        <p:nvCxnSpPr>
-          <p:cNvPr id="257" name="Connector 256"/>
-          <p:cNvCxnSpPr/>
-          <p:nvPr/>
-        </p:nvCxnSpPr>
-        <p:spPr>
-          <a:xfrm>
-            <a:off x="10000000" y="2380000"/>
-            <a:ext cx="650000" cy="0"/>
-          </a:xfrm>
-          <a:prstGeom prst="line">
-            <a:avLst/>
-          </a:prstGeom>
-          <a:ln w="12700">
-            <a:solidFill>
-              <a:srgbClr val="FFFFFF"/>
-            </a:solidFill>
-          </a:ln>
-        </p:spPr>
-        <p:style>
-          <a:lnRef idx="2">
-            <a:schemeClr val="accent1"/>
-          </a:lnRef>
-          <a:fillRef idx="0">
-            <a:schemeClr val="accent1"/>
-          </a:fillRef>
-          <a:effectRef idx="1">
-            <a:schemeClr val="accent1"/>
-          </a:effectRef>
-          <a:fontRef idx="minor">
-            <a:schemeClr val="tx1"/>
-          </a:fontRef>
-        </p:style>
-      </p:cxnSp>
-      <p:cxnSp>
-        <p:nvCxnSpPr>
-          <p:cNvPr id="258" name="Connector 257"/>
-          <p:cNvCxnSpPr/>
-          <p:nvPr/>
-        </p:nvCxnSpPr>
-        <p:spPr>
-          <a:xfrm>
-            <a:off x="10000000" y="2420000"/>
-            <a:ext cx="650000" cy="0"/>
-          </a:xfrm>
-          <a:prstGeom prst="line">
-            <a:avLst/>
-          </a:prstGeom>
-          <a:ln w="12700">
-            <a:solidFill>
-              <a:srgbClr val="FFFFFF"/>
-            </a:solidFill>
-          </a:ln>
-        </p:spPr>
-        <p:style>
-          <a:lnRef idx="2">
-            <a:schemeClr val="accent1"/>
-          </a:lnRef>
-          <a:fillRef idx="0">
-            <a:schemeClr val="accent1"/>
-          </a:fillRef>
-          <a:effectRef idx="1">
-            <a:schemeClr val="accent1"/>
-          </a:effectRef>
-          <a:fontRef idx="minor">
-            <a:schemeClr val="tx1"/>
-          </a:fontRef>
-        </p:style>
-      </p:cxnSp>
-      <p:cxnSp>
-        <p:nvCxnSpPr>
-          <p:cNvPr id="259" name="Connector 258"/>
-          <p:cNvCxnSpPr/>
-          <p:nvPr/>
-        </p:nvCxnSpPr>
-        <p:spPr>
-          <a:xfrm>
-            <a:off x="10000000" y="2460000"/>
-            <a:ext cx="650000" cy="0"/>
-          </a:xfrm>
-          <a:prstGeom prst="line">
-            <a:avLst/>
-          </a:prstGeom>
-          <a:ln w="12700">
-            <a:solidFill>
-              <a:srgbClr val="FFFFFF"/>
-            </a:solidFill>
-          </a:ln>
-        </p:spPr>
-        <p:style>
-          <a:lnRef idx="2">
-            <a:schemeClr val="accent1"/>
-          </a:lnRef>
-          <a:fillRef idx="0">
-            <a:schemeClr val="accent1"/>
-          </a:fillRef>
-          <a:effectRef idx="1">
-            <a:schemeClr val="accent1"/>
-          </a:effectRef>
-          <a:fontRef idx="minor">
-            <a:schemeClr val="tx1"/>
-          </a:fontRef>
-        </p:style>
-      </p:cxnSp>
-      <p:cxnSp>
-        <p:nvCxnSpPr>
-          <p:cNvPr id="260" name="Connector 259"/>
-          <p:cNvCxnSpPr/>
-          <p:nvPr/>
-        </p:nvCxnSpPr>
-        <p:spPr>
-          <a:xfrm>
-            <a:off x="10000000" y="2500000"/>
-            <a:ext cx="650000" cy="0"/>
-          </a:xfrm>
-          <a:prstGeom prst="line">
-            <a:avLst/>
-          </a:prstGeom>
-          <a:ln w="12700">
-            <a:solidFill>
-              <a:srgbClr val="FFFFFF"/>
-            </a:solidFill>
-          </a:ln>
-        </p:spPr>
-        <p:style>
-          <a:lnRef idx="2">
-            <a:schemeClr val="accent1"/>
-          </a:lnRef>
-          <a:fillRef idx="0">
-            <a:schemeClr val="accent1"/>
-          </a:fillRef>
-          <a:effectRef idx="1">
-            <a:schemeClr val="accent1"/>
-          </a:effectRef>
-          <a:fontRef idx="minor">
-            <a:schemeClr val="tx1"/>
-          </a:fontRef>
-        </p:style>
-      </p:cxnSp>
-      <p:cxnSp>
-        <p:nvCxnSpPr>
-          <p:cNvPr id="261" name="Connector 260"/>
-          <p:cNvCxnSpPr/>
-          <p:nvPr/>
-        </p:nvCxnSpPr>
-        <p:spPr>
-          <a:xfrm>
-            <a:off x="10000000" y="2540000"/>
-            <a:ext cx="650000" cy="0"/>
-          </a:xfrm>
-          <a:prstGeom prst="line">
-            <a:avLst/>
-          </a:prstGeom>
-          <a:ln w="12700">
-            <a:solidFill>
-              <a:srgbClr val="FFFFFF"/>
-            </a:solidFill>
-          </a:ln>
-        </p:spPr>
-        <p:style>
-          <a:lnRef idx="2">
-            <a:schemeClr val="accent1"/>
-          </a:lnRef>
-          <a:fillRef idx="0">
-            <a:schemeClr val="accent1"/>
-          </a:fillRef>
-          <a:effectRef idx="1">
-            <a:schemeClr val="accent1"/>
-          </a:effectRef>
-          <a:fontRef idx="minor">
-            <a:schemeClr val="tx1"/>
-          </a:fontRef>
-        </p:style>
-      </p:cxnSp>
-      <p:sp>
-        <p:nvSpPr>
-          <p:cNvPr id="262" name="TextBox 261"/>
-          <p:cNvSpPr txBox="1"/>
-          <p:nvPr/>
-        </p:nvSpPr>
-        <p:spPr>
-          <a:xfrm>
-            <a:off x="7550000" y="4450000"/>
-            <a:ext cx="3300000" cy="300000"/>
-          </a:xfrm>
-          <a:prstGeom prst="rect">
-            <a:avLst/>
-          </a:prstGeom>
-          <a:noFill/>
-        </p:spPr>
-        <p:txBody>
-          <a:bodyPr wrap="square" lIns="0" rIns="0" tIns="0" bIns="0">
-            <a:spAutoFit/>
-          </a:bodyPr>
-          <a:lstStyle/>
-          <a:p>
-            <a:pPr algn="ctr"/>
-            <a:r>
-              <a:rPr sz="1000" b="0" i="1">
-                <a:solidFill>
-                  <a:srgbClr val="3A3A3A"/>
-                </a:solidFill>
-                <a:latin typeface="Roboto Condensed"/>
-              </a:rPr>
-              <a:t>Referencial: tarjeta de identidad digital (eID)</a:t>
-            </a:r>
           </a:p>
         </p:txBody>
       </p:sp>
@@ -40175,7 +39330,7 @@
 </p:sld>
 </file>
 
-<file path=ppt/slides/slide12.xml><?xml version="1.0" encoding="utf-8"?>
+<file path=ppt/slides/slide11.xml><?xml version="1.0" encoding="utf-8"?>
 <p:sld xmlns:a="http://schemas.openxmlformats.org/drawingml/2006/main" xmlns:p="http://schemas.openxmlformats.org/presentationml/2006/main" xmlns:r="http://schemas.openxmlformats.org/officeDocument/2006/relationships">
   <p:cSld>
     <p:spTree>
@@ -40247,7 +39402,7 @@
         <p:spPr>
           <a:xfrm>
             <a:off x="889446" y="2014379"/>
-            <a:ext cx="6300000" cy="3413760"/>
+            <a:ext cx="9385264" cy="3413760"/>
           </a:xfrm>
           <a:prstGeom prst="rect">
             <a:avLst/>
@@ -40271,12 +39426,12 @@
                 <a:spcPts val="0"/>
               </a:spcBef>
               <a:spcAft>
-                <a:spcPts val="600"/>
+                <a:spcPts val="800"/>
               </a:spcAft>
               <a:buNone/>
             </a:pPr>
             <a:r>
-              <a:rPr sz="1500">
+              <a:rPr sz="2000">
                 <a:solidFill>
                   <a:srgbClr val="3A3A3A"/>
                 </a:solidFill>
@@ -40289,11 +39444,11 @@
           <a:p>
             <a:pPr>
               <a:spcAft>
-                <a:spcPts val="600"/>
+                <a:spcPts val="800"/>
               </a:spcAft>
             </a:pPr>
             <a:r>
-              <a:rPr sz="1500">
+              <a:rPr sz="2000">
                 <a:solidFill>
                   <a:srgbClr val="3A3A3A"/>
                 </a:solidFill>
@@ -40305,11 +39460,11 @@
           <a:p>
             <a:pPr>
               <a:spcAft>
-                <a:spcPts val="600"/>
+                <a:spcPts val="800"/>
               </a:spcAft>
             </a:pPr>
             <a:r>
-              <a:rPr sz="1500">
+              <a:rPr sz="2000">
                 <a:solidFill>
                   <a:srgbClr val="3A3A3A"/>
                 </a:solidFill>
@@ -40321,11 +39476,11 @@
           <a:p>
             <a:pPr>
               <a:spcAft>
-                <a:spcPts val="600"/>
+                <a:spcPts val="800"/>
               </a:spcAft>
             </a:pPr>
             <a:r>
-              <a:rPr sz="1500">
+              <a:rPr sz="2000">
                 <a:solidFill>
                   <a:srgbClr val="3A3A3A"/>
                 </a:solidFill>
@@ -40337,11 +39492,11 @@
           <a:p>
             <a:pPr>
               <a:spcAft>
-                <a:spcPts val="600"/>
+                <a:spcPts val="800"/>
               </a:spcAft>
             </a:pPr>
             <a:r>
-              <a:rPr sz="1500">
+              <a:rPr sz="2000">
                 <a:solidFill>
                   <a:srgbClr val="3A3A3A"/>
                 </a:solidFill>
@@ -40353,11 +39508,11 @@
           <a:p>
             <a:pPr>
               <a:spcAft>
-                <a:spcPts val="600"/>
+                <a:spcPts val="800"/>
               </a:spcAft>
             </a:pPr>
             <a:r>
-              <a:rPr sz="1500">
+              <a:rPr sz="2000">
                 <a:solidFill>
                   <a:srgbClr val="3A3A3A"/>
                 </a:solidFill>
@@ -40375,12 +39530,12 @@
                 <a:spcPts val="0"/>
               </a:spcBef>
               <a:spcAft>
-                <a:spcPts val="600"/>
+                <a:spcPts val="800"/>
               </a:spcAft>
               <a:buNone/>
             </a:pPr>
             <a:r>
-              <a:rPr sz="1500">
+              <a:rPr sz="2000">
                 <a:solidFill>
                   <a:srgbClr val="3A3A3A"/>
                 </a:solidFill>
@@ -40399,12 +39554,12 @@
                 <a:spcPts val="0"/>
               </a:spcBef>
               <a:spcAft>
-                <a:spcPts val="600"/>
+                <a:spcPts val="800"/>
               </a:spcAft>
               <a:buNone/>
             </a:pPr>
             <a:r>
-              <a:rPr sz="1500" i="1">
+              <a:rPr sz="1200" i="1">
                 <a:solidFill>
                   <a:srgbClr val="3A3A3A"/>
                 </a:solidFill>
@@ -40700,659 +39855,9 @@
           <a:p>
             <a:pPr algn="r"/>
             <a:r>
-              <a:t>12</a:t>
+              <a:t>11</a:t>
             </a:r>
             <a:endParaRPr lang="en-US"/>
-          </a:p>
-        </p:txBody>
-      </p:sp>
-      <p:cxnSp>
-        <p:nvCxnSpPr>
-          <p:cNvPr id="253" name="Connector 252"/>
-          <p:cNvCxnSpPr/>
-          <p:nvPr/>
-        </p:nvCxnSpPr>
-        <p:spPr>
-          <a:xfrm>
-            <a:off x="9330000" y="2480000"/>
-            <a:ext cx="1300000" cy="700000"/>
-          </a:xfrm>
-          <a:prstGeom prst="line">
-            <a:avLst/>
-          </a:prstGeom>
-          <a:ln w="9525">
-            <a:solidFill>
-              <a:srgbClr val="E8E8E8"/>
-            </a:solidFill>
-          </a:ln>
-        </p:spPr>
-        <p:style>
-          <a:lnRef idx="2">
-            <a:schemeClr val="accent1"/>
-          </a:lnRef>
-          <a:fillRef idx="0">
-            <a:schemeClr val="accent1"/>
-          </a:fillRef>
-          <a:effectRef idx="1">
-            <a:schemeClr val="accent1"/>
-          </a:effectRef>
-          <a:fontRef idx="minor">
-            <a:schemeClr val="tx1"/>
-          </a:fontRef>
-        </p:style>
-      </p:cxnSp>
-      <p:cxnSp>
-        <p:nvCxnSpPr>
-          <p:cNvPr id="254" name="Connector 253"/>
-          <p:cNvCxnSpPr/>
-          <p:nvPr/>
-        </p:nvCxnSpPr>
-        <p:spPr>
-          <a:xfrm>
-            <a:off x="9330000" y="2480000"/>
-            <a:ext cx="850000" cy="2100000"/>
-          </a:xfrm>
-          <a:prstGeom prst="line">
-            <a:avLst/>
-          </a:prstGeom>
-          <a:ln w="9525">
-            <a:solidFill>
-              <a:srgbClr val="E8E8E8"/>
-            </a:solidFill>
-          </a:ln>
-        </p:spPr>
-        <p:style>
-          <a:lnRef idx="2">
-            <a:schemeClr val="accent1"/>
-          </a:lnRef>
-          <a:fillRef idx="0">
-            <a:schemeClr val="accent1"/>
-          </a:fillRef>
-          <a:effectRef idx="1">
-            <a:schemeClr val="accent1"/>
-          </a:effectRef>
-          <a:fontRef idx="minor">
-            <a:schemeClr val="tx1"/>
-          </a:fontRef>
-        </p:style>
-      </p:cxnSp>
-      <p:cxnSp>
-        <p:nvCxnSpPr>
-          <p:cNvPr id="255" name="Connector 254"/>
-          <p:cNvCxnSpPr/>
-          <p:nvPr/>
-        </p:nvCxnSpPr>
-        <p:spPr>
-          <a:xfrm flipH="1">
-            <a:off x="8480000" y="2480000"/>
-            <a:ext cx="850000" cy="2100000"/>
-          </a:xfrm>
-          <a:prstGeom prst="line">
-            <a:avLst/>
-          </a:prstGeom>
-          <a:ln w="9525">
-            <a:solidFill>
-              <a:srgbClr val="E8E8E8"/>
-            </a:solidFill>
-          </a:ln>
-        </p:spPr>
-        <p:style>
-          <a:lnRef idx="2">
-            <a:schemeClr val="accent1"/>
-          </a:lnRef>
-          <a:fillRef idx="0">
-            <a:schemeClr val="accent1"/>
-          </a:fillRef>
-          <a:effectRef idx="1">
-            <a:schemeClr val="accent1"/>
-          </a:effectRef>
-          <a:fontRef idx="minor">
-            <a:schemeClr val="tx1"/>
-          </a:fontRef>
-        </p:style>
-      </p:cxnSp>
-      <p:cxnSp>
-        <p:nvCxnSpPr>
-          <p:cNvPr id="256" name="Connector 255"/>
-          <p:cNvCxnSpPr/>
-          <p:nvPr/>
-        </p:nvCxnSpPr>
-        <p:spPr>
-          <a:xfrm flipH="1">
-            <a:off x="8030000" y="2480000"/>
-            <a:ext cx="1300000" cy="700000"/>
-          </a:xfrm>
-          <a:prstGeom prst="line">
-            <a:avLst/>
-          </a:prstGeom>
-          <a:ln w="9525">
-            <a:solidFill>
-              <a:srgbClr val="E8E8E8"/>
-            </a:solidFill>
-          </a:ln>
-        </p:spPr>
-        <p:style>
-          <a:lnRef idx="2">
-            <a:schemeClr val="accent1"/>
-          </a:lnRef>
-          <a:fillRef idx="0">
-            <a:schemeClr val="accent1"/>
-          </a:fillRef>
-          <a:effectRef idx="1">
-            <a:schemeClr val="accent1"/>
-          </a:effectRef>
-          <a:fontRef idx="minor">
-            <a:schemeClr val="tx1"/>
-          </a:fontRef>
-        </p:style>
-      </p:cxnSp>
-      <p:cxnSp>
-        <p:nvCxnSpPr>
-          <p:cNvPr id="257" name="Connector 256"/>
-          <p:cNvCxnSpPr/>
-          <p:nvPr/>
-        </p:nvCxnSpPr>
-        <p:spPr>
-          <a:xfrm flipH="1">
-            <a:off x="10180000" y="3180000"/>
-            <a:ext cx="450000" cy="1400000"/>
-          </a:xfrm>
-          <a:prstGeom prst="line">
-            <a:avLst/>
-          </a:prstGeom>
-          <a:ln w="9525">
-            <a:solidFill>
-              <a:srgbClr val="E8E8E8"/>
-            </a:solidFill>
-          </a:ln>
-        </p:spPr>
-        <p:style>
-          <a:lnRef idx="2">
-            <a:schemeClr val="accent1"/>
-          </a:lnRef>
-          <a:fillRef idx="0">
-            <a:schemeClr val="accent1"/>
-          </a:fillRef>
-          <a:effectRef idx="1">
-            <a:schemeClr val="accent1"/>
-          </a:effectRef>
-          <a:fontRef idx="minor">
-            <a:schemeClr val="tx1"/>
-          </a:fontRef>
-        </p:style>
-      </p:cxnSp>
-      <p:cxnSp>
-        <p:nvCxnSpPr>
-          <p:cNvPr id="258" name="Connector 257"/>
-          <p:cNvCxnSpPr/>
-          <p:nvPr/>
-        </p:nvCxnSpPr>
-        <p:spPr>
-          <a:xfrm flipH="1">
-            <a:off x="8480000" y="3180000"/>
-            <a:ext cx="2150000" cy="1400000"/>
-          </a:xfrm>
-          <a:prstGeom prst="line">
-            <a:avLst/>
-          </a:prstGeom>
-          <a:ln w="9525">
-            <a:solidFill>
-              <a:srgbClr val="E8E8E8"/>
-            </a:solidFill>
-          </a:ln>
-        </p:spPr>
-        <p:style>
-          <a:lnRef idx="2">
-            <a:schemeClr val="accent1"/>
-          </a:lnRef>
-          <a:fillRef idx="0">
-            <a:schemeClr val="accent1"/>
-          </a:fillRef>
-          <a:effectRef idx="1">
-            <a:schemeClr val="accent1"/>
-          </a:effectRef>
-          <a:fontRef idx="minor">
-            <a:schemeClr val="tx1"/>
-          </a:fontRef>
-        </p:style>
-      </p:cxnSp>
-      <p:cxnSp>
-        <p:nvCxnSpPr>
-          <p:cNvPr id="259" name="Connector 258"/>
-          <p:cNvCxnSpPr/>
-          <p:nvPr/>
-        </p:nvCxnSpPr>
-        <p:spPr>
-          <a:xfrm flipH="1">
-            <a:off x="8030000" y="3180000"/>
-            <a:ext cx="2600000" cy="0"/>
-          </a:xfrm>
-          <a:prstGeom prst="line">
-            <a:avLst/>
-          </a:prstGeom>
-          <a:ln w="9525">
-            <a:solidFill>
-              <a:srgbClr val="E8E8E8"/>
-            </a:solidFill>
-          </a:ln>
-        </p:spPr>
-        <p:style>
-          <a:lnRef idx="2">
-            <a:schemeClr val="accent1"/>
-          </a:lnRef>
-          <a:fillRef idx="0">
-            <a:schemeClr val="accent1"/>
-          </a:fillRef>
-          <a:effectRef idx="1">
-            <a:schemeClr val="accent1"/>
-          </a:effectRef>
-          <a:fontRef idx="minor">
-            <a:schemeClr val="tx1"/>
-          </a:fontRef>
-        </p:style>
-      </p:cxnSp>
-      <p:cxnSp>
-        <p:nvCxnSpPr>
-          <p:cNvPr id="260" name="Connector 259"/>
-          <p:cNvCxnSpPr/>
-          <p:nvPr/>
-        </p:nvCxnSpPr>
-        <p:spPr>
-          <a:xfrm flipH="1">
-            <a:off x="8480000" y="4580000"/>
-            <a:ext cx="1700000" cy="0"/>
-          </a:xfrm>
-          <a:prstGeom prst="line">
-            <a:avLst/>
-          </a:prstGeom>
-          <a:ln w="9525">
-            <a:solidFill>
-              <a:srgbClr val="E8E8E8"/>
-            </a:solidFill>
-          </a:ln>
-        </p:spPr>
-        <p:style>
-          <a:lnRef idx="2">
-            <a:schemeClr val="accent1"/>
-          </a:lnRef>
-          <a:fillRef idx="0">
-            <a:schemeClr val="accent1"/>
-          </a:fillRef>
-          <a:effectRef idx="1">
-            <a:schemeClr val="accent1"/>
-          </a:effectRef>
-          <a:fontRef idx="minor">
-            <a:schemeClr val="tx1"/>
-          </a:fontRef>
-        </p:style>
-      </p:cxnSp>
-      <p:cxnSp>
-        <p:nvCxnSpPr>
-          <p:cNvPr id="261" name="Connector 260"/>
-          <p:cNvCxnSpPr/>
-          <p:nvPr/>
-        </p:nvCxnSpPr>
-        <p:spPr>
-          <a:xfrm flipH="1" flipV="1">
-            <a:off x="8030000" y="3180000"/>
-            <a:ext cx="2150000" cy="1400000"/>
-          </a:xfrm>
-          <a:prstGeom prst="line">
-            <a:avLst/>
-          </a:prstGeom>
-          <a:ln w="9525">
-            <a:solidFill>
-              <a:srgbClr val="E8E8E8"/>
-            </a:solidFill>
-          </a:ln>
-        </p:spPr>
-        <p:style>
-          <a:lnRef idx="2">
-            <a:schemeClr val="accent1"/>
-          </a:lnRef>
-          <a:fillRef idx="0">
-            <a:schemeClr val="accent1"/>
-          </a:fillRef>
-          <a:effectRef idx="1">
-            <a:schemeClr val="accent1"/>
-          </a:effectRef>
-          <a:fontRef idx="minor">
-            <a:schemeClr val="tx1"/>
-          </a:fontRef>
-        </p:style>
-      </p:cxnSp>
-      <p:cxnSp>
-        <p:nvCxnSpPr>
-          <p:cNvPr id="262" name="Connector 261"/>
-          <p:cNvCxnSpPr/>
-          <p:nvPr/>
-        </p:nvCxnSpPr>
-        <p:spPr>
-          <a:xfrm flipH="1" flipV="1">
-            <a:off x="8030000" y="3180000"/>
-            <a:ext cx="450000" cy="1400000"/>
-          </a:xfrm>
-          <a:prstGeom prst="line">
-            <a:avLst/>
-          </a:prstGeom>
-          <a:ln w="9525">
-            <a:solidFill>
-              <a:srgbClr val="E8E8E8"/>
-            </a:solidFill>
-          </a:ln>
-        </p:spPr>
-        <p:style>
-          <a:lnRef idx="2">
-            <a:schemeClr val="accent1"/>
-          </a:lnRef>
-          <a:fillRef idx="0">
-            <a:schemeClr val="accent1"/>
-          </a:fillRef>
-          <a:effectRef idx="1">
-            <a:schemeClr val="accent1"/>
-          </a:effectRef>
-          <a:fontRef idx="minor">
-            <a:schemeClr val="tx1"/>
-          </a:fontRef>
-        </p:style>
-      </p:cxnSp>
-      <p:sp>
-        <p:nvSpPr>
-          <p:cNvPr id="263" name="Oval 262"/>
-          <p:cNvSpPr/>
-          <p:nvPr/>
-        </p:nvSpPr>
-        <p:spPr>
-          <a:xfrm>
-            <a:off x="9000000" y="2150000"/>
-            <a:ext cx="660000" cy="660000"/>
-          </a:xfrm>
-          <a:prstGeom prst="ellipse">
-            <a:avLst/>
-          </a:prstGeom>
-          <a:solidFill>
-            <a:srgbClr val="0F9ED5"/>
-          </a:solidFill>
-          <a:ln>
-            <a:noFill/>
-          </a:ln>
-          <a:effectLst/>
-        </p:spPr>
-        <p:style>
-          <a:lnRef idx="1">
-            <a:schemeClr val="accent1"/>
-          </a:lnRef>
-          <a:fillRef idx="3">
-            <a:schemeClr val="accent1"/>
-          </a:fillRef>
-          <a:effectRef idx="2">
-            <a:schemeClr val="accent1"/>
-          </a:effectRef>
-          <a:fontRef idx="minor">
-            <a:schemeClr val="lt1"/>
-          </a:fontRef>
-        </p:style>
-        <p:txBody>
-          <a:bodyPr rtlCol="0" anchor="ctr" wrap="square" lIns="18000" rIns="18000" tIns="9000" bIns="9000"/>
-          <a:lstStyle/>
-          <a:p>
-            <a:pPr algn="ctr"/>
-            <a:r>
-              <a:rPr sz="900" b="1">
-                <a:solidFill>
-                  <a:srgbClr val="0E2841"/>
-                </a:solidFill>
-                <a:latin typeface="Roboto Condensed"/>
-              </a:rPr>
-              <a:t>Salud</a:t>
-            </a:r>
-          </a:p>
-        </p:txBody>
-      </p:sp>
-      <p:sp>
-        <p:nvSpPr>
-          <p:cNvPr id="264" name="Oval 263"/>
-          <p:cNvSpPr/>
-          <p:nvPr/>
-        </p:nvSpPr>
-        <p:spPr>
-          <a:xfrm>
-            <a:off x="10300000" y="2850000"/>
-            <a:ext cx="660000" cy="660000"/>
-          </a:xfrm>
-          <a:prstGeom prst="ellipse">
-            <a:avLst/>
-          </a:prstGeom>
-          <a:solidFill>
-            <a:srgbClr val="0F9ED5"/>
-          </a:solidFill>
-          <a:ln>
-            <a:noFill/>
-          </a:ln>
-          <a:effectLst/>
-        </p:spPr>
-        <p:style>
-          <a:lnRef idx="1">
-            <a:schemeClr val="accent1"/>
-          </a:lnRef>
-          <a:fillRef idx="3">
-            <a:schemeClr val="accent1"/>
-          </a:fillRef>
-          <a:effectRef idx="2">
-            <a:schemeClr val="accent1"/>
-          </a:effectRef>
-          <a:fontRef idx="minor">
-            <a:schemeClr val="lt1"/>
-          </a:fontRef>
-        </p:style>
-        <p:txBody>
-          <a:bodyPr rtlCol="0" anchor="ctr" wrap="square" lIns="18000" rIns="18000" tIns="9000" bIns="9000"/>
-          <a:lstStyle/>
-          <a:p>
-            <a:pPr algn="ctr"/>
-            <a:r>
-              <a:rPr sz="900" b="1">
-                <a:solidFill>
-                  <a:srgbClr val="0E2841"/>
-                </a:solidFill>
-                <a:latin typeface="Roboto Condensed"/>
-              </a:rPr>
-              <a:t>Bancos</a:t>
-            </a:r>
-          </a:p>
-        </p:txBody>
-      </p:sp>
-      <p:sp>
-        <p:nvSpPr>
-          <p:cNvPr id="265" name="Oval 264"/>
-          <p:cNvSpPr/>
-          <p:nvPr/>
-        </p:nvSpPr>
-        <p:spPr>
-          <a:xfrm>
-            <a:off x="9850000" y="4250000"/>
-            <a:ext cx="660000" cy="660000"/>
-          </a:xfrm>
-          <a:prstGeom prst="ellipse">
-            <a:avLst/>
-          </a:prstGeom>
-          <a:solidFill>
-            <a:srgbClr val="0F9ED5"/>
-          </a:solidFill>
-          <a:ln>
-            <a:noFill/>
-          </a:ln>
-          <a:effectLst/>
-        </p:spPr>
-        <p:style>
-          <a:lnRef idx="1">
-            <a:schemeClr val="accent1"/>
-          </a:lnRef>
-          <a:fillRef idx="3">
-            <a:schemeClr val="accent1"/>
-          </a:fillRef>
-          <a:effectRef idx="2">
-            <a:schemeClr val="accent1"/>
-          </a:effectRef>
-          <a:fontRef idx="minor">
-            <a:schemeClr val="lt1"/>
-          </a:fontRef>
-        </p:style>
-        <p:txBody>
-          <a:bodyPr rtlCol="0" anchor="ctr" wrap="square" lIns="18000" rIns="18000" tIns="9000" bIns="9000"/>
-          <a:lstStyle/>
-          <a:p>
-            <a:pPr algn="ctr"/>
-            <a:r>
-              <a:rPr sz="900" b="1">
-                <a:solidFill>
-                  <a:srgbClr val="0E2841"/>
-                </a:solidFill>
-                <a:latin typeface="Roboto Condensed"/>
-              </a:rPr>
-              <a:t>Municipios</a:t>
-            </a:r>
-          </a:p>
-        </p:txBody>
-      </p:sp>
-      <p:sp>
-        <p:nvSpPr>
-          <p:cNvPr id="266" name="Oval 265"/>
-          <p:cNvSpPr/>
-          <p:nvPr/>
-        </p:nvSpPr>
-        <p:spPr>
-          <a:xfrm>
-            <a:off x="8150000" y="4250000"/>
-            <a:ext cx="660000" cy="660000"/>
-          </a:xfrm>
-          <a:prstGeom prst="ellipse">
-            <a:avLst/>
-          </a:prstGeom>
-          <a:solidFill>
-            <a:srgbClr val="0F9ED5"/>
-          </a:solidFill>
-          <a:ln>
-            <a:noFill/>
-          </a:ln>
-          <a:effectLst/>
-        </p:spPr>
-        <p:style>
-          <a:lnRef idx="1">
-            <a:schemeClr val="accent1"/>
-          </a:lnRef>
-          <a:fillRef idx="3">
-            <a:schemeClr val="accent1"/>
-          </a:fillRef>
-          <a:effectRef idx="2">
-            <a:schemeClr val="accent1"/>
-          </a:effectRef>
-          <a:fontRef idx="minor">
-            <a:schemeClr val="lt1"/>
-          </a:fontRef>
-        </p:style>
-        <p:txBody>
-          <a:bodyPr rtlCol="0" anchor="ctr" wrap="square" lIns="18000" rIns="18000" tIns="9000" bIns="9000"/>
-          <a:lstStyle/>
-          <a:p>
-            <a:pPr algn="ctr"/>
-            <a:r>
-              <a:rPr sz="900" b="1">
-                <a:solidFill>
-                  <a:srgbClr val="0E2841"/>
-                </a:solidFill>
-                <a:latin typeface="Roboto Condensed"/>
-              </a:rPr>
-              <a:t>Educación</a:t>
-            </a:r>
-          </a:p>
-        </p:txBody>
-      </p:sp>
-      <p:sp>
-        <p:nvSpPr>
-          <p:cNvPr id="267" name="Oval 266"/>
-          <p:cNvSpPr/>
-          <p:nvPr/>
-        </p:nvSpPr>
-        <p:spPr>
-          <a:xfrm>
-            <a:off x="7700000" y="2850000"/>
-            <a:ext cx="660000" cy="660000"/>
-          </a:xfrm>
-          <a:prstGeom prst="ellipse">
-            <a:avLst/>
-          </a:prstGeom>
-          <a:solidFill>
-            <a:srgbClr val="0F9ED5"/>
-          </a:solidFill>
-          <a:ln>
-            <a:noFill/>
-          </a:ln>
-          <a:effectLst/>
-        </p:spPr>
-        <p:style>
-          <a:lnRef idx="1">
-            <a:schemeClr val="accent1"/>
-          </a:lnRef>
-          <a:fillRef idx="3">
-            <a:schemeClr val="accent1"/>
-          </a:fillRef>
-          <a:effectRef idx="2">
-            <a:schemeClr val="accent1"/>
-          </a:effectRef>
-          <a:fontRef idx="minor">
-            <a:schemeClr val="lt1"/>
-          </a:fontRef>
-        </p:style>
-        <p:txBody>
-          <a:bodyPr rtlCol="0" anchor="ctr" wrap="square" lIns="18000" rIns="18000" tIns="9000" bIns="9000"/>
-          <a:lstStyle/>
-          <a:p>
-            <a:pPr algn="ctr"/>
-            <a:r>
-              <a:rPr sz="900" b="1">
-                <a:solidFill>
-                  <a:srgbClr val="0E2841"/>
-                </a:solidFill>
-                <a:latin typeface="Roboto Condensed"/>
-              </a:rPr>
-              <a:t>Impuestos</a:t>
-            </a:r>
-          </a:p>
-        </p:txBody>
-      </p:sp>
-      <p:sp>
-        <p:nvSpPr>
-          <p:cNvPr id="268" name="TextBox 267"/>
-          <p:cNvSpPr txBox="1"/>
-          <p:nvPr/>
-        </p:nvSpPr>
-        <p:spPr>
-          <a:xfrm>
-            <a:off x="7350000" y="4650000"/>
-            <a:ext cx="3700000" cy="300000"/>
-          </a:xfrm>
-          <a:prstGeom prst="rect">
-            <a:avLst/>
-          </a:prstGeom>
-          <a:noFill/>
-        </p:spPr>
-        <p:txBody>
-          <a:bodyPr wrap="square" lIns="0" rIns="0" tIns="0" bIns="0">
-            <a:spAutoFit/>
-          </a:bodyPr>
-          <a:lstStyle/>
-          <a:p>
-            <a:pPr algn="ctr"/>
-            <a:r>
-              <a:rPr sz="1000" b="0" i="1">
-                <a:solidFill>
-                  <a:srgbClr val="3A3A3A"/>
-                </a:solidFill>
-                <a:latin typeface="Roboto Condensed"/>
-              </a:rPr>
-              <a:t>Referencial: red distribuida sin autoridad central</a:t>
-            </a:r>
           </a:p>
         </p:txBody>
       </p:sp>
@@ -41364,7 +39869,7 @@
 </p:sld>
 </file>
 
-<file path=ppt/slides/slide13.xml><?xml version="1.0" encoding="utf-8"?>
+<file path=ppt/slides/slide12.xml><?xml version="1.0" encoding="utf-8"?>
 <p:sld xmlns:a="http://schemas.openxmlformats.org/drawingml/2006/main" xmlns:p="http://schemas.openxmlformats.org/presentationml/2006/main" xmlns:r="http://schemas.openxmlformats.org/officeDocument/2006/relationships">
   <p:cSld>
     <p:spTree>
@@ -41857,7 +40362,7 @@
           <a:p>
             <a:pPr algn="r"/>
             <a:r>
-              <a:t>13</a:t>
+              <a:t>12</a:t>
             </a:r>
             <a:endParaRPr lang="en-US"/>
           </a:p>
@@ -41871,7 +40376,7 @@
 </p:sld>
 </file>
 
-<file path=ppt/slides/slide14.xml><?xml version="1.0" encoding="utf-8"?>
+<file path=ppt/slides/slide13.xml><?xml version="1.0" encoding="utf-8"?>
 <p:sld xmlns:a="http://schemas.openxmlformats.org/drawingml/2006/main" xmlns:p="http://schemas.openxmlformats.org/presentationml/2006/main" xmlns:r="http://schemas.openxmlformats.org/officeDocument/2006/relationships">
   <p:cSld>
     <p:spTree>
@@ -41943,7 +40448,7 @@
         <p:spPr>
           <a:xfrm>
             <a:off x="889446" y="2014379"/>
-            <a:ext cx="6300000" cy="3413760"/>
+            <a:ext cx="9385264" cy="3413760"/>
           </a:xfrm>
           <a:prstGeom prst="rect">
             <a:avLst/>
@@ -41967,12 +40472,12 @@
                 <a:spcPts val="0"/>
               </a:spcBef>
               <a:spcAft>
-                <a:spcPts val="600"/>
+                <a:spcPts val="800"/>
               </a:spcAft>
               <a:buNone/>
             </a:pPr>
             <a:r>
-              <a:rPr sz="1500">
+              <a:rPr sz="2000">
                 <a:solidFill>
                   <a:srgbClr val="3A3A3A"/>
                 </a:solidFill>
@@ -41991,12 +40496,12 @@
                 <a:spcPts val="0"/>
               </a:spcBef>
               <a:spcAft>
-                <a:spcPts val="600"/>
+                <a:spcPts val="800"/>
               </a:spcAft>
               <a:buNone/>
             </a:pPr>
             <a:r>
-              <a:rPr sz="1500">
+              <a:rPr sz="2000">
                 <a:solidFill>
                   <a:srgbClr val="3A3A3A"/>
                 </a:solidFill>
@@ -42015,12 +40520,12 @@
                 <a:spcPts val="0"/>
               </a:spcBef>
               <a:spcAft>
-                <a:spcPts val="600"/>
+                <a:spcPts val="800"/>
               </a:spcAft>
               <a:buNone/>
             </a:pPr>
             <a:r>
-              <a:rPr sz="1500">
+              <a:rPr sz="2000">
                 <a:solidFill>
                   <a:srgbClr val="3A3A3A"/>
                 </a:solidFill>
@@ -42039,12 +40544,12 @@
                 <a:spcPts val="0"/>
               </a:spcBef>
               <a:spcAft>
-                <a:spcPts val="600"/>
+                <a:spcPts val="800"/>
               </a:spcAft>
               <a:buNone/>
             </a:pPr>
             <a:r>
-              <a:rPr sz="1500">
+              <a:rPr sz="2000">
                 <a:solidFill>
                   <a:srgbClr val="3A3A3A"/>
                 </a:solidFill>
@@ -42063,12 +40568,12 @@
                 <a:spcPts val="0"/>
               </a:spcBef>
               <a:spcAft>
-                <a:spcPts val="600"/>
+                <a:spcPts val="800"/>
               </a:spcAft>
               <a:buNone/>
             </a:pPr>
             <a:r>
-              <a:rPr sz="1500">
+              <a:rPr sz="2000">
                 <a:solidFill>
                   <a:srgbClr val="3A3A3A"/>
                 </a:solidFill>
@@ -42087,12 +40592,12 @@
                 <a:spcPts val="0"/>
               </a:spcBef>
               <a:spcAft>
-                <a:spcPts val="600"/>
+                <a:spcPts val="800"/>
               </a:spcAft>
               <a:buNone/>
             </a:pPr>
             <a:r>
-              <a:rPr sz="1500">
+              <a:rPr sz="2000">
                 <a:solidFill>
                   <a:srgbClr val="3A3A3A"/>
                 </a:solidFill>
@@ -42111,12 +40616,12 @@
                 <a:spcPts val="0"/>
               </a:spcBef>
               <a:spcAft>
-                <a:spcPts val="600"/>
+                <a:spcPts val="800"/>
               </a:spcAft>
               <a:buNone/>
             </a:pPr>
             <a:r>
-              <a:rPr sz="1500" i="1">
+              <a:rPr sz="1200" i="1">
                 <a:solidFill>
                   <a:srgbClr val="3A3A3A"/>
                 </a:solidFill>
@@ -42412,203 +40917,9 @@
           <a:p>
             <a:pPr algn="r"/>
             <a:r>
-              <a:t>14</a:t>
+              <a:t>13</a:t>
             </a:r>
             <a:endParaRPr lang="en-US"/>
-          </a:p>
-        </p:txBody>
-      </p:sp>
-      <p:sp>
-        <p:nvSpPr>
-          <p:cNvPr id="253" name="Oval 252"/>
-          <p:cNvSpPr/>
-          <p:nvPr/>
-        </p:nvSpPr>
-        <p:spPr>
-          <a:xfrm>
-            <a:off x="8200000" y="2200000"/>
-            <a:ext cx="900000" cy="900000"/>
-          </a:xfrm>
-          <a:prstGeom prst="ellipse">
-            <a:avLst/>
-          </a:prstGeom>
-          <a:solidFill>
-            <a:srgbClr val="E97132"/>
-          </a:solidFill>
-          <a:ln>
-            <a:noFill/>
-          </a:ln>
-          <a:effectLst/>
-        </p:spPr>
-        <p:style>
-          <a:lnRef idx="1">
-            <a:schemeClr val="accent1"/>
-          </a:lnRef>
-          <a:fillRef idx="3">
-            <a:schemeClr val="accent1"/>
-          </a:fillRef>
-          <a:effectRef idx="2">
-            <a:schemeClr val="accent1"/>
-          </a:effectRef>
-          <a:fontRef idx="minor">
-            <a:schemeClr val="lt1"/>
-          </a:fontRef>
-        </p:style>
-        <p:txBody>
-          <a:bodyPr rtlCol="0" anchor="ctr" wrap="square" lIns="18000" rIns="18000" tIns="9000" bIns="9000"/>
-          <a:lstStyle/>
-          <a:p>
-            <a:pPr algn="ctr"/>
-          </a:p>
-        </p:txBody>
-      </p:sp>
-      <p:sp>
-        <p:nvSpPr>
-          <p:cNvPr id="254" name="Rounded Rectangle 253"/>
-          <p:cNvSpPr/>
-          <p:nvPr/>
-        </p:nvSpPr>
-        <p:spPr>
-          <a:xfrm>
-            <a:off x="8050000" y="2950000"/>
-            <a:ext cx="1200000" cy="1100000"/>
-          </a:xfrm>
-          <a:prstGeom prst="roundRect">
-            <a:avLst/>
-          </a:prstGeom>
-          <a:solidFill>
-            <a:srgbClr val="E97132"/>
-          </a:solidFill>
-          <a:ln>
-            <a:noFill/>
-          </a:ln>
-          <a:effectLst/>
-        </p:spPr>
-        <p:style>
-          <a:lnRef idx="1">
-            <a:schemeClr val="accent1"/>
-          </a:lnRef>
-          <a:fillRef idx="3">
-            <a:schemeClr val="accent1"/>
-          </a:fillRef>
-          <a:effectRef idx="2">
-            <a:schemeClr val="accent1"/>
-          </a:effectRef>
-          <a:fontRef idx="minor">
-            <a:schemeClr val="lt1"/>
-          </a:fontRef>
-        </p:style>
-        <p:txBody>
-          <a:bodyPr rtlCol="0" anchor="ctr" wrap="square" lIns="18000" rIns="18000" tIns="9000" bIns="9000"/>
-          <a:lstStyle/>
-          <a:p>
-            <a:pPr algn="ctr"/>
-          </a:p>
-        </p:txBody>
-      </p:sp>
-      <p:sp>
-        <p:nvSpPr>
-          <p:cNvPr id="255" name="TextBox 254"/>
-          <p:cNvSpPr txBox="1"/>
-          <p:nvPr/>
-        </p:nvSpPr>
-        <p:spPr>
-          <a:xfrm>
-            <a:off x="7850000" y="4250000"/>
-            <a:ext cx="1600000" cy="260000"/>
-          </a:xfrm>
-          <a:prstGeom prst="rect">
-            <a:avLst/>
-          </a:prstGeom>
-          <a:noFill/>
-        </p:spPr>
-        <p:txBody>
-          <a:bodyPr wrap="square" lIns="0" rIns="0" tIns="0" bIns="0">
-            <a:spAutoFit/>
-          </a:bodyPr>
-          <a:lstStyle/>
-          <a:p>
-            <a:pPr algn="ctr"/>
-            <a:r>
-              <a:rPr sz="1400" b="1" i="0">
-                <a:solidFill>
-                  <a:srgbClr val="0E2841"/>
-                </a:solidFill>
-                <a:latin typeface="Roboto Condensed"/>
-              </a:rPr>
-              <a:t>ClaveÚnica</a:t>
-            </a:r>
-          </a:p>
-        </p:txBody>
-      </p:sp>
-      <p:sp>
-        <p:nvSpPr>
-          <p:cNvPr id="256" name="TextBox 255"/>
-          <p:cNvSpPr txBox="1"/>
-          <p:nvPr/>
-        </p:nvSpPr>
-        <p:spPr>
-          <a:xfrm>
-            <a:off x="7850000" y="4520000"/>
-            <a:ext cx="1600000" cy="400000"/>
-          </a:xfrm>
-          <a:prstGeom prst="rect">
-            <a:avLst/>
-          </a:prstGeom>
-          <a:noFill/>
-        </p:spPr>
-        <p:txBody>
-          <a:bodyPr wrap="square" lIns="0" rIns="0" tIns="0" bIns="0">
-            <a:spAutoFit/>
-          </a:bodyPr>
-          <a:lstStyle/>
-          <a:p>
-            <a:pPr algn="ctr"/>
-            <a:r>
-              <a:rPr sz="1000" b="0" i="0">
-                <a:solidFill>
-                  <a:srgbClr val="3A3A3A"/>
-                </a:solidFill>
-                <a:latin typeface="Roboto Condensed"/>
-              </a:rPr>
-              <a:t>Identidad digital
-del Estado de Chile</a:t>
-            </a:r>
-          </a:p>
-        </p:txBody>
-      </p:sp>
-      <p:sp>
-        <p:nvSpPr>
-          <p:cNvPr id="257" name="TextBox 256"/>
-          <p:cNvSpPr txBox="1"/>
-          <p:nvPr/>
-        </p:nvSpPr>
-        <p:spPr>
-          <a:xfrm>
-            <a:off x="7450000" y="5050000"/>
-            <a:ext cx="2000000" cy="300000"/>
-          </a:xfrm>
-          <a:prstGeom prst="rect">
-            <a:avLst/>
-          </a:prstGeom>
-          <a:noFill/>
-        </p:spPr>
-        <p:txBody>
-          <a:bodyPr wrap="square" lIns="0" rIns="0" tIns="0" bIns="0">
-            <a:spAutoFit/>
-          </a:bodyPr>
-          <a:lstStyle/>
-          <a:p>
-            <a:pPr algn="ctr"/>
-            <a:r>
-              <a:rPr sz="1000" b="0" i="1">
-                <a:solidFill>
-                  <a:srgbClr val="3A3A3A"/>
-                </a:solidFill>
-                <a:latin typeface="Roboto Condensed"/>
-              </a:rPr>
-              <a:t>Referencial: acceso único a trámites del Estado</a:t>
-            </a:r>
           </a:p>
         </p:txBody>
       </p:sp>
@@ -42620,7 +40931,7 @@
 </p:sld>
 </file>
 
-<file path=ppt/slides/slide15.xml><?xml version="1.0" encoding="utf-8"?>
+<file path=ppt/slides/slide14.xml><?xml version="1.0" encoding="utf-8"?>
 <p:sld xmlns:a="http://schemas.openxmlformats.org/drawingml/2006/main" xmlns:p="http://schemas.openxmlformats.org/presentationml/2006/main" xmlns:r="http://schemas.openxmlformats.org/officeDocument/2006/relationships">
   <p:cSld>
     <p:spTree>
@@ -43017,7 +41328,7 @@
           <a:p>
             <a:pPr algn="r"/>
             <a:r>
-              <a:t>15</a:t>
+              <a:t>14</a:t>
             </a:r>
             <a:endParaRPr lang="en-US"/>
           </a:p>
@@ -43031,7 +41342,7 @@
 </p:sld>
 </file>
 
-<file path=ppt/slides/slide16.xml><?xml version="1.0" encoding="utf-8"?>
+<file path=ppt/slides/slide15.xml><?xml version="1.0" encoding="utf-8"?>
 <p:sld xmlns:a="http://schemas.openxmlformats.org/drawingml/2006/main" xmlns:p="http://schemas.openxmlformats.org/presentationml/2006/main" xmlns:r="http://schemas.openxmlformats.org/officeDocument/2006/relationships">
   <p:cSld>
     <p:spTree>
@@ -43103,7 +41414,7 @@
         <p:spPr>
           <a:xfrm>
             <a:off x="889446" y="2014379"/>
-            <a:ext cx="6300000" cy="3413760"/>
+            <a:ext cx="9385264" cy="3413760"/>
           </a:xfrm>
           <a:prstGeom prst="rect">
             <a:avLst/>
@@ -43127,12 +41438,12 @@
                 <a:spcPts val="0"/>
               </a:spcBef>
               <a:spcAft>
-                <a:spcPts val="600"/>
+                <a:spcPts val="800"/>
               </a:spcAft>
               <a:buNone/>
             </a:pPr>
             <a:r>
-              <a:rPr sz="1500">
+              <a:rPr sz="2000">
                 <a:solidFill>
                   <a:srgbClr val="3A3A3A"/>
                 </a:solidFill>
@@ -43145,11 +41456,11 @@
           <a:p>
             <a:pPr>
               <a:spcAft>
-                <a:spcPts val="600"/>
+                <a:spcPts val="800"/>
               </a:spcAft>
             </a:pPr>
             <a:r>
-              <a:rPr sz="1500">
+              <a:rPr sz="2000">
                 <a:solidFill>
                   <a:srgbClr val="3A3A3A"/>
                 </a:solidFill>
@@ -43161,11 +41472,11 @@
           <a:p>
             <a:pPr lvl="1">
               <a:spcAft>
-                <a:spcPts val="600"/>
+                <a:spcPts val="400"/>
               </a:spcAft>
             </a:pPr>
             <a:r>
-              <a:rPr sz="1500">
+              <a:rPr sz="1800">
                 <a:solidFill>
                   <a:srgbClr val="3A3A3A"/>
                 </a:solidFill>
@@ -43177,11 +41488,11 @@
           <a:p>
             <a:pPr lvl="1">
               <a:spcAft>
-                <a:spcPts val="600"/>
+                <a:spcPts val="400"/>
               </a:spcAft>
             </a:pPr>
             <a:r>
-              <a:rPr sz="1500">
+              <a:rPr sz="1800">
                 <a:solidFill>
                   <a:srgbClr val="3A3A3A"/>
                 </a:solidFill>
@@ -43193,11 +41504,11 @@
           <a:p>
             <a:pPr>
               <a:spcAft>
-                <a:spcPts val="600"/>
+                <a:spcPts val="800"/>
               </a:spcAft>
             </a:pPr>
             <a:r>
-              <a:rPr sz="1500">
+              <a:rPr sz="2000">
                 <a:solidFill>
                   <a:srgbClr val="3A3A3A"/>
                 </a:solidFill>
@@ -43492,1140 +41803,9 @@
           <a:p>
             <a:pPr algn="r"/>
             <a:r>
-              <a:t>16</a:t>
+              <a:t>15</a:t>
             </a:r>
             <a:endParaRPr lang="en-US"/>
-          </a:p>
-        </p:txBody>
-      </p:sp>
-      <p:cxnSp>
-        <p:nvCxnSpPr>
-          <p:cNvPr id="253" name="Connector 252"/>
-          <p:cNvCxnSpPr/>
-          <p:nvPr/>
-        </p:nvCxnSpPr>
-        <p:spPr>
-          <a:xfrm flipV="1">
-            <a:off x="7920000" y="2370000"/>
-            <a:ext cx="1100000" cy="220000"/>
-          </a:xfrm>
-          <a:prstGeom prst="line">
-            <a:avLst/>
-          </a:prstGeom>
-          <a:ln w="6350">
-            <a:solidFill>
-              <a:srgbClr val="E8E8E8"/>
-            </a:solidFill>
-          </a:ln>
-        </p:spPr>
-        <p:style>
-          <a:lnRef idx="2">
-            <a:schemeClr val="accent1"/>
-          </a:lnRef>
-          <a:fillRef idx="0">
-            <a:schemeClr val="accent1"/>
-          </a:fillRef>
-          <a:effectRef idx="1">
-            <a:schemeClr val="accent1"/>
-          </a:effectRef>
-          <a:fontRef idx="minor">
-            <a:schemeClr val="tx1"/>
-          </a:fontRef>
-        </p:style>
-      </p:cxnSp>
-      <p:cxnSp>
-        <p:nvCxnSpPr>
-          <p:cNvPr id="254" name="Connector 253"/>
-          <p:cNvCxnSpPr/>
-          <p:nvPr/>
-        </p:nvCxnSpPr>
-        <p:spPr>
-          <a:xfrm>
-            <a:off x="7920000" y="2590000"/>
-            <a:ext cx="1100000" cy="300000"/>
-          </a:xfrm>
-          <a:prstGeom prst="line">
-            <a:avLst/>
-          </a:prstGeom>
-          <a:ln w="6350">
-            <a:solidFill>
-              <a:srgbClr val="E8E8E8"/>
-            </a:solidFill>
-          </a:ln>
-        </p:spPr>
-        <p:style>
-          <a:lnRef idx="2">
-            <a:schemeClr val="accent1"/>
-          </a:lnRef>
-          <a:fillRef idx="0">
-            <a:schemeClr val="accent1"/>
-          </a:fillRef>
-          <a:effectRef idx="1">
-            <a:schemeClr val="accent1"/>
-          </a:effectRef>
-          <a:fontRef idx="minor">
-            <a:schemeClr val="tx1"/>
-          </a:fontRef>
-        </p:style>
-      </p:cxnSp>
-      <p:cxnSp>
-        <p:nvCxnSpPr>
-          <p:cNvPr id="255" name="Connector 254"/>
-          <p:cNvCxnSpPr/>
-          <p:nvPr/>
-        </p:nvCxnSpPr>
-        <p:spPr>
-          <a:xfrm>
-            <a:off x="7920000" y="2590000"/>
-            <a:ext cx="1100000" cy="820000"/>
-          </a:xfrm>
-          <a:prstGeom prst="line">
-            <a:avLst/>
-          </a:prstGeom>
-          <a:ln w="6350">
-            <a:solidFill>
-              <a:srgbClr val="E8E8E8"/>
-            </a:solidFill>
-          </a:ln>
-        </p:spPr>
-        <p:style>
-          <a:lnRef idx="2">
-            <a:schemeClr val="accent1"/>
-          </a:lnRef>
-          <a:fillRef idx="0">
-            <a:schemeClr val="accent1"/>
-          </a:fillRef>
-          <a:effectRef idx="1">
-            <a:schemeClr val="accent1"/>
-          </a:effectRef>
-          <a:fontRef idx="minor">
-            <a:schemeClr val="tx1"/>
-          </a:fontRef>
-        </p:style>
-      </p:cxnSp>
-      <p:cxnSp>
-        <p:nvCxnSpPr>
-          <p:cNvPr id="256" name="Connector 255"/>
-          <p:cNvCxnSpPr/>
-          <p:nvPr/>
-        </p:nvCxnSpPr>
-        <p:spPr>
-          <a:xfrm>
-            <a:off x="7920000" y="2590000"/>
-            <a:ext cx="1100000" cy="1340000"/>
-          </a:xfrm>
-          <a:prstGeom prst="line">
-            <a:avLst/>
-          </a:prstGeom>
-          <a:ln w="6350">
-            <a:solidFill>
-              <a:srgbClr val="E8E8E8"/>
-            </a:solidFill>
-          </a:ln>
-        </p:spPr>
-        <p:style>
-          <a:lnRef idx="2">
-            <a:schemeClr val="accent1"/>
-          </a:lnRef>
-          <a:fillRef idx="0">
-            <a:schemeClr val="accent1"/>
-          </a:fillRef>
-          <a:effectRef idx="1">
-            <a:schemeClr val="accent1"/>
-          </a:effectRef>
-          <a:fontRef idx="minor">
-            <a:schemeClr val="tx1"/>
-          </a:fontRef>
-        </p:style>
-      </p:cxnSp>
-      <p:cxnSp>
-        <p:nvCxnSpPr>
-          <p:cNvPr id="257" name="Connector 256"/>
-          <p:cNvCxnSpPr/>
-          <p:nvPr/>
-        </p:nvCxnSpPr>
-        <p:spPr>
-          <a:xfrm flipV="1">
-            <a:off x="7920000" y="2370000"/>
-            <a:ext cx="1100000" cy="740000"/>
-          </a:xfrm>
-          <a:prstGeom prst="line">
-            <a:avLst/>
-          </a:prstGeom>
-          <a:ln w="6350">
-            <a:solidFill>
-              <a:srgbClr val="E8E8E8"/>
-            </a:solidFill>
-          </a:ln>
-        </p:spPr>
-        <p:style>
-          <a:lnRef idx="2">
-            <a:schemeClr val="accent1"/>
-          </a:lnRef>
-          <a:fillRef idx="0">
-            <a:schemeClr val="accent1"/>
-          </a:fillRef>
-          <a:effectRef idx="1">
-            <a:schemeClr val="accent1"/>
-          </a:effectRef>
-          <a:fontRef idx="minor">
-            <a:schemeClr val="tx1"/>
-          </a:fontRef>
-        </p:style>
-      </p:cxnSp>
-      <p:cxnSp>
-        <p:nvCxnSpPr>
-          <p:cNvPr id="258" name="Connector 257"/>
-          <p:cNvCxnSpPr/>
-          <p:nvPr/>
-        </p:nvCxnSpPr>
-        <p:spPr>
-          <a:xfrm flipV="1">
-            <a:off x="7920000" y="2890000"/>
-            <a:ext cx="1100000" cy="220000"/>
-          </a:xfrm>
-          <a:prstGeom prst="line">
-            <a:avLst/>
-          </a:prstGeom>
-          <a:ln w="6350">
-            <a:solidFill>
-              <a:srgbClr val="E8E8E8"/>
-            </a:solidFill>
-          </a:ln>
-        </p:spPr>
-        <p:style>
-          <a:lnRef idx="2">
-            <a:schemeClr val="accent1"/>
-          </a:lnRef>
-          <a:fillRef idx="0">
-            <a:schemeClr val="accent1"/>
-          </a:fillRef>
-          <a:effectRef idx="1">
-            <a:schemeClr val="accent1"/>
-          </a:effectRef>
-          <a:fontRef idx="minor">
-            <a:schemeClr val="tx1"/>
-          </a:fontRef>
-        </p:style>
-      </p:cxnSp>
-      <p:cxnSp>
-        <p:nvCxnSpPr>
-          <p:cNvPr id="259" name="Connector 258"/>
-          <p:cNvCxnSpPr/>
-          <p:nvPr/>
-        </p:nvCxnSpPr>
-        <p:spPr>
-          <a:xfrm>
-            <a:off x="7920000" y="3110000"/>
-            <a:ext cx="1100000" cy="300000"/>
-          </a:xfrm>
-          <a:prstGeom prst="line">
-            <a:avLst/>
-          </a:prstGeom>
-          <a:ln w="6350">
-            <a:solidFill>
-              <a:srgbClr val="E8E8E8"/>
-            </a:solidFill>
-          </a:ln>
-        </p:spPr>
-        <p:style>
-          <a:lnRef idx="2">
-            <a:schemeClr val="accent1"/>
-          </a:lnRef>
-          <a:fillRef idx="0">
-            <a:schemeClr val="accent1"/>
-          </a:fillRef>
-          <a:effectRef idx="1">
-            <a:schemeClr val="accent1"/>
-          </a:effectRef>
-          <a:fontRef idx="minor">
-            <a:schemeClr val="tx1"/>
-          </a:fontRef>
-        </p:style>
-      </p:cxnSp>
-      <p:cxnSp>
-        <p:nvCxnSpPr>
-          <p:cNvPr id="260" name="Connector 259"/>
-          <p:cNvCxnSpPr/>
-          <p:nvPr/>
-        </p:nvCxnSpPr>
-        <p:spPr>
-          <a:xfrm>
-            <a:off x="7920000" y="3110000"/>
-            <a:ext cx="1100000" cy="820000"/>
-          </a:xfrm>
-          <a:prstGeom prst="line">
-            <a:avLst/>
-          </a:prstGeom>
-          <a:ln w="6350">
-            <a:solidFill>
-              <a:srgbClr val="E8E8E8"/>
-            </a:solidFill>
-          </a:ln>
-        </p:spPr>
-        <p:style>
-          <a:lnRef idx="2">
-            <a:schemeClr val="accent1"/>
-          </a:lnRef>
-          <a:fillRef idx="0">
-            <a:schemeClr val="accent1"/>
-          </a:fillRef>
-          <a:effectRef idx="1">
-            <a:schemeClr val="accent1"/>
-          </a:effectRef>
-          <a:fontRef idx="minor">
-            <a:schemeClr val="tx1"/>
-          </a:fontRef>
-        </p:style>
-      </p:cxnSp>
-      <p:cxnSp>
-        <p:nvCxnSpPr>
-          <p:cNvPr id="261" name="Connector 260"/>
-          <p:cNvCxnSpPr/>
-          <p:nvPr/>
-        </p:nvCxnSpPr>
-        <p:spPr>
-          <a:xfrm flipV="1">
-            <a:off x="7920000" y="2370000"/>
-            <a:ext cx="1100000" cy="1260000"/>
-          </a:xfrm>
-          <a:prstGeom prst="line">
-            <a:avLst/>
-          </a:prstGeom>
-          <a:ln w="6350">
-            <a:solidFill>
-              <a:srgbClr val="E8E8E8"/>
-            </a:solidFill>
-          </a:ln>
-        </p:spPr>
-        <p:style>
-          <a:lnRef idx="2">
-            <a:schemeClr val="accent1"/>
-          </a:lnRef>
-          <a:fillRef idx="0">
-            <a:schemeClr val="accent1"/>
-          </a:fillRef>
-          <a:effectRef idx="1">
-            <a:schemeClr val="accent1"/>
-          </a:effectRef>
-          <a:fontRef idx="minor">
-            <a:schemeClr val="tx1"/>
-          </a:fontRef>
-        </p:style>
-      </p:cxnSp>
-      <p:cxnSp>
-        <p:nvCxnSpPr>
-          <p:cNvPr id="262" name="Connector 261"/>
-          <p:cNvCxnSpPr/>
-          <p:nvPr/>
-        </p:nvCxnSpPr>
-        <p:spPr>
-          <a:xfrm flipV="1">
-            <a:off x="7920000" y="2890000"/>
-            <a:ext cx="1100000" cy="740000"/>
-          </a:xfrm>
-          <a:prstGeom prst="line">
-            <a:avLst/>
-          </a:prstGeom>
-          <a:ln w="6350">
-            <a:solidFill>
-              <a:srgbClr val="E8E8E8"/>
-            </a:solidFill>
-          </a:ln>
-        </p:spPr>
-        <p:style>
-          <a:lnRef idx="2">
-            <a:schemeClr val="accent1"/>
-          </a:lnRef>
-          <a:fillRef idx="0">
-            <a:schemeClr val="accent1"/>
-          </a:fillRef>
-          <a:effectRef idx="1">
-            <a:schemeClr val="accent1"/>
-          </a:effectRef>
-          <a:fontRef idx="minor">
-            <a:schemeClr val="tx1"/>
-          </a:fontRef>
-        </p:style>
-      </p:cxnSp>
-      <p:cxnSp>
-        <p:nvCxnSpPr>
-          <p:cNvPr id="263" name="Connector 262"/>
-          <p:cNvCxnSpPr/>
-          <p:nvPr/>
-        </p:nvCxnSpPr>
-        <p:spPr>
-          <a:xfrm flipV="1">
-            <a:off x="7920000" y="3410000"/>
-            <a:ext cx="1100000" cy="220000"/>
-          </a:xfrm>
-          <a:prstGeom prst="line">
-            <a:avLst/>
-          </a:prstGeom>
-          <a:ln w="6350">
-            <a:solidFill>
-              <a:srgbClr val="E8E8E8"/>
-            </a:solidFill>
-          </a:ln>
-        </p:spPr>
-        <p:style>
-          <a:lnRef idx="2">
-            <a:schemeClr val="accent1"/>
-          </a:lnRef>
-          <a:fillRef idx="0">
-            <a:schemeClr val="accent1"/>
-          </a:fillRef>
-          <a:effectRef idx="1">
-            <a:schemeClr val="accent1"/>
-          </a:effectRef>
-          <a:fontRef idx="minor">
-            <a:schemeClr val="tx1"/>
-          </a:fontRef>
-        </p:style>
-      </p:cxnSp>
-      <p:cxnSp>
-        <p:nvCxnSpPr>
-          <p:cNvPr id="264" name="Connector 263"/>
-          <p:cNvCxnSpPr/>
-          <p:nvPr/>
-        </p:nvCxnSpPr>
-        <p:spPr>
-          <a:xfrm>
-            <a:off x="7920000" y="3630000"/>
-            <a:ext cx="1100000" cy="300000"/>
-          </a:xfrm>
-          <a:prstGeom prst="line">
-            <a:avLst/>
-          </a:prstGeom>
-          <a:ln w="6350">
-            <a:solidFill>
-              <a:srgbClr val="E8E8E8"/>
-            </a:solidFill>
-          </a:ln>
-        </p:spPr>
-        <p:style>
-          <a:lnRef idx="2">
-            <a:schemeClr val="accent1"/>
-          </a:lnRef>
-          <a:fillRef idx="0">
-            <a:schemeClr val="accent1"/>
-          </a:fillRef>
-          <a:effectRef idx="1">
-            <a:schemeClr val="accent1"/>
-          </a:effectRef>
-          <a:fontRef idx="minor">
-            <a:schemeClr val="tx1"/>
-          </a:fontRef>
-        </p:style>
-      </p:cxnSp>
-      <p:cxnSp>
-        <p:nvCxnSpPr>
-          <p:cNvPr id="265" name="Connector 264"/>
-          <p:cNvCxnSpPr/>
-          <p:nvPr/>
-        </p:nvCxnSpPr>
-        <p:spPr>
-          <a:xfrm>
-            <a:off x="9020000" y="2370000"/>
-            <a:ext cx="1100000" cy="440000"/>
-          </a:xfrm>
-          <a:prstGeom prst="line">
-            <a:avLst/>
-          </a:prstGeom>
-          <a:ln w="6350">
-            <a:solidFill>
-              <a:srgbClr val="E8E8E8"/>
-            </a:solidFill>
-          </a:ln>
-        </p:spPr>
-        <p:style>
-          <a:lnRef idx="2">
-            <a:schemeClr val="accent1"/>
-          </a:lnRef>
-          <a:fillRef idx="0">
-            <a:schemeClr val="accent1"/>
-          </a:fillRef>
-          <a:effectRef idx="1">
-            <a:schemeClr val="accent1"/>
-          </a:effectRef>
-          <a:fontRef idx="minor">
-            <a:schemeClr val="tx1"/>
-          </a:fontRef>
-        </p:style>
-      </p:cxnSp>
-      <p:cxnSp>
-        <p:nvCxnSpPr>
-          <p:cNvPr id="266" name="Connector 265"/>
-          <p:cNvCxnSpPr/>
-          <p:nvPr/>
-        </p:nvCxnSpPr>
-        <p:spPr>
-          <a:xfrm>
-            <a:off x="9020000" y="2370000"/>
-            <a:ext cx="1100000" cy="960000"/>
-          </a:xfrm>
-          <a:prstGeom prst="line">
-            <a:avLst/>
-          </a:prstGeom>
-          <a:ln w="6350">
-            <a:solidFill>
-              <a:srgbClr val="E8E8E8"/>
-            </a:solidFill>
-          </a:ln>
-        </p:spPr>
-        <p:style>
-          <a:lnRef idx="2">
-            <a:schemeClr val="accent1"/>
-          </a:lnRef>
-          <a:fillRef idx="0">
-            <a:schemeClr val="accent1"/>
-          </a:fillRef>
-          <a:effectRef idx="1">
-            <a:schemeClr val="accent1"/>
-          </a:effectRef>
-          <a:fontRef idx="minor">
-            <a:schemeClr val="tx1"/>
-          </a:fontRef>
-        </p:style>
-      </p:cxnSp>
-      <p:cxnSp>
-        <p:nvCxnSpPr>
-          <p:cNvPr id="267" name="Connector 266"/>
-          <p:cNvCxnSpPr/>
-          <p:nvPr/>
-        </p:nvCxnSpPr>
-        <p:spPr>
-          <a:xfrm flipV="1">
-            <a:off x="9020000" y="2810000"/>
-            <a:ext cx="1100000" cy="80000"/>
-          </a:xfrm>
-          <a:prstGeom prst="line">
-            <a:avLst/>
-          </a:prstGeom>
-          <a:ln w="6350">
-            <a:solidFill>
-              <a:srgbClr val="E8E8E8"/>
-            </a:solidFill>
-          </a:ln>
-        </p:spPr>
-        <p:style>
-          <a:lnRef idx="2">
-            <a:schemeClr val="accent1"/>
-          </a:lnRef>
-          <a:fillRef idx="0">
-            <a:schemeClr val="accent1"/>
-          </a:fillRef>
-          <a:effectRef idx="1">
-            <a:schemeClr val="accent1"/>
-          </a:effectRef>
-          <a:fontRef idx="minor">
-            <a:schemeClr val="tx1"/>
-          </a:fontRef>
-        </p:style>
-      </p:cxnSp>
-      <p:cxnSp>
-        <p:nvCxnSpPr>
-          <p:cNvPr id="268" name="Connector 267"/>
-          <p:cNvCxnSpPr/>
-          <p:nvPr/>
-        </p:nvCxnSpPr>
-        <p:spPr>
-          <a:xfrm>
-            <a:off x="9020000" y="2890000"/>
-            <a:ext cx="1100000" cy="440000"/>
-          </a:xfrm>
-          <a:prstGeom prst="line">
-            <a:avLst/>
-          </a:prstGeom>
-          <a:ln w="6350">
-            <a:solidFill>
-              <a:srgbClr val="E8E8E8"/>
-            </a:solidFill>
-          </a:ln>
-        </p:spPr>
-        <p:style>
-          <a:lnRef idx="2">
-            <a:schemeClr val="accent1"/>
-          </a:lnRef>
-          <a:fillRef idx="0">
-            <a:schemeClr val="accent1"/>
-          </a:fillRef>
-          <a:effectRef idx="1">
-            <a:schemeClr val="accent1"/>
-          </a:effectRef>
-          <a:fontRef idx="minor">
-            <a:schemeClr val="tx1"/>
-          </a:fontRef>
-        </p:style>
-      </p:cxnSp>
-      <p:cxnSp>
-        <p:nvCxnSpPr>
-          <p:cNvPr id="269" name="Connector 268"/>
-          <p:cNvCxnSpPr/>
-          <p:nvPr/>
-        </p:nvCxnSpPr>
-        <p:spPr>
-          <a:xfrm flipV="1">
-            <a:off x="9020000" y="2810000"/>
-            <a:ext cx="1100000" cy="600000"/>
-          </a:xfrm>
-          <a:prstGeom prst="line">
-            <a:avLst/>
-          </a:prstGeom>
-          <a:ln w="6350">
-            <a:solidFill>
-              <a:srgbClr val="E8E8E8"/>
-            </a:solidFill>
-          </a:ln>
-        </p:spPr>
-        <p:style>
-          <a:lnRef idx="2">
-            <a:schemeClr val="accent1"/>
-          </a:lnRef>
-          <a:fillRef idx="0">
-            <a:schemeClr val="accent1"/>
-          </a:fillRef>
-          <a:effectRef idx="1">
-            <a:schemeClr val="accent1"/>
-          </a:effectRef>
-          <a:fontRef idx="minor">
-            <a:schemeClr val="tx1"/>
-          </a:fontRef>
-        </p:style>
-      </p:cxnSp>
-      <p:cxnSp>
-        <p:nvCxnSpPr>
-          <p:cNvPr id="270" name="Connector 269"/>
-          <p:cNvCxnSpPr/>
-          <p:nvPr/>
-        </p:nvCxnSpPr>
-        <p:spPr>
-          <a:xfrm flipV="1">
-            <a:off x="9020000" y="3330000"/>
-            <a:ext cx="1100000" cy="80000"/>
-          </a:xfrm>
-          <a:prstGeom prst="line">
-            <a:avLst/>
-          </a:prstGeom>
-          <a:ln w="6350">
-            <a:solidFill>
-              <a:srgbClr val="E8E8E8"/>
-            </a:solidFill>
-          </a:ln>
-        </p:spPr>
-        <p:style>
-          <a:lnRef idx="2">
-            <a:schemeClr val="accent1"/>
-          </a:lnRef>
-          <a:fillRef idx="0">
-            <a:schemeClr val="accent1"/>
-          </a:fillRef>
-          <a:effectRef idx="1">
-            <a:schemeClr val="accent1"/>
-          </a:effectRef>
-          <a:fontRef idx="minor">
-            <a:schemeClr val="tx1"/>
-          </a:fontRef>
-        </p:style>
-      </p:cxnSp>
-      <p:cxnSp>
-        <p:nvCxnSpPr>
-          <p:cNvPr id="271" name="Connector 270"/>
-          <p:cNvCxnSpPr/>
-          <p:nvPr/>
-        </p:nvCxnSpPr>
-        <p:spPr>
-          <a:xfrm flipV="1">
-            <a:off x="9020000" y="2810000"/>
-            <a:ext cx="1100000" cy="1120000"/>
-          </a:xfrm>
-          <a:prstGeom prst="line">
-            <a:avLst/>
-          </a:prstGeom>
-          <a:ln w="6350">
-            <a:solidFill>
-              <a:srgbClr val="E8E8E8"/>
-            </a:solidFill>
-          </a:ln>
-        </p:spPr>
-        <p:style>
-          <a:lnRef idx="2">
-            <a:schemeClr val="accent1"/>
-          </a:lnRef>
-          <a:fillRef idx="0">
-            <a:schemeClr val="accent1"/>
-          </a:fillRef>
-          <a:effectRef idx="1">
-            <a:schemeClr val="accent1"/>
-          </a:effectRef>
-          <a:fontRef idx="minor">
-            <a:schemeClr val="tx1"/>
-          </a:fontRef>
-        </p:style>
-      </p:cxnSp>
-      <p:cxnSp>
-        <p:nvCxnSpPr>
-          <p:cNvPr id="272" name="Connector 271"/>
-          <p:cNvCxnSpPr/>
-          <p:nvPr/>
-        </p:nvCxnSpPr>
-        <p:spPr>
-          <a:xfrm flipV="1">
-            <a:off x="9020000" y="3330000"/>
-            <a:ext cx="1100000" cy="600000"/>
-          </a:xfrm>
-          <a:prstGeom prst="line">
-            <a:avLst/>
-          </a:prstGeom>
-          <a:ln w="6350">
-            <a:solidFill>
-              <a:srgbClr val="E8E8E8"/>
-            </a:solidFill>
-          </a:ln>
-        </p:spPr>
-        <p:style>
-          <a:lnRef idx="2">
-            <a:schemeClr val="accent1"/>
-          </a:lnRef>
-          <a:fillRef idx="0">
-            <a:schemeClr val="accent1"/>
-          </a:fillRef>
-          <a:effectRef idx="1">
-            <a:schemeClr val="accent1"/>
-          </a:effectRef>
-          <a:fontRef idx="minor">
-            <a:schemeClr val="tx1"/>
-          </a:fontRef>
-        </p:style>
-      </p:cxnSp>
-      <p:sp>
-        <p:nvSpPr>
-          <p:cNvPr id="273" name="Oval 272"/>
-          <p:cNvSpPr/>
-          <p:nvPr/>
-        </p:nvSpPr>
-        <p:spPr>
-          <a:xfrm>
-            <a:off x="7700000" y="2370000"/>
-            <a:ext cx="440000" cy="440000"/>
-          </a:xfrm>
-          <a:prstGeom prst="ellipse">
-            <a:avLst/>
-          </a:prstGeom>
-          <a:solidFill>
-            <a:srgbClr val="156082"/>
-          </a:solidFill>
-          <a:ln>
-            <a:noFill/>
-          </a:ln>
-          <a:effectLst/>
-        </p:spPr>
-        <p:style>
-          <a:lnRef idx="1">
-            <a:schemeClr val="accent1"/>
-          </a:lnRef>
-          <a:fillRef idx="3">
-            <a:schemeClr val="accent1"/>
-          </a:fillRef>
-          <a:effectRef idx="2">
-            <a:schemeClr val="accent1"/>
-          </a:effectRef>
-          <a:fontRef idx="minor">
-            <a:schemeClr val="lt1"/>
-          </a:fontRef>
-        </p:style>
-        <p:txBody>
-          <a:bodyPr rtlCol="0" anchor="ctr" wrap="square" lIns="18000" rIns="18000" tIns="9000" bIns="9000"/>
-          <a:lstStyle/>
-          <a:p>
-            <a:pPr algn="ctr"/>
-          </a:p>
-        </p:txBody>
-      </p:sp>
-      <p:sp>
-        <p:nvSpPr>
-          <p:cNvPr id="274" name="Oval 273"/>
-          <p:cNvSpPr/>
-          <p:nvPr/>
-        </p:nvSpPr>
-        <p:spPr>
-          <a:xfrm>
-            <a:off x="7700000" y="2890000"/>
-            <a:ext cx="440000" cy="440000"/>
-          </a:xfrm>
-          <a:prstGeom prst="ellipse">
-            <a:avLst/>
-          </a:prstGeom>
-          <a:solidFill>
-            <a:srgbClr val="156082"/>
-          </a:solidFill>
-          <a:ln>
-            <a:noFill/>
-          </a:ln>
-          <a:effectLst/>
-        </p:spPr>
-        <p:style>
-          <a:lnRef idx="1">
-            <a:schemeClr val="accent1"/>
-          </a:lnRef>
-          <a:fillRef idx="3">
-            <a:schemeClr val="accent1"/>
-          </a:fillRef>
-          <a:effectRef idx="2">
-            <a:schemeClr val="accent1"/>
-          </a:effectRef>
-          <a:fontRef idx="minor">
-            <a:schemeClr val="lt1"/>
-          </a:fontRef>
-        </p:style>
-        <p:txBody>
-          <a:bodyPr rtlCol="0" anchor="ctr" wrap="square" lIns="18000" rIns="18000" tIns="9000" bIns="9000"/>
-          <a:lstStyle/>
-          <a:p>
-            <a:pPr algn="ctr"/>
-          </a:p>
-        </p:txBody>
-      </p:sp>
-      <p:sp>
-        <p:nvSpPr>
-          <p:cNvPr id="275" name="Oval 274"/>
-          <p:cNvSpPr/>
-          <p:nvPr/>
-        </p:nvSpPr>
-        <p:spPr>
-          <a:xfrm>
-            <a:off x="7700000" y="3410000"/>
-            <a:ext cx="440000" cy="440000"/>
-          </a:xfrm>
-          <a:prstGeom prst="ellipse">
-            <a:avLst/>
-          </a:prstGeom>
-          <a:solidFill>
-            <a:srgbClr val="156082"/>
-          </a:solidFill>
-          <a:ln>
-            <a:noFill/>
-          </a:ln>
-          <a:effectLst/>
-        </p:spPr>
-        <p:style>
-          <a:lnRef idx="1">
-            <a:schemeClr val="accent1"/>
-          </a:lnRef>
-          <a:fillRef idx="3">
-            <a:schemeClr val="accent1"/>
-          </a:fillRef>
-          <a:effectRef idx="2">
-            <a:schemeClr val="accent1"/>
-          </a:effectRef>
-          <a:fontRef idx="minor">
-            <a:schemeClr val="lt1"/>
-          </a:fontRef>
-        </p:style>
-        <p:txBody>
-          <a:bodyPr rtlCol="0" anchor="ctr" wrap="square" lIns="18000" rIns="18000" tIns="9000" bIns="9000"/>
-          <a:lstStyle/>
-          <a:p>
-            <a:pPr algn="ctr"/>
-          </a:p>
-        </p:txBody>
-      </p:sp>
-      <p:sp>
-        <p:nvSpPr>
-          <p:cNvPr id="276" name="Oval 275"/>
-          <p:cNvSpPr/>
-          <p:nvPr/>
-        </p:nvSpPr>
-        <p:spPr>
-          <a:xfrm>
-            <a:off x="8800000" y="2150000"/>
-            <a:ext cx="440000" cy="440000"/>
-          </a:xfrm>
-          <a:prstGeom prst="ellipse">
-            <a:avLst/>
-          </a:prstGeom>
-          <a:solidFill>
-            <a:srgbClr val="156082"/>
-          </a:solidFill>
-          <a:ln>
-            <a:noFill/>
-          </a:ln>
-          <a:effectLst/>
-        </p:spPr>
-        <p:style>
-          <a:lnRef idx="1">
-            <a:schemeClr val="accent1"/>
-          </a:lnRef>
-          <a:fillRef idx="3">
-            <a:schemeClr val="accent1"/>
-          </a:fillRef>
-          <a:effectRef idx="2">
-            <a:schemeClr val="accent1"/>
-          </a:effectRef>
-          <a:fontRef idx="minor">
-            <a:schemeClr val="lt1"/>
-          </a:fontRef>
-        </p:style>
-        <p:txBody>
-          <a:bodyPr rtlCol="0" anchor="ctr" wrap="square" lIns="18000" rIns="18000" tIns="9000" bIns="9000"/>
-          <a:lstStyle/>
-          <a:p>
-            <a:pPr algn="ctr"/>
-          </a:p>
-        </p:txBody>
-      </p:sp>
-      <p:sp>
-        <p:nvSpPr>
-          <p:cNvPr id="277" name="Oval 276"/>
-          <p:cNvSpPr/>
-          <p:nvPr/>
-        </p:nvSpPr>
-        <p:spPr>
-          <a:xfrm>
-            <a:off x="8800000" y="2670000"/>
-            <a:ext cx="440000" cy="440000"/>
-          </a:xfrm>
-          <a:prstGeom prst="ellipse">
-            <a:avLst/>
-          </a:prstGeom>
-          <a:solidFill>
-            <a:srgbClr val="156082"/>
-          </a:solidFill>
-          <a:ln>
-            <a:noFill/>
-          </a:ln>
-          <a:effectLst/>
-        </p:spPr>
-        <p:style>
-          <a:lnRef idx="1">
-            <a:schemeClr val="accent1"/>
-          </a:lnRef>
-          <a:fillRef idx="3">
-            <a:schemeClr val="accent1"/>
-          </a:fillRef>
-          <a:effectRef idx="2">
-            <a:schemeClr val="accent1"/>
-          </a:effectRef>
-          <a:fontRef idx="minor">
-            <a:schemeClr val="lt1"/>
-          </a:fontRef>
-        </p:style>
-        <p:txBody>
-          <a:bodyPr rtlCol="0" anchor="ctr" wrap="square" lIns="18000" rIns="18000" tIns="9000" bIns="9000"/>
-          <a:lstStyle/>
-          <a:p>
-            <a:pPr algn="ctr"/>
-          </a:p>
-        </p:txBody>
-      </p:sp>
-      <p:sp>
-        <p:nvSpPr>
-          <p:cNvPr id="278" name="Oval 277"/>
-          <p:cNvSpPr/>
-          <p:nvPr/>
-        </p:nvSpPr>
-        <p:spPr>
-          <a:xfrm>
-            <a:off x="8800000" y="3190000"/>
-            <a:ext cx="440000" cy="440000"/>
-          </a:xfrm>
-          <a:prstGeom prst="ellipse">
-            <a:avLst/>
-          </a:prstGeom>
-          <a:solidFill>
-            <a:srgbClr val="156082"/>
-          </a:solidFill>
-          <a:ln>
-            <a:noFill/>
-          </a:ln>
-          <a:effectLst/>
-        </p:spPr>
-        <p:style>
-          <a:lnRef idx="1">
-            <a:schemeClr val="accent1"/>
-          </a:lnRef>
-          <a:fillRef idx="3">
-            <a:schemeClr val="accent1"/>
-          </a:fillRef>
-          <a:effectRef idx="2">
-            <a:schemeClr val="accent1"/>
-          </a:effectRef>
-          <a:fontRef idx="minor">
-            <a:schemeClr val="lt1"/>
-          </a:fontRef>
-        </p:style>
-        <p:txBody>
-          <a:bodyPr rtlCol="0" anchor="ctr" wrap="square" lIns="18000" rIns="18000" tIns="9000" bIns="9000"/>
-          <a:lstStyle/>
-          <a:p>
-            <a:pPr algn="ctr"/>
-          </a:p>
-        </p:txBody>
-      </p:sp>
-      <p:sp>
-        <p:nvSpPr>
-          <p:cNvPr id="279" name="Oval 278"/>
-          <p:cNvSpPr/>
-          <p:nvPr/>
-        </p:nvSpPr>
-        <p:spPr>
-          <a:xfrm>
-            <a:off x="8800000" y="3710000"/>
-            <a:ext cx="440000" cy="440000"/>
-          </a:xfrm>
-          <a:prstGeom prst="ellipse">
-            <a:avLst/>
-          </a:prstGeom>
-          <a:solidFill>
-            <a:srgbClr val="156082"/>
-          </a:solidFill>
-          <a:ln>
-            <a:noFill/>
-          </a:ln>
-          <a:effectLst/>
-        </p:spPr>
-        <p:style>
-          <a:lnRef idx="1">
-            <a:schemeClr val="accent1"/>
-          </a:lnRef>
-          <a:fillRef idx="3">
-            <a:schemeClr val="accent1"/>
-          </a:fillRef>
-          <a:effectRef idx="2">
-            <a:schemeClr val="accent1"/>
-          </a:effectRef>
-          <a:fontRef idx="minor">
-            <a:schemeClr val="lt1"/>
-          </a:fontRef>
-        </p:style>
-        <p:txBody>
-          <a:bodyPr rtlCol="0" anchor="ctr" wrap="square" lIns="18000" rIns="18000" tIns="9000" bIns="9000"/>
-          <a:lstStyle/>
-          <a:p>
-            <a:pPr algn="ctr"/>
-          </a:p>
-        </p:txBody>
-      </p:sp>
-      <p:sp>
-        <p:nvSpPr>
-          <p:cNvPr id="280" name="Oval 279"/>
-          <p:cNvSpPr/>
-          <p:nvPr/>
-        </p:nvSpPr>
-        <p:spPr>
-          <a:xfrm>
-            <a:off x="9900000" y="2590000"/>
-            <a:ext cx="440000" cy="440000"/>
-          </a:xfrm>
-          <a:prstGeom prst="ellipse">
-            <a:avLst/>
-          </a:prstGeom>
-          <a:solidFill>
-            <a:srgbClr val="156082"/>
-          </a:solidFill>
-          <a:ln>
-            <a:noFill/>
-          </a:ln>
-          <a:effectLst/>
-        </p:spPr>
-        <p:style>
-          <a:lnRef idx="1">
-            <a:schemeClr val="accent1"/>
-          </a:lnRef>
-          <a:fillRef idx="3">
-            <a:schemeClr val="accent1"/>
-          </a:fillRef>
-          <a:effectRef idx="2">
-            <a:schemeClr val="accent1"/>
-          </a:effectRef>
-          <a:fontRef idx="minor">
-            <a:schemeClr val="lt1"/>
-          </a:fontRef>
-        </p:style>
-        <p:txBody>
-          <a:bodyPr rtlCol="0" anchor="ctr" wrap="square" lIns="18000" rIns="18000" tIns="9000" bIns="9000"/>
-          <a:lstStyle/>
-          <a:p>
-            <a:pPr algn="ctr"/>
-          </a:p>
-        </p:txBody>
-      </p:sp>
-      <p:sp>
-        <p:nvSpPr>
-          <p:cNvPr id="281" name="Oval 280"/>
-          <p:cNvSpPr/>
-          <p:nvPr/>
-        </p:nvSpPr>
-        <p:spPr>
-          <a:xfrm>
-            <a:off x="9900000" y="3110000"/>
-            <a:ext cx="440000" cy="440000"/>
-          </a:xfrm>
-          <a:prstGeom prst="ellipse">
-            <a:avLst/>
-          </a:prstGeom>
-          <a:solidFill>
-            <a:srgbClr val="156082"/>
-          </a:solidFill>
-          <a:ln>
-            <a:noFill/>
-          </a:ln>
-          <a:effectLst/>
-        </p:spPr>
-        <p:style>
-          <a:lnRef idx="1">
-            <a:schemeClr val="accent1"/>
-          </a:lnRef>
-          <a:fillRef idx="3">
-            <a:schemeClr val="accent1"/>
-          </a:fillRef>
-          <a:effectRef idx="2">
-            <a:schemeClr val="accent1"/>
-          </a:effectRef>
-          <a:fontRef idx="minor">
-            <a:schemeClr val="lt1"/>
-          </a:fontRef>
-        </p:style>
-        <p:txBody>
-          <a:bodyPr rtlCol="0" anchor="ctr" wrap="square" lIns="18000" rIns="18000" tIns="9000" bIns="9000"/>
-          <a:lstStyle/>
-          <a:p>
-            <a:pPr algn="ctr"/>
-          </a:p>
-        </p:txBody>
-      </p:sp>
-      <p:sp>
-        <p:nvSpPr>
-          <p:cNvPr id="282" name="TextBox 281"/>
-          <p:cNvSpPr txBox="1"/>
-          <p:nvPr/>
-        </p:nvSpPr>
-        <p:spPr>
-          <a:xfrm>
-            <a:off x="7500000" y="4650000"/>
-            <a:ext cx="3200000" cy="300000"/>
-          </a:xfrm>
-          <a:prstGeom prst="rect">
-            <a:avLst/>
-          </a:prstGeom>
-          <a:noFill/>
-        </p:spPr>
-        <p:txBody>
-          <a:bodyPr wrap="square" lIns="0" rIns="0" tIns="0" bIns="0">
-            <a:spAutoFit/>
-          </a:bodyPr>
-          <a:lstStyle/>
-          <a:p>
-            <a:pPr algn="ctr"/>
-            <a:r>
-              <a:rPr sz="1000" b="0" i="1">
-                <a:solidFill>
-                  <a:srgbClr val="3A3A3A"/>
-                </a:solidFill>
-                <a:latin typeface="Roboto Condensed"/>
-              </a:rPr>
-              <a:t>Referencial: red neuronal artificial (capas de entrada, ocultas y salida)</a:t>
-            </a:r>
           </a:p>
         </p:txBody>
       </p:sp>
@@ -44637,7 +41817,7 @@
 </p:sld>
 </file>
 
-<file path=ppt/slides/slide17.xml><?xml version="1.0" encoding="utf-8"?>
+<file path=ppt/slides/slide16.xml><?xml version="1.0" encoding="utf-8"?>
 <p:sld xmlns:a="http://schemas.openxmlformats.org/drawingml/2006/main" xmlns:p="http://schemas.openxmlformats.org/presentationml/2006/main" xmlns:r="http://schemas.openxmlformats.org/officeDocument/2006/relationships">
   <p:cSld>
     <p:spTree>
@@ -45098,7 +42278,7 @@
           <a:p>
             <a:pPr algn="r"/>
             <a:r>
-              <a:t>17</a:t>
+              <a:t>16</a:t>
             </a:r>
             <a:endParaRPr lang="en-US"/>
           </a:p>
@@ -45112,7 +42292,7 @@
 </p:sld>
 </file>
 
-<file path=ppt/slides/slide18.xml><?xml version="1.0" encoding="utf-8"?>
+<file path=ppt/slides/slide17.xml><?xml version="1.0" encoding="utf-8"?>
 <p:sld xmlns:a="http://schemas.openxmlformats.org/drawingml/2006/main" xmlns:p="http://schemas.openxmlformats.org/presentationml/2006/main" xmlns:r="http://schemas.openxmlformats.org/officeDocument/2006/relationships">
   <p:cSld>
     <p:spTree>
@@ -45557,7 +42737,7 @@
           <a:p>
             <a:pPr algn="r"/>
             <a:r>
-              <a:t>18</a:t>
+              <a:t>17</a:t>
             </a:r>
             <a:endParaRPr lang="en-US"/>
           </a:p>
@@ -45571,7 +42751,7 @@
 </p:sld>
 </file>
 
-<file path=ppt/slides/slide19.xml><?xml version="1.0" encoding="utf-8"?>
+<file path=ppt/slides/slide18.xml><?xml version="1.0" encoding="utf-8"?>
 <p:sld xmlns:a="http://schemas.openxmlformats.org/drawingml/2006/main" xmlns:p="http://schemas.openxmlformats.org/presentationml/2006/main" xmlns:r="http://schemas.openxmlformats.org/officeDocument/2006/relationships">
   <p:cSld>
     <p:spTree>
@@ -46016,7 +43196,7 @@
           <a:p>
             <a:pPr algn="r"/>
             <a:r>
-              <a:t>19</a:t>
+              <a:t>18</a:t>
             </a:r>
             <a:endParaRPr lang="en-US"/>
           </a:p>
@@ -46030,629 +43210,7 @@
 </p:sld>
 </file>
 
-<file path=ppt/slides/slide2.xml><?xml version="1.0" encoding="utf-8"?>
-<p:sld xmlns:a="http://schemas.openxmlformats.org/drawingml/2006/main" xmlns:p="http://schemas.openxmlformats.org/presentationml/2006/main" xmlns:r="http://schemas.openxmlformats.org/officeDocument/2006/relationships">
-  <p:cSld>
-    <p:spTree>
-      <p:nvGrpSpPr>
-        <p:cNvPr id="1" name=""/>
-        <p:cNvGrpSpPr/>
-        <p:nvPr/>
-      </p:nvGrpSpPr>
-      <p:grpSpPr/>
-      <p:sp>
-        <p:nvSpPr>
-          <p:cNvPr id="240" name="Google Shape;240;p38"/>
-          <p:cNvSpPr/>
-          <p:nvPr/>
-        </p:nvSpPr>
-        <p:spPr>
-          <a:xfrm>
-            <a:off x="853440" y="790892"/>
-            <a:ext cx="9055100" cy="731520"/>
-          </a:xfrm>
-          <a:prstGeom prst="rect">
-            <a:avLst/>
-          </a:prstGeom>
-          <a:noFill/>
-          <a:ln>
-            <a:noFill/>
-          </a:ln>
-        </p:spPr>
-        <p:txBody>
-          <a:bodyPr spcFirstLastPara="1" wrap="square" lIns="91425" tIns="45700" rIns="91425" bIns="45700" anchor="ctr" anchorCtr="0">
-            <a:noAutofit/>
-          </a:bodyPr>
-          <a:lstStyle/>
-          <a:p>
-            <a:pPr marL="0" marR="0" lvl="0" indent="0" algn="l" rtl="0">
-              <a:lnSpc>
-                <a:spcPct val="100000"/>
-              </a:lnSpc>
-              <a:spcBef>
-                <a:spcPts val="0"/>
-              </a:spcBef>
-              <a:spcAft>
-                <a:spcPts val="0"/>
-              </a:spcAft>
-              <a:buNone/>
-            </a:pPr>
-            <a:r>
-              <a:rPr lang="en-US" sz="4400" dirty="0">
-                <a:solidFill>
-                  <a:srgbClr val="3A3A3A"/>
-                </a:solidFill>
-                <a:latin typeface="Roboto Condensed Medium"/>
-                <a:ea typeface="Roboto Condensed Medium"/>
-                <a:cs typeface="Roboto Condensed Medium"/>
-                <a:sym typeface="Roboto Condensed Medium"/>
-              </a:rPr>
-              <a:t>Sobre el relator</a:t>
-            </a:r>
-            <a:endParaRPr dirty="0"/>
-          </a:p>
-        </p:txBody>
-      </p:sp>
-      <p:sp>
-        <p:nvSpPr>
-          <p:cNvPr id="241" name="Google Shape;241;p38"/>
-          <p:cNvSpPr/>
-          <p:nvPr/>
-        </p:nvSpPr>
-        <p:spPr>
-          <a:xfrm>
-            <a:off x="889446" y="2014379"/>
-            <a:ext cx="5300000" cy="3413760"/>
-          </a:xfrm>
-          <a:prstGeom prst="rect">
-            <a:avLst/>
-          </a:prstGeom>
-          <a:noFill/>
-          <a:ln>
-            <a:noFill/>
-          </a:ln>
-        </p:spPr>
-        <p:txBody>
-          <a:bodyPr spcFirstLastPara="1" wrap="square" lIns="91425" tIns="45700" rIns="91425" bIns="45700" anchor="t" anchorCtr="0">
-            <a:noAutofit/>
-          </a:bodyPr>
-          <a:lstStyle/>
-          <a:p>
-            <a:pPr marL="0" marR="0" indent="0" algn="l" rtl="0">
-              <a:lnSpc>
-                <a:spcPct val="100000"/>
-              </a:lnSpc>
-              <a:spcBef>
-                <a:spcPts val="0"/>
-              </a:spcBef>
-              <a:spcAft>
-                <a:spcPts val="800"/>
-              </a:spcAft>
-              <a:buNone/>
-            </a:pPr>
-            <a:r>
-              <a:rPr sz="2200" b="1">
-                <a:solidFill>
-                  <a:srgbClr val="3A3A3A"/>
-                </a:solidFill>
-                <a:latin typeface="Roboto Condensed"/>
-              </a:rPr>
-              <a:t>Ing. Diego Zamorano</a:t>
-            </a:r>
-            <a:endParaRPr dirty="0"/>
-          </a:p>
-          <a:p>
-            <a:pPr marL="0" marR="0" indent="0" algn="l" rtl="0">
-              <a:lnSpc>
-                <a:spcPct val="100000"/>
-              </a:lnSpc>
-              <a:spcBef>
-                <a:spcPts val="0"/>
-              </a:spcBef>
-              <a:spcAft>
-                <a:spcPts val="800"/>
-              </a:spcAft>
-              <a:buNone/>
-            </a:pPr>
-            <a:r>
-              <a:rPr sz="1400">
-                <a:solidFill>
-                  <a:srgbClr val="3A3A3A"/>
-                </a:solidFill>
-                <a:latin typeface="Roboto Condensed"/>
-              </a:rPr>
-              <a:t>Cargo / rol actual: [Completa aquí]</a:t>
-            </a:r>
-            <a:endParaRPr dirty="0"/>
-          </a:p>
-          <a:p>
-            <a:pPr marL="0" marR="0" indent="0" algn="l" rtl="0">
-              <a:lnSpc>
-                <a:spcPct val="100000"/>
-              </a:lnSpc>
-              <a:spcBef>
-                <a:spcPts val="0"/>
-              </a:spcBef>
-              <a:spcAft>
-                <a:spcPts val="800"/>
-              </a:spcAft>
-              <a:buNone/>
-            </a:pPr>
-            <a:r>
-              <a:rPr sz="1400">
-                <a:solidFill>
-                  <a:srgbClr val="3A3A3A"/>
-                </a:solidFill>
-                <a:latin typeface="Roboto Condensed"/>
-              </a:rPr>
-              <a:t>Experiencia profesional: [Completa aquí]</a:t>
-            </a:r>
-            <a:endParaRPr dirty="0"/>
-          </a:p>
-          <a:p>
-            <a:pPr marL="0" marR="0" indent="0" algn="l" rtl="0">
-              <a:lnSpc>
-                <a:spcPct val="100000"/>
-              </a:lnSpc>
-              <a:spcBef>
-                <a:spcPts val="0"/>
-              </a:spcBef>
-              <a:spcAft>
-                <a:spcPts val="800"/>
-              </a:spcAft>
-              <a:buNone/>
-            </a:pPr>
-            <a:r>
-              <a:rPr sz="1400">
-                <a:solidFill>
-                  <a:srgbClr val="3A3A3A"/>
-                </a:solidFill>
-                <a:latin typeface="Roboto Condensed"/>
-              </a:rPr>
-              <a:t>Experiencia docente: [Completa aquí]</a:t>
-            </a:r>
-            <a:endParaRPr dirty="0"/>
-          </a:p>
-          <a:p>
-            <a:pPr marL="0" marR="0" indent="0" algn="l" rtl="0">
-              <a:lnSpc>
-                <a:spcPct val="100000"/>
-              </a:lnSpc>
-              <a:spcBef>
-                <a:spcPts val="0"/>
-              </a:spcBef>
-              <a:spcAft>
-                <a:spcPts val="800"/>
-              </a:spcAft>
-              <a:buNone/>
-            </a:pPr>
-            <a:r>
-              <a:rPr sz="1400">
-                <a:solidFill>
-                  <a:srgbClr val="3A3A3A"/>
-                </a:solidFill>
-                <a:latin typeface="Roboto Condensed"/>
-              </a:rPr>
-              <a:t>Formación académica (título, diplomado): [Completa aquí]</a:t>
-            </a:r>
-            <a:endParaRPr dirty="0"/>
-          </a:p>
-          <a:p>
-            <a:pPr marL="0" marR="0" indent="0" algn="l" rtl="0">
-              <a:lnSpc>
-                <a:spcPct val="100000"/>
-              </a:lnSpc>
-              <a:spcBef>
-                <a:spcPts val="0"/>
-              </a:spcBef>
-              <a:spcAft>
-                <a:spcPts val="800"/>
-              </a:spcAft>
-              <a:buNone/>
-            </a:pPr>
-            <a:r>
-              <a:rPr sz="1400">
-                <a:solidFill>
-                  <a:srgbClr val="3A3A3A"/>
-                </a:solidFill>
-                <a:latin typeface="Roboto Condensed"/>
-              </a:rPr>
-              <a:t>diego.zamorano.p@mail.pucv.cl</a:t>
-            </a:r>
-            <a:endParaRPr dirty="0"/>
-          </a:p>
-        </p:txBody>
-      </p:sp>
-      <p:pic>
-        <p:nvPicPr>
-          <p:cNvPr id="252" name="Google Shape;252;p38"/>
-          <p:cNvPicPr preferRelativeResize="0"/>
-          <p:nvPr/>
-        </p:nvPicPr>
-        <p:blipFill rotWithShape="1">
-          <a:blip r:embed="rId2">
-            <a:alphaModFix/>
-          </a:blip>
-          <a:srcRect/>
-          <a:stretch/>
-        </p:blipFill>
-        <p:spPr>
-          <a:xfrm>
-            <a:off x="10120580" y="230187"/>
-            <a:ext cx="1866726" cy="590083"/>
-          </a:xfrm>
-          <a:prstGeom prst="rect">
-            <a:avLst/>
-          </a:prstGeom>
-          <a:noFill/>
-          <a:ln>
-            <a:noFill/>
-          </a:ln>
-        </p:spPr>
-      </p:pic>
-      <p:sp>
-        <p:nvSpPr>
-          <p:cNvPr id="2" name="Marcador de número de diapositiva 2">
-            <a:extLst>
-              <a:ext uri="{FF2B5EF4-FFF2-40B4-BE49-F238E27FC236}">
-                <a16:creationId xmlns:a16="http://schemas.microsoft.com/office/drawing/2014/main" id="{9E2EBC40-EC40-BDF2-F68A-0BA88B712A11}"/>
-              </a:ext>
-            </a:extLst>
-          </p:cNvPr>
-          <p:cNvSpPr txBox="1">
-            <a:spLocks/>
-          </p:cNvSpPr>
-          <p:nvPr/>
-        </p:nvSpPr>
-        <p:spPr>
-          <a:xfrm>
-            <a:off x="8610600" y="6356351"/>
-            <a:ext cx="2743200" cy="365125"/>
-          </a:xfrm>
-          <a:prstGeom prst="rect">
-            <a:avLst/>
-          </a:prstGeom>
-        </p:spPr>
-        <p:txBody>
-          <a:bodyPr/>
-          <a:lstStyle>
-            <a:defPPr marR="0" lvl="0" algn="l" rtl="0">
-              <a:lnSpc>
-                <a:spcPct val="100000"/>
-              </a:lnSpc>
-              <a:spcBef>
-                <a:spcPts val="0"/>
-              </a:spcBef>
-              <a:spcAft>
-                <a:spcPts val="0"/>
-              </a:spcAft>
-            </a:defPPr>
-            <a:lvl1pPr marR="0" lvl="0" algn="l" rtl="0">
-              <a:lnSpc>
-                <a:spcPct val="100000"/>
-              </a:lnSpc>
-              <a:spcBef>
-                <a:spcPts val="0"/>
-              </a:spcBef>
-              <a:spcAft>
-                <a:spcPts val="0"/>
-              </a:spcAft>
-              <a:buClr>
-                <a:srgbClr val="000000"/>
-              </a:buClr>
-              <a:buFont typeface="Arial"/>
-              <a:defRPr sz="1400" b="0" i="0" u="none" strike="noStrike" cap="none">
-                <a:solidFill>
-                  <a:srgbClr val="000000"/>
-                </a:solidFill>
-                <a:latin typeface="Arial"/>
-                <a:ea typeface="Arial"/>
-                <a:cs typeface="Arial"/>
-                <a:sym typeface="Arial"/>
-              </a:defRPr>
-            </a:lvl1pPr>
-            <a:lvl2pPr marR="0" lvl="1" algn="l" rtl="0">
-              <a:lnSpc>
-                <a:spcPct val="100000"/>
-              </a:lnSpc>
-              <a:spcBef>
-                <a:spcPts val="0"/>
-              </a:spcBef>
-              <a:spcAft>
-                <a:spcPts val="0"/>
-              </a:spcAft>
-              <a:buClr>
-                <a:srgbClr val="000000"/>
-              </a:buClr>
-              <a:buFont typeface="Arial"/>
-              <a:defRPr sz="1400" b="0" i="0" u="none" strike="noStrike" cap="none">
-                <a:solidFill>
-                  <a:srgbClr val="000000"/>
-                </a:solidFill>
-                <a:latin typeface="Arial"/>
-                <a:ea typeface="Arial"/>
-                <a:cs typeface="Arial"/>
-                <a:sym typeface="Arial"/>
-              </a:defRPr>
-            </a:lvl2pPr>
-            <a:lvl3pPr marR="0" lvl="2" algn="l" rtl="0">
-              <a:lnSpc>
-                <a:spcPct val="100000"/>
-              </a:lnSpc>
-              <a:spcBef>
-                <a:spcPts val="0"/>
-              </a:spcBef>
-              <a:spcAft>
-                <a:spcPts val="0"/>
-              </a:spcAft>
-              <a:buClr>
-                <a:srgbClr val="000000"/>
-              </a:buClr>
-              <a:buFont typeface="Arial"/>
-              <a:defRPr sz="1400" b="0" i="0" u="none" strike="noStrike" cap="none">
-                <a:solidFill>
-                  <a:srgbClr val="000000"/>
-                </a:solidFill>
-                <a:latin typeface="Arial"/>
-                <a:ea typeface="Arial"/>
-                <a:cs typeface="Arial"/>
-                <a:sym typeface="Arial"/>
-              </a:defRPr>
-            </a:lvl3pPr>
-            <a:lvl4pPr marR="0" lvl="3" algn="l" rtl="0">
-              <a:lnSpc>
-                <a:spcPct val="100000"/>
-              </a:lnSpc>
-              <a:spcBef>
-                <a:spcPts val="0"/>
-              </a:spcBef>
-              <a:spcAft>
-                <a:spcPts val="0"/>
-              </a:spcAft>
-              <a:buClr>
-                <a:srgbClr val="000000"/>
-              </a:buClr>
-              <a:buFont typeface="Arial"/>
-              <a:defRPr sz="1400" b="0" i="0" u="none" strike="noStrike" cap="none">
-                <a:solidFill>
-                  <a:srgbClr val="000000"/>
-                </a:solidFill>
-                <a:latin typeface="Arial"/>
-                <a:ea typeface="Arial"/>
-                <a:cs typeface="Arial"/>
-                <a:sym typeface="Arial"/>
-              </a:defRPr>
-            </a:lvl4pPr>
-            <a:lvl5pPr marR="0" lvl="4" algn="l" rtl="0">
-              <a:lnSpc>
-                <a:spcPct val="100000"/>
-              </a:lnSpc>
-              <a:spcBef>
-                <a:spcPts val="0"/>
-              </a:spcBef>
-              <a:spcAft>
-                <a:spcPts val="0"/>
-              </a:spcAft>
-              <a:buClr>
-                <a:srgbClr val="000000"/>
-              </a:buClr>
-              <a:buFont typeface="Arial"/>
-              <a:defRPr sz="1400" b="0" i="0" u="none" strike="noStrike" cap="none">
-                <a:solidFill>
-                  <a:srgbClr val="000000"/>
-                </a:solidFill>
-                <a:latin typeface="Arial"/>
-                <a:ea typeface="Arial"/>
-                <a:cs typeface="Arial"/>
-                <a:sym typeface="Arial"/>
-              </a:defRPr>
-            </a:lvl5pPr>
-            <a:lvl6pPr marR="0" lvl="5" algn="l" rtl="0">
-              <a:lnSpc>
-                <a:spcPct val="100000"/>
-              </a:lnSpc>
-              <a:spcBef>
-                <a:spcPts val="0"/>
-              </a:spcBef>
-              <a:spcAft>
-                <a:spcPts val="0"/>
-              </a:spcAft>
-              <a:buClr>
-                <a:srgbClr val="000000"/>
-              </a:buClr>
-              <a:buFont typeface="Arial"/>
-              <a:defRPr sz="1400" b="0" i="0" u="none" strike="noStrike" cap="none">
-                <a:solidFill>
-                  <a:srgbClr val="000000"/>
-                </a:solidFill>
-                <a:latin typeface="Arial"/>
-                <a:ea typeface="Arial"/>
-                <a:cs typeface="Arial"/>
-                <a:sym typeface="Arial"/>
-              </a:defRPr>
-            </a:lvl6pPr>
-            <a:lvl7pPr marR="0" lvl="6" algn="l" rtl="0">
-              <a:lnSpc>
-                <a:spcPct val="100000"/>
-              </a:lnSpc>
-              <a:spcBef>
-                <a:spcPts val="0"/>
-              </a:spcBef>
-              <a:spcAft>
-                <a:spcPts val="0"/>
-              </a:spcAft>
-              <a:buClr>
-                <a:srgbClr val="000000"/>
-              </a:buClr>
-              <a:buFont typeface="Arial"/>
-              <a:defRPr sz="1400" b="0" i="0" u="none" strike="noStrike" cap="none">
-                <a:solidFill>
-                  <a:srgbClr val="000000"/>
-                </a:solidFill>
-                <a:latin typeface="Arial"/>
-                <a:ea typeface="Arial"/>
-                <a:cs typeface="Arial"/>
-                <a:sym typeface="Arial"/>
-              </a:defRPr>
-            </a:lvl7pPr>
-            <a:lvl8pPr marR="0" lvl="7" algn="l" rtl="0">
-              <a:lnSpc>
-                <a:spcPct val="100000"/>
-              </a:lnSpc>
-              <a:spcBef>
-                <a:spcPts val="0"/>
-              </a:spcBef>
-              <a:spcAft>
-                <a:spcPts val="0"/>
-              </a:spcAft>
-              <a:buClr>
-                <a:srgbClr val="000000"/>
-              </a:buClr>
-              <a:buFont typeface="Arial"/>
-              <a:defRPr sz="1400" b="0" i="0" u="none" strike="noStrike" cap="none">
-                <a:solidFill>
-                  <a:srgbClr val="000000"/>
-                </a:solidFill>
-                <a:latin typeface="Arial"/>
-                <a:ea typeface="Arial"/>
-                <a:cs typeface="Arial"/>
-                <a:sym typeface="Arial"/>
-              </a:defRPr>
-            </a:lvl8pPr>
-            <a:lvl9pPr marR="0" lvl="8" algn="l" rtl="0">
-              <a:lnSpc>
-                <a:spcPct val="100000"/>
-              </a:lnSpc>
-              <a:spcBef>
-                <a:spcPts val="0"/>
-              </a:spcBef>
-              <a:spcAft>
-                <a:spcPts val="0"/>
-              </a:spcAft>
-              <a:buClr>
-                <a:srgbClr val="000000"/>
-              </a:buClr>
-              <a:buFont typeface="Arial"/>
-              <a:defRPr sz="1400" b="0" i="0" u="none" strike="noStrike" cap="none">
-                <a:solidFill>
-                  <a:srgbClr val="000000"/>
-                </a:solidFill>
-                <a:latin typeface="Arial"/>
-                <a:ea typeface="Arial"/>
-                <a:cs typeface="Arial"/>
-                <a:sym typeface="Arial"/>
-              </a:defRPr>
-            </a:lvl9pPr>
-          </a:lstStyle>
-          <a:p>
-            <a:pPr algn="r"/>
-            <a:r>
-              <a:t>2</a:t>
-            </a:r>
-            <a:endParaRPr lang="en-US"/>
-          </a:p>
-        </p:txBody>
-      </p:sp>
-      <p:sp>
-        <p:nvSpPr>
-          <p:cNvPr id="253" name="Rectangle 252"/>
-          <p:cNvSpPr/>
-          <p:nvPr/>
-        </p:nvSpPr>
-        <p:spPr>
-          <a:xfrm>
-            <a:off x="7400000" y="1900000"/>
-            <a:ext cx="3450000" cy="3450000"/>
-          </a:xfrm>
-          <a:prstGeom prst="rect">
-            <a:avLst/>
-          </a:prstGeom>
-          <a:solidFill>
-            <a:srgbClr val="F0F0F0"/>
-          </a:solidFill>
-          <a:ln w="15875">
-            <a:solidFill>
-              <a:srgbClr val="B0B0B0"/>
-            </a:solidFill>
-            <a:prstDash val="dash"/>
-          </a:ln>
-          <a:effectLst/>
-        </p:spPr>
-        <p:style>
-          <a:lnRef idx="1">
-            <a:schemeClr val="accent1"/>
-          </a:lnRef>
-          <a:fillRef idx="3">
-            <a:schemeClr val="accent1"/>
-          </a:fillRef>
-          <a:effectRef idx="2">
-            <a:schemeClr val="accent1"/>
-          </a:effectRef>
-          <a:fontRef idx="minor">
-            <a:schemeClr val="lt1"/>
-          </a:fontRef>
-        </p:style>
-        <p:txBody>
-          <a:bodyPr rtlCol="0" anchor="ctr" wrap="square"/>
-          <a:lstStyle/>
-          <a:p>
-            <a:pPr algn="ctr"/>
-            <a:r>
-              <a:rPr sz="1400" i="1">
-                <a:solidFill>
-                  <a:srgbClr val="808080"/>
-                </a:solidFill>
-                <a:latin typeface="Roboto Condensed"/>
-              </a:rPr>
-              <a:t>Espacio para fotografía</a:t>
-            </a:r>
-          </a:p>
-        </p:txBody>
-      </p:sp>
-      <p:sp>
-        <p:nvSpPr>
-          <p:cNvPr id="254" name="TextBox 253"/>
-          <p:cNvSpPr txBox="1"/>
-          <p:nvPr/>
-        </p:nvSpPr>
-        <p:spPr>
-          <a:xfrm>
-            <a:off x="7400000" y="5500000"/>
-            <a:ext cx="3450000" cy="300000"/>
-          </a:xfrm>
-          <a:prstGeom prst="rect">
-            <a:avLst/>
-          </a:prstGeom>
-          <a:noFill/>
-        </p:spPr>
-        <p:txBody>
-          <a:bodyPr wrap="square" lIns="0" rIns="0" tIns="0" bIns="0">
-            <a:spAutoFit/>
-          </a:bodyPr>
-          <a:lstStyle/>
-          <a:p>
-            <a:pPr algn="ctr"/>
-            <a:r>
-              <a:rPr sz="1000" b="0" i="1">
-                <a:solidFill>
-                  <a:srgbClr val="3A3A3A"/>
-                </a:solidFill>
-                <a:latin typeface="Roboto Condensed"/>
-              </a:rPr>
-              <a:t>Reemplazar este recuadro por una fotografía del relator</a:t>
-            </a:r>
-          </a:p>
-        </p:txBody>
-      </p:sp>
-    </p:spTree>
-  </p:cSld>
-  <p:clrMapOvr>
-    <a:masterClrMapping/>
-  </p:clrMapOvr>
-</p:sld>
-</file>
-
-<file path=ppt/slides/slide20.xml><?xml version="1.0" encoding="utf-8"?>
+<file path=ppt/slides/slide19.xml><?xml version="1.0" encoding="utf-8"?>
 <p:sld xmlns:a="http://schemas.openxmlformats.org/drawingml/2006/main" xmlns:p="http://schemas.openxmlformats.org/presentationml/2006/main" xmlns:r="http://schemas.openxmlformats.org/officeDocument/2006/relationships">
   <p:cSld>
     <p:spTree>
@@ -47113,7 +43671,7 @@
           <a:p>
             <a:pPr algn="r"/>
             <a:r>
-              <a:t>20</a:t>
+              <a:t>19</a:t>
             </a:r>
             <a:endParaRPr lang="en-US"/>
           </a:p>
@@ -47127,7 +43685,482 @@
 </p:sld>
 </file>
 
-<file path=ppt/slides/slide21.xml><?xml version="1.0" encoding="utf-8"?>
+<file path=ppt/slides/slide2.xml><?xml version="1.0" encoding="utf-8"?>
+<p:sld xmlns:a="http://schemas.openxmlformats.org/drawingml/2006/main" xmlns:p="http://schemas.openxmlformats.org/presentationml/2006/main" xmlns:r="http://schemas.openxmlformats.org/officeDocument/2006/relationships">
+  <p:cSld>
+    <p:spTree>
+      <p:nvGrpSpPr>
+        <p:cNvPr id="1" name=""/>
+        <p:cNvGrpSpPr/>
+        <p:nvPr/>
+      </p:nvGrpSpPr>
+      <p:grpSpPr/>
+      <p:sp>
+        <p:nvSpPr>
+          <p:cNvPr id="240" name="Google Shape;240;p38"/>
+          <p:cNvSpPr/>
+          <p:nvPr/>
+        </p:nvSpPr>
+        <p:spPr>
+          <a:xfrm>
+            <a:off x="853440" y="790892"/>
+            <a:ext cx="9055100" cy="731520"/>
+          </a:xfrm>
+          <a:prstGeom prst="rect">
+            <a:avLst/>
+          </a:prstGeom>
+          <a:noFill/>
+          <a:ln>
+            <a:noFill/>
+          </a:ln>
+        </p:spPr>
+        <p:txBody>
+          <a:bodyPr spcFirstLastPara="1" wrap="square" lIns="91425" tIns="45700" rIns="91425" bIns="45700" anchor="ctr" anchorCtr="0">
+            <a:noAutofit/>
+          </a:bodyPr>
+          <a:lstStyle/>
+          <a:p>
+            <a:pPr marL="0" marR="0" lvl="0" indent="0" algn="l" rtl="0">
+              <a:lnSpc>
+                <a:spcPct val="100000"/>
+              </a:lnSpc>
+              <a:spcBef>
+                <a:spcPts val="0"/>
+              </a:spcBef>
+              <a:spcAft>
+                <a:spcPts val="0"/>
+              </a:spcAft>
+              <a:buNone/>
+            </a:pPr>
+            <a:r>
+              <a:rPr lang="en-US" sz="4400" dirty="0">
+                <a:solidFill>
+                  <a:srgbClr val="3A3A3A"/>
+                </a:solidFill>
+                <a:latin typeface="Roboto Condensed Medium"/>
+                <a:ea typeface="Roboto Condensed Medium"/>
+                <a:cs typeface="Roboto Condensed Medium"/>
+                <a:sym typeface="Roboto Condensed Medium"/>
+              </a:rPr>
+              <a:t>Objetivo del módulo</a:t>
+            </a:r>
+            <a:endParaRPr dirty="0"/>
+          </a:p>
+        </p:txBody>
+      </p:sp>
+      <p:sp>
+        <p:nvSpPr>
+          <p:cNvPr id="241" name="Google Shape;241;p38"/>
+          <p:cNvSpPr/>
+          <p:nvPr/>
+        </p:nvSpPr>
+        <p:spPr>
+          <a:xfrm>
+            <a:off x="889446" y="2014379"/>
+            <a:ext cx="9385264" cy="3413760"/>
+          </a:xfrm>
+          <a:prstGeom prst="rect">
+            <a:avLst/>
+          </a:prstGeom>
+          <a:noFill/>
+          <a:ln>
+            <a:noFill/>
+          </a:ln>
+        </p:spPr>
+        <p:txBody>
+          <a:bodyPr spcFirstLastPara="1" wrap="square" lIns="91425" tIns="45700" rIns="91425" bIns="45700" anchor="t" anchorCtr="0">
+            <a:noAutofit/>
+          </a:bodyPr>
+          <a:lstStyle/>
+          <a:p>
+            <a:pPr marL="0" marR="0" indent="0" algn="l" rtl="0">
+              <a:lnSpc>
+                <a:spcPct val="100000"/>
+              </a:lnSpc>
+              <a:spcBef>
+                <a:spcPts val="0"/>
+              </a:spcBef>
+              <a:spcAft>
+                <a:spcPts val="800"/>
+              </a:spcAft>
+              <a:buNone/>
+            </a:pPr>
+            <a:r>
+              <a:rPr sz="2000">
+                <a:solidFill>
+                  <a:srgbClr val="3A3A3A"/>
+                </a:solidFill>
+                <a:latin typeface="Roboto Condensed"/>
+              </a:rPr>
+              <a:t>• Analizar el proceso de transformación digital en las organizaciones, integrando inteligencia artificial con otras tecnologías emergentes</a:t>
+            </a:r>
+            <a:endParaRPr dirty="0"/>
+          </a:p>
+          <a:p>
+            <a:pPr>
+              <a:spcAft>
+                <a:spcPts val="800"/>
+              </a:spcAft>
+            </a:pPr>
+            <a:r>
+              <a:rPr sz="2000">
+                <a:solidFill>
+                  <a:srgbClr val="3A3A3A"/>
+                </a:solidFill>
+                <a:latin typeface="Roboto Condensed"/>
+              </a:rPr>
+              <a:t>• Examinar estrategias para implementar cambios digitales que mejoren la eficiencia operativa y la competitividad</a:t>
+            </a:r>
+          </a:p>
+          <a:p>
+            <a:pPr lvl="1">
+              <a:spcAft>
+                <a:spcPts val="400"/>
+              </a:spcAft>
+            </a:pPr>
+            <a:r>
+              <a:rPr sz="1800">
+                <a:solidFill>
+                  <a:srgbClr val="3A3A3A"/>
+                </a:solidFill>
+                <a:latin typeface="Roboto Condensed"/>
+              </a:rPr>
+              <a:t>– Clase 1 (7 jul): digitalización, IA, IoT y Blockchain</a:t>
+            </a:r>
+          </a:p>
+          <a:p>
+            <a:pPr lvl="1">
+              <a:spcAft>
+                <a:spcPts val="400"/>
+              </a:spcAft>
+            </a:pPr>
+            <a:r>
+              <a:rPr sz="1800">
+                <a:solidFill>
+                  <a:srgbClr val="3A3A3A"/>
+                </a:solidFill>
+                <a:latin typeface="Roboto Condensed"/>
+              </a:rPr>
+              <a:t>– Clase 2 (14 jul): Big Data/BI, Cloud, Automatización y Ciberseguridad</a:t>
+            </a:r>
+          </a:p>
+          <a:p>
+            <a:pPr lvl="1">
+              <a:spcAft>
+                <a:spcPts val="400"/>
+              </a:spcAft>
+            </a:pPr>
+            <a:r>
+              <a:rPr sz="1800">
+                <a:solidFill>
+                  <a:srgbClr val="3A3A3A"/>
+                </a:solidFill>
+                <a:latin typeface="Roboto Condensed"/>
+              </a:rPr>
+              <a:t>– Evaluación del módulo: lunes 21 de julio</a:t>
+            </a:r>
+          </a:p>
+        </p:txBody>
+      </p:sp>
+      <p:pic>
+        <p:nvPicPr>
+          <p:cNvPr id="252" name="Google Shape;252;p38"/>
+          <p:cNvPicPr preferRelativeResize="0"/>
+          <p:nvPr/>
+        </p:nvPicPr>
+        <p:blipFill rotWithShape="1">
+          <a:blip r:embed="rId2">
+            <a:alphaModFix/>
+          </a:blip>
+          <a:srcRect/>
+          <a:stretch/>
+        </p:blipFill>
+        <p:spPr>
+          <a:xfrm>
+            <a:off x="10120580" y="230187"/>
+            <a:ext cx="1866726" cy="590083"/>
+          </a:xfrm>
+          <a:prstGeom prst="rect">
+            <a:avLst/>
+          </a:prstGeom>
+          <a:noFill/>
+          <a:ln>
+            <a:noFill/>
+          </a:ln>
+        </p:spPr>
+      </p:pic>
+      <p:sp>
+        <p:nvSpPr>
+          <p:cNvPr id="2" name="Marcador de número de diapositiva 2">
+            <a:extLst>
+              <a:ext uri="{FF2B5EF4-FFF2-40B4-BE49-F238E27FC236}">
+                <a16:creationId xmlns:a16="http://schemas.microsoft.com/office/drawing/2014/main" id="{9E2EBC40-EC40-BDF2-F68A-0BA88B712A11}"/>
+              </a:ext>
+            </a:extLst>
+          </p:cNvPr>
+          <p:cNvSpPr txBox="1">
+            <a:spLocks/>
+          </p:cNvSpPr>
+          <p:nvPr/>
+        </p:nvSpPr>
+        <p:spPr>
+          <a:xfrm>
+            <a:off x="8610600" y="6356351"/>
+            <a:ext cx="2743200" cy="365125"/>
+          </a:xfrm>
+          <a:prstGeom prst="rect">
+            <a:avLst/>
+          </a:prstGeom>
+        </p:spPr>
+        <p:txBody>
+          <a:bodyPr/>
+          <a:lstStyle>
+            <a:defPPr marR="0" lvl="0" algn="l" rtl="0">
+              <a:lnSpc>
+                <a:spcPct val="100000"/>
+              </a:lnSpc>
+              <a:spcBef>
+                <a:spcPts val="0"/>
+              </a:spcBef>
+              <a:spcAft>
+                <a:spcPts val="0"/>
+              </a:spcAft>
+            </a:defPPr>
+            <a:lvl1pPr marR="0" lvl="0" algn="l" rtl="0">
+              <a:lnSpc>
+                <a:spcPct val="100000"/>
+              </a:lnSpc>
+              <a:spcBef>
+                <a:spcPts val="0"/>
+              </a:spcBef>
+              <a:spcAft>
+                <a:spcPts val="0"/>
+              </a:spcAft>
+              <a:buClr>
+                <a:srgbClr val="000000"/>
+              </a:buClr>
+              <a:buFont typeface="Arial"/>
+              <a:defRPr sz="1400" b="0" i="0" u="none" strike="noStrike" cap="none">
+                <a:solidFill>
+                  <a:srgbClr val="000000"/>
+                </a:solidFill>
+                <a:latin typeface="Arial"/>
+                <a:ea typeface="Arial"/>
+                <a:cs typeface="Arial"/>
+                <a:sym typeface="Arial"/>
+              </a:defRPr>
+            </a:lvl1pPr>
+            <a:lvl2pPr marR="0" lvl="1" algn="l" rtl="0">
+              <a:lnSpc>
+                <a:spcPct val="100000"/>
+              </a:lnSpc>
+              <a:spcBef>
+                <a:spcPts val="0"/>
+              </a:spcBef>
+              <a:spcAft>
+                <a:spcPts val="0"/>
+              </a:spcAft>
+              <a:buClr>
+                <a:srgbClr val="000000"/>
+              </a:buClr>
+              <a:buFont typeface="Arial"/>
+              <a:defRPr sz="1400" b="0" i="0" u="none" strike="noStrike" cap="none">
+                <a:solidFill>
+                  <a:srgbClr val="000000"/>
+                </a:solidFill>
+                <a:latin typeface="Arial"/>
+                <a:ea typeface="Arial"/>
+                <a:cs typeface="Arial"/>
+                <a:sym typeface="Arial"/>
+              </a:defRPr>
+            </a:lvl2pPr>
+            <a:lvl3pPr marR="0" lvl="2" algn="l" rtl="0">
+              <a:lnSpc>
+                <a:spcPct val="100000"/>
+              </a:lnSpc>
+              <a:spcBef>
+                <a:spcPts val="0"/>
+              </a:spcBef>
+              <a:spcAft>
+                <a:spcPts val="0"/>
+              </a:spcAft>
+              <a:buClr>
+                <a:srgbClr val="000000"/>
+              </a:buClr>
+              <a:buFont typeface="Arial"/>
+              <a:defRPr sz="1400" b="0" i="0" u="none" strike="noStrike" cap="none">
+                <a:solidFill>
+                  <a:srgbClr val="000000"/>
+                </a:solidFill>
+                <a:latin typeface="Arial"/>
+                <a:ea typeface="Arial"/>
+                <a:cs typeface="Arial"/>
+                <a:sym typeface="Arial"/>
+              </a:defRPr>
+            </a:lvl3pPr>
+            <a:lvl4pPr marR="0" lvl="3" algn="l" rtl="0">
+              <a:lnSpc>
+                <a:spcPct val="100000"/>
+              </a:lnSpc>
+              <a:spcBef>
+                <a:spcPts val="0"/>
+              </a:spcBef>
+              <a:spcAft>
+                <a:spcPts val="0"/>
+              </a:spcAft>
+              <a:buClr>
+                <a:srgbClr val="000000"/>
+              </a:buClr>
+              <a:buFont typeface="Arial"/>
+              <a:defRPr sz="1400" b="0" i="0" u="none" strike="noStrike" cap="none">
+                <a:solidFill>
+                  <a:srgbClr val="000000"/>
+                </a:solidFill>
+                <a:latin typeface="Arial"/>
+                <a:ea typeface="Arial"/>
+                <a:cs typeface="Arial"/>
+                <a:sym typeface="Arial"/>
+              </a:defRPr>
+            </a:lvl4pPr>
+            <a:lvl5pPr marR="0" lvl="4" algn="l" rtl="0">
+              <a:lnSpc>
+                <a:spcPct val="100000"/>
+              </a:lnSpc>
+              <a:spcBef>
+                <a:spcPts val="0"/>
+              </a:spcBef>
+              <a:spcAft>
+                <a:spcPts val="0"/>
+              </a:spcAft>
+              <a:buClr>
+                <a:srgbClr val="000000"/>
+              </a:buClr>
+              <a:buFont typeface="Arial"/>
+              <a:defRPr sz="1400" b="0" i="0" u="none" strike="noStrike" cap="none">
+                <a:solidFill>
+                  <a:srgbClr val="000000"/>
+                </a:solidFill>
+                <a:latin typeface="Arial"/>
+                <a:ea typeface="Arial"/>
+                <a:cs typeface="Arial"/>
+                <a:sym typeface="Arial"/>
+              </a:defRPr>
+            </a:lvl5pPr>
+            <a:lvl6pPr marR="0" lvl="5" algn="l" rtl="0">
+              <a:lnSpc>
+                <a:spcPct val="100000"/>
+              </a:lnSpc>
+              <a:spcBef>
+                <a:spcPts val="0"/>
+              </a:spcBef>
+              <a:spcAft>
+                <a:spcPts val="0"/>
+              </a:spcAft>
+              <a:buClr>
+                <a:srgbClr val="000000"/>
+              </a:buClr>
+              <a:buFont typeface="Arial"/>
+              <a:defRPr sz="1400" b="0" i="0" u="none" strike="noStrike" cap="none">
+                <a:solidFill>
+                  <a:srgbClr val="000000"/>
+                </a:solidFill>
+                <a:latin typeface="Arial"/>
+                <a:ea typeface="Arial"/>
+                <a:cs typeface="Arial"/>
+                <a:sym typeface="Arial"/>
+              </a:defRPr>
+            </a:lvl6pPr>
+            <a:lvl7pPr marR="0" lvl="6" algn="l" rtl="0">
+              <a:lnSpc>
+                <a:spcPct val="100000"/>
+              </a:lnSpc>
+              <a:spcBef>
+                <a:spcPts val="0"/>
+              </a:spcBef>
+              <a:spcAft>
+                <a:spcPts val="0"/>
+              </a:spcAft>
+              <a:buClr>
+                <a:srgbClr val="000000"/>
+              </a:buClr>
+              <a:buFont typeface="Arial"/>
+              <a:defRPr sz="1400" b="0" i="0" u="none" strike="noStrike" cap="none">
+                <a:solidFill>
+                  <a:srgbClr val="000000"/>
+                </a:solidFill>
+                <a:latin typeface="Arial"/>
+                <a:ea typeface="Arial"/>
+                <a:cs typeface="Arial"/>
+                <a:sym typeface="Arial"/>
+              </a:defRPr>
+            </a:lvl7pPr>
+            <a:lvl8pPr marR="0" lvl="7" algn="l" rtl="0">
+              <a:lnSpc>
+                <a:spcPct val="100000"/>
+              </a:lnSpc>
+              <a:spcBef>
+                <a:spcPts val="0"/>
+              </a:spcBef>
+              <a:spcAft>
+                <a:spcPts val="0"/>
+              </a:spcAft>
+              <a:buClr>
+                <a:srgbClr val="000000"/>
+              </a:buClr>
+              <a:buFont typeface="Arial"/>
+              <a:defRPr sz="1400" b="0" i="0" u="none" strike="noStrike" cap="none">
+                <a:solidFill>
+                  <a:srgbClr val="000000"/>
+                </a:solidFill>
+                <a:latin typeface="Arial"/>
+                <a:ea typeface="Arial"/>
+                <a:cs typeface="Arial"/>
+                <a:sym typeface="Arial"/>
+              </a:defRPr>
+            </a:lvl8pPr>
+            <a:lvl9pPr marR="0" lvl="8" algn="l" rtl="0">
+              <a:lnSpc>
+                <a:spcPct val="100000"/>
+              </a:lnSpc>
+              <a:spcBef>
+                <a:spcPts val="0"/>
+              </a:spcBef>
+              <a:spcAft>
+                <a:spcPts val="0"/>
+              </a:spcAft>
+              <a:buClr>
+                <a:srgbClr val="000000"/>
+              </a:buClr>
+              <a:buFont typeface="Arial"/>
+              <a:defRPr sz="1400" b="0" i="0" u="none" strike="noStrike" cap="none">
+                <a:solidFill>
+                  <a:srgbClr val="000000"/>
+                </a:solidFill>
+                <a:latin typeface="Arial"/>
+                <a:ea typeface="Arial"/>
+                <a:cs typeface="Arial"/>
+                <a:sym typeface="Arial"/>
+              </a:defRPr>
+            </a:lvl9pPr>
+          </a:lstStyle>
+          <a:p>
+            <a:pPr algn="r"/>
+            <a:r>
+              <a:t>2</a:t>
+            </a:r>
+            <a:endParaRPr lang="en-US"/>
+          </a:p>
+        </p:txBody>
+      </p:sp>
+    </p:spTree>
+  </p:cSld>
+  <p:clrMapOvr>
+    <a:masterClrMapping/>
+  </p:clrMapOvr>
+</p:sld>
+</file>
+
+<file path=ppt/slides/slide20.xml><?xml version="1.0" encoding="utf-8"?>
 <p:sld xmlns:a="http://schemas.openxmlformats.org/drawingml/2006/main" xmlns:p="http://schemas.openxmlformats.org/presentationml/2006/main" xmlns:r="http://schemas.openxmlformats.org/officeDocument/2006/relationships">
   <p:cSld>
     <p:spTree>
@@ -47524,7 +44557,7 @@
           <a:p>
             <a:pPr algn="r"/>
             <a:r>
-              <a:t>21</a:t>
+              <a:t>20</a:t>
             </a:r>
             <a:endParaRPr lang="en-US"/>
           </a:p>
@@ -47538,7 +44571,7 @@
 </p:sld>
 </file>
 
-<file path=ppt/slides/slide22.xml><?xml version="1.0" encoding="utf-8"?>
+<file path=ppt/slides/slide21.xml><?xml version="1.0" encoding="utf-8"?>
 <p:sld xmlns:a="http://schemas.openxmlformats.org/drawingml/2006/main" xmlns:p="http://schemas.openxmlformats.org/presentationml/2006/main" xmlns:r="http://schemas.openxmlformats.org/officeDocument/2006/relationships">
   <p:cSld>
     <p:spTree>
@@ -47610,7 +44643,7 @@
         <p:spPr>
           <a:xfrm>
             <a:off x="889446" y="2014379"/>
-            <a:ext cx="6300000" cy="3413760"/>
+            <a:ext cx="9385264" cy="3413760"/>
           </a:xfrm>
           <a:prstGeom prst="rect">
             <a:avLst/>
@@ -47634,12 +44667,12 @@
                 <a:spcPts val="0"/>
               </a:spcBef>
               <a:spcAft>
-                <a:spcPts val="600"/>
+                <a:spcPts val="800"/>
               </a:spcAft>
               <a:buNone/>
             </a:pPr>
             <a:r>
-              <a:rPr sz="1500">
+              <a:rPr sz="2000">
                 <a:solidFill>
                   <a:srgbClr val="3A3A3A"/>
                 </a:solidFill>
@@ -47652,11 +44685,11 @@
           <a:p>
             <a:pPr>
               <a:spcAft>
-                <a:spcPts val="600"/>
+                <a:spcPts val="800"/>
               </a:spcAft>
             </a:pPr>
             <a:r>
-              <a:rPr sz="1500">
+              <a:rPr sz="2000">
                 <a:solidFill>
                   <a:srgbClr val="3A3A3A"/>
                 </a:solidFill>
@@ -47668,11 +44701,11 @@
           <a:p>
             <a:pPr lvl="1">
               <a:spcAft>
-                <a:spcPts val="600"/>
+                <a:spcPts val="400"/>
               </a:spcAft>
             </a:pPr>
             <a:r>
-              <a:rPr sz="1500">
+              <a:rPr sz="1800">
                 <a:solidFill>
                   <a:srgbClr val="3A3A3A"/>
                 </a:solidFill>
@@ -47684,11 +44717,11 @@
           <a:p>
             <a:pPr>
               <a:spcAft>
-                <a:spcPts val="600"/>
+                <a:spcPts val="800"/>
               </a:spcAft>
             </a:pPr>
             <a:r>
-              <a:rPr sz="1500">
+              <a:rPr sz="2000">
                 <a:solidFill>
                   <a:srgbClr val="3A3A3A"/>
                 </a:solidFill>
@@ -47983,450 +45016,9 @@
           <a:p>
             <a:pPr algn="r"/>
             <a:r>
-              <a:t>22</a:t>
+              <a:t>21</a:t>
             </a:r>
             <a:endParaRPr lang="en-US"/>
-          </a:p>
-        </p:txBody>
-      </p:sp>
-      <p:sp>
-        <p:nvSpPr>
-          <p:cNvPr id="253" name="Oval 252"/>
-          <p:cNvSpPr/>
-          <p:nvPr/>
-        </p:nvSpPr>
-        <p:spPr>
-          <a:xfrm>
-            <a:off x="8850000" y="3100000"/>
-            <a:ext cx="1000000" cy="700000"/>
-          </a:xfrm>
-          <a:prstGeom prst="ellipse">
-            <a:avLst/>
-          </a:prstGeom>
-          <a:solidFill>
-            <a:srgbClr val="0E2841"/>
-          </a:solidFill>
-          <a:ln>
-            <a:noFill/>
-          </a:ln>
-          <a:effectLst/>
-        </p:spPr>
-        <p:style>
-          <a:lnRef idx="1">
-            <a:schemeClr val="accent1"/>
-          </a:lnRef>
-          <a:fillRef idx="3">
-            <a:schemeClr val="accent1"/>
-          </a:fillRef>
-          <a:effectRef idx="2">
-            <a:schemeClr val="accent1"/>
-          </a:effectRef>
-          <a:fontRef idx="minor">
-            <a:schemeClr val="lt1"/>
-          </a:fontRef>
-        </p:style>
-        <p:txBody>
-          <a:bodyPr rtlCol="0" anchor="ctr" wrap="square" lIns="18000" rIns="18000" tIns="9000" bIns="9000"/>
-          <a:lstStyle/>
-          <a:p>
-            <a:pPr algn="ctr"/>
-            <a:r>
-              <a:rPr sz="1000" b="1">
-                <a:solidFill>
-                  <a:srgbClr val="FFFFFF"/>
-                </a:solidFill>
-                <a:latin typeface="Roboto Condensed"/>
-              </a:rPr>
-              <a:t>Nube /
-plataforma</a:t>
-            </a:r>
-          </a:p>
-        </p:txBody>
-      </p:sp>
-      <p:cxnSp>
-        <p:nvCxnSpPr>
-          <p:cNvPr id="254" name="Connector 253"/>
-          <p:cNvCxnSpPr/>
-          <p:nvPr/>
-        </p:nvCxnSpPr>
-        <p:spPr>
-          <a:xfrm flipH="1" flipV="1">
-            <a:off x="8050000" y="2500000"/>
-            <a:ext cx="1300000" cy="950000"/>
-          </a:xfrm>
-          <a:prstGeom prst="line">
-            <a:avLst/>
-          </a:prstGeom>
-          <a:ln w="12700">
-            <a:solidFill>
-              <a:srgbClr val="0F9ED5"/>
-            </a:solidFill>
-          </a:ln>
-        </p:spPr>
-        <p:style>
-          <a:lnRef idx="2">
-            <a:schemeClr val="accent1"/>
-          </a:lnRef>
-          <a:fillRef idx="0">
-            <a:schemeClr val="accent1"/>
-          </a:fillRef>
-          <a:effectRef idx="1">
-            <a:schemeClr val="accent1"/>
-          </a:effectRef>
-          <a:fontRef idx="minor">
-            <a:schemeClr val="tx1"/>
-          </a:fontRef>
-        </p:style>
-      </p:cxnSp>
-      <p:sp>
-        <p:nvSpPr>
-          <p:cNvPr id="255" name="Rounded Rectangle 254"/>
-          <p:cNvSpPr/>
-          <p:nvPr/>
-        </p:nvSpPr>
-        <p:spPr>
-          <a:xfrm>
-            <a:off x="7650000" y="2200000"/>
-            <a:ext cx="800000" cy="600000"/>
-          </a:xfrm>
-          <a:prstGeom prst="roundRect">
-            <a:avLst/>
-          </a:prstGeom>
-          <a:solidFill>
-            <a:srgbClr val="0F9ED5"/>
-          </a:solidFill>
-          <a:ln>
-            <a:noFill/>
-          </a:ln>
-          <a:effectLst/>
-        </p:spPr>
-        <p:style>
-          <a:lnRef idx="1">
-            <a:schemeClr val="accent1"/>
-          </a:lnRef>
-          <a:fillRef idx="3">
-            <a:schemeClr val="accent1"/>
-          </a:fillRef>
-          <a:effectRef idx="2">
-            <a:schemeClr val="accent1"/>
-          </a:effectRef>
-          <a:fontRef idx="minor">
-            <a:schemeClr val="lt1"/>
-          </a:fontRef>
-        </p:style>
-        <p:txBody>
-          <a:bodyPr rtlCol="0" anchor="ctr" wrap="square" lIns="18000" rIns="18000" tIns="9000" bIns="9000"/>
-          <a:lstStyle/>
-          <a:p>
-            <a:pPr algn="ctr"/>
-            <a:r>
-              <a:rPr sz="900" b="1">
-                <a:solidFill>
-                  <a:srgbClr val="0E2841"/>
-                </a:solidFill>
-                <a:latin typeface="Roboto Condensed"/>
-              </a:rPr>
-              <a:t>Sensores</a:t>
-            </a:r>
-          </a:p>
-        </p:txBody>
-      </p:sp>
-      <p:cxnSp>
-        <p:nvCxnSpPr>
-          <p:cNvPr id="256" name="Connector 255"/>
-          <p:cNvCxnSpPr/>
-          <p:nvPr/>
-        </p:nvCxnSpPr>
-        <p:spPr>
-          <a:xfrm flipV="1">
-            <a:off x="9350000" y="2500000"/>
-            <a:ext cx="1100000" cy="950000"/>
-          </a:xfrm>
-          <a:prstGeom prst="line">
-            <a:avLst/>
-          </a:prstGeom>
-          <a:ln w="12700">
-            <a:solidFill>
-              <a:srgbClr val="0F9ED5"/>
-            </a:solidFill>
-          </a:ln>
-        </p:spPr>
-        <p:style>
-          <a:lnRef idx="2">
-            <a:schemeClr val="accent1"/>
-          </a:lnRef>
-          <a:fillRef idx="0">
-            <a:schemeClr val="accent1"/>
-          </a:fillRef>
-          <a:effectRef idx="1">
-            <a:schemeClr val="accent1"/>
-          </a:effectRef>
-          <a:fontRef idx="minor">
-            <a:schemeClr val="tx1"/>
-          </a:fontRef>
-        </p:style>
-      </p:cxnSp>
-      <p:sp>
-        <p:nvSpPr>
-          <p:cNvPr id="257" name="Rounded Rectangle 256"/>
-          <p:cNvSpPr/>
-          <p:nvPr/>
-        </p:nvSpPr>
-        <p:spPr>
-          <a:xfrm>
-            <a:off x="10050000" y="2200000"/>
-            <a:ext cx="800000" cy="600000"/>
-          </a:xfrm>
-          <a:prstGeom prst="roundRect">
-            <a:avLst/>
-          </a:prstGeom>
-          <a:solidFill>
-            <a:srgbClr val="0F9ED5"/>
-          </a:solidFill>
-          <a:ln>
-            <a:noFill/>
-          </a:ln>
-          <a:effectLst/>
-        </p:spPr>
-        <p:style>
-          <a:lnRef idx="1">
-            <a:schemeClr val="accent1"/>
-          </a:lnRef>
-          <a:fillRef idx="3">
-            <a:schemeClr val="accent1"/>
-          </a:fillRef>
-          <a:effectRef idx="2">
-            <a:schemeClr val="accent1"/>
-          </a:effectRef>
-          <a:fontRef idx="minor">
-            <a:schemeClr val="lt1"/>
-          </a:fontRef>
-        </p:style>
-        <p:txBody>
-          <a:bodyPr rtlCol="0" anchor="ctr" wrap="square" lIns="18000" rIns="18000" tIns="9000" bIns="9000"/>
-          <a:lstStyle/>
-          <a:p>
-            <a:pPr algn="ctr"/>
-            <a:r>
-              <a:rPr sz="900" b="1">
-                <a:solidFill>
-                  <a:srgbClr val="0E2841"/>
-                </a:solidFill>
-                <a:latin typeface="Roboto Condensed"/>
-              </a:rPr>
-              <a:t>Cámaras</a:t>
-            </a:r>
-          </a:p>
-        </p:txBody>
-      </p:sp>
-      <p:cxnSp>
-        <p:nvCxnSpPr>
-          <p:cNvPr id="258" name="Connector 257"/>
-          <p:cNvCxnSpPr/>
-          <p:nvPr/>
-        </p:nvCxnSpPr>
-        <p:spPr>
-          <a:xfrm flipH="1">
-            <a:off x="8050000" y="3450000"/>
-            <a:ext cx="1300000" cy="1050000"/>
-          </a:xfrm>
-          <a:prstGeom prst="line">
-            <a:avLst/>
-          </a:prstGeom>
-          <a:ln w="12700">
-            <a:solidFill>
-              <a:srgbClr val="0F9ED5"/>
-            </a:solidFill>
-          </a:ln>
-        </p:spPr>
-        <p:style>
-          <a:lnRef idx="2">
-            <a:schemeClr val="accent1"/>
-          </a:lnRef>
-          <a:fillRef idx="0">
-            <a:schemeClr val="accent1"/>
-          </a:fillRef>
-          <a:effectRef idx="1">
-            <a:schemeClr val="accent1"/>
-          </a:effectRef>
-          <a:fontRef idx="minor">
-            <a:schemeClr val="tx1"/>
-          </a:fontRef>
-        </p:style>
-      </p:cxnSp>
-      <p:sp>
-        <p:nvSpPr>
-          <p:cNvPr id="259" name="Rounded Rectangle 258"/>
-          <p:cNvSpPr/>
-          <p:nvPr/>
-        </p:nvSpPr>
-        <p:spPr>
-          <a:xfrm>
-            <a:off x="7650000" y="4200000"/>
-            <a:ext cx="800000" cy="600000"/>
-          </a:xfrm>
-          <a:prstGeom prst="roundRect">
-            <a:avLst/>
-          </a:prstGeom>
-          <a:solidFill>
-            <a:srgbClr val="0F9ED5"/>
-          </a:solidFill>
-          <a:ln>
-            <a:noFill/>
-          </a:ln>
-          <a:effectLst/>
-        </p:spPr>
-        <p:style>
-          <a:lnRef idx="1">
-            <a:schemeClr val="accent1"/>
-          </a:lnRef>
-          <a:fillRef idx="3">
-            <a:schemeClr val="accent1"/>
-          </a:fillRef>
-          <a:effectRef idx="2">
-            <a:schemeClr val="accent1"/>
-          </a:effectRef>
-          <a:fontRef idx="minor">
-            <a:schemeClr val="lt1"/>
-          </a:fontRef>
-        </p:style>
-        <p:txBody>
-          <a:bodyPr rtlCol="0" anchor="ctr" wrap="square" lIns="18000" rIns="18000" tIns="9000" bIns="9000"/>
-          <a:lstStyle/>
-          <a:p>
-            <a:pPr algn="ctr"/>
-            <a:r>
-              <a:rPr sz="900" b="1">
-                <a:solidFill>
-                  <a:srgbClr val="0E2841"/>
-                </a:solidFill>
-                <a:latin typeface="Roboto Condensed"/>
-              </a:rPr>
-              <a:t>Medidores</a:t>
-            </a:r>
-          </a:p>
-        </p:txBody>
-      </p:sp>
-      <p:cxnSp>
-        <p:nvCxnSpPr>
-          <p:cNvPr id="260" name="Connector 259"/>
-          <p:cNvCxnSpPr/>
-          <p:nvPr/>
-        </p:nvCxnSpPr>
-        <p:spPr>
-          <a:xfrm>
-            <a:off x="9350000" y="3450000"/>
-            <a:ext cx="1100000" cy="1050000"/>
-          </a:xfrm>
-          <a:prstGeom prst="line">
-            <a:avLst/>
-          </a:prstGeom>
-          <a:ln w="12700">
-            <a:solidFill>
-              <a:srgbClr val="0F9ED5"/>
-            </a:solidFill>
-          </a:ln>
-        </p:spPr>
-        <p:style>
-          <a:lnRef idx="2">
-            <a:schemeClr val="accent1"/>
-          </a:lnRef>
-          <a:fillRef idx="0">
-            <a:schemeClr val="accent1"/>
-          </a:fillRef>
-          <a:effectRef idx="1">
-            <a:schemeClr val="accent1"/>
-          </a:effectRef>
-          <a:fontRef idx="minor">
-            <a:schemeClr val="tx1"/>
-          </a:fontRef>
-        </p:style>
-      </p:cxnSp>
-      <p:sp>
-        <p:nvSpPr>
-          <p:cNvPr id="261" name="Rounded Rectangle 260"/>
-          <p:cNvSpPr/>
-          <p:nvPr/>
-        </p:nvSpPr>
-        <p:spPr>
-          <a:xfrm>
-            <a:off x="10050000" y="4200000"/>
-            <a:ext cx="800000" cy="600000"/>
-          </a:xfrm>
-          <a:prstGeom prst="roundRect">
-            <a:avLst/>
-          </a:prstGeom>
-          <a:solidFill>
-            <a:srgbClr val="0F9ED5"/>
-          </a:solidFill>
-          <a:ln>
-            <a:noFill/>
-          </a:ln>
-          <a:effectLst/>
-        </p:spPr>
-        <p:style>
-          <a:lnRef idx="1">
-            <a:schemeClr val="accent1"/>
-          </a:lnRef>
-          <a:fillRef idx="3">
-            <a:schemeClr val="accent1"/>
-          </a:fillRef>
-          <a:effectRef idx="2">
-            <a:schemeClr val="accent1"/>
-          </a:effectRef>
-          <a:fontRef idx="minor">
-            <a:schemeClr val="lt1"/>
-          </a:fontRef>
-        </p:style>
-        <p:txBody>
-          <a:bodyPr rtlCol="0" anchor="ctr" wrap="square" lIns="18000" rIns="18000" tIns="9000" bIns="9000"/>
-          <a:lstStyle/>
-          <a:p>
-            <a:pPr algn="ctr"/>
-            <a:r>
-              <a:rPr sz="900" b="1">
-                <a:solidFill>
-                  <a:srgbClr val="0E2841"/>
-                </a:solidFill>
-                <a:latin typeface="Roboto Condensed"/>
-              </a:rPr>
-              <a:t>Wearables</a:t>
-            </a:r>
-          </a:p>
-        </p:txBody>
-      </p:sp>
-      <p:sp>
-        <p:nvSpPr>
-          <p:cNvPr id="262" name="TextBox 261"/>
-          <p:cNvSpPr txBox="1"/>
-          <p:nvPr/>
-        </p:nvSpPr>
-        <p:spPr>
-          <a:xfrm>
-            <a:off x="7450000" y="4950000"/>
-            <a:ext cx="3400000" cy="300000"/>
-          </a:xfrm>
-          <a:prstGeom prst="rect">
-            <a:avLst/>
-          </a:prstGeom>
-          <a:noFill/>
-        </p:spPr>
-        <p:txBody>
-          <a:bodyPr wrap="square" lIns="0" rIns="0" tIns="0" bIns="0">
-            <a:spAutoFit/>
-          </a:bodyPr>
-          <a:lstStyle/>
-          <a:p>
-            <a:pPr algn="ctr"/>
-            <a:r>
-              <a:rPr sz="1000" b="0" i="1">
-                <a:solidFill>
-                  <a:srgbClr val="3A3A3A"/>
-                </a:solidFill>
-                <a:latin typeface="Roboto Condensed"/>
-              </a:rPr>
-              <a:t>Referencial: dispositivos conectados a una plataforma central</a:t>
-            </a:r>
           </a:p>
         </p:txBody>
       </p:sp>
@@ -48438,7 +45030,7 @@
 </p:sld>
 </file>
 
-<file path=ppt/slides/slide23.xml><?xml version="1.0" encoding="utf-8"?>
+<file path=ppt/slides/slide22.xml><?xml version="1.0" encoding="utf-8"?>
 <p:sld xmlns:a="http://schemas.openxmlformats.org/drawingml/2006/main" xmlns:p="http://schemas.openxmlformats.org/presentationml/2006/main" xmlns:r="http://schemas.openxmlformats.org/officeDocument/2006/relationships">
   <p:cSld>
     <p:spTree>
@@ -48899,7 +45491,7 @@
           <a:p>
             <a:pPr algn="r"/>
             <a:r>
-              <a:t>23</a:t>
+              <a:t>22</a:t>
             </a:r>
             <a:endParaRPr lang="en-US"/>
           </a:p>
@@ -48913,7 +45505,7 @@
 </p:sld>
 </file>
 
-<file path=ppt/slides/slide24.xml><?xml version="1.0" encoding="utf-8"?>
+<file path=ppt/slides/slide23.xml><?xml version="1.0" encoding="utf-8"?>
 <p:sld xmlns:a="http://schemas.openxmlformats.org/drawingml/2006/main" xmlns:p="http://schemas.openxmlformats.org/presentationml/2006/main" xmlns:r="http://schemas.openxmlformats.org/officeDocument/2006/relationships">
   <p:cSld>
     <p:spTree>
@@ -49390,7 +45982,7 @@
           <a:p>
             <a:pPr algn="r"/>
             <a:r>
-              <a:t>24</a:t>
+              <a:t>23</a:t>
             </a:r>
             <a:endParaRPr lang="en-US"/>
           </a:p>
@@ -49404,7 +45996,7 @@
 </p:sld>
 </file>
 
-<file path=ppt/slides/slide25.xml><?xml version="1.0" encoding="utf-8"?>
+<file path=ppt/slides/slide24.xml><?xml version="1.0" encoding="utf-8"?>
 <p:sld xmlns:a="http://schemas.openxmlformats.org/drawingml/2006/main" xmlns:p="http://schemas.openxmlformats.org/presentationml/2006/main" xmlns:r="http://schemas.openxmlformats.org/officeDocument/2006/relationships">
   <p:cSld>
     <p:spTree>
@@ -49476,7 +46068,7 @@
         <p:spPr>
           <a:xfrm>
             <a:off x="889446" y="2014379"/>
-            <a:ext cx="6300000" cy="3413760"/>
+            <a:ext cx="9385264" cy="3413760"/>
           </a:xfrm>
           <a:prstGeom prst="rect">
             <a:avLst/>
@@ -49500,12 +46092,12 @@
                 <a:spcPts val="0"/>
               </a:spcBef>
               <a:spcAft>
-                <a:spcPts val="600"/>
+                <a:spcPts val="800"/>
               </a:spcAft>
               <a:buNone/>
             </a:pPr>
             <a:r>
-              <a:rPr sz="1500">
+              <a:rPr sz="2000">
                 <a:solidFill>
                   <a:srgbClr val="3A3A3A"/>
                 </a:solidFill>
@@ -49518,11 +46110,11 @@
           <a:p>
             <a:pPr>
               <a:spcAft>
-                <a:spcPts val="600"/>
+                <a:spcPts val="800"/>
               </a:spcAft>
             </a:pPr>
             <a:r>
-              <a:rPr sz="1500">
+              <a:rPr sz="2000">
                 <a:solidFill>
                   <a:srgbClr val="3A3A3A"/>
                 </a:solidFill>
@@ -49534,11 +46126,11 @@
           <a:p>
             <a:pPr>
               <a:spcAft>
-                <a:spcPts val="600"/>
+                <a:spcPts val="800"/>
               </a:spcAft>
             </a:pPr>
             <a:r>
-              <a:rPr sz="1500">
+              <a:rPr sz="2000">
                 <a:solidFill>
                   <a:srgbClr val="3A3A3A"/>
                 </a:solidFill>
@@ -49550,11 +46142,11 @@
           <a:p>
             <a:pPr>
               <a:spcAft>
-                <a:spcPts val="600"/>
+                <a:spcPts val="800"/>
               </a:spcAft>
             </a:pPr>
             <a:r>
-              <a:rPr sz="1500">
+              <a:rPr sz="2000">
                 <a:solidFill>
                   <a:srgbClr val="3A3A3A"/>
                 </a:solidFill>
@@ -49849,492 +46441,9 @@
           <a:p>
             <a:pPr algn="r"/>
             <a:r>
-              <a:t>25</a:t>
+              <a:t>24</a:t>
             </a:r>
             <a:endParaRPr lang="en-US"/>
-          </a:p>
-        </p:txBody>
-      </p:sp>
-      <p:sp>
-        <p:nvSpPr>
-          <p:cNvPr id="253" name="Rounded Rectangle 252"/>
-          <p:cNvSpPr/>
-          <p:nvPr/>
-        </p:nvSpPr>
-        <p:spPr>
-          <a:xfrm>
-            <a:off x="7900000" y="3000000"/>
-            <a:ext cx="1600000" cy="700000"/>
-          </a:xfrm>
-          <a:prstGeom prst="roundRect">
-            <a:avLst/>
-          </a:prstGeom>
-          <a:solidFill>
-            <a:srgbClr val="196B24"/>
-          </a:solidFill>
-          <a:ln>
-            <a:noFill/>
-          </a:ln>
-          <a:effectLst/>
-        </p:spPr>
-        <p:style>
-          <a:lnRef idx="1">
-            <a:schemeClr val="accent1"/>
-          </a:lnRef>
-          <a:fillRef idx="3">
-            <a:schemeClr val="accent1"/>
-          </a:fillRef>
-          <a:effectRef idx="2">
-            <a:schemeClr val="accent1"/>
-          </a:effectRef>
-          <a:fontRef idx="minor">
-            <a:schemeClr val="lt1"/>
-          </a:fontRef>
-        </p:style>
-        <p:txBody>
-          <a:bodyPr rtlCol="0" anchor="ctr" wrap="square" lIns="18000" rIns="18000" tIns="9000" bIns="9000"/>
-          <a:lstStyle/>
-          <a:p>
-            <a:pPr algn="ctr"/>
-          </a:p>
-        </p:txBody>
-      </p:sp>
-      <p:sp>
-        <p:nvSpPr>
-          <p:cNvPr id="254" name="Rounded Rectangle 253"/>
-          <p:cNvSpPr/>
-          <p:nvPr/>
-        </p:nvSpPr>
-        <p:spPr>
-          <a:xfrm>
-            <a:off x="8900000" y="2600000"/>
-            <a:ext cx="700000" cy="700000"/>
-          </a:xfrm>
-          <a:prstGeom prst="roundRect">
-            <a:avLst/>
-          </a:prstGeom>
-          <a:solidFill>
-            <a:srgbClr val="196B24"/>
-          </a:solidFill>
-          <a:ln>
-            <a:noFill/>
-          </a:ln>
-          <a:effectLst/>
-        </p:spPr>
-        <p:style>
-          <a:lnRef idx="1">
-            <a:schemeClr val="accent1"/>
-          </a:lnRef>
-          <a:fillRef idx="3">
-            <a:schemeClr val="accent1"/>
-          </a:fillRef>
-          <a:effectRef idx="2">
-            <a:schemeClr val="accent1"/>
-          </a:effectRef>
-          <a:fontRef idx="minor">
-            <a:schemeClr val="lt1"/>
-          </a:fontRef>
-        </p:style>
-        <p:txBody>
-          <a:bodyPr rtlCol="0" anchor="ctr" wrap="square" lIns="18000" rIns="18000" tIns="9000" bIns="9000"/>
-          <a:lstStyle/>
-          <a:p>
-            <a:pPr algn="ctr"/>
-          </a:p>
-        </p:txBody>
-      </p:sp>
-      <p:sp>
-        <p:nvSpPr>
-          <p:cNvPr id="255" name="Oval 254"/>
-          <p:cNvSpPr/>
-          <p:nvPr/>
-        </p:nvSpPr>
-        <p:spPr>
-          <a:xfrm>
-            <a:off x="7850000" y="3600000"/>
-            <a:ext cx="500000" cy="500000"/>
-          </a:xfrm>
-          <a:prstGeom prst="ellipse">
-            <a:avLst/>
-          </a:prstGeom>
-          <a:solidFill>
-            <a:srgbClr val="0E2841"/>
-          </a:solidFill>
-          <a:ln>
-            <a:noFill/>
-          </a:ln>
-          <a:effectLst/>
-        </p:spPr>
-        <p:style>
-          <a:lnRef idx="1">
-            <a:schemeClr val="accent1"/>
-          </a:lnRef>
-          <a:fillRef idx="3">
-            <a:schemeClr val="accent1"/>
-          </a:fillRef>
-          <a:effectRef idx="2">
-            <a:schemeClr val="accent1"/>
-          </a:effectRef>
-          <a:fontRef idx="minor">
-            <a:schemeClr val="lt1"/>
-          </a:fontRef>
-        </p:style>
-        <p:txBody>
-          <a:bodyPr rtlCol="0" anchor="ctr" wrap="square" lIns="18000" rIns="18000" tIns="9000" bIns="9000"/>
-          <a:lstStyle/>
-          <a:p>
-            <a:pPr algn="ctr"/>
-          </a:p>
-        </p:txBody>
-      </p:sp>
-      <p:sp>
-        <p:nvSpPr>
-          <p:cNvPr id="256" name="Oval 255"/>
-          <p:cNvSpPr/>
-          <p:nvPr/>
-        </p:nvSpPr>
-        <p:spPr>
-          <a:xfrm>
-            <a:off x="9250000" y="3600000"/>
-            <a:ext cx="700000" cy="700000"/>
-          </a:xfrm>
-          <a:prstGeom prst="ellipse">
-            <a:avLst/>
-          </a:prstGeom>
-          <a:solidFill>
-            <a:srgbClr val="0E2841"/>
-          </a:solidFill>
-          <a:ln>
-            <a:noFill/>
-          </a:ln>
-          <a:effectLst/>
-        </p:spPr>
-        <p:style>
-          <a:lnRef idx="1">
-            <a:schemeClr val="accent1"/>
-          </a:lnRef>
-          <a:fillRef idx="3">
-            <a:schemeClr val="accent1"/>
-          </a:fillRef>
-          <a:effectRef idx="2">
-            <a:schemeClr val="accent1"/>
-          </a:effectRef>
-          <a:fontRef idx="minor">
-            <a:schemeClr val="lt1"/>
-          </a:fontRef>
-        </p:style>
-        <p:txBody>
-          <a:bodyPr rtlCol="0" anchor="ctr" wrap="square" lIns="18000" rIns="18000" tIns="9000" bIns="9000"/>
-          <a:lstStyle/>
-          <a:p>
-            <a:pPr algn="ctr"/>
-          </a:p>
-        </p:txBody>
-      </p:sp>
-      <p:sp>
-        <p:nvSpPr>
-          <p:cNvPr id="257" name="Oval 256"/>
-          <p:cNvSpPr/>
-          <p:nvPr/>
-        </p:nvSpPr>
-        <p:spPr>
-          <a:xfrm>
-            <a:off x="8100000" y="2250000"/>
-            <a:ext cx="160000" cy="160000"/>
-          </a:xfrm>
-          <a:prstGeom prst="ellipse">
-            <a:avLst/>
-          </a:prstGeom>
-          <a:solidFill>
-            <a:srgbClr val="E97132"/>
-          </a:solidFill>
-          <a:ln>
-            <a:noFill/>
-          </a:ln>
-          <a:effectLst/>
-        </p:spPr>
-        <p:style>
-          <a:lnRef idx="1">
-            <a:schemeClr val="accent1"/>
-          </a:lnRef>
-          <a:fillRef idx="3">
-            <a:schemeClr val="accent1"/>
-          </a:fillRef>
-          <a:effectRef idx="2">
-            <a:schemeClr val="accent1"/>
-          </a:effectRef>
-          <a:fontRef idx="minor">
-            <a:schemeClr val="lt1"/>
-          </a:fontRef>
-        </p:style>
-        <p:txBody>
-          <a:bodyPr rtlCol="0" anchor="ctr" wrap="square" lIns="18000" rIns="18000" tIns="9000" bIns="9000"/>
-          <a:lstStyle/>
-          <a:p>
-            <a:pPr algn="ctr"/>
-          </a:p>
-        </p:txBody>
-      </p:sp>
-      <p:cxnSp>
-        <p:nvCxnSpPr>
-          <p:cNvPr id="258" name="Connector 257"/>
-          <p:cNvCxnSpPr/>
-          <p:nvPr/>
-        </p:nvCxnSpPr>
-        <p:spPr>
-          <a:xfrm>
-            <a:off x="8180000" y="2410000"/>
-            <a:ext cx="0" cy="240000"/>
-          </a:xfrm>
-          <a:prstGeom prst="line">
-            <a:avLst/>
-          </a:prstGeom>
-          <a:ln w="12700">
-            <a:solidFill>
-              <a:srgbClr val="E97132"/>
-            </a:solidFill>
-          </a:ln>
-        </p:spPr>
-        <p:style>
-          <a:lnRef idx="2">
-            <a:schemeClr val="accent1"/>
-          </a:lnRef>
-          <a:fillRef idx="0">
-            <a:schemeClr val="accent1"/>
-          </a:fillRef>
-          <a:effectRef idx="1">
-            <a:schemeClr val="accent1"/>
-          </a:effectRef>
-          <a:fontRef idx="minor">
-            <a:schemeClr val="tx1"/>
-          </a:fontRef>
-        </p:style>
-      </p:cxnSp>
-      <p:sp>
-        <p:nvSpPr>
-          <p:cNvPr id="259" name="Oval 258"/>
-          <p:cNvSpPr/>
-          <p:nvPr/>
-        </p:nvSpPr>
-        <p:spPr>
-          <a:xfrm>
-            <a:off x="8500000" y="2250000"/>
-            <a:ext cx="160000" cy="160000"/>
-          </a:xfrm>
-          <a:prstGeom prst="ellipse">
-            <a:avLst/>
-          </a:prstGeom>
-          <a:solidFill>
-            <a:srgbClr val="E97132"/>
-          </a:solidFill>
-          <a:ln>
-            <a:noFill/>
-          </a:ln>
-          <a:effectLst/>
-        </p:spPr>
-        <p:style>
-          <a:lnRef idx="1">
-            <a:schemeClr val="accent1"/>
-          </a:lnRef>
-          <a:fillRef idx="3">
-            <a:schemeClr val="accent1"/>
-          </a:fillRef>
-          <a:effectRef idx="2">
-            <a:schemeClr val="accent1"/>
-          </a:effectRef>
-          <a:fontRef idx="minor">
-            <a:schemeClr val="lt1"/>
-          </a:fontRef>
-        </p:style>
-        <p:txBody>
-          <a:bodyPr rtlCol="0" anchor="ctr" wrap="square" lIns="18000" rIns="18000" tIns="9000" bIns="9000"/>
-          <a:lstStyle/>
-          <a:p>
-            <a:pPr algn="ctr"/>
-          </a:p>
-        </p:txBody>
-      </p:sp>
-      <p:cxnSp>
-        <p:nvCxnSpPr>
-          <p:cNvPr id="260" name="Connector 259"/>
-          <p:cNvCxnSpPr/>
-          <p:nvPr/>
-        </p:nvCxnSpPr>
-        <p:spPr>
-          <a:xfrm>
-            <a:off x="8580000" y="2410000"/>
-            <a:ext cx="0" cy="240000"/>
-          </a:xfrm>
-          <a:prstGeom prst="line">
-            <a:avLst/>
-          </a:prstGeom>
-          <a:ln w="12700">
-            <a:solidFill>
-              <a:srgbClr val="E97132"/>
-            </a:solidFill>
-          </a:ln>
-        </p:spPr>
-        <p:style>
-          <a:lnRef idx="2">
-            <a:schemeClr val="accent1"/>
-          </a:lnRef>
-          <a:fillRef idx="0">
-            <a:schemeClr val="accent1"/>
-          </a:fillRef>
-          <a:effectRef idx="1">
-            <a:schemeClr val="accent1"/>
-          </a:effectRef>
-          <a:fontRef idx="minor">
-            <a:schemeClr val="tx1"/>
-          </a:fontRef>
-        </p:style>
-      </p:cxnSp>
-      <p:sp>
-        <p:nvSpPr>
-          <p:cNvPr id="261" name="Oval 260"/>
-          <p:cNvSpPr/>
-          <p:nvPr/>
-        </p:nvSpPr>
-        <p:spPr>
-          <a:xfrm>
-            <a:off x="8900000" y="2250000"/>
-            <a:ext cx="160000" cy="160000"/>
-          </a:xfrm>
-          <a:prstGeom prst="ellipse">
-            <a:avLst/>
-          </a:prstGeom>
-          <a:solidFill>
-            <a:srgbClr val="E97132"/>
-          </a:solidFill>
-          <a:ln>
-            <a:noFill/>
-          </a:ln>
-          <a:effectLst/>
-        </p:spPr>
-        <p:style>
-          <a:lnRef idx="1">
-            <a:schemeClr val="accent1"/>
-          </a:lnRef>
-          <a:fillRef idx="3">
-            <a:schemeClr val="accent1"/>
-          </a:fillRef>
-          <a:effectRef idx="2">
-            <a:schemeClr val="accent1"/>
-          </a:effectRef>
-          <a:fontRef idx="minor">
-            <a:schemeClr val="lt1"/>
-          </a:fontRef>
-        </p:style>
-        <p:txBody>
-          <a:bodyPr rtlCol="0" anchor="ctr" wrap="square" lIns="18000" rIns="18000" tIns="9000" bIns="9000"/>
-          <a:lstStyle/>
-          <a:p>
-            <a:pPr algn="ctr"/>
-          </a:p>
-        </p:txBody>
-      </p:sp>
-      <p:cxnSp>
-        <p:nvCxnSpPr>
-          <p:cNvPr id="262" name="Connector 261"/>
-          <p:cNvCxnSpPr/>
-          <p:nvPr/>
-        </p:nvCxnSpPr>
-        <p:spPr>
-          <a:xfrm>
-            <a:off x="8980000" y="2410000"/>
-            <a:ext cx="0" cy="240000"/>
-          </a:xfrm>
-          <a:prstGeom prst="line">
-            <a:avLst/>
-          </a:prstGeom>
-          <a:ln w="12700">
-            <a:solidFill>
-              <a:srgbClr val="E97132"/>
-            </a:solidFill>
-          </a:ln>
-        </p:spPr>
-        <p:style>
-          <a:lnRef idx="2">
-            <a:schemeClr val="accent1"/>
-          </a:lnRef>
-          <a:fillRef idx="0">
-            <a:schemeClr val="accent1"/>
-          </a:fillRef>
-          <a:effectRef idx="1">
-            <a:schemeClr val="accent1"/>
-          </a:effectRef>
-          <a:fontRef idx="minor">
-            <a:schemeClr val="tx1"/>
-          </a:fontRef>
-        </p:style>
-      </p:cxnSp>
-      <p:sp>
-        <p:nvSpPr>
-          <p:cNvPr id="263" name="TextBox 262"/>
-          <p:cNvSpPr txBox="1"/>
-          <p:nvPr/>
-        </p:nvSpPr>
-        <p:spPr>
-          <a:xfrm>
-            <a:off x="7600000" y="4300000"/>
-            <a:ext cx="2600000" cy="300000"/>
-          </a:xfrm>
-          <a:prstGeom prst="rect">
-            <a:avLst/>
-          </a:prstGeom>
-          <a:noFill/>
-        </p:spPr>
-        <p:txBody>
-          <a:bodyPr wrap="square" lIns="0" rIns="0" tIns="0" bIns="0">
-            <a:spAutoFit/>
-          </a:bodyPr>
-          <a:lstStyle/>
-          <a:p>
-            <a:pPr algn="ctr"/>
-            <a:r>
-              <a:rPr sz="1000" b="1" i="0">
-                <a:solidFill>
-                  <a:srgbClr val="3A3A3A"/>
-                </a:solidFill>
-                <a:latin typeface="Roboto Condensed"/>
-              </a:rPr>
-              <a:t>Sensores + IA + Conectividad</a:t>
-            </a:r>
-          </a:p>
-        </p:txBody>
-      </p:sp>
-      <p:sp>
-        <p:nvSpPr>
-          <p:cNvPr id="264" name="TextBox 263"/>
-          <p:cNvSpPr txBox="1"/>
-          <p:nvPr/>
-        </p:nvSpPr>
-        <p:spPr>
-          <a:xfrm>
-            <a:off x="7600000" y="4650000"/>
-            <a:ext cx="2600000" cy="300000"/>
-          </a:xfrm>
-          <a:prstGeom prst="rect">
-            <a:avLst/>
-          </a:prstGeom>
-          <a:noFill/>
-        </p:spPr>
-        <p:txBody>
-          <a:bodyPr wrap="square" lIns="0" rIns="0" tIns="0" bIns="0">
-            <a:spAutoFit/>
-          </a:bodyPr>
-          <a:lstStyle/>
-          <a:p>
-            <a:pPr algn="ctr"/>
-            <a:r>
-              <a:rPr sz="1000" b="0" i="1">
-                <a:solidFill>
-                  <a:srgbClr val="3A3A3A"/>
-                </a:solidFill>
-                <a:latin typeface="Roboto Condensed"/>
-              </a:rPr>
-              <a:t>Referencial: maquinaria agrícola conectada (Agricultura 4.0)</a:t>
-            </a:r>
           </a:p>
         </p:txBody>
       </p:sp>
@@ -50346,7 +46455,7 @@
 </p:sld>
 </file>
 
-<file path=ppt/slides/slide26.xml><?xml version="1.0" encoding="utf-8"?>
+<file path=ppt/slides/slide25.xml><?xml version="1.0" encoding="utf-8"?>
 <p:sld xmlns:a="http://schemas.openxmlformats.org/drawingml/2006/main" xmlns:p="http://schemas.openxmlformats.org/presentationml/2006/main" xmlns:r="http://schemas.openxmlformats.org/officeDocument/2006/relationships">
   <p:cSld>
     <p:spTree>
@@ -50855,7 +46964,7 @@
           <a:p>
             <a:pPr algn="r"/>
             <a:r>
-              <a:t>26</a:t>
+              <a:t>25</a:t>
             </a:r>
             <a:endParaRPr lang="en-US"/>
           </a:p>
@@ -50869,7 +46978,7 @@
 </p:sld>
 </file>
 
-<file path=ppt/slides/slide27.xml><?xml version="1.0" encoding="utf-8"?>
+<file path=ppt/slides/slide26.xml><?xml version="1.0" encoding="utf-8"?>
 <p:sld xmlns:a="http://schemas.openxmlformats.org/drawingml/2006/main" xmlns:p="http://schemas.openxmlformats.org/presentationml/2006/main" xmlns:r="http://schemas.openxmlformats.org/officeDocument/2006/relationships">
   <p:cSld>
     <p:spTree>
@@ -51266,7 +47375,7 @@
           <a:p>
             <a:pPr algn="r"/>
             <a:r>
-              <a:t>27</a:t>
+              <a:t>26</a:t>
             </a:r>
             <a:endParaRPr lang="en-US"/>
           </a:p>
@@ -51280,7 +47389,7 @@
 </p:sld>
 </file>
 
-<file path=ppt/slides/slide28.xml><?xml version="1.0" encoding="utf-8"?>
+<file path=ppt/slides/slide27.xml><?xml version="1.0" encoding="utf-8"?>
 <p:sld xmlns:a="http://schemas.openxmlformats.org/drawingml/2006/main" xmlns:p="http://schemas.openxmlformats.org/presentationml/2006/main" xmlns:r="http://schemas.openxmlformats.org/officeDocument/2006/relationships">
   <p:cSld>
     <p:spTree>
@@ -51352,7 +47461,7 @@
         <p:spPr>
           <a:xfrm>
             <a:off x="889446" y="2014379"/>
-            <a:ext cx="6300000" cy="3413760"/>
+            <a:ext cx="9385264" cy="3413760"/>
           </a:xfrm>
           <a:prstGeom prst="rect">
             <a:avLst/>
@@ -51376,12 +47485,12 @@
                 <a:spcPts val="0"/>
               </a:spcBef>
               <a:spcAft>
-                <a:spcPts val="600"/>
+                <a:spcPts val="800"/>
               </a:spcAft>
               <a:buNone/>
             </a:pPr>
             <a:r>
-              <a:rPr sz="1500">
+              <a:rPr sz="2000">
                 <a:solidFill>
                   <a:srgbClr val="3A3A3A"/>
                 </a:solidFill>
@@ -51394,11 +47503,11 @@
           <a:p>
             <a:pPr>
               <a:spcAft>
-                <a:spcPts val="600"/>
+                <a:spcPts val="800"/>
               </a:spcAft>
             </a:pPr>
             <a:r>
-              <a:rPr sz="1500">
+              <a:rPr sz="2000">
                 <a:solidFill>
                   <a:srgbClr val="3A3A3A"/>
                 </a:solidFill>
@@ -51410,11 +47519,11 @@
           <a:p>
             <a:pPr>
               <a:spcAft>
-                <a:spcPts val="600"/>
+                <a:spcPts val="800"/>
               </a:spcAft>
             </a:pPr>
             <a:r>
-              <a:rPr sz="1500">
+              <a:rPr sz="2000">
                 <a:solidFill>
                   <a:srgbClr val="3A3A3A"/>
                 </a:solidFill>
@@ -51426,11 +47535,11 @@
           <a:p>
             <a:pPr>
               <a:spcAft>
-                <a:spcPts val="600"/>
+                <a:spcPts val="800"/>
               </a:spcAft>
             </a:pPr>
             <a:r>
-              <a:rPr sz="1500">
+              <a:rPr sz="2000">
                 <a:solidFill>
                   <a:srgbClr val="3A3A3A"/>
                 </a:solidFill>
@@ -51442,11 +47551,11 @@
           <a:p>
             <a:pPr>
               <a:spcAft>
-                <a:spcPts val="600"/>
+                <a:spcPts val="800"/>
               </a:spcAft>
             </a:pPr>
             <a:r>
-              <a:rPr sz="1500">
+              <a:rPr sz="2000">
                 <a:solidFill>
                   <a:srgbClr val="3A3A3A"/>
                 </a:solidFill>
@@ -51741,364 +47850,9 @@
           <a:p>
             <a:pPr algn="r"/>
             <a:r>
-              <a:t>28</a:t>
+              <a:t>27</a:t>
             </a:r>
             <a:endParaRPr lang="en-US"/>
-          </a:p>
-        </p:txBody>
-      </p:sp>
-      <p:sp>
-        <p:nvSpPr>
-          <p:cNvPr id="253" name="Rounded Rectangle 252"/>
-          <p:cNvSpPr/>
-          <p:nvPr/>
-        </p:nvSpPr>
-        <p:spPr>
-          <a:xfrm>
-            <a:off x="7600000" y="2600000"/>
-            <a:ext cx="750000" cy="750000"/>
-          </a:xfrm>
-          <a:prstGeom prst="roundRect">
-            <a:avLst/>
-          </a:prstGeom>
-          <a:solidFill>
-            <a:srgbClr val="0E2841"/>
-          </a:solidFill>
-          <a:ln>
-            <a:noFill/>
-          </a:ln>
-          <a:effectLst/>
-        </p:spPr>
-        <p:style>
-          <a:lnRef idx="1">
-            <a:schemeClr val="accent1"/>
-          </a:lnRef>
-          <a:fillRef idx="3">
-            <a:schemeClr val="accent1"/>
-          </a:fillRef>
-          <a:effectRef idx="2">
-            <a:schemeClr val="accent1"/>
-          </a:effectRef>
-          <a:fontRef idx="minor">
-            <a:schemeClr val="lt1"/>
-          </a:fontRef>
-        </p:style>
-        <p:txBody>
-          <a:bodyPr rtlCol="0" anchor="ctr" wrap="square" lIns="18000" rIns="18000" tIns="9000" bIns="9000"/>
-          <a:lstStyle/>
-          <a:p>
-            <a:pPr algn="ctr"/>
-            <a:r>
-              <a:rPr sz="900" b="1">
-                <a:solidFill>
-                  <a:srgbClr val="FFFFFF"/>
-                </a:solidFill>
-                <a:latin typeface="Roboto Condensed"/>
-              </a:rPr>
-              <a:t>Bloque 1</a:t>
-            </a:r>
-          </a:p>
-        </p:txBody>
-      </p:sp>
-      <p:sp>
-        <p:nvSpPr>
-          <p:cNvPr id="254" name="Rounded Rectangle 253"/>
-          <p:cNvSpPr/>
-          <p:nvPr/>
-        </p:nvSpPr>
-        <p:spPr>
-          <a:xfrm>
-            <a:off x="8610000" y="2600000"/>
-            <a:ext cx="750000" cy="750000"/>
-          </a:xfrm>
-          <a:prstGeom prst="roundRect">
-            <a:avLst/>
-          </a:prstGeom>
-          <a:solidFill>
-            <a:srgbClr val="0E2841"/>
-          </a:solidFill>
-          <a:ln>
-            <a:noFill/>
-          </a:ln>
-          <a:effectLst/>
-        </p:spPr>
-        <p:style>
-          <a:lnRef idx="1">
-            <a:schemeClr val="accent1"/>
-          </a:lnRef>
-          <a:fillRef idx="3">
-            <a:schemeClr val="accent1"/>
-          </a:fillRef>
-          <a:effectRef idx="2">
-            <a:schemeClr val="accent1"/>
-          </a:effectRef>
-          <a:fontRef idx="minor">
-            <a:schemeClr val="lt1"/>
-          </a:fontRef>
-        </p:style>
-        <p:txBody>
-          <a:bodyPr rtlCol="0" anchor="ctr" wrap="square" lIns="18000" rIns="18000" tIns="9000" bIns="9000"/>
-          <a:lstStyle/>
-          <a:p>
-            <a:pPr algn="ctr"/>
-            <a:r>
-              <a:rPr sz="900" b="1">
-                <a:solidFill>
-                  <a:srgbClr val="FFFFFF"/>
-                </a:solidFill>
-                <a:latin typeface="Roboto Condensed"/>
-              </a:rPr>
-              <a:t>Bloque 2</a:t>
-            </a:r>
-          </a:p>
-        </p:txBody>
-      </p:sp>
-      <p:cxnSp>
-        <p:nvCxnSpPr>
-          <p:cNvPr id="255" name="Connector 254"/>
-          <p:cNvCxnSpPr/>
-          <p:nvPr/>
-        </p:nvCxnSpPr>
-        <p:spPr>
-          <a:xfrm>
-            <a:off x="8350000" y="2975000"/>
-            <a:ext cx="260000" cy="0"/>
-          </a:xfrm>
-          <a:prstGeom prst="line">
-            <a:avLst/>
-          </a:prstGeom>
-          <a:ln w="19050">
-            <a:solidFill>
-              <a:srgbClr val="E97132"/>
-            </a:solidFill>
-            <a:tailEnd type="triangle" w="med" len="med"/>
-          </a:ln>
-        </p:spPr>
-        <p:style>
-          <a:lnRef idx="2">
-            <a:schemeClr val="accent1"/>
-          </a:lnRef>
-          <a:fillRef idx="0">
-            <a:schemeClr val="accent1"/>
-          </a:fillRef>
-          <a:effectRef idx="1">
-            <a:schemeClr val="accent1"/>
-          </a:effectRef>
-          <a:fontRef idx="minor">
-            <a:schemeClr val="tx1"/>
-          </a:fontRef>
-        </p:style>
-      </p:cxnSp>
-      <p:sp>
-        <p:nvSpPr>
-          <p:cNvPr id="256" name="Rounded Rectangle 255"/>
-          <p:cNvSpPr/>
-          <p:nvPr/>
-        </p:nvSpPr>
-        <p:spPr>
-          <a:xfrm>
-            <a:off x="9620000" y="2600000"/>
-            <a:ext cx="750000" cy="750000"/>
-          </a:xfrm>
-          <a:prstGeom prst="roundRect">
-            <a:avLst/>
-          </a:prstGeom>
-          <a:solidFill>
-            <a:srgbClr val="0E2841"/>
-          </a:solidFill>
-          <a:ln>
-            <a:noFill/>
-          </a:ln>
-          <a:effectLst/>
-        </p:spPr>
-        <p:style>
-          <a:lnRef idx="1">
-            <a:schemeClr val="accent1"/>
-          </a:lnRef>
-          <a:fillRef idx="3">
-            <a:schemeClr val="accent1"/>
-          </a:fillRef>
-          <a:effectRef idx="2">
-            <a:schemeClr val="accent1"/>
-          </a:effectRef>
-          <a:fontRef idx="minor">
-            <a:schemeClr val="lt1"/>
-          </a:fontRef>
-        </p:style>
-        <p:txBody>
-          <a:bodyPr rtlCol="0" anchor="ctr" wrap="square" lIns="18000" rIns="18000" tIns="9000" bIns="9000"/>
-          <a:lstStyle/>
-          <a:p>
-            <a:pPr algn="ctr"/>
-            <a:r>
-              <a:rPr sz="900" b="1">
-                <a:solidFill>
-                  <a:srgbClr val="FFFFFF"/>
-                </a:solidFill>
-                <a:latin typeface="Roboto Condensed"/>
-              </a:rPr>
-              <a:t>Bloque 3</a:t>
-            </a:r>
-          </a:p>
-        </p:txBody>
-      </p:sp>
-      <p:cxnSp>
-        <p:nvCxnSpPr>
-          <p:cNvPr id="257" name="Connector 256"/>
-          <p:cNvCxnSpPr/>
-          <p:nvPr/>
-        </p:nvCxnSpPr>
-        <p:spPr>
-          <a:xfrm>
-            <a:off x="9360000" y="2975000"/>
-            <a:ext cx="260000" cy="0"/>
-          </a:xfrm>
-          <a:prstGeom prst="line">
-            <a:avLst/>
-          </a:prstGeom>
-          <a:ln w="19050">
-            <a:solidFill>
-              <a:srgbClr val="E97132"/>
-            </a:solidFill>
-            <a:tailEnd type="triangle" w="med" len="med"/>
-          </a:ln>
-        </p:spPr>
-        <p:style>
-          <a:lnRef idx="2">
-            <a:schemeClr val="accent1"/>
-          </a:lnRef>
-          <a:fillRef idx="0">
-            <a:schemeClr val="accent1"/>
-          </a:fillRef>
-          <a:effectRef idx="1">
-            <a:schemeClr val="accent1"/>
-          </a:effectRef>
-          <a:fontRef idx="minor">
-            <a:schemeClr val="tx1"/>
-          </a:fontRef>
-        </p:style>
-      </p:cxnSp>
-      <p:sp>
-        <p:nvSpPr>
-          <p:cNvPr id="258" name="Rounded Rectangle 257"/>
-          <p:cNvSpPr/>
-          <p:nvPr/>
-        </p:nvSpPr>
-        <p:spPr>
-          <a:xfrm>
-            <a:off x="10630000" y="2600000"/>
-            <a:ext cx="750000" cy="750000"/>
-          </a:xfrm>
-          <a:prstGeom prst="roundRect">
-            <a:avLst/>
-          </a:prstGeom>
-          <a:solidFill>
-            <a:srgbClr val="0E2841"/>
-          </a:solidFill>
-          <a:ln>
-            <a:noFill/>
-          </a:ln>
-          <a:effectLst/>
-        </p:spPr>
-        <p:style>
-          <a:lnRef idx="1">
-            <a:schemeClr val="accent1"/>
-          </a:lnRef>
-          <a:fillRef idx="3">
-            <a:schemeClr val="accent1"/>
-          </a:fillRef>
-          <a:effectRef idx="2">
-            <a:schemeClr val="accent1"/>
-          </a:effectRef>
-          <a:fontRef idx="minor">
-            <a:schemeClr val="lt1"/>
-          </a:fontRef>
-        </p:style>
-        <p:txBody>
-          <a:bodyPr rtlCol="0" anchor="ctr" wrap="square" lIns="18000" rIns="18000" tIns="9000" bIns="9000"/>
-          <a:lstStyle/>
-          <a:p>
-            <a:pPr algn="ctr"/>
-            <a:r>
-              <a:rPr sz="900" b="1">
-                <a:solidFill>
-                  <a:srgbClr val="FFFFFF"/>
-                </a:solidFill>
-                <a:latin typeface="Roboto Condensed"/>
-              </a:rPr>
-              <a:t>Bloque 4</a:t>
-            </a:r>
-          </a:p>
-        </p:txBody>
-      </p:sp>
-      <p:cxnSp>
-        <p:nvCxnSpPr>
-          <p:cNvPr id="259" name="Connector 258"/>
-          <p:cNvCxnSpPr/>
-          <p:nvPr/>
-        </p:nvCxnSpPr>
-        <p:spPr>
-          <a:xfrm>
-            <a:off x="10370000" y="2975000"/>
-            <a:ext cx="260000" cy="0"/>
-          </a:xfrm>
-          <a:prstGeom prst="line">
-            <a:avLst/>
-          </a:prstGeom>
-          <a:ln w="19050">
-            <a:solidFill>
-              <a:srgbClr val="E97132"/>
-            </a:solidFill>
-            <a:tailEnd type="triangle" w="med" len="med"/>
-          </a:ln>
-        </p:spPr>
-        <p:style>
-          <a:lnRef idx="2">
-            <a:schemeClr val="accent1"/>
-          </a:lnRef>
-          <a:fillRef idx="0">
-            <a:schemeClr val="accent1"/>
-          </a:fillRef>
-          <a:effectRef idx="1">
-            <a:schemeClr val="accent1"/>
-          </a:effectRef>
-          <a:fontRef idx="minor">
-            <a:schemeClr val="tx1"/>
-          </a:fontRef>
-        </p:style>
-      </p:cxnSp>
-      <p:sp>
-        <p:nvSpPr>
-          <p:cNvPr id="260" name="TextBox 259"/>
-          <p:cNvSpPr txBox="1"/>
-          <p:nvPr/>
-        </p:nvSpPr>
-        <p:spPr>
-          <a:xfrm>
-            <a:off x="7600000" y="3650000"/>
-            <a:ext cx="3400000" cy="300000"/>
-          </a:xfrm>
-          <a:prstGeom prst="rect">
-            <a:avLst/>
-          </a:prstGeom>
-          <a:noFill/>
-        </p:spPr>
-        <p:txBody>
-          <a:bodyPr wrap="square" lIns="0" rIns="0" tIns="0" bIns="0">
-            <a:spAutoFit/>
-          </a:bodyPr>
-          <a:lstStyle/>
-          <a:p>
-            <a:pPr algn="ctr"/>
-            <a:r>
-              <a:rPr sz="1000" b="0" i="1">
-                <a:solidFill>
-                  <a:srgbClr val="3A3A3A"/>
-                </a:solidFill>
-                <a:latin typeface="Roboto Condensed"/>
-              </a:rPr>
-              <a:t>Referencial: cada bloque se encadena criptográficamente al anterior</a:t>
-            </a:r>
           </a:p>
         </p:txBody>
       </p:sp>
@@ -52110,7 +47864,7 @@
 </p:sld>
 </file>
 
-<file path=ppt/slides/slide29.xml><?xml version="1.0" encoding="utf-8"?>
+<file path=ppt/slides/slide28.xml><?xml version="1.0" encoding="utf-8"?>
 <p:sld xmlns:a="http://schemas.openxmlformats.org/drawingml/2006/main" xmlns:p="http://schemas.openxmlformats.org/presentationml/2006/main" xmlns:r="http://schemas.openxmlformats.org/officeDocument/2006/relationships">
   <p:cSld>
     <p:spTree>
@@ -52571,7 +48325,7 @@
           <a:p>
             <a:pPr algn="r"/>
             <a:r>
-              <a:t>29</a:t>
+              <a:t>28</a:t>
             </a:r>
             <a:endParaRPr lang="en-US"/>
           </a:p>
@@ -52585,482 +48339,7 @@
 </p:sld>
 </file>
 
-<file path=ppt/slides/slide3.xml><?xml version="1.0" encoding="utf-8"?>
-<p:sld xmlns:a="http://schemas.openxmlformats.org/drawingml/2006/main" xmlns:p="http://schemas.openxmlformats.org/presentationml/2006/main" xmlns:r="http://schemas.openxmlformats.org/officeDocument/2006/relationships">
-  <p:cSld>
-    <p:spTree>
-      <p:nvGrpSpPr>
-        <p:cNvPr id="1" name=""/>
-        <p:cNvGrpSpPr/>
-        <p:nvPr/>
-      </p:nvGrpSpPr>
-      <p:grpSpPr/>
-      <p:sp>
-        <p:nvSpPr>
-          <p:cNvPr id="240" name="Google Shape;240;p38"/>
-          <p:cNvSpPr/>
-          <p:nvPr/>
-        </p:nvSpPr>
-        <p:spPr>
-          <a:xfrm>
-            <a:off x="853440" y="790892"/>
-            <a:ext cx="9055100" cy="731520"/>
-          </a:xfrm>
-          <a:prstGeom prst="rect">
-            <a:avLst/>
-          </a:prstGeom>
-          <a:noFill/>
-          <a:ln>
-            <a:noFill/>
-          </a:ln>
-        </p:spPr>
-        <p:txBody>
-          <a:bodyPr spcFirstLastPara="1" wrap="square" lIns="91425" tIns="45700" rIns="91425" bIns="45700" anchor="ctr" anchorCtr="0">
-            <a:noAutofit/>
-          </a:bodyPr>
-          <a:lstStyle/>
-          <a:p>
-            <a:pPr marL="0" marR="0" lvl="0" indent="0" algn="l" rtl="0">
-              <a:lnSpc>
-                <a:spcPct val="100000"/>
-              </a:lnSpc>
-              <a:spcBef>
-                <a:spcPts val="0"/>
-              </a:spcBef>
-              <a:spcAft>
-                <a:spcPts val="0"/>
-              </a:spcAft>
-              <a:buNone/>
-            </a:pPr>
-            <a:r>
-              <a:rPr lang="en-US" sz="4400" dirty="0">
-                <a:solidFill>
-                  <a:srgbClr val="3A3A3A"/>
-                </a:solidFill>
-                <a:latin typeface="Roboto Condensed Medium"/>
-                <a:ea typeface="Roboto Condensed Medium"/>
-                <a:cs typeface="Roboto Condensed Medium"/>
-                <a:sym typeface="Roboto Condensed Medium"/>
-              </a:rPr>
-              <a:t>Objetivo del módulo</a:t>
-            </a:r>
-            <a:endParaRPr dirty="0"/>
-          </a:p>
-        </p:txBody>
-      </p:sp>
-      <p:sp>
-        <p:nvSpPr>
-          <p:cNvPr id="241" name="Google Shape;241;p38"/>
-          <p:cNvSpPr/>
-          <p:nvPr/>
-        </p:nvSpPr>
-        <p:spPr>
-          <a:xfrm>
-            <a:off x="889446" y="2014379"/>
-            <a:ext cx="9385264" cy="3413760"/>
-          </a:xfrm>
-          <a:prstGeom prst="rect">
-            <a:avLst/>
-          </a:prstGeom>
-          <a:noFill/>
-          <a:ln>
-            <a:noFill/>
-          </a:ln>
-        </p:spPr>
-        <p:txBody>
-          <a:bodyPr spcFirstLastPara="1" wrap="square" lIns="91425" tIns="45700" rIns="91425" bIns="45700" anchor="t" anchorCtr="0">
-            <a:noAutofit/>
-          </a:bodyPr>
-          <a:lstStyle/>
-          <a:p>
-            <a:pPr marL="0" marR="0" indent="0" algn="l" rtl="0">
-              <a:lnSpc>
-                <a:spcPct val="100000"/>
-              </a:lnSpc>
-              <a:spcBef>
-                <a:spcPts val="0"/>
-              </a:spcBef>
-              <a:spcAft>
-                <a:spcPts val="800"/>
-              </a:spcAft>
-              <a:buNone/>
-            </a:pPr>
-            <a:r>
-              <a:rPr sz="2000">
-                <a:solidFill>
-                  <a:srgbClr val="3A3A3A"/>
-                </a:solidFill>
-                <a:latin typeface="Roboto Condensed"/>
-              </a:rPr>
-              <a:t>• Analizar el proceso de transformación digital en las organizaciones, integrando inteligencia artificial con otras tecnologías emergentes</a:t>
-            </a:r>
-            <a:endParaRPr dirty="0"/>
-          </a:p>
-          <a:p>
-            <a:pPr>
-              <a:spcAft>
-                <a:spcPts val="800"/>
-              </a:spcAft>
-            </a:pPr>
-            <a:r>
-              <a:rPr sz="2000">
-                <a:solidFill>
-                  <a:srgbClr val="3A3A3A"/>
-                </a:solidFill>
-                <a:latin typeface="Roboto Condensed"/>
-              </a:rPr>
-              <a:t>• Examinar estrategias para implementar cambios digitales que mejoren la eficiencia operativa y la competitividad</a:t>
-            </a:r>
-          </a:p>
-          <a:p>
-            <a:pPr lvl="1">
-              <a:spcAft>
-                <a:spcPts val="400"/>
-              </a:spcAft>
-            </a:pPr>
-            <a:r>
-              <a:rPr sz="1800">
-                <a:solidFill>
-                  <a:srgbClr val="3A3A3A"/>
-                </a:solidFill>
-                <a:latin typeface="Roboto Condensed"/>
-              </a:rPr>
-              <a:t>– Clase 1 (7 jul): digitalización, IA, IoT y Blockchain</a:t>
-            </a:r>
-          </a:p>
-          <a:p>
-            <a:pPr lvl="1">
-              <a:spcAft>
-                <a:spcPts val="400"/>
-              </a:spcAft>
-            </a:pPr>
-            <a:r>
-              <a:rPr sz="1800">
-                <a:solidFill>
-                  <a:srgbClr val="3A3A3A"/>
-                </a:solidFill>
-                <a:latin typeface="Roboto Condensed"/>
-              </a:rPr>
-              <a:t>– Clase 2 (14 jul): Big Data/BI, Cloud, Automatización y Ciberseguridad</a:t>
-            </a:r>
-          </a:p>
-          <a:p>
-            <a:pPr lvl="1">
-              <a:spcAft>
-                <a:spcPts val="400"/>
-              </a:spcAft>
-            </a:pPr>
-            <a:r>
-              <a:rPr sz="1800">
-                <a:solidFill>
-                  <a:srgbClr val="3A3A3A"/>
-                </a:solidFill>
-                <a:latin typeface="Roboto Condensed"/>
-              </a:rPr>
-              <a:t>– Evaluación del módulo: lunes 21 de julio</a:t>
-            </a:r>
-          </a:p>
-        </p:txBody>
-      </p:sp>
-      <p:pic>
-        <p:nvPicPr>
-          <p:cNvPr id="252" name="Google Shape;252;p38"/>
-          <p:cNvPicPr preferRelativeResize="0"/>
-          <p:nvPr/>
-        </p:nvPicPr>
-        <p:blipFill rotWithShape="1">
-          <a:blip r:embed="rId2">
-            <a:alphaModFix/>
-          </a:blip>
-          <a:srcRect/>
-          <a:stretch/>
-        </p:blipFill>
-        <p:spPr>
-          <a:xfrm>
-            <a:off x="10120580" y="230187"/>
-            <a:ext cx="1866726" cy="590083"/>
-          </a:xfrm>
-          <a:prstGeom prst="rect">
-            <a:avLst/>
-          </a:prstGeom>
-          <a:noFill/>
-          <a:ln>
-            <a:noFill/>
-          </a:ln>
-        </p:spPr>
-      </p:pic>
-      <p:sp>
-        <p:nvSpPr>
-          <p:cNvPr id="2" name="Marcador de número de diapositiva 2">
-            <a:extLst>
-              <a:ext uri="{FF2B5EF4-FFF2-40B4-BE49-F238E27FC236}">
-                <a16:creationId xmlns:a16="http://schemas.microsoft.com/office/drawing/2014/main" id="{9E2EBC40-EC40-BDF2-F68A-0BA88B712A11}"/>
-              </a:ext>
-            </a:extLst>
-          </p:cNvPr>
-          <p:cNvSpPr txBox="1">
-            <a:spLocks/>
-          </p:cNvSpPr>
-          <p:nvPr/>
-        </p:nvSpPr>
-        <p:spPr>
-          <a:xfrm>
-            <a:off x="8610600" y="6356351"/>
-            <a:ext cx="2743200" cy="365125"/>
-          </a:xfrm>
-          <a:prstGeom prst="rect">
-            <a:avLst/>
-          </a:prstGeom>
-        </p:spPr>
-        <p:txBody>
-          <a:bodyPr/>
-          <a:lstStyle>
-            <a:defPPr marR="0" lvl="0" algn="l" rtl="0">
-              <a:lnSpc>
-                <a:spcPct val="100000"/>
-              </a:lnSpc>
-              <a:spcBef>
-                <a:spcPts val="0"/>
-              </a:spcBef>
-              <a:spcAft>
-                <a:spcPts val="0"/>
-              </a:spcAft>
-            </a:defPPr>
-            <a:lvl1pPr marR="0" lvl="0" algn="l" rtl="0">
-              <a:lnSpc>
-                <a:spcPct val="100000"/>
-              </a:lnSpc>
-              <a:spcBef>
-                <a:spcPts val="0"/>
-              </a:spcBef>
-              <a:spcAft>
-                <a:spcPts val="0"/>
-              </a:spcAft>
-              <a:buClr>
-                <a:srgbClr val="000000"/>
-              </a:buClr>
-              <a:buFont typeface="Arial"/>
-              <a:defRPr sz="1400" b="0" i="0" u="none" strike="noStrike" cap="none">
-                <a:solidFill>
-                  <a:srgbClr val="000000"/>
-                </a:solidFill>
-                <a:latin typeface="Arial"/>
-                <a:ea typeface="Arial"/>
-                <a:cs typeface="Arial"/>
-                <a:sym typeface="Arial"/>
-              </a:defRPr>
-            </a:lvl1pPr>
-            <a:lvl2pPr marR="0" lvl="1" algn="l" rtl="0">
-              <a:lnSpc>
-                <a:spcPct val="100000"/>
-              </a:lnSpc>
-              <a:spcBef>
-                <a:spcPts val="0"/>
-              </a:spcBef>
-              <a:spcAft>
-                <a:spcPts val="0"/>
-              </a:spcAft>
-              <a:buClr>
-                <a:srgbClr val="000000"/>
-              </a:buClr>
-              <a:buFont typeface="Arial"/>
-              <a:defRPr sz="1400" b="0" i="0" u="none" strike="noStrike" cap="none">
-                <a:solidFill>
-                  <a:srgbClr val="000000"/>
-                </a:solidFill>
-                <a:latin typeface="Arial"/>
-                <a:ea typeface="Arial"/>
-                <a:cs typeface="Arial"/>
-                <a:sym typeface="Arial"/>
-              </a:defRPr>
-            </a:lvl2pPr>
-            <a:lvl3pPr marR="0" lvl="2" algn="l" rtl="0">
-              <a:lnSpc>
-                <a:spcPct val="100000"/>
-              </a:lnSpc>
-              <a:spcBef>
-                <a:spcPts val="0"/>
-              </a:spcBef>
-              <a:spcAft>
-                <a:spcPts val="0"/>
-              </a:spcAft>
-              <a:buClr>
-                <a:srgbClr val="000000"/>
-              </a:buClr>
-              <a:buFont typeface="Arial"/>
-              <a:defRPr sz="1400" b="0" i="0" u="none" strike="noStrike" cap="none">
-                <a:solidFill>
-                  <a:srgbClr val="000000"/>
-                </a:solidFill>
-                <a:latin typeface="Arial"/>
-                <a:ea typeface="Arial"/>
-                <a:cs typeface="Arial"/>
-                <a:sym typeface="Arial"/>
-              </a:defRPr>
-            </a:lvl3pPr>
-            <a:lvl4pPr marR="0" lvl="3" algn="l" rtl="0">
-              <a:lnSpc>
-                <a:spcPct val="100000"/>
-              </a:lnSpc>
-              <a:spcBef>
-                <a:spcPts val="0"/>
-              </a:spcBef>
-              <a:spcAft>
-                <a:spcPts val="0"/>
-              </a:spcAft>
-              <a:buClr>
-                <a:srgbClr val="000000"/>
-              </a:buClr>
-              <a:buFont typeface="Arial"/>
-              <a:defRPr sz="1400" b="0" i="0" u="none" strike="noStrike" cap="none">
-                <a:solidFill>
-                  <a:srgbClr val="000000"/>
-                </a:solidFill>
-                <a:latin typeface="Arial"/>
-                <a:ea typeface="Arial"/>
-                <a:cs typeface="Arial"/>
-                <a:sym typeface="Arial"/>
-              </a:defRPr>
-            </a:lvl4pPr>
-            <a:lvl5pPr marR="0" lvl="4" algn="l" rtl="0">
-              <a:lnSpc>
-                <a:spcPct val="100000"/>
-              </a:lnSpc>
-              <a:spcBef>
-                <a:spcPts val="0"/>
-              </a:spcBef>
-              <a:spcAft>
-                <a:spcPts val="0"/>
-              </a:spcAft>
-              <a:buClr>
-                <a:srgbClr val="000000"/>
-              </a:buClr>
-              <a:buFont typeface="Arial"/>
-              <a:defRPr sz="1400" b="0" i="0" u="none" strike="noStrike" cap="none">
-                <a:solidFill>
-                  <a:srgbClr val="000000"/>
-                </a:solidFill>
-                <a:latin typeface="Arial"/>
-                <a:ea typeface="Arial"/>
-                <a:cs typeface="Arial"/>
-                <a:sym typeface="Arial"/>
-              </a:defRPr>
-            </a:lvl5pPr>
-            <a:lvl6pPr marR="0" lvl="5" algn="l" rtl="0">
-              <a:lnSpc>
-                <a:spcPct val="100000"/>
-              </a:lnSpc>
-              <a:spcBef>
-                <a:spcPts val="0"/>
-              </a:spcBef>
-              <a:spcAft>
-                <a:spcPts val="0"/>
-              </a:spcAft>
-              <a:buClr>
-                <a:srgbClr val="000000"/>
-              </a:buClr>
-              <a:buFont typeface="Arial"/>
-              <a:defRPr sz="1400" b="0" i="0" u="none" strike="noStrike" cap="none">
-                <a:solidFill>
-                  <a:srgbClr val="000000"/>
-                </a:solidFill>
-                <a:latin typeface="Arial"/>
-                <a:ea typeface="Arial"/>
-                <a:cs typeface="Arial"/>
-                <a:sym typeface="Arial"/>
-              </a:defRPr>
-            </a:lvl6pPr>
-            <a:lvl7pPr marR="0" lvl="6" algn="l" rtl="0">
-              <a:lnSpc>
-                <a:spcPct val="100000"/>
-              </a:lnSpc>
-              <a:spcBef>
-                <a:spcPts val="0"/>
-              </a:spcBef>
-              <a:spcAft>
-                <a:spcPts val="0"/>
-              </a:spcAft>
-              <a:buClr>
-                <a:srgbClr val="000000"/>
-              </a:buClr>
-              <a:buFont typeface="Arial"/>
-              <a:defRPr sz="1400" b="0" i="0" u="none" strike="noStrike" cap="none">
-                <a:solidFill>
-                  <a:srgbClr val="000000"/>
-                </a:solidFill>
-                <a:latin typeface="Arial"/>
-                <a:ea typeface="Arial"/>
-                <a:cs typeface="Arial"/>
-                <a:sym typeface="Arial"/>
-              </a:defRPr>
-            </a:lvl7pPr>
-            <a:lvl8pPr marR="0" lvl="7" algn="l" rtl="0">
-              <a:lnSpc>
-                <a:spcPct val="100000"/>
-              </a:lnSpc>
-              <a:spcBef>
-                <a:spcPts val="0"/>
-              </a:spcBef>
-              <a:spcAft>
-                <a:spcPts val="0"/>
-              </a:spcAft>
-              <a:buClr>
-                <a:srgbClr val="000000"/>
-              </a:buClr>
-              <a:buFont typeface="Arial"/>
-              <a:defRPr sz="1400" b="0" i="0" u="none" strike="noStrike" cap="none">
-                <a:solidFill>
-                  <a:srgbClr val="000000"/>
-                </a:solidFill>
-                <a:latin typeface="Arial"/>
-                <a:ea typeface="Arial"/>
-                <a:cs typeface="Arial"/>
-                <a:sym typeface="Arial"/>
-              </a:defRPr>
-            </a:lvl8pPr>
-            <a:lvl9pPr marR="0" lvl="8" algn="l" rtl="0">
-              <a:lnSpc>
-                <a:spcPct val="100000"/>
-              </a:lnSpc>
-              <a:spcBef>
-                <a:spcPts val="0"/>
-              </a:spcBef>
-              <a:spcAft>
-                <a:spcPts val="0"/>
-              </a:spcAft>
-              <a:buClr>
-                <a:srgbClr val="000000"/>
-              </a:buClr>
-              <a:buFont typeface="Arial"/>
-              <a:defRPr sz="1400" b="0" i="0" u="none" strike="noStrike" cap="none">
-                <a:solidFill>
-                  <a:srgbClr val="000000"/>
-                </a:solidFill>
-                <a:latin typeface="Arial"/>
-                <a:ea typeface="Arial"/>
-                <a:cs typeface="Arial"/>
-                <a:sym typeface="Arial"/>
-              </a:defRPr>
-            </a:lvl9pPr>
-          </a:lstStyle>
-          <a:p>
-            <a:pPr algn="r"/>
-            <a:r>
-              <a:t>3</a:t>
-            </a:r>
-            <a:endParaRPr lang="en-US"/>
-          </a:p>
-        </p:txBody>
-      </p:sp>
-    </p:spTree>
-  </p:cSld>
-  <p:clrMapOvr>
-    <a:masterClrMapping/>
-  </p:clrMapOvr>
-</p:sld>
-</file>
-
-<file path=ppt/slides/slide30.xml><?xml version="1.0" encoding="utf-8"?>
+<file path=ppt/slides/slide29.xml><?xml version="1.0" encoding="utf-8"?>
 <p:sld xmlns:a="http://schemas.openxmlformats.org/drawingml/2006/main" xmlns:p="http://schemas.openxmlformats.org/presentationml/2006/main" xmlns:r="http://schemas.openxmlformats.org/officeDocument/2006/relationships">
   <p:cSld>
     <p:spTree>
@@ -53521,7 +48800,7 @@
           <a:p>
             <a:pPr algn="r"/>
             <a:r>
-              <a:t>30</a:t>
+              <a:t>29</a:t>
             </a:r>
             <a:endParaRPr lang="en-US"/>
           </a:p>
@@ -53535,7 +48814,7 @@
 </p:sld>
 </file>
 
-<file path=ppt/slides/slide31.xml><?xml version="1.0" encoding="utf-8"?>
+<file path=ppt/slides/slide3.xml><?xml version="1.0" encoding="utf-8"?>
 <p:sld xmlns:a="http://schemas.openxmlformats.org/drawingml/2006/main" xmlns:p="http://schemas.openxmlformats.org/presentationml/2006/main" xmlns:r="http://schemas.openxmlformats.org/officeDocument/2006/relationships">
   <p:cSld>
     <p:spTree>
@@ -53592,7 +48871,7 @@
                 <a:cs typeface="Roboto Condensed Medium"/>
                 <a:sym typeface="Roboto Condensed Medium"/>
               </a:rPr>
-              <a:t>Caso: IBM Food Trust y Walmart</a:t>
+              <a:t>Agenda de la clase</a:t>
             </a:r>
             <a:endParaRPr dirty="0"/>
           </a:p>
@@ -53607,7 +48886,7 @@
         <p:spPr>
           <a:xfrm>
             <a:off x="889446" y="2014379"/>
-            <a:ext cx="6300000" cy="3413760"/>
+            <a:ext cx="9385264" cy="3413760"/>
           </a:xfrm>
           <a:prstGeom prst="rect">
             <a:avLst/>
@@ -53631,12 +48910,639 @@
                 <a:spcPts val="0"/>
               </a:spcBef>
               <a:spcAft>
-                <a:spcPts val="600"/>
+                <a:spcPts val="800"/>
               </a:spcAft>
               <a:buNone/>
             </a:pPr>
             <a:r>
-              <a:rPr sz="1500">
+              <a:rPr sz="1800">
+                <a:solidFill>
+                  <a:srgbClr val="3A3A3A"/>
+                </a:solidFill>
+                <a:latin typeface="Roboto Condensed"/>
+              </a:rPr>
+              <a:t>• La digitalización en la organización pública y privada</a:t>
+            </a:r>
+            <a:endParaRPr dirty="0"/>
+          </a:p>
+          <a:p>
+            <a:pPr marL="0" marR="0" indent="0" algn="l" rtl="0">
+              <a:lnSpc>
+                <a:spcPct val="100000"/>
+              </a:lnSpc>
+              <a:spcBef>
+                <a:spcPts val="0"/>
+              </a:spcBef>
+              <a:spcAft>
+                <a:spcPts val="800"/>
+              </a:spcAft>
+              <a:buNone/>
+            </a:pPr>
+            <a:r>
+              <a:rPr sz="1800">
+                <a:solidFill>
+                  <a:srgbClr val="3A3A3A"/>
+                </a:solidFill>
+                <a:latin typeface="Roboto Condensed"/>
+              </a:rPr>
+              <a:t>– Caso comparativo: e-Estonia y la plataforma X-Road</a:t>
+            </a:r>
+            <a:endParaRPr dirty="0"/>
+          </a:p>
+          <a:p>
+            <a:pPr marL="0" marR="0" indent="0" algn="l" rtl="0">
+              <a:lnSpc>
+                <a:spcPct val="100000"/>
+              </a:lnSpc>
+              <a:spcBef>
+                <a:spcPts val="0"/>
+              </a:spcBef>
+              <a:spcAft>
+                <a:spcPts val="800"/>
+              </a:spcAft>
+              <a:buNone/>
+            </a:pPr>
+            <a:r>
+              <a:rPr sz="1800">
+                <a:solidFill>
+                  <a:srgbClr val="3A3A3A"/>
+                </a:solidFill>
+                <a:latin typeface="Roboto Condensed"/>
+              </a:rPr>
+              <a:t>– Demostración en vivo: recorrido por e-Estonia y datos abiertos del Estado de Chile</a:t>
+            </a:r>
+            <a:endParaRPr dirty="0"/>
+          </a:p>
+          <a:p>
+            <a:pPr marL="0" marR="0" indent="0" algn="l" rtl="0">
+              <a:lnSpc>
+                <a:spcPct val="100000"/>
+              </a:lnSpc>
+              <a:spcBef>
+                <a:spcPts val="0"/>
+              </a:spcBef>
+              <a:spcAft>
+                <a:spcPts val="800"/>
+              </a:spcAft>
+              <a:buNone/>
+            </a:pPr>
+            <a:r>
+              <a:rPr sz="1800">
+                <a:solidFill>
+                  <a:srgbClr val="3A3A3A"/>
+                </a:solidFill>
+                <a:latin typeface="Roboto Condensed"/>
+              </a:rPr>
+              <a:t>– Caso chileno: ClaveÚnica y la digitalización del Estado</a:t>
+            </a:r>
+            <a:endParaRPr dirty="0"/>
+          </a:p>
+          <a:p>
+            <a:pPr marL="0" marR="0" indent="0" algn="l" rtl="0">
+              <a:lnSpc>
+                <a:spcPct val="100000"/>
+              </a:lnSpc>
+              <a:spcBef>
+                <a:spcPts val="0"/>
+              </a:spcBef>
+              <a:spcAft>
+                <a:spcPts val="800"/>
+              </a:spcAft>
+              <a:buNone/>
+            </a:pPr>
+            <a:r>
+              <a:rPr sz="1800">
+                <a:solidFill>
+                  <a:srgbClr val="3A3A3A"/>
+                </a:solidFill>
+                <a:latin typeface="Roboto Condensed"/>
+              </a:rPr>
+              <a:t>• Inteligencia Artificial en la transformación digital</a:t>
+            </a:r>
+            <a:endParaRPr dirty="0"/>
+          </a:p>
+          <a:p>
+            <a:pPr marL="0" marR="0" indent="0" algn="l" rtl="0">
+              <a:lnSpc>
+                <a:spcPct val="100000"/>
+              </a:lnSpc>
+              <a:spcBef>
+                <a:spcPts val="0"/>
+              </a:spcBef>
+              <a:spcAft>
+                <a:spcPts val="800"/>
+              </a:spcAft>
+              <a:buNone/>
+            </a:pPr>
+            <a:r>
+              <a:rPr sz="1800">
+                <a:solidFill>
+                  <a:srgbClr val="3A3A3A"/>
+                </a:solidFill>
+                <a:latin typeface="Roboto Condensed"/>
+              </a:rPr>
+              <a:t>• El Internet de las Cosas (IoT)</a:t>
+            </a:r>
+            <a:endParaRPr dirty="0"/>
+          </a:p>
+          <a:p>
+            <a:pPr marL="0" marR="0" indent="0" algn="l" rtl="0">
+              <a:lnSpc>
+                <a:spcPct val="100000"/>
+              </a:lnSpc>
+              <a:spcBef>
+                <a:spcPts val="0"/>
+              </a:spcBef>
+              <a:spcAft>
+                <a:spcPts val="800"/>
+              </a:spcAft>
+              <a:buNone/>
+            </a:pPr>
+            <a:r>
+              <a:rPr sz="1800">
+                <a:solidFill>
+                  <a:srgbClr val="3A3A3A"/>
+                </a:solidFill>
+                <a:latin typeface="Roboto Condensed"/>
+              </a:rPr>
+              <a:t>– Caso de estudio: John Deere y la Agricultura 4.0</a:t>
+            </a:r>
+            <a:endParaRPr dirty="0"/>
+          </a:p>
+          <a:p>
+            <a:pPr marL="0" marR="0" indent="0" algn="l" rtl="0">
+              <a:lnSpc>
+                <a:spcPct val="100000"/>
+              </a:lnSpc>
+              <a:spcBef>
+                <a:spcPts val="0"/>
+              </a:spcBef>
+              <a:spcAft>
+                <a:spcPts val="800"/>
+              </a:spcAft>
+              <a:buNone/>
+            </a:pPr>
+            <a:r>
+              <a:rPr sz="1800">
+                <a:solidFill>
+                  <a:srgbClr val="3A3A3A"/>
+                </a:solidFill>
+                <a:latin typeface="Roboto Condensed"/>
+              </a:rPr>
+              <a:t>• Blockchain</a:t>
+            </a:r>
+            <a:endParaRPr dirty="0"/>
+          </a:p>
+          <a:p>
+            <a:pPr marL="0" marR="0" indent="0" algn="l" rtl="0">
+              <a:lnSpc>
+                <a:spcPct val="100000"/>
+              </a:lnSpc>
+              <a:spcBef>
+                <a:spcPts val="0"/>
+              </a:spcBef>
+              <a:spcAft>
+                <a:spcPts val="800"/>
+              </a:spcAft>
+              <a:buNone/>
+            </a:pPr>
+            <a:r>
+              <a:rPr sz="1800">
+                <a:solidFill>
+                  <a:srgbClr val="3A3A3A"/>
+                </a:solidFill>
+                <a:latin typeface="Roboto Condensed"/>
+              </a:rPr>
+              <a:t>– Caso de estudio: IBM Food Trust, Walmart y la cadena de suministro</a:t>
+            </a:r>
+            <a:endParaRPr dirty="0"/>
+          </a:p>
+          <a:p>
+            <a:pPr marL="0" marR="0" indent="0" algn="l" rtl="0">
+              <a:lnSpc>
+                <a:spcPct val="100000"/>
+              </a:lnSpc>
+              <a:spcBef>
+                <a:spcPts val="0"/>
+              </a:spcBef>
+              <a:spcAft>
+                <a:spcPts val="800"/>
+              </a:spcAft>
+              <a:buNone/>
+            </a:pPr>
+            <a:r>
+              <a:rPr sz="1800">
+                <a:solidFill>
+                  <a:srgbClr val="3A3A3A"/>
+                </a:solidFill>
+                <a:latin typeface="Roboto Condensed"/>
+              </a:rPr>
+              <a:t>• Ética, privacidad y normativa: hilo transversal del diplomado</a:t>
+            </a:r>
+            <a:endParaRPr dirty="0"/>
+          </a:p>
+        </p:txBody>
+      </p:sp>
+      <p:pic>
+        <p:nvPicPr>
+          <p:cNvPr id="252" name="Google Shape;252;p38"/>
+          <p:cNvPicPr preferRelativeResize="0"/>
+          <p:nvPr/>
+        </p:nvPicPr>
+        <p:blipFill rotWithShape="1">
+          <a:blip r:embed="rId2">
+            <a:alphaModFix/>
+          </a:blip>
+          <a:srcRect/>
+          <a:stretch/>
+        </p:blipFill>
+        <p:spPr>
+          <a:xfrm>
+            <a:off x="10120580" y="230187"/>
+            <a:ext cx="1866726" cy="590083"/>
+          </a:xfrm>
+          <a:prstGeom prst="rect">
+            <a:avLst/>
+          </a:prstGeom>
+          <a:noFill/>
+          <a:ln>
+            <a:noFill/>
+          </a:ln>
+        </p:spPr>
+      </p:pic>
+      <p:sp>
+        <p:nvSpPr>
+          <p:cNvPr id="2" name="Marcador de número de diapositiva 2">
+            <a:extLst>
+              <a:ext uri="{FF2B5EF4-FFF2-40B4-BE49-F238E27FC236}">
+                <a16:creationId xmlns:a16="http://schemas.microsoft.com/office/drawing/2014/main" id="{9E2EBC40-EC40-BDF2-F68A-0BA88B712A11}"/>
+              </a:ext>
+            </a:extLst>
+          </p:cNvPr>
+          <p:cNvSpPr txBox="1">
+            <a:spLocks/>
+          </p:cNvSpPr>
+          <p:nvPr/>
+        </p:nvSpPr>
+        <p:spPr>
+          <a:xfrm>
+            <a:off x="8610600" y="6356351"/>
+            <a:ext cx="2743200" cy="365125"/>
+          </a:xfrm>
+          <a:prstGeom prst="rect">
+            <a:avLst/>
+          </a:prstGeom>
+        </p:spPr>
+        <p:txBody>
+          <a:bodyPr/>
+          <a:lstStyle>
+            <a:defPPr marR="0" lvl="0" algn="l" rtl="0">
+              <a:lnSpc>
+                <a:spcPct val="100000"/>
+              </a:lnSpc>
+              <a:spcBef>
+                <a:spcPts val="0"/>
+              </a:spcBef>
+              <a:spcAft>
+                <a:spcPts val="0"/>
+              </a:spcAft>
+            </a:defPPr>
+            <a:lvl1pPr marR="0" lvl="0" algn="l" rtl="0">
+              <a:lnSpc>
+                <a:spcPct val="100000"/>
+              </a:lnSpc>
+              <a:spcBef>
+                <a:spcPts val="0"/>
+              </a:spcBef>
+              <a:spcAft>
+                <a:spcPts val="0"/>
+              </a:spcAft>
+              <a:buClr>
+                <a:srgbClr val="000000"/>
+              </a:buClr>
+              <a:buFont typeface="Arial"/>
+              <a:defRPr sz="1400" b="0" i="0" u="none" strike="noStrike" cap="none">
+                <a:solidFill>
+                  <a:srgbClr val="000000"/>
+                </a:solidFill>
+                <a:latin typeface="Arial"/>
+                <a:ea typeface="Arial"/>
+                <a:cs typeface="Arial"/>
+                <a:sym typeface="Arial"/>
+              </a:defRPr>
+            </a:lvl1pPr>
+            <a:lvl2pPr marR="0" lvl="1" algn="l" rtl="0">
+              <a:lnSpc>
+                <a:spcPct val="100000"/>
+              </a:lnSpc>
+              <a:spcBef>
+                <a:spcPts val="0"/>
+              </a:spcBef>
+              <a:spcAft>
+                <a:spcPts val="0"/>
+              </a:spcAft>
+              <a:buClr>
+                <a:srgbClr val="000000"/>
+              </a:buClr>
+              <a:buFont typeface="Arial"/>
+              <a:defRPr sz="1400" b="0" i="0" u="none" strike="noStrike" cap="none">
+                <a:solidFill>
+                  <a:srgbClr val="000000"/>
+                </a:solidFill>
+                <a:latin typeface="Arial"/>
+                <a:ea typeface="Arial"/>
+                <a:cs typeface="Arial"/>
+                <a:sym typeface="Arial"/>
+              </a:defRPr>
+            </a:lvl2pPr>
+            <a:lvl3pPr marR="0" lvl="2" algn="l" rtl="0">
+              <a:lnSpc>
+                <a:spcPct val="100000"/>
+              </a:lnSpc>
+              <a:spcBef>
+                <a:spcPts val="0"/>
+              </a:spcBef>
+              <a:spcAft>
+                <a:spcPts val="0"/>
+              </a:spcAft>
+              <a:buClr>
+                <a:srgbClr val="000000"/>
+              </a:buClr>
+              <a:buFont typeface="Arial"/>
+              <a:defRPr sz="1400" b="0" i="0" u="none" strike="noStrike" cap="none">
+                <a:solidFill>
+                  <a:srgbClr val="000000"/>
+                </a:solidFill>
+                <a:latin typeface="Arial"/>
+                <a:ea typeface="Arial"/>
+                <a:cs typeface="Arial"/>
+                <a:sym typeface="Arial"/>
+              </a:defRPr>
+            </a:lvl3pPr>
+            <a:lvl4pPr marR="0" lvl="3" algn="l" rtl="0">
+              <a:lnSpc>
+                <a:spcPct val="100000"/>
+              </a:lnSpc>
+              <a:spcBef>
+                <a:spcPts val="0"/>
+              </a:spcBef>
+              <a:spcAft>
+                <a:spcPts val="0"/>
+              </a:spcAft>
+              <a:buClr>
+                <a:srgbClr val="000000"/>
+              </a:buClr>
+              <a:buFont typeface="Arial"/>
+              <a:defRPr sz="1400" b="0" i="0" u="none" strike="noStrike" cap="none">
+                <a:solidFill>
+                  <a:srgbClr val="000000"/>
+                </a:solidFill>
+                <a:latin typeface="Arial"/>
+                <a:ea typeface="Arial"/>
+                <a:cs typeface="Arial"/>
+                <a:sym typeface="Arial"/>
+              </a:defRPr>
+            </a:lvl4pPr>
+            <a:lvl5pPr marR="0" lvl="4" algn="l" rtl="0">
+              <a:lnSpc>
+                <a:spcPct val="100000"/>
+              </a:lnSpc>
+              <a:spcBef>
+                <a:spcPts val="0"/>
+              </a:spcBef>
+              <a:spcAft>
+                <a:spcPts val="0"/>
+              </a:spcAft>
+              <a:buClr>
+                <a:srgbClr val="000000"/>
+              </a:buClr>
+              <a:buFont typeface="Arial"/>
+              <a:defRPr sz="1400" b="0" i="0" u="none" strike="noStrike" cap="none">
+                <a:solidFill>
+                  <a:srgbClr val="000000"/>
+                </a:solidFill>
+                <a:latin typeface="Arial"/>
+                <a:ea typeface="Arial"/>
+                <a:cs typeface="Arial"/>
+                <a:sym typeface="Arial"/>
+              </a:defRPr>
+            </a:lvl5pPr>
+            <a:lvl6pPr marR="0" lvl="5" algn="l" rtl="0">
+              <a:lnSpc>
+                <a:spcPct val="100000"/>
+              </a:lnSpc>
+              <a:spcBef>
+                <a:spcPts val="0"/>
+              </a:spcBef>
+              <a:spcAft>
+                <a:spcPts val="0"/>
+              </a:spcAft>
+              <a:buClr>
+                <a:srgbClr val="000000"/>
+              </a:buClr>
+              <a:buFont typeface="Arial"/>
+              <a:defRPr sz="1400" b="0" i="0" u="none" strike="noStrike" cap="none">
+                <a:solidFill>
+                  <a:srgbClr val="000000"/>
+                </a:solidFill>
+                <a:latin typeface="Arial"/>
+                <a:ea typeface="Arial"/>
+                <a:cs typeface="Arial"/>
+                <a:sym typeface="Arial"/>
+              </a:defRPr>
+            </a:lvl6pPr>
+            <a:lvl7pPr marR="0" lvl="6" algn="l" rtl="0">
+              <a:lnSpc>
+                <a:spcPct val="100000"/>
+              </a:lnSpc>
+              <a:spcBef>
+                <a:spcPts val="0"/>
+              </a:spcBef>
+              <a:spcAft>
+                <a:spcPts val="0"/>
+              </a:spcAft>
+              <a:buClr>
+                <a:srgbClr val="000000"/>
+              </a:buClr>
+              <a:buFont typeface="Arial"/>
+              <a:defRPr sz="1400" b="0" i="0" u="none" strike="noStrike" cap="none">
+                <a:solidFill>
+                  <a:srgbClr val="000000"/>
+                </a:solidFill>
+                <a:latin typeface="Arial"/>
+                <a:ea typeface="Arial"/>
+                <a:cs typeface="Arial"/>
+                <a:sym typeface="Arial"/>
+              </a:defRPr>
+            </a:lvl7pPr>
+            <a:lvl8pPr marR="0" lvl="7" algn="l" rtl="0">
+              <a:lnSpc>
+                <a:spcPct val="100000"/>
+              </a:lnSpc>
+              <a:spcBef>
+                <a:spcPts val="0"/>
+              </a:spcBef>
+              <a:spcAft>
+                <a:spcPts val="0"/>
+              </a:spcAft>
+              <a:buClr>
+                <a:srgbClr val="000000"/>
+              </a:buClr>
+              <a:buFont typeface="Arial"/>
+              <a:defRPr sz="1400" b="0" i="0" u="none" strike="noStrike" cap="none">
+                <a:solidFill>
+                  <a:srgbClr val="000000"/>
+                </a:solidFill>
+                <a:latin typeface="Arial"/>
+                <a:ea typeface="Arial"/>
+                <a:cs typeface="Arial"/>
+                <a:sym typeface="Arial"/>
+              </a:defRPr>
+            </a:lvl8pPr>
+            <a:lvl9pPr marR="0" lvl="8" algn="l" rtl="0">
+              <a:lnSpc>
+                <a:spcPct val="100000"/>
+              </a:lnSpc>
+              <a:spcBef>
+                <a:spcPts val="0"/>
+              </a:spcBef>
+              <a:spcAft>
+                <a:spcPts val="0"/>
+              </a:spcAft>
+              <a:buClr>
+                <a:srgbClr val="000000"/>
+              </a:buClr>
+              <a:buFont typeface="Arial"/>
+              <a:defRPr sz="1400" b="0" i="0" u="none" strike="noStrike" cap="none">
+                <a:solidFill>
+                  <a:srgbClr val="000000"/>
+                </a:solidFill>
+                <a:latin typeface="Arial"/>
+                <a:ea typeface="Arial"/>
+                <a:cs typeface="Arial"/>
+                <a:sym typeface="Arial"/>
+              </a:defRPr>
+            </a:lvl9pPr>
+          </a:lstStyle>
+          <a:p>
+            <a:pPr algn="r"/>
+            <a:r>
+              <a:t>3</a:t>
+            </a:r>
+            <a:endParaRPr lang="en-US"/>
+          </a:p>
+        </p:txBody>
+      </p:sp>
+    </p:spTree>
+  </p:cSld>
+  <p:clrMapOvr>
+    <a:masterClrMapping/>
+  </p:clrMapOvr>
+</p:sld>
+</file>
+
+<file path=ppt/slides/slide30.xml><?xml version="1.0" encoding="utf-8"?>
+<p:sld xmlns:a="http://schemas.openxmlformats.org/drawingml/2006/main" xmlns:p="http://schemas.openxmlformats.org/presentationml/2006/main" xmlns:r="http://schemas.openxmlformats.org/officeDocument/2006/relationships">
+  <p:cSld>
+    <p:spTree>
+      <p:nvGrpSpPr>
+        <p:cNvPr id="1" name=""/>
+        <p:cNvGrpSpPr/>
+        <p:nvPr/>
+      </p:nvGrpSpPr>
+      <p:grpSpPr/>
+      <p:sp>
+        <p:nvSpPr>
+          <p:cNvPr id="240" name="Google Shape;240;p38"/>
+          <p:cNvSpPr/>
+          <p:nvPr/>
+        </p:nvSpPr>
+        <p:spPr>
+          <a:xfrm>
+            <a:off x="853440" y="790892"/>
+            <a:ext cx="9055100" cy="731520"/>
+          </a:xfrm>
+          <a:prstGeom prst="rect">
+            <a:avLst/>
+          </a:prstGeom>
+          <a:noFill/>
+          <a:ln>
+            <a:noFill/>
+          </a:ln>
+        </p:spPr>
+        <p:txBody>
+          <a:bodyPr spcFirstLastPara="1" wrap="square" lIns="91425" tIns="45700" rIns="91425" bIns="45700" anchor="ctr" anchorCtr="0">
+            <a:noAutofit/>
+          </a:bodyPr>
+          <a:lstStyle/>
+          <a:p>
+            <a:pPr marL="0" marR="0" lvl="0" indent="0" algn="l" rtl="0">
+              <a:lnSpc>
+                <a:spcPct val="100000"/>
+              </a:lnSpc>
+              <a:spcBef>
+                <a:spcPts val="0"/>
+              </a:spcBef>
+              <a:spcAft>
+                <a:spcPts val="0"/>
+              </a:spcAft>
+              <a:buNone/>
+            </a:pPr>
+            <a:r>
+              <a:rPr lang="en-US" sz="4400" dirty="0">
+                <a:solidFill>
+                  <a:srgbClr val="3A3A3A"/>
+                </a:solidFill>
+                <a:latin typeface="Roboto Condensed Medium"/>
+                <a:ea typeface="Roboto Condensed Medium"/>
+                <a:cs typeface="Roboto Condensed Medium"/>
+                <a:sym typeface="Roboto Condensed Medium"/>
+              </a:rPr>
+              <a:t>Caso: IBM Food Trust y Walmart</a:t>
+            </a:r>
+            <a:endParaRPr dirty="0"/>
+          </a:p>
+        </p:txBody>
+      </p:sp>
+      <p:sp>
+        <p:nvSpPr>
+          <p:cNvPr id="241" name="Google Shape;241;p38"/>
+          <p:cNvSpPr/>
+          <p:nvPr/>
+        </p:nvSpPr>
+        <p:spPr>
+          <a:xfrm>
+            <a:off x="889446" y="2014379"/>
+            <a:ext cx="9385264" cy="3413760"/>
+          </a:xfrm>
+          <a:prstGeom prst="rect">
+            <a:avLst/>
+          </a:prstGeom>
+          <a:noFill/>
+          <a:ln>
+            <a:noFill/>
+          </a:ln>
+        </p:spPr>
+        <p:txBody>
+          <a:bodyPr spcFirstLastPara="1" wrap="square" lIns="91425" tIns="45700" rIns="91425" bIns="45700" anchor="t" anchorCtr="0">
+            <a:noAutofit/>
+          </a:bodyPr>
+          <a:lstStyle/>
+          <a:p>
+            <a:pPr marL="0" marR="0" indent="0" algn="l" rtl="0">
+              <a:lnSpc>
+                <a:spcPct val="100000"/>
+              </a:lnSpc>
+              <a:spcBef>
+                <a:spcPts val="0"/>
+              </a:spcBef>
+              <a:spcAft>
+                <a:spcPts val="800"/>
+              </a:spcAft>
+              <a:buNone/>
+            </a:pPr>
+            <a:r>
+              <a:rPr sz="2000">
                 <a:solidFill>
                   <a:srgbClr val="3A3A3A"/>
                 </a:solidFill>
@@ -53649,11 +49555,11 @@
           <a:p>
             <a:pPr>
               <a:spcAft>
-                <a:spcPts val="600"/>
+                <a:spcPts val="800"/>
               </a:spcAft>
             </a:pPr>
             <a:r>
-              <a:rPr sz="1500">
+              <a:rPr sz="2000">
                 <a:solidFill>
                   <a:srgbClr val="3A3A3A"/>
                 </a:solidFill>
@@ -53665,11 +49571,11 @@
           <a:p>
             <a:pPr>
               <a:spcAft>
-                <a:spcPts val="600"/>
+                <a:spcPts val="800"/>
               </a:spcAft>
             </a:pPr>
             <a:r>
-              <a:rPr sz="1500">
+              <a:rPr sz="2000">
                 <a:solidFill>
                   <a:srgbClr val="3A3A3A"/>
                 </a:solidFill>
@@ -53681,11 +49587,11 @@
           <a:p>
             <a:pPr>
               <a:spcAft>
-                <a:spcPts val="600"/>
+                <a:spcPts val="800"/>
               </a:spcAft>
             </a:pPr>
             <a:r>
-              <a:rPr sz="1500">
+              <a:rPr sz="2000">
                 <a:solidFill>
                   <a:srgbClr val="3A3A3A"/>
                 </a:solidFill>
@@ -53697,11 +49603,11 @@
           <a:p>
             <a:pPr>
               <a:spcAft>
-                <a:spcPts val="600"/>
+                <a:spcPts val="800"/>
               </a:spcAft>
             </a:pPr>
             <a:r>
-              <a:rPr sz="1500">
+              <a:rPr sz="2000">
                 <a:solidFill>
                   <a:srgbClr val="3A3A3A"/>
                 </a:solidFill>
@@ -53719,12 +49625,12 @@
                 <a:spcPts val="0"/>
               </a:spcBef>
               <a:spcAft>
-                <a:spcPts val="600"/>
+                <a:spcPts val="800"/>
               </a:spcAft>
               <a:buNone/>
             </a:pPr>
             <a:r>
-              <a:rPr sz="1500">
+              <a:rPr sz="2000">
                 <a:solidFill>
                   <a:srgbClr val="3A3A3A"/>
                 </a:solidFill>
@@ -53743,12 +49649,12 @@
                 <a:spcPts val="0"/>
               </a:spcBef>
               <a:spcAft>
-                <a:spcPts val="600"/>
+                <a:spcPts val="800"/>
               </a:spcAft>
               <a:buNone/>
             </a:pPr>
             <a:r>
-              <a:rPr sz="1500" i="1">
+              <a:rPr sz="1200" i="1">
                 <a:solidFill>
                   <a:srgbClr val="3A3A3A"/>
                 </a:solidFill>
@@ -54044,435 +49950,9 @@
           <a:p>
             <a:pPr algn="r"/>
             <a:r>
-              <a:t>31</a:t>
+              <a:t>30</a:t>
             </a:r>
             <a:endParaRPr lang="en-US"/>
-          </a:p>
-        </p:txBody>
-      </p:sp>
-      <p:sp>
-        <p:nvSpPr>
-          <p:cNvPr id="253" name="Rounded Rectangle 252"/>
-          <p:cNvSpPr/>
-          <p:nvPr/>
-        </p:nvSpPr>
-        <p:spPr>
-          <a:xfrm>
-            <a:off x="7550000" y="2500000"/>
-            <a:ext cx="780000" cy="600000"/>
-          </a:xfrm>
-          <a:prstGeom prst="roundRect">
-            <a:avLst/>
-          </a:prstGeom>
-          <a:solidFill>
-            <a:srgbClr val="156082"/>
-          </a:solidFill>
-          <a:ln>
-            <a:noFill/>
-          </a:ln>
-          <a:effectLst/>
-        </p:spPr>
-        <p:style>
-          <a:lnRef idx="1">
-            <a:schemeClr val="accent1"/>
-          </a:lnRef>
-          <a:fillRef idx="3">
-            <a:schemeClr val="accent1"/>
-          </a:fillRef>
-          <a:effectRef idx="2">
-            <a:schemeClr val="accent1"/>
-          </a:effectRef>
-          <a:fontRef idx="minor">
-            <a:schemeClr val="lt1"/>
-          </a:fontRef>
-        </p:style>
-        <p:txBody>
-          <a:bodyPr rtlCol="0" anchor="ctr" wrap="square" lIns="18000" rIns="18000" tIns="9000" bIns="9000"/>
-          <a:lstStyle/>
-          <a:p>
-            <a:pPr algn="ctr"/>
-            <a:r>
-              <a:rPr sz="900" b="1">
-                <a:solidFill>
-                  <a:srgbClr val="FFFFFF"/>
-                </a:solidFill>
-                <a:latin typeface="Roboto Condensed"/>
-              </a:rPr>
-              <a:t>Granja</a:t>
-            </a:r>
-          </a:p>
-        </p:txBody>
-      </p:sp>
-      <p:sp>
-        <p:nvSpPr>
-          <p:cNvPr id="254" name="Rounded Rectangle 253"/>
-          <p:cNvSpPr/>
-          <p:nvPr/>
-        </p:nvSpPr>
-        <p:spPr>
-          <a:xfrm>
-            <a:off x="8510000" y="2500000"/>
-            <a:ext cx="780000" cy="600000"/>
-          </a:xfrm>
-          <a:prstGeom prst="roundRect">
-            <a:avLst/>
-          </a:prstGeom>
-          <a:solidFill>
-            <a:srgbClr val="156082"/>
-          </a:solidFill>
-          <a:ln>
-            <a:noFill/>
-          </a:ln>
-          <a:effectLst/>
-        </p:spPr>
-        <p:style>
-          <a:lnRef idx="1">
-            <a:schemeClr val="accent1"/>
-          </a:lnRef>
-          <a:fillRef idx="3">
-            <a:schemeClr val="accent1"/>
-          </a:fillRef>
-          <a:effectRef idx="2">
-            <a:schemeClr val="accent1"/>
-          </a:effectRef>
-          <a:fontRef idx="minor">
-            <a:schemeClr val="lt1"/>
-          </a:fontRef>
-        </p:style>
-        <p:txBody>
-          <a:bodyPr rtlCol="0" anchor="ctr" wrap="square" lIns="18000" rIns="18000" tIns="9000" bIns="9000"/>
-          <a:lstStyle/>
-          <a:p>
-            <a:pPr algn="ctr"/>
-            <a:r>
-              <a:rPr sz="900" b="1">
-                <a:solidFill>
-                  <a:srgbClr val="FFFFFF"/>
-                </a:solidFill>
-                <a:latin typeface="Roboto Condensed"/>
-              </a:rPr>
-              <a:t>Planta</a:t>
-            </a:r>
-          </a:p>
-        </p:txBody>
-      </p:sp>
-      <p:cxnSp>
-        <p:nvCxnSpPr>
-          <p:cNvPr id="255" name="Connector 254"/>
-          <p:cNvCxnSpPr/>
-          <p:nvPr/>
-        </p:nvCxnSpPr>
-        <p:spPr>
-          <a:xfrm>
-            <a:off x="8330000" y="2800000"/>
-            <a:ext cx="180000" cy="0"/>
-          </a:xfrm>
-          <a:prstGeom prst="line">
-            <a:avLst/>
-          </a:prstGeom>
-          <a:ln w="15240">
-            <a:solidFill>
-              <a:srgbClr val="3A3A3A"/>
-            </a:solidFill>
-            <a:tailEnd type="triangle" w="med" len="med"/>
-          </a:ln>
-        </p:spPr>
-        <p:style>
-          <a:lnRef idx="2">
-            <a:schemeClr val="accent1"/>
-          </a:lnRef>
-          <a:fillRef idx="0">
-            <a:schemeClr val="accent1"/>
-          </a:fillRef>
-          <a:effectRef idx="1">
-            <a:schemeClr val="accent1"/>
-          </a:effectRef>
-          <a:fontRef idx="minor">
-            <a:schemeClr val="tx1"/>
-          </a:fontRef>
-        </p:style>
-      </p:cxnSp>
-      <p:sp>
-        <p:nvSpPr>
-          <p:cNvPr id="256" name="Rounded Rectangle 255"/>
-          <p:cNvSpPr/>
-          <p:nvPr/>
-        </p:nvSpPr>
-        <p:spPr>
-          <a:xfrm>
-            <a:off x="9470000" y="2500000"/>
-            <a:ext cx="780000" cy="600000"/>
-          </a:xfrm>
-          <a:prstGeom prst="roundRect">
-            <a:avLst/>
-          </a:prstGeom>
-          <a:solidFill>
-            <a:srgbClr val="156082"/>
-          </a:solidFill>
-          <a:ln>
-            <a:noFill/>
-          </a:ln>
-          <a:effectLst/>
-        </p:spPr>
-        <p:style>
-          <a:lnRef idx="1">
-            <a:schemeClr val="accent1"/>
-          </a:lnRef>
-          <a:fillRef idx="3">
-            <a:schemeClr val="accent1"/>
-          </a:fillRef>
-          <a:effectRef idx="2">
-            <a:schemeClr val="accent1"/>
-          </a:effectRef>
-          <a:fontRef idx="minor">
-            <a:schemeClr val="lt1"/>
-          </a:fontRef>
-        </p:style>
-        <p:txBody>
-          <a:bodyPr rtlCol="0" anchor="ctr" wrap="square" lIns="18000" rIns="18000" tIns="9000" bIns="9000"/>
-          <a:lstStyle/>
-          <a:p>
-            <a:pPr algn="ctr"/>
-            <a:r>
-              <a:rPr sz="900" b="1">
-                <a:solidFill>
-                  <a:srgbClr val="FFFFFF"/>
-                </a:solidFill>
-                <a:latin typeface="Roboto Condensed"/>
-              </a:rPr>
-              <a:t>Transporte</a:t>
-            </a:r>
-          </a:p>
-        </p:txBody>
-      </p:sp>
-      <p:cxnSp>
-        <p:nvCxnSpPr>
-          <p:cNvPr id="257" name="Connector 256"/>
-          <p:cNvCxnSpPr/>
-          <p:nvPr/>
-        </p:nvCxnSpPr>
-        <p:spPr>
-          <a:xfrm>
-            <a:off x="9290000" y="2800000"/>
-            <a:ext cx="180000" cy="0"/>
-          </a:xfrm>
-          <a:prstGeom prst="line">
-            <a:avLst/>
-          </a:prstGeom>
-          <a:ln w="15240">
-            <a:solidFill>
-              <a:srgbClr val="3A3A3A"/>
-            </a:solidFill>
-            <a:tailEnd type="triangle" w="med" len="med"/>
-          </a:ln>
-        </p:spPr>
-        <p:style>
-          <a:lnRef idx="2">
-            <a:schemeClr val="accent1"/>
-          </a:lnRef>
-          <a:fillRef idx="0">
-            <a:schemeClr val="accent1"/>
-          </a:fillRef>
-          <a:effectRef idx="1">
-            <a:schemeClr val="accent1"/>
-          </a:effectRef>
-          <a:fontRef idx="minor">
-            <a:schemeClr val="tx1"/>
-          </a:fontRef>
-        </p:style>
-      </p:cxnSp>
-      <p:sp>
-        <p:nvSpPr>
-          <p:cNvPr id="258" name="Rounded Rectangle 257"/>
-          <p:cNvSpPr/>
-          <p:nvPr/>
-        </p:nvSpPr>
-        <p:spPr>
-          <a:xfrm>
-            <a:off x="10430000" y="2500000"/>
-            <a:ext cx="780000" cy="600000"/>
-          </a:xfrm>
-          <a:prstGeom prst="roundRect">
-            <a:avLst/>
-          </a:prstGeom>
-          <a:solidFill>
-            <a:srgbClr val="156082"/>
-          </a:solidFill>
-          <a:ln>
-            <a:noFill/>
-          </a:ln>
-          <a:effectLst/>
-        </p:spPr>
-        <p:style>
-          <a:lnRef idx="1">
-            <a:schemeClr val="accent1"/>
-          </a:lnRef>
-          <a:fillRef idx="3">
-            <a:schemeClr val="accent1"/>
-          </a:fillRef>
-          <a:effectRef idx="2">
-            <a:schemeClr val="accent1"/>
-          </a:effectRef>
-          <a:fontRef idx="minor">
-            <a:schemeClr val="lt1"/>
-          </a:fontRef>
-        </p:style>
-        <p:txBody>
-          <a:bodyPr rtlCol="0" anchor="ctr" wrap="square" lIns="18000" rIns="18000" tIns="9000" bIns="9000"/>
-          <a:lstStyle/>
-          <a:p>
-            <a:pPr algn="ctr"/>
-            <a:r>
-              <a:rPr sz="900" b="1">
-                <a:solidFill>
-                  <a:srgbClr val="FFFFFF"/>
-                </a:solidFill>
-                <a:latin typeface="Roboto Condensed"/>
-              </a:rPr>
-              <a:t>Tienda</a:t>
-            </a:r>
-          </a:p>
-        </p:txBody>
-      </p:sp>
-      <p:cxnSp>
-        <p:nvCxnSpPr>
-          <p:cNvPr id="259" name="Connector 258"/>
-          <p:cNvCxnSpPr/>
-          <p:nvPr/>
-        </p:nvCxnSpPr>
-        <p:spPr>
-          <a:xfrm>
-            <a:off x="10250000" y="2800000"/>
-            <a:ext cx="180000" cy="0"/>
-          </a:xfrm>
-          <a:prstGeom prst="line">
-            <a:avLst/>
-          </a:prstGeom>
-          <a:ln w="15240">
-            <a:solidFill>
-              <a:srgbClr val="3A3A3A"/>
-            </a:solidFill>
-            <a:tailEnd type="triangle" w="med" len="med"/>
-          </a:ln>
-        </p:spPr>
-        <p:style>
-          <a:lnRef idx="2">
-            <a:schemeClr val="accent1"/>
-          </a:lnRef>
-          <a:fillRef idx="0">
-            <a:schemeClr val="accent1"/>
-          </a:fillRef>
-          <a:effectRef idx="1">
-            <a:schemeClr val="accent1"/>
-          </a:effectRef>
-          <a:fontRef idx="minor">
-            <a:schemeClr val="tx1"/>
-          </a:fontRef>
-        </p:style>
-      </p:cxnSp>
-      <p:cxnSp>
-        <p:nvCxnSpPr>
-          <p:cNvPr id="260" name="Connector 259"/>
-          <p:cNvCxnSpPr/>
-          <p:nvPr/>
-        </p:nvCxnSpPr>
-        <p:spPr>
-          <a:xfrm>
-            <a:off x="7550000" y="2250000"/>
-            <a:ext cx="3480000" cy="0"/>
-          </a:xfrm>
-          <a:prstGeom prst="line">
-            <a:avLst/>
-          </a:prstGeom>
-          <a:ln w="25400">
-            <a:solidFill>
-              <a:srgbClr val="E97132"/>
-            </a:solidFill>
-            <a:prstDash val="dash"/>
-          </a:ln>
-        </p:spPr>
-        <p:style>
-          <a:lnRef idx="2">
-            <a:schemeClr val="accent1"/>
-          </a:lnRef>
-          <a:fillRef idx="0">
-            <a:schemeClr val="accent1"/>
-          </a:fillRef>
-          <a:effectRef idx="1">
-            <a:schemeClr val="accent1"/>
-          </a:effectRef>
-          <a:fontRef idx="minor">
-            <a:schemeClr val="tx1"/>
-          </a:fontRef>
-        </p:style>
-      </p:cxnSp>
-      <p:sp>
-        <p:nvSpPr>
-          <p:cNvPr id="261" name="TextBox 260"/>
-          <p:cNvSpPr txBox="1"/>
-          <p:nvPr/>
-        </p:nvSpPr>
-        <p:spPr>
-          <a:xfrm>
-            <a:off x="7550000" y="1950000"/>
-            <a:ext cx="3400000" cy="260000"/>
-          </a:xfrm>
-          <a:prstGeom prst="rect">
-            <a:avLst/>
-          </a:prstGeom>
-          <a:noFill/>
-        </p:spPr>
-        <p:txBody>
-          <a:bodyPr wrap="square" lIns="0" rIns="0" tIns="0" bIns="0">
-            <a:spAutoFit/>
-          </a:bodyPr>
-          <a:lstStyle/>
-          <a:p>
-            <a:pPr algn="ctr"/>
-            <a:r>
-              <a:rPr sz="900" b="1" i="0">
-                <a:solidFill>
-                  <a:srgbClr val="E97132"/>
-                </a:solidFill>
-                <a:latin typeface="Roboto Condensed"/>
-              </a:rPr>
-              <a:t>Registro compartido (blockchain)</a:t>
-            </a:r>
-          </a:p>
-        </p:txBody>
-      </p:sp>
-      <p:sp>
-        <p:nvSpPr>
-          <p:cNvPr id="262" name="TextBox 261"/>
-          <p:cNvSpPr txBox="1"/>
-          <p:nvPr/>
-        </p:nvSpPr>
-        <p:spPr>
-          <a:xfrm>
-            <a:off x="7550000" y="3450000"/>
-            <a:ext cx="3400000" cy="300000"/>
-          </a:xfrm>
-          <a:prstGeom prst="rect">
-            <a:avLst/>
-          </a:prstGeom>
-          <a:noFill/>
-        </p:spPr>
-        <p:txBody>
-          <a:bodyPr wrap="square" lIns="0" rIns="0" tIns="0" bIns="0">
-            <a:spAutoFit/>
-          </a:bodyPr>
-          <a:lstStyle/>
-          <a:p>
-            <a:pPr algn="ctr"/>
-            <a:r>
-              <a:rPr sz="1000" b="0" i="1">
-                <a:solidFill>
-                  <a:srgbClr val="3A3A3A"/>
-                </a:solidFill>
-                <a:latin typeface="Roboto Condensed"/>
-              </a:rPr>
-              <a:t>Referencial: trazabilidad de origen a punto de venta</a:t>
-            </a:r>
           </a:p>
         </p:txBody>
       </p:sp>
@@ -54484,7 +49964,7 @@
 </p:sld>
 </file>
 
-<file path=ppt/slides/slide32.xml><?xml version="1.0" encoding="utf-8"?>
+<file path=ppt/slides/slide31.xml><?xml version="1.0" encoding="utf-8"?>
 <p:sld xmlns:a="http://schemas.openxmlformats.org/drawingml/2006/main" xmlns:p="http://schemas.openxmlformats.org/presentationml/2006/main" xmlns:r="http://schemas.openxmlformats.org/officeDocument/2006/relationships">
   <p:cSld>
     <p:spTree>
@@ -55001,7 +50481,7 @@
           <a:p>
             <a:pPr algn="r"/>
             <a:r>
-              <a:t>32</a:t>
+              <a:t>31</a:t>
             </a:r>
             <a:endParaRPr lang="en-US"/>
           </a:p>
@@ -55015,7 +50495,7 @@
 </p:sld>
 </file>
 
-<file path=ppt/slides/slide33.xml><?xml version="1.0" encoding="utf-8"?>
+<file path=ppt/slides/slide32.xml><?xml version="1.0" encoding="utf-8"?>
 <p:sld xmlns:a="http://schemas.openxmlformats.org/drawingml/2006/main" xmlns:p="http://schemas.openxmlformats.org/presentationml/2006/main" xmlns:r="http://schemas.openxmlformats.org/officeDocument/2006/relationships">
   <p:cSld>
     <p:spTree>
@@ -55500,7 +50980,7 @@
           <a:p>
             <a:pPr algn="r"/>
             <a:r>
-              <a:t>33</a:t>
+              <a:t>32</a:t>
             </a:r>
             <a:endParaRPr lang="en-US"/>
           </a:p>
@@ -55514,7 +50994,7 @@
 </p:sld>
 </file>
 
-<file path=ppt/slides/slide34.xml><?xml version="1.0" encoding="utf-8"?>
+<file path=ppt/slides/slide33.xml><?xml version="1.0" encoding="utf-8"?>
 <p:sld xmlns:a="http://schemas.openxmlformats.org/drawingml/2006/main" xmlns:r="http://schemas.openxmlformats.org/officeDocument/2006/relationships" xmlns:p="http://schemas.openxmlformats.org/presentationml/2006/main">
   <p:cSld>
     <p:spTree>
@@ -55977,7 +51457,7 @@
               <a:buNone/>
             </a:pPr>
             <a:r>
-              <a:t>34</a:t>
+              <a:t>33</a:t>
             </a:r>
             <a:endParaRPr lang="en-US"/>
           </a:p>
@@ -55992,633 +51472,6 @@
 </file>
 
 <file path=ppt/slides/slide4.xml><?xml version="1.0" encoding="utf-8"?>
-<p:sld xmlns:a="http://schemas.openxmlformats.org/drawingml/2006/main" xmlns:p="http://schemas.openxmlformats.org/presentationml/2006/main" xmlns:r="http://schemas.openxmlformats.org/officeDocument/2006/relationships">
-  <p:cSld>
-    <p:spTree>
-      <p:nvGrpSpPr>
-        <p:cNvPr id="1" name=""/>
-        <p:cNvGrpSpPr/>
-        <p:nvPr/>
-      </p:nvGrpSpPr>
-      <p:grpSpPr/>
-      <p:sp>
-        <p:nvSpPr>
-          <p:cNvPr id="240" name="Google Shape;240;p38"/>
-          <p:cNvSpPr/>
-          <p:nvPr/>
-        </p:nvSpPr>
-        <p:spPr>
-          <a:xfrm>
-            <a:off x="853440" y="790892"/>
-            <a:ext cx="9055100" cy="731520"/>
-          </a:xfrm>
-          <a:prstGeom prst="rect">
-            <a:avLst/>
-          </a:prstGeom>
-          <a:noFill/>
-          <a:ln>
-            <a:noFill/>
-          </a:ln>
-        </p:spPr>
-        <p:txBody>
-          <a:bodyPr spcFirstLastPara="1" wrap="square" lIns="91425" tIns="45700" rIns="91425" bIns="45700" anchor="ctr" anchorCtr="0">
-            <a:noAutofit/>
-          </a:bodyPr>
-          <a:lstStyle/>
-          <a:p>
-            <a:pPr marL="0" marR="0" lvl="0" indent="0" algn="l" rtl="0">
-              <a:lnSpc>
-                <a:spcPct val="100000"/>
-              </a:lnSpc>
-              <a:spcBef>
-                <a:spcPts val="0"/>
-              </a:spcBef>
-              <a:spcAft>
-                <a:spcPts val="0"/>
-              </a:spcAft>
-              <a:buNone/>
-            </a:pPr>
-            <a:r>
-              <a:rPr lang="en-US" sz="4400" dirty="0">
-                <a:solidFill>
-                  <a:srgbClr val="3A3A3A"/>
-                </a:solidFill>
-                <a:latin typeface="Roboto Condensed Medium"/>
-                <a:ea typeface="Roboto Condensed Medium"/>
-                <a:cs typeface="Roboto Condensed Medium"/>
-                <a:sym typeface="Roboto Condensed Medium"/>
-              </a:rPr>
-              <a:t>Agenda de la clase</a:t>
-            </a:r>
-            <a:endParaRPr dirty="0"/>
-          </a:p>
-        </p:txBody>
-      </p:sp>
-      <p:sp>
-        <p:nvSpPr>
-          <p:cNvPr id="241" name="Google Shape;241;p38"/>
-          <p:cNvSpPr/>
-          <p:nvPr/>
-        </p:nvSpPr>
-        <p:spPr>
-          <a:xfrm>
-            <a:off x="889446" y="2014379"/>
-            <a:ext cx="9385264" cy="3413760"/>
-          </a:xfrm>
-          <a:prstGeom prst="rect">
-            <a:avLst/>
-          </a:prstGeom>
-          <a:noFill/>
-          <a:ln>
-            <a:noFill/>
-          </a:ln>
-        </p:spPr>
-        <p:txBody>
-          <a:bodyPr spcFirstLastPara="1" wrap="square" lIns="91425" tIns="45700" rIns="91425" bIns="45700" anchor="t" anchorCtr="0">
-            <a:noAutofit/>
-          </a:bodyPr>
-          <a:lstStyle/>
-          <a:p>
-            <a:pPr marL="0" marR="0" indent="0" algn="l" rtl="0">
-              <a:lnSpc>
-                <a:spcPct val="100000"/>
-              </a:lnSpc>
-              <a:spcBef>
-                <a:spcPts val="0"/>
-              </a:spcBef>
-              <a:spcAft>
-                <a:spcPts val="800"/>
-              </a:spcAft>
-              <a:buNone/>
-            </a:pPr>
-            <a:r>
-              <a:rPr sz="1800">
-                <a:solidFill>
-                  <a:srgbClr val="3A3A3A"/>
-                </a:solidFill>
-                <a:latin typeface="Roboto Condensed"/>
-              </a:rPr>
-              <a:t>• La digitalización en la organización pública y privada</a:t>
-            </a:r>
-            <a:endParaRPr dirty="0"/>
-          </a:p>
-          <a:p>
-            <a:pPr marL="0" marR="0" indent="0" algn="l" rtl="0">
-              <a:lnSpc>
-                <a:spcPct val="100000"/>
-              </a:lnSpc>
-              <a:spcBef>
-                <a:spcPts val="0"/>
-              </a:spcBef>
-              <a:spcAft>
-                <a:spcPts val="800"/>
-              </a:spcAft>
-              <a:buNone/>
-            </a:pPr>
-            <a:r>
-              <a:rPr sz="1800">
-                <a:solidFill>
-                  <a:srgbClr val="3A3A3A"/>
-                </a:solidFill>
-                <a:latin typeface="Roboto Condensed"/>
-              </a:rPr>
-              <a:t>– Caso comparativo: e-Estonia y la plataforma X-Road</a:t>
-            </a:r>
-            <a:endParaRPr dirty="0"/>
-          </a:p>
-          <a:p>
-            <a:pPr marL="0" marR="0" indent="0" algn="l" rtl="0">
-              <a:lnSpc>
-                <a:spcPct val="100000"/>
-              </a:lnSpc>
-              <a:spcBef>
-                <a:spcPts val="0"/>
-              </a:spcBef>
-              <a:spcAft>
-                <a:spcPts val="800"/>
-              </a:spcAft>
-              <a:buNone/>
-            </a:pPr>
-            <a:r>
-              <a:rPr sz="1800">
-                <a:solidFill>
-                  <a:srgbClr val="3A3A3A"/>
-                </a:solidFill>
-                <a:latin typeface="Roboto Condensed"/>
-              </a:rPr>
-              <a:t>– Demostración en vivo: recorrido por e-Estonia y datos abiertos del Estado de Chile</a:t>
-            </a:r>
-            <a:endParaRPr dirty="0"/>
-          </a:p>
-          <a:p>
-            <a:pPr marL="0" marR="0" indent="0" algn="l" rtl="0">
-              <a:lnSpc>
-                <a:spcPct val="100000"/>
-              </a:lnSpc>
-              <a:spcBef>
-                <a:spcPts val="0"/>
-              </a:spcBef>
-              <a:spcAft>
-                <a:spcPts val="800"/>
-              </a:spcAft>
-              <a:buNone/>
-            </a:pPr>
-            <a:r>
-              <a:rPr sz="1800">
-                <a:solidFill>
-                  <a:srgbClr val="3A3A3A"/>
-                </a:solidFill>
-                <a:latin typeface="Roboto Condensed"/>
-              </a:rPr>
-              <a:t>– Caso chileno: ClaveÚnica y la digitalización del Estado</a:t>
-            </a:r>
-            <a:endParaRPr dirty="0"/>
-          </a:p>
-          <a:p>
-            <a:pPr marL="0" marR="0" indent="0" algn="l" rtl="0">
-              <a:lnSpc>
-                <a:spcPct val="100000"/>
-              </a:lnSpc>
-              <a:spcBef>
-                <a:spcPts val="0"/>
-              </a:spcBef>
-              <a:spcAft>
-                <a:spcPts val="800"/>
-              </a:spcAft>
-              <a:buNone/>
-            </a:pPr>
-            <a:r>
-              <a:rPr sz="1800">
-                <a:solidFill>
-                  <a:srgbClr val="3A3A3A"/>
-                </a:solidFill>
-                <a:latin typeface="Roboto Condensed"/>
-              </a:rPr>
-              <a:t>• Inteligencia Artificial en la transformación digital</a:t>
-            </a:r>
-            <a:endParaRPr dirty="0"/>
-          </a:p>
-          <a:p>
-            <a:pPr marL="0" marR="0" indent="0" algn="l" rtl="0">
-              <a:lnSpc>
-                <a:spcPct val="100000"/>
-              </a:lnSpc>
-              <a:spcBef>
-                <a:spcPts val="0"/>
-              </a:spcBef>
-              <a:spcAft>
-                <a:spcPts val="800"/>
-              </a:spcAft>
-              <a:buNone/>
-            </a:pPr>
-            <a:r>
-              <a:rPr sz="1800">
-                <a:solidFill>
-                  <a:srgbClr val="3A3A3A"/>
-                </a:solidFill>
-                <a:latin typeface="Roboto Condensed"/>
-              </a:rPr>
-              <a:t>• El Internet de las Cosas (IoT)</a:t>
-            </a:r>
-            <a:endParaRPr dirty="0"/>
-          </a:p>
-          <a:p>
-            <a:pPr marL="0" marR="0" indent="0" algn="l" rtl="0">
-              <a:lnSpc>
-                <a:spcPct val="100000"/>
-              </a:lnSpc>
-              <a:spcBef>
-                <a:spcPts val="0"/>
-              </a:spcBef>
-              <a:spcAft>
-                <a:spcPts val="800"/>
-              </a:spcAft>
-              <a:buNone/>
-            </a:pPr>
-            <a:r>
-              <a:rPr sz="1800">
-                <a:solidFill>
-                  <a:srgbClr val="3A3A3A"/>
-                </a:solidFill>
-                <a:latin typeface="Roboto Condensed"/>
-              </a:rPr>
-              <a:t>– Caso de estudio: John Deere y la Agricultura 4.0</a:t>
-            </a:r>
-            <a:endParaRPr dirty="0"/>
-          </a:p>
-          <a:p>
-            <a:pPr marL="0" marR="0" indent="0" algn="l" rtl="0">
-              <a:lnSpc>
-                <a:spcPct val="100000"/>
-              </a:lnSpc>
-              <a:spcBef>
-                <a:spcPts val="0"/>
-              </a:spcBef>
-              <a:spcAft>
-                <a:spcPts val="800"/>
-              </a:spcAft>
-              <a:buNone/>
-            </a:pPr>
-            <a:r>
-              <a:rPr sz="1800">
-                <a:solidFill>
-                  <a:srgbClr val="3A3A3A"/>
-                </a:solidFill>
-                <a:latin typeface="Roboto Condensed"/>
-              </a:rPr>
-              <a:t>• Blockchain</a:t>
-            </a:r>
-            <a:endParaRPr dirty="0"/>
-          </a:p>
-          <a:p>
-            <a:pPr marL="0" marR="0" indent="0" algn="l" rtl="0">
-              <a:lnSpc>
-                <a:spcPct val="100000"/>
-              </a:lnSpc>
-              <a:spcBef>
-                <a:spcPts val="0"/>
-              </a:spcBef>
-              <a:spcAft>
-                <a:spcPts val="800"/>
-              </a:spcAft>
-              <a:buNone/>
-            </a:pPr>
-            <a:r>
-              <a:rPr sz="1800">
-                <a:solidFill>
-                  <a:srgbClr val="3A3A3A"/>
-                </a:solidFill>
-                <a:latin typeface="Roboto Condensed"/>
-              </a:rPr>
-              <a:t>– Caso de estudio: IBM Food Trust, Walmart y la cadena de suministro</a:t>
-            </a:r>
-            <a:endParaRPr dirty="0"/>
-          </a:p>
-          <a:p>
-            <a:pPr marL="0" marR="0" indent="0" algn="l" rtl="0">
-              <a:lnSpc>
-                <a:spcPct val="100000"/>
-              </a:lnSpc>
-              <a:spcBef>
-                <a:spcPts val="0"/>
-              </a:spcBef>
-              <a:spcAft>
-                <a:spcPts val="800"/>
-              </a:spcAft>
-              <a:buNone/>
-            </a:pPr>
-            <a:r>
-              <a:rPr sz="1800">
-                <a:solidFill>
-                  <a:srgbClr val="3A3A3A"/>
-                </a:solidFill>
-                <a:latin typeface="Roboto Condensed"/>
-              </a:rPr>
-              <a:t>• Ética, privacidad y normativa: hilo transversal del diplomado</a:t>
-            </a:r>
-            <a:endParaRPr dirty="0"/>
-          </a:p>
-        </p:txBody>
-      </p:sp>
-      <p:pic>
-        <p:nvPicPr>
-          <p:cNvPr id="252" name="Google Shape;252;p38"/>
-          <p:cNvPicPr preferRelativeResize="0"/>
-          <p:nvPr/>
-        </p:nvPicPr>
-        <p:blipFill rotWithShape="1">
-          <a:blip r:embed="rId2">
-            <a:alphaModFix/>
-          </a:blip>
-          <a:srcRect/>
-          <a:stretch/>
-        </p:blipFill>
-        <p:spPr>
-          <a:xfrm>
-            <a:off x="10120580" y="230187"/>
-            <a:ext cx="1866726" cy="590083"/>
-          </a:xfrm>
-          <a:prstGeom prst="rect">
-            <a:avLst/>
-          </a:prstGeom>
-          <a:noFill/>
-          <a:ln>
-            <a:noFill/>
-          </a:ln>
-        </p:spPr>
-      </p:pic>
-      <p:sp>
-        <p:nvSpPr>
-          <p:cNvPr id="2" name="Marcador de número de diapositiva 2">
-            <a:extLst>
-              <a:ext uri="{FF2B5EF4-FFF2-40B4-BE49-F238E27FC236}">
-                <a16:creationId xmlns:a16="http://schemas.microsoft.com/office/drawing/2014/main" id="{9E2EBC40-EC40-BDF2-F68A-0BA88B712A11}"/>
-              </a:ext>
-            </a:extLst>
-          </p:cNvPr>
-          <p:cNvSpPr txBox="1">
-            <a:spLocks/>
-          </p:cNvSpPr>
-          <p:nvPr/>
-        </p:nvSpPr>
-        <p:spPr>
-          <a:xfrm>
-            <a:off x="8610600" y="6356351"/>
-            <a:ext cx="2743200" cy="365125"/>
-          </a:xfrm>
-          <a:prstGeom prst="rect">
-            <a:avLst/>
-          </a:prstGeom>
-        </p:spPr>
-        <p:txBody>
-          <a:bodyPr/>
-          <a:lstStyle>
-            <a:defPPr marR="0" lvl="0" algn="l" rtl="0">
-              <a:lnSpc>
-                <a:spcPct val="100000"/>
-              </a:lnSpc>
-              <a:spcBef>
-                <a:spcPts val="0"/>
-              </a:spcBef>
-              <a:spcAft>
-                <a:spcPts val="0"/>
-              </a:spcAft>
-            </a:defPPr>
-            <a:lvl1pPr marR="0" lvl="0" algn="l" rtl="0">
-              <a:lnSpc>
-                <a:spcPct val="100000"/>
-              </a:lnSpc>
-              <a:spcBef>
-                <a:spcPts val="0"/>
-              </a:spcBef>
-              <a:spcAft>
-                <a:spcPts val="0"/>
-              </a:spcAft>
-              <a:buClr>
-                <a:srgbClr val="000000"/>
-              </a:buClr>
-              <a:buFont typeface="Arial"/>
-              <a:defRPr sz="1400" b="0" i="0" u="none" strike="noStrike" cap="none">
-                <a:solidFill>
-                  <a:srgbClr val="000000"/>
-                </a:solidFill>
-                <a:latin typeface="Arial"/>
-                <a:ea typeface="Arial"/>
-                <a:cs typeface="Arial"/>
-                <a:sym typeface="Arial"/>
-              </a:defRPr>
-            </a:lvl1pPr>
-            <a:lvl2pPr marR="0" lvl="1" algn="l" rtl="0">
-              <a:lnSpc>
-                <a:spcPct val="100000"/>
-              </a:lnSpc>
-              <a:spcBef>
-                <a:spcPts val="0"/>
-              </a:spcBef>
-              <a:spcAft>
-                <a:spcPts val="0"/>
-              </a:spcAft>
-              <a:buClr>
-                <a:srgbClr val="000000"/>
-              </a:buClr>
-              <a:buFont typeface="Arial"/>
-              <a:defRPr sz="1400" b="0" i="0" u="none" strike="noStrike" cap="none">
-                <a:solidFill>
-                  <a:srgbClr val="000000"/>
-                </a:solidFill>
-                <a:latin typeface="Arial"/>
-                <a:ea typeface="Arial"/>
-                <a:cs typeface="Arial"/>
-                <a:sym typeface="Arial"/>
-              </a:defRPr>
-            </a:lvl2pPr>
-            <a:lvl3pPr marR="0" lvl="2" algn="l" rtl="0">
-              <a:lnSpc>
-                <a:spcPct val="100000"/>
-              </a:lnSpc>
-              <a:spcBef>
-                <a:spcPts val="0"/>
-              </a:spcBef>
-              <a:spcAft>
-                <a:spcPts val="0"/>
-              </a:spcAft>
-              <a:buClr>
-                <a:srgbClr val="000000"/>
-              </a:buClr>
-              <a:buFont typeface="Arial"/>
-              <a:defRPr sz="1400" b="0" i="0" u="none" strike="noStrike" cap="none">
-                <a:solidFill>
-                  <a:srgbClr val="000000"/>
-                </a:solidFill>
-                <a:latin typeface="Arial"/>
-                <a:ea typeface="Arial"/>
-                <a:cs typeface="Arial"/>
-                <a:sym typeface="Arial"/>
-              </a:defRPr>
-            </a:lvl3pPr>
-            <a:lvl4pPr marR="0" lvl="3" algn="l" rtl="0">
-              <a:lnSpc>
-                <a:spcPct val="100000"/>
-              </a:lnSpc>
-              <a:spcBef>
-                <a:spcPts val="0"/>
-              </a:spcBef>
-              <a:spcAft>
-                <a:spcPts val="0"/>
-              </a:spcAft>
-              <a:buClr>
-                <a:srgbClr val="000000"/>
-              </a:buClr>
-              <a:buFont typeface="Arial"/>
-              <a:defRPr sz="1400" b="0" i="0" u="none" strike="noStrike" cap="none">
-                <a:solidFill>
-                  <a:srgbClr val="000000"/>
-                </a:solidFill>
-                <a:latin typeface="Arial"/>
-                <a:ea typeface="Arial"/>
-                <a:cs typeface="Arial"/>
-                <a:sym typeface="Arial"/>
-              </a:defRPr>
-            </a:lvl4pPr>
-            <a:lvl5pPr marR="0" lvl="4" algn="l" rtl="0">
-              <a:lnSpc>
-                <a:spcPct val="100000"/>
-              </a:lnSpc>
-              <a:spcBef>
-                <a:spcPts val="0"/>
-              </a:spcBef>
-              <a:spcAft>
-                <a:spcPts val="0"/>
-              </a:spcAft>
-              <a:buClr>
-                <a:srgbClr val="000000"/>
-              </a:buClr>
-              <a:buFont typeface="Arial"/>
-              <a:defRPr sz="1400" b="0" i="0" u="none" strike="noStrike" cap="none">
-                <a:solidFill>
-                  <a:srgbClr val="000000"/>
-                </a:solidFill>
-                <a:latin typeface="Arial"/>
-                <a:ea typeface="Arial"/>
-                <a:cs typeface="Arial"/>
-                <a:sym typeface="Arial"/>
-              </a:defRPr>
-            </a:lvl5pPr>
-            <a:lvl6pPr marR="0" lvl="5" algn="l" rtl="0">
-              <a:lnSpc>
-                <a:spcPct val="100000"/>
-              </a:lnSpc>
-              <a:spcBef>
-                <a:spcPts val="0"/>
-              </a:spcBef>
-              <a:spcAft>
-                <a:spcPts val="0"/>
-              </a:spcAft>
-              <a:buClr>
-                <a:srgbClr val="000000"/>
-              </a:buClr>
-              <a:buFont typeface="Arial"/>
-              <a:defRPr sz="1400" b="0" i="0" u="none" strike="noStrike" cap="none">
-                <a:solidFill>
-                  <a:srgbClr val="000000"/>
-                </a:solidFill>
-                <a:latin typeface="Arial"/>
-                <a:ea typeface="Arial"/>
-                <a:cs typeface="Arial"/>
-                <a:sym typeface="Arial"/>
-              </a:defRPr>
-            </a:lvl6pPr>
-            <a:lvl7pPr marR="0" lvl="6" algn="l" rtl="0">
-              <a:lnSpc>
-                <a:spcPct val="100000"/>
-              </a:lnSpc>
-              <a:spcBef>
-                <a:spcPts val="0"/>
-              </a:spcBef>
-              <a:spcAft>
-                <a:spcPts val="0"/>
-              </a:spcAft>
-              <a:buClr>
-                <a:srgbClr val="000000"/>
-              </a:buClr>
-              <a:buFont typeface="Arial"/>
-              <a:defRPr sz="1400" b="0" i="0" u="none" strike="noStrike" cap="none">
-                <a:solidFill>
-                  <a:srgbClr val="000000"/>
-                </a:solidFill>
-                <a:latin typeface="Arial"/>
-                <a:ea typeface="Arial"/>
-                <a:cs typeface="Arial"/>
-                <a:sym typeface="Arial"/>
-              </a:defRPr>
-            </a:lvl7pPr>
-            <a:lvl8pPr marR="0" lvl="7" algn="l" rtl="0">
-              <a:lnSpc>
-                <a:spcPct val="100000"/>
-              </a:lnSpc>
-              <a:spcBef>
-                <a:spcPts val="0"/>
-              </a:spcBef>
-              <a:spcAft>
-                <a:spcPts val="0"/>
-              </a:spcAft>
-              <a:buClr>
-                <a:srgbClr val="000000"/>
-              </a:buClr>
-              <a:buFont typeface="Arial"/>
-              <a:defRPr sz="1400" b="0" i="0" u="none" strike="noStrike" cap="none">
-                <a:solidFill>
-                  <a:srgbClr val="000000"/>
-                </a:solidFill>
-                <a:latin typeface="Arial"/>
-                <a:ea typeface="Arial"/>
-                <a:cs typeface="Arial"/>
-                <a:sym typeface="Arial"/>
-              </a:defRPr>
-            </a:lvl8pPr>
-            <a:lvl9pPr marR="0" lvl="8" algn="l" rtl="0">
-              <a:lnSpc>
-                <a:spcPct val="100000"/>
-              </a:lnSpc>
-              <a:spcBef>
-                <a:spcPts val="0"/>
-              </a:spcBef>
-              <a:spcAft>
-                <a:spcPts val="0"/>
-              </a:spcAft>
-              <a:buClr>
-                <a:srgbClr val="000000"/>
-              </a:buClr>
-              <a:buFont typeface="Arial"/>
-              <a:defRPr sz="1400" b="0" i="0" u="none" strike="noStrike" cap="none">
-                <a:solidFill>
-                  <a:srgbClr val="000000"/>
-                </a:solidFill>
-                <a:latin typeface="Arial"/>
-                <a:ea typeface="Arial"/>
-                <a:cs typeface="Arial"/>
-                <a:sym typeface="Arial"/>
-              </a:defRPr>
-            </a:lvl9pPr>
-          </a:lstStyle>
-          <a:p>
-            <a:pPr algn="r"/>
-            <a:r>
-              <a:t>4</a:t>
-            </a:r>
-            <a:endParaRPr lang="en-US"/>
-          </a:p>
-        </p:txBody>
-      </p:sp>
-    </p:spTree>
-  </p:cSld>
-  <p:clrMapOvr>
-    <a:masterClrMapping/>
-  </p:clrMapOvr>
-</p:sld>
-</file>
-
-<file path=ppt/slides/slide5.xml><?xml version="1.0" encoding="utf-8"?>
 <p:sld xmlns:a="http://schemas.openxmlformats.org/drawingml/2006/main" xmlns:p="http://schemas.openxmlformats.org/presentationml/2006/main" xmlns:r="http://schemas.openxmlformats.org/officeDocument/2006/relationships">
   <p:cSld>
     <p:spTree>
@@ -57015,7 +51868,7 @@
           <a:p>
             <a:pPr algn="r"/>
             <a:r>
-              <a:t>5</a:t>
+              <a:t>4</a:t>
             </a:r>
             <a:endParaRPr lang="en-US"/>
           </a:p>
@@ -57029,7 +51882,7 @@
 </p:sld>
 </file>
 
-<file path=ppt/slides/slide6.xml><?xml version="1.0" encoding="utf-8"?>
+<file path=ppt/slides/slide5.xml><?xml version="1.0" encoding="utf-8"?>
 <p:sld xmlns:a="http://schemas.openxmlformats.org/drawingml/2006/main" xmlns:p="http://schemas.openxmlformats.org/presentationml/2006/main" xmlns:r="http://schemas.openxmlformats.org/officeDocument/2006/relationships">
   <p:cSld>
     <p:spTree>
@@ -57474,7 +52327,7 @@
           <a:p>
             <a:pPr algn="r"/>
             <a:r>
-              <a:t>6</a:t>
+              <a:t>5</a:t>
             </a:r>
             <a:endParaRPr lang="en-US"/>
           </a:p>
@@ -57488,7 +52341,7 @@
 </p:sld>
 </file>
 
-<file path=ppt/slides/slide7.xml><?xml version="1.0" encoding="utf-8"?>
+<file path=ppt/slides/slide6.xml><?xml version="1.0" encoding="utf-8"?>
 <p:sld xmlns:a="http://schemas.openxmlformats.org/drawingml/2006/main" xmlns:p="http://schemas.openxmlformats.org/presentationml/2006/main" xmlns:r="http://schemas.openxmlformats.org/officeDocument/2006/relationships">
   <p:cSld>
     <p:spTree>
@@ -57965,7 +52818,7 @@
           <a:p>
             <a:pPr algn="r"/>
             <a:r>
-              <a:t>7</a:t>
+              <a:t>6</a:t>
             </a:r>
             <a:endParaRPr lang="en-US"/>
           </a:p>
@@ -57979,7 +52832,7 @@
 </p:sld>
 </file>
 
-<file path=ppt/slides/slide8.xml><?xml version="1.0" encoding="utf-8"?>
+<file path=ppt/slides/slide7.xml><?xml version="1.0" encoding="utf-8"?>
 <p:sld xmlns:a="http://schemas.openxmlformats.org/drawingml/2006/main" xmlns:p="http://schemas.openxmlformats.org/presentationml/2006/main" xmlns:r="http://schemas.openxmlformats.org/officeDocument/2006/relationships">
   <p:cSld>
     <p:spTree>
@@ -58440,7 +53293,7 @@
           <a:p>
             <a:pPr algn="r"/>
             <a:r>
-              <a:t>8</a:t>
+              <a:t>7</a:t>
             </a:r>
             <a:endParaRPr lang="en-US"/>
           </a:p>
@@ -58454,7 +53307,7 @@
 </p:sld>
 </file>
 
-<file path=ppt/slides/slide9.xml><?xml version="1.0" encoding="utf-8"?>
+<file path=ppt/slides/slide8.xml><?xml version="1.0" encoding="utf-8"?>
 <p:sld xmlns:a="http://schemas.openxmlformats.org/drawingml/2006/main" xmlns:p="http://schemas.openxmlformats.org/presentationml/2006/main" xmlns:r="http://schemas.openxmlformats.org/officeDocument/2006/relationships">
   <p:cSld>
     <p:spTree>
@@ -58851,7 +53704,7 @@
           <a:p>
             <a:pPr algn="r"/>
             <a:r>
-              <a:t>9</a:t>
+              <a:t>8</a:t>
             </a:r>
             <a:endParaRPr lang="en-US"/>
           </a:p>
@@ -59232,6 +54085,481 @@
           </a:graphicData>
         </a:graphic>
       </p:graphicFrame>
+    </p:spTree>
+  </p:cSld>
+  <p:clrMapOvr>
+    <a:masterClrMapping/>
+  </p:clrMapOvr>
+</p:sld>
+</file>
+
+<file path=ppt/slides/slide9.xml><?xml version="1.0" encoding="utf-8"?>
+<p:sld xmlns:a="http://schemas.openxmlformats.org/drawingml/2006/main" xmlns:p="http://schemas.openxmlformats.org/presentationml/2006/main" xmlns:r="http://schemas.openxmlformats.org/officeDocument/2006/relationships">
+  <p:cSld>
+    <p:spTree>
+      <p:nvGrpSpPr>
+        <p:cNvPr id="1" name=""/>
+        <p:cNvGrpSpPr/>
+        <p:nvPr/>
+      </p:nvGrpSpPr>
+      <p:grpSpPr/>
+      <p:sp>
+        <p:nvSpPr>
+          <p:cNvPr id="240" name="Google Shape;240;p38"/>
+          <p:cNvSpPr/>
+          <p:nvPr/>
+        </p:nvSpPr>
+        <p:spPr>
+          <a:xfrm>
+            <a:off x="853440" y="790892"/>
+            <a:ext cx="9055100" cy="731520"/>
+          </a:xfrm>
+          <a:prstGeom prst="rect">
+            <a:avLst/>
+          </a:prstGeom>
+          <a:noFill/>
+          <a:ln>
+            <a:noFill/>
+          </a:ln>
+        </p:spPr>
+        <p:txBody>
+          <a:bodyPr spcFirstLastPara="1" wrap="square" lIns="91425" tIns="45700" rIns="91425" bIns="45700" anchor="ctr" anchorCtr="0">
+            <a:noAutofit/>
+          </a:bodyPr>
+          <a:lstStyle/>
+          <a:p>
+            <a:pPr marL="0" marR="0" lvl="0" indent="0" algn="l" rtl="0">
+              <a:lnSpc>
+                <a:spcPct val="100000"/>
+              </a:lnSpc>
+              <a:spcBef>
+                <a:spcPts val="0"/>
+              </a:spcBef>
+              <a:spcAft>
+                <a:spcPts val="0"/>
+              </a:spcAft>
+              <a:buNone/>
+            </a:pPr>
+            <a:r>
+              <a:rPr lang="en-US" sz="4400" dirty="0">
+                <a:solidFill>
+                  <a:srgbClr val="3A3A3A"/>
+                </a:solidFill>
+                <a:latin typeface="Roboto Condensed Medium"/>
+                <a:ea typeface="Roboto Condensed Medium"/>
+                <a:cs typeface="Roboto Condensed Medium"/>
+                <a:sym typeface="Roboto Condensed Medium"/>
+              </a:rPr>
+              <a:t>¿Paliativo o solución? El riesgo de digitalizar un mal proceso</a:t>
+            </a:r>
+            <a:endParaRPr dirty="0"/>
+          </a:p>
+        </p:txBody>
+      </p:sp>
+      <p:sp>
+        <p:nvSpPr>
+          <p:cNvPr id="241" name="Google Shape;241;p38"/>
+          <p:cNvSpPr/>
+          <p:nvPr/>
+        </p:nvSpPr>
+        <p:spPr>
+          <a:xfrm>
+            <a:off x="889446" y="2014379"/>
+            <a:ext cx="9385264" cy="3413760"/>
+          </a:xfrm>
+          <a:prstGeom prst="rect">
+            <a:avLst/>
+          </a:prstGeom>
+          <a:noFill/>
+          <a:ln>
+            <a:noFill/>
+          </a:ln>
+        </p:spPr>
+        <p:txBody>
+          <a:bodyPr spcFirstLastPara="1" wrap="square" lIns="91425" tIns="45700" rIns="91425" bIns="45700" anchor="t" anchorCtr="0">
+            <a:noAutofit/>
+          </a:bodyPr>
+          <a:lstStyle/>
+          <a:p>
+            <a:pPr marL="0" marR="0" indent="0" algn="l" rtl="0">
+              <a:lnSpc>
+                <a:spcPct val="100000"/>
+              </a:lnSpc>
+              <a:spcBef>
+                <a:spcPts val="0"/>
+              </a:spcBef>
+              <a:spcAft>
+                <a:spcPts val="800"/>
+              </a:spcAft>
+              <a:buNone/>
+            </a:pPr>
+            <a:r>
+              <a:rPr sz="2000">
+                <a:solidFill>
+                  <a:srgbClr val="3A3A3A"/>
+                </a:solidFill>
+                <a:latin typeface="Roboto Condensed"/>
+              </a:rPr>
+              <a:t>• Digitalizar un mal proceso traslada al entorno virtual las mismas demoras y duplicidades del papel</a:t>
+            </a:r>
+            <a:endParaRPr dirty="0"/>
+          </a:p>
+          <a:p>
+            <a:pPr lvl="1">
+              <a:spcAft>
+                <a:spcPts val="400"/>
+              </a:spcAft>
+            </a:pPr>
+            <a:r>
+              <a:rPr sz="1800">
+                <a:solidFill>
+                  <a:srgbClr val="3A3A3A"/>
+                </a:solidFill>
+                <a:latin typeface="Roboto Condensed"/>
+              </a:rPr>
+              <a:t>– Ej.: trámite que inicia en línea pero exige imprimir, ir a la oficina y repetir información</a:t>
+            </a:r>
+          </a:p>
+          <a:p>
+            <a:pPr>
+              <a:spcAft>
+                <a:spcPts val="800"/>
+              </a:spcAft>
+            </a:pPr>
+            <a:r>
+              <a:rPr sz="2000">
+                <a:solidFill>
+                  <a:srgbClr val="3A3A3A"/>
+                </a:solidFill>
+                <a:latin typeface="Roboto Condensed"/>
+              </a:rPr>
+              <a:t>• Una transformación bien diseñada: simplifica procedimientos, conecta bases de datos, reduce discrecionalidad</a:t>
+            </a:r>
+          </a:p>
+          <a:p>
+            <a:pPr>
+              <a:spcAft>
+                <a:spcPts val="800"/>
+              </a:spcAft>
+            </a:pPr>
+            <a:r>
+              <a:rPr sz="2000">
+                <a:solidFill>
+                  <a:srgbClr val="3A3A3A"/>
+                </a:solidFill>
+                <a:latin typeface="Roboto Condensed"/>
+              </a:rPr>
+              <a:t>• Aumenta la trazabilidad de las decisiones y mejora la experiencia ciudadana</a:t>
+            </a:r>
+          </a:p>
+          <a:p>
+            <a:pPr>
+              <a:spcAft>
+                <a:spcPts val="800"/>
+              </a:spcAft>
+            </a:pPr>
+            <a:r>
+              <a:rPr sz="2000">
+                <a:solidFill>
+                  <a:srgbClr val="3A3A3A"/>
+                </a:solidFill>
+                <a:latin typeface="Roboto Condensed"/>
+              </a:rPr>
+              <a:t>• Requiere liderazgo estratégico que sostenga el cambio más allá de una administración específica</a:t>
+            </a:r>
+          </a:p>
+        </p:txBody>
+      </p:sp>
+      <p:pic>
+        <p:nvPicPr>
+          <p:cNvPr id="252" name="Google Shape;252;p38"/>
+          <p:cNvPicPr preferRelativeResize="0"/>
+          <p:nvPr/>
+        </p:nvPicPr>
+        <p:blipFill rotWithShape="1">
+          <a:blip r:embed="rId2">
+            <a:alphaModFix/>
+          </a:blip>
+          <a:srcRect/>
+          <a:stretch/>
+        </p:blipFill>
+        <p:spPr>
+          <a:xfrm>
+            <a:off x="10120580" y="230187"/>
+            <a:ext cx="1866726" cy="590083"/>
+          </a:xfrm>
+          <a:prstGeom prst="rect">
+            <a:avLst/>
+          </a:prstGeom>
+          <a:noFill/>
+          <a:ln>
+            <a:noFill/>
+          </a:ln>
+        </p:spPr>
+      </p:pic>
+      <p:sp>
+        <p:nvSpPr>
+          <p:cNvPr id="2" name="Marcador de número de diapositiva 2">
+            <a:extLst>
+              <a:ext uri="{FF2B5EF4-FFF2-40B4-BE49-F238E27FC236}">
+                <a16:creationId xmlns:a16="http://schemas.microsoft.com/office/drawing/2014/main" id="{9E2EBC40-EC40-BDF2-F68A-0BA88B712A11}"/>
+              </a:ext>
+            </a:extLst>
+          </p:cNvPr>
+          <p:cNvSpPr txBox="1">
+            <a:spLocks/>
+          </p:cNvSpPr>
+          <p:nvPr/>
+        </p:nvSpPr>
+        <p:spPr>
+          <a:xfrm>
+            <a:off x="8610600" y="6356351"/>
+            <a:ext cx="2743200" cy="365125"/>
+          </a:xfrm>
+          <a:prstGeom prst="rect">
+            <a:avLst/>
+          </a:prstGeom>
+        </p:spPr>
+        <p:txBody>
+          <a:bodyPr/>
+          <a:lstStyle>
+            <a:defPPr marR="0" lvl="0" algn="l" rtl="0">
+              <a:lnSpc>
+                <a:spcPct val="100000"/>
+              </a:lnSpc>
+              <a:spcBef>
+                <a:spcPts val="0"/>
+              </a:spcBef>
+              <a:spcAft>
+                <a:spcPts val="0"/>
+              </a:spcAft>
+            </a:defPPr>
+            <a:lvl1pPr marR="0" lvl="0" algn="l" rtl="0">
+              <a:lnSpc>
+                <a:spcPct val="100000"/>
+              </a:lnSpc>
+              <a:spcBef>
+                <a:spcPts val="0"/>
+              </a:spcBef>
+              <a:spcAft>
+                <a:spcPts val="0"/>
+              </a:spcAft>
+              <a:buClr>
+                <a:srgbClr val="000000"/>
+              </a:buClr>
+              <a:buFont typeface="Arial"/>
+              <a:defRPr sz="1400" b="0" i="0" u="none" strike="noStrike" cap="none">
+                <a:solidFill>
+                  <a:srgbClr val="000000"/>
+                </a:solidFill>
+                <a:latin typeface="Arial"/>
+                <a:ea typeface="Arial"/>
+                <a:cs typeface="Arial"/>
+                <a:sym typeface="Arial"/>
+              </a:defRPr>
+            </a:lvl1pPr>
+            <a:lvl2pPr marR="0" lvl="1" algn="l" rtl="0">
+              <a:lnSpc>
+                <a:spcPct val="100000"/>
+              </a:lnSpc>
+              <a:spcBef>
+                <a:spcPts val="0"/>
+              </a:spcBef>
+              <a:spcAft>
+                <a:spcPts val="0"/>
+              </a:spcAft>
+              <a:buClr>
+                <a:srgbClr val="000000"/>
+              </a:buClr>
+              <a:buFont typeface="Arial"/>
+              <a:defRPr sz="1400" b="0" i="0" u="none" strike="noStrike" cap="none">
+                <a:solidFill>
+                  <a:srgbClr val="000000"/>
+                </a:solidFill>
+                <a:latin typeface="Arial"/>
+                <a:ea typeface="Arial"/>
+                <a:cs typeface="Arial"/>
+                <a:sym typeface="Arial"/>
+              </a:defRPr>
+            </a:lvl2pPr>
+            <a:lvl3pPr marR="0" lvl="2" algn="l" rtl="0">
+              <a:lnSpc>
+                <a:spcPct val="100000"/>
+              </a:lnSpc>
+              <a:spcBef>
+                <a:spcPts val="0"/>
+              </a:spcBef>
+              <a:spcAft>
+                <a:spcPts val="0"/>
+              </a:spcAft>
+              <a:buClr>
+                <a:srgbClr val="000000"/>
+              </a:buClr>
+              <a:buFont typeface="Arial"/>
+              <a:defRPr sz="1400" b="0" i="0" u="none" strike="noStrike" cap="none">
+                <a:solidFill>
+                  <a:srgbClr val="000000"/>
+                </a:solidFill>
+                <a:latin typeface="Arial"/>
+                <a:ea typeface="Arial"/>
+                <a:cs typeface="Arial"/>
+                <a:sym typeface="Arial"/>
+              </a:defRPr>
+            </a:lvl3pPr>
+            <a:lvl4pPr marR="0" lvl="3" algn="l" rtl="0">
+              <a:lnSpc>
+                <a:spcPct val="100000"/>
+              </a:lnSpc>
+              <a:spcBef>
+                <a:spcPts val="0"/>
+              </a:spcBef>
+              <a:spcAft>
+                <a:spcPts val="0"/>
+              </a:spcAft>
+              <a:buClr>
+                <a:srgbClr val="000000"/>
+              </a:buClr>
+              <a:buFont typeface="Arial"/>
+              <a:defRPr sz="1400" b="0" i="0" u="none" strike="noStrike" cap="none">
+                <a:solidFill>
+                  <a:srgbClr val="000000"/>
+                </a:solidFill>
+                <a:latin typeface="Arial"/>
+                <a:ea typeface="Arial"/>
+                <a:cs typeface="Arial"/>
+                <a:sym typeface="Arial"/>
+              </a:defRPr>
+            </a:lvl4pPr>
+            <a:lvl5pPr marR="0" lvl="4" algn="l" rtl="0">
+              <a:lnSpc>
+                <a:spcPct val="100000"/>
+              </a:lnSpc>
+              <a:spcBef>
+                <a:spcPts val="0"/>
+              </a:spcBef>
+              <a:spcAft>
+                <a:spcPts val="0"/>
+              </a:spcAft>
+              <a:buClr>
+                <a:srgbClr val="000000"/>
+              </a:buClr>
+              <a:buFont typeface="Arial"/>
+              <a:defRPr sz="1400" b="0" i="0" u="none" strike="noStrike" cap="none">
+                <a:solidFill>
+                  <a:srgbClr val="000000"/>
+                </a:solidFill>
+                <a:latin typeface="Arial"/>
+                <a:ea typeface="Arial"/>
+                <a:cs typeface="Arial"/>
+                <a:sym typeface="Arial"/>
+              </a:defRPr>
+            </a:lvl5pPr>
+            <a:lvl6pPr marR="0" lvl="5" algn="l" rtl="0">
+              <a:lnSpc>
+                <a:spcPct val="100000"/>
+              </a:lnSpc>
+              <a:spcBef>
+                <a:spcPts val="0"/>
+              </a:spcBef>
+              <a:spcAft>
+                <a:spcPts val="0"/>
+              </a:spcAft>
+              <a:buClr>
+                <a:srgbClr val="000000"/>
+              </a:buClr>
+              <a:buFont typeface="Arial"/>
+              <a:defRPr sz="1400" b="0" i="0" u="none" strike="noStrike" cap="none">
+                <a:solidFill>
+                  <a:srgbClr val="000000"/>
+                </a:solidFill>
+                <a:latin typeface="Arial"/>
+                <a:ea typeface="Arial"/>
+                <a:cs typeface="Arial"/>
+                <a:sym typeface="Arial"/>
+              </a:defRPr>
+            </a:lvl6pPr>
+            <a:lvl7pPr marR="0" lvl="6" algn="l" rtl="0">
+              <a:lnSpc>
+                <a:spcPct val="100000"/>
+              </a:lnSpc>
+              <a:spcBef>
+                <a:spcPts val="0"/>
+              </a:spcBef>
+              <a:spcAft>
+                <a:spcPts val="0"/>
+              </a:spcAft>
+              <a:buClr>
+                <a:srgbClr val="000000"/>
+              </a:buClr>
+              <a:buFont typeface="Arial"/>
+              <a:defRPr sz="1400" b="0" i="0" u="none" strike="noStrike" cap="none">
+                <a:solidFill>
+                  <a:srgbClr val="000000"/>
+                </a:solidFill>
+                <a:latin typeface="Arial"/>
+                <a:ea typeface="Arial"/>
+                <a:cs typeface="Arial"/>
+                <a:sym typeface="Arial"/>
+              </a:defRPr>
+            </a:lvl7pPr>
+            <a:lvl8pPr marR="0" lvl="7" algn="l" rtl="0">
+              <a:lnSpc>
+                <a:spcPct val="100000"/>
+              </a:lnSpc>
+              <a:spcBef>
+                <a:spcPts val="0"/>
+              </a:spcBef>
+              <a:spcAft>
+                <a:spcPts val="0"/>
+              </a:spcAft>
+              <a:buClr>
+                <a:srgbClr val="000000"/>
+              </a:buClr>
+              <a:buFont typeface="Arial"/>
+              <a:defRPr sz="1400" b="0" i="0" u="none" strike="noStrike" cap="none">
+                <a:solidFill>
+                  <a:srgbClr val="000000"/>
+                </a:solidFill>
+                <a:latin typeface="Arial"/>
+                <a:ea typeface="Arial"/>
+                <a:cs typeface="Arial"/>
+                <a:sym typeface="Arial"/>
+              </a:defRPr>
+            </a:lvl8pPr>
+            <a:lvl9pPr marR="0" lvl="8" algn="l" rtl="0">
+              <a:lnSpc>
+                <a:spcPct val="100000"/>
+              </a:lnSpc>
+              <a:spcBef>
+                <a:spcPts val="0"/>
+              </a:spcBef>
+              <a:spcAft>
+                <a:spcPts val="0"/>
+              </a:spcAft>
+              <a:buClr>
+                <a:srgbClr val="000000"/>
+              </a:buClr>
+              <a:buFont typeface="Arial"/>
+              <a:defRPr sz="1400" b="0" i="0" u="none" strike="noStrike" cap="none">
+                <a:solidFill>
+                  <a:srgbClr val="000000"/>
+                </a:solidFill>
+                <a:latin typeface="Arial"/>
+                <a:ea typeface="Arial"/>
+                <a:cs typeface="Arial"/>
+                <a:sym typeface="Arial"/>
+              </a:defRPr>
+            </a:lvl9pPr>
+          </a:lstStyle>
+          <a:p>
+            <a:pPr algn="r"/>
+            <a:r>
+              <a:t>9</a:t>
+            </a:r>
+            <a:endParaRPr lang="en-US"/>
+          </a:p>
+        </p:txBody>
+      </p:sp>
     </p:spTree>
   </p:cSld>
   <p:clrMapOvr>
